--- a/John/PPT_Keamanan_Data.pptx
+++ b/John/PPT_Keamanan_Data.pptx
@@ -5,7 +5,7 @@
     <p:sldMasterId id="2147483648" r:id="rId1"/>
   </p:sldMasterIdLst>
   <p:notesMasterIdLst>
-    <p:notesMasterId r:id="rId12"/>
+    <p:notesMasterId r:id="rId15"/>
   </p:notesMasterIdLst>
   <p:sldIdLst>
     <p:sldId id="256" r:id="rId4"/>
@@ -16,6 +16,9 @@
     <p:sldId id="261" r:id="rId9"/>
     <p:sldId id="262" r:id="rId10"/>
     <p:sldId id="263" r:id="rId11"/>
+    <p:sldId id="264" r:id="rId12"/>
+    <p:sldId id="265" r:id="rId13"/>
+    <p:sldId id="266" r:id="rId14"/>
   </p:sldIdLst>
   <p:sldSz cx="12192000" cy="6858000"/>
   <p:notesSz cx="6858000" cy="9144000"/>
@@ -141,7 +144,7 @@
       </p:grpSpPr>
       <p:sp>
         <p:nvSpPr>
-          <p:cNvPr id="1690401347" name="Header Placeholder 1"/>
+          <p:cNvPr id="1496460344" name="Header Placeholder 1"/>
           <p:cNvSpPr>
             <a:spLocks noGrp="1"/>
           </p:cNvSpPr>
@@ -175,7 +178,7 @@
       </p:sp>
       <p:sp>
         <p:nvSpPr>
-          <p:cNvPr id="2101212617" name="Date Placeholder 2"/>
+          <p:cNvPr id="1728807285" name="Date Placeholder 2"/>
           <p:cNvSpPr>
             <a:spLocks noGrp="1"/>
           </p:cNvSpPr>
@@ -213,7 +216,7 @@
       </p:sp>
       <p:sp>
         <p:nvSpPr>
-          <p:cNvPr id="1221736555" name="Slide Image Placeholder 3"/>
+          <p:cNvPr id="514462159" name="Slide Image Placeholder 3"/>
           <p:cNvSpPr>
             <a:spLocks noChangeAspect="1" noGrp="1" noRot="1"/>
           </p:cNvSpPr>
@@ -249,7 +252,7 @@
       </p:sp>
       <p:sp>
         <p:nvSpPr>
-          <p:cNvPr id="1646488221" name="Notes Placeholder 4"/>
+          <p:cNvPr id="266888466" name="Notes Placeholder 4"/>
           <p:cNvSpPr>
             <a:spLocks noGrp="1"/>
           </p:cNvSpPr>
@@ -323,7 +326,7 @@
       </p:sp>
       <p:sp>
         <p:nvSpPr>
-          <p:cNvPr id="1652681510" name="Footer Placeholder 5"/>
+          <p:cNvPr id="1808766258" name="Footer Placeholder 5"/>
           <p:cNvSpPr>
             <a:spLocks noGrp="1"/>
           </p:cNvSpPr>
@@ -357,7 +360,7 @@
       </p:sp>
       <p:sp>
         <p:nvSpPr>
-          <p:cNvPr id="997874297" name="Slide Number Placeholder 6"/>
+          <p:cNvPr id="27506475" name="Slide Number Placeholder 6"/>
           <p:cNvSpPr>
             <a:spLocks noGrp="1"/>
           </p:cNvSpPr>
@@ -510,7 +513,7 @@
       </p:grpSpPr>
       <p:sp>
         <p:nvSpPr>
-          <p:cNvPr id="142557894" name="Slide Image Placeholder 1"/>
+          <p:cNvPr id="128623708" name="Slide Image Placeholder 1"/>
           <p:cNvSpPr>
             <a:spLocks noChangeAspect="1" noGrp="1" noRot="1"/>
           </p:cNvSpPr>
@@ -527,7 +530,7 @@
       </p:sp>
       <p:sp>
         <p:nvSpPr>
-          <p:cNvPr id="2042695066" name="Notes Placeholder 2"/>
+          <p:cNvPr id="557127158" name="Notes Placeholder 2"/>
           <p:cNvSpPr>
             <a:spLocks noGrp="1"/>
           </p:cNvSpPr>
@@ -552,7 +555,7 @@
       </p:sp>
       <p:sp>
         <p:nvSpPr>
-          <p:cNvPr id="483122088" name="Slide Number Placeholder 3"/>
+          <p:cNvPr id="1885241703" name="Slide Number Placeholder 3"/>
           <p:cNvSpPr>
             <a:spLocks noGrp="1"/>
           </p:cNvSpPr>
@@ -571,6 +574,192 @@
             <a:fld id="{2E6999B8-B6B4-4561-A3CD-BBCDAB9FC9D9}" type="slidenum">
               <a:rPr lang="en-US"/>
               <a:t>1</a:t>
+            </a:fld>
+            <a:endParaRPr lang="en-US"/>
+          </a:p>
+        </p:txBody>
+      </p:sp>
+    </p:spTree>
+  </p:cSld>
+  <p:clrMapOvr>
+    <a:masterClrMapping/>
+  </p:clrMapOvr>
+</p:notes>
+</file>
+
+<file path=ppt/notesSlides/notesSlide10.xml><?xml version="1.0" encoding="utf-8"?>
+<p:notes xmlns:a="http://schemas.openxmlformats.org/drawingml/2006/main" xmlns:r="http://schemas.openxmlformats.org/officeDocument/2006/relationships" xmlns:p="http://schemas.openxmlformats.org/presentationml/2006/main" xmlns:m="http://schemas.openxmlformats.org/officeDocument/2006/math" xmlns:w="http://schemas.openxmlformats.org/wordprocessingml/2006/main">
+  <p:cSld name="">
+    <p:spTree>
+      <p:nvGrpSpPr>
+        <p:cNvPr id="1" name=""/>
+        <p:cNvGrpSpPr/>
+        <p:nvPr/>
+      </p:nvGrpSpPr>
+      <p:grpSpPr bwMode="auto">
+        <a:xfrm>
+          <a:off x="0" y="0"/>
+          <a:ext cx="0" cy="0"/>
+          <a:chOff x="0" y="0"/>
+          <a:chExt cx="0" cy="0"/>
+        </a:xfrm>
+      </p:grpSpPr>
+      <p:sp>
+        <p:nvSpPr>
+          <p:cNvPr id="1007189422" name="Slide Image Placeholder 1"/>
+          <p:cNvSpPr>
+            <a:spLocks noChangeAspect="1" noGrp="1" noRot="1"/>
+          </p:cNvSpPr>
+          <p:nvPr>
+            <p:ph type="sldImg"/>
+          </p:nvPr>
+        </p:nvSpPr>
+        <p:spPr bwMode="auto">
+          <a:xfrm>
+            <a:off x="685800" y="1143000"/>
+            <a:ext cx="5486400" cy="3086100"/>
+          </a:xfrm>
+        </p:spPr>
+      </p:sp>
+      <p:sp>
+        <p:nvSpPr>
+          <p:cNvPr id="831563673" name="Notes Placeholder 2"/>
+          <p:cNvSpPr>
+            <a:spLocks noGrp="1"/>
+          </p:cNvSpPr>
+          <p:nvPr>
+            <p:ph type="body" idx="1"/>
+          </p:nvPr>
+        </p:nvSpPr>
+        <p:spPr bwMode="auto"/>
+        <p:txBody>
+          <a:bodyPr/>
+          <a:lstStyle/>
+          <a:p>
+            <a:pPr>
+              <a:defRPr/>
+            </a:pPr>
+            <a:endParaRPr lang="en-US">
+              <a:latin typeface="Arial"/>
+              <a:cs typeface="Arial"/>
+            </a:endParaRPr>
+          </a:p>
+        </p:txBody>
+      </p:sp>
+      <p:sp>
+        <p:nvSpPr>
+          <p:cNvPr id="1046236826" name="Slide Number Placeholder 3"/>
+          <p:cNvSpPr>
+            <a:spLocks noGrp="1"/>
+          </p:cNvSpPr>
+          <p:nvPr>
+            <p:ph type="sldNum" sz="quarter" idx="10"/>
+          </p:nvPr>
+        </p:nvSpPr>
+        <p:spPr bwMode="auto"/>
+        <p:txBody>
+          <a:bodyPr/>
+          <a:lstStyle/>
+          <a:p>
+            <a:pPr>
+              <a:defRPr/>
+            </a:pPr>
+            <a:fld id="{EC5E6FC8-B6B2-F2DA-B265-9B07F1DC2F19}" type="slidenum">
+              <a:rPr lang="en-US"/>
+              <a:t/>
+            </a:fld>
+            <a:endParaRPr lang="en-US"/>
+          </a:p>
+        </p:txBody>
+      </p:sp>
+    </p:spTree>
+  </p:cSld>
+  <p:clrMapOvr>
+    <a:masterClrMapping/>
+  </p:clrMapOvr>
+</p:notes>
+</file>
+
+<file path=ppt/notesSlides/notesSlide11.xml><?xml version="1.0" encoding="utf-8"?>
+<p:notes xmlns:a="http://schemas.openxmlformats.org/drawingml/2006/main" xmlns:r="http://schemas.openxmlformats.org/officeDocument/2006/relationships" xmlns:p="http://schemas.openxmlformats.org/presentationml/2006/main" xmlns:m="http://schemas.openxmlformats.org/officeDocument/2006/math" xmlns:w="http://schemas.openxmlformats.org/wordprocessingml/2006/main">
+  <p:cSld name="">
+    <p:spTree>
+      <p:nvGrpSpPr>
+        <p:cNvPr id="1" name=""/>
+        <p:cNvGrpSpPr/>
+        <p:nvPr/>
+      </p:nvGrpSpPr>
+      <p:grpSpPr bwMode="auto">
+        <a:xfrm>
+          <a:off x="0" y="0"/>
+          <a:ext cx="0" cy="0"/>
+          <a:chOff x="0" y="0"/>
+          <a:chExt cx="0" cy="0"/>
+        </a:xfrm>
+      </p:grpSpPr>
+      <p:sp>
+        <p:nvSpPr>
+          <p:cNvPr id="1257840076" name="Slide Image Placeholder 1"/>
+          <p:cNvSpPr>
+            <a:spLocks noChangeAspect="1" noGrp="1" noRot="1"/>
+          </p:cNvSpPr>
+          <p:nvPr>
+            <p:ph type="sldImg"/>
+          </p:nvPr>
+        </p:nvSpPr>
+        <p:spPr bwMode="auto">
+          <a:xfrm>
+            <a:off x="685800" y="1143000"/>
+            <a:ext cx="5486400" cy="3086100"/>
+          </a:xfrm>
+        </p:spPr>
+      </p:sp>
+      <p:sp>
+        <p:nvSpPr>
+          <p:cNvPr id="835169137" name="Notes Placeholder 2"/>
+          <p:cNvSpPr>
+            <a:spLocks noGrp="1"/>
+          </p:cNvSpPr>
+          <p:nvPr>
+            <p:ph type="body" idx="1"/>
+          </p:nvPr>
+        </p:nvSpPr>
+        <p:spPr bwMode="auto"/>
+        <p:txBody>
+          <a:bodyPr/>
+          <a:lstStyle/>
+          <a:p>
+            <a:pPr>
+              <a:defRPr/>
+            </a:pPr>
+            <a:endParaRPr lang="en-US">
+              <a:latin typeface="Arial"/>
+              <a:cs typeface="Arial"/>
+            </a:endParaRPr>
+          </a:p>
+        </p:txBody>
+      </p:sp>
+      <p:sp>
+        <p:nvSpPr>
+          <p:cNvPr id="1723420705" name="Slide Number Placeholder 3"/>
+          <p:cNvSpPr>
+            <a:spLocks noGrp="1"/>
+          </p:cNvSpPr>
+          <p:nvPr>
+            <p:ph type="sldNum" sz="quarter" idx="10"/>
+          </p:nvPr>
+        </p:nvSpPr>
+        <p:spPr bwMode="auto"/>
+        <p:txBody>
+          <a:bodyPr/>
+          <a:lstStyle/>
+          <a:p>
+            <a:pPr>
+              <a:defRPr/>
+            </a:pPr>
+            <a:fld id="{9D95A7EF-A7CA-014C-CD27-DDD2BC3F2050}" type="slidenum">
+              <a:rPr lang="en-US"/>
+              <a:t/>
             </a:fld>
             <a:endParaRPr lang="en-US"/>
           </a:p>
@@ -603,7 +792,7 @@
       </p:grpSpPr>
       <p:sp>
         <p:nvSpPr>
-          <p:cNvPr id="1323333228" name="Slide Image Placeholder 1"/>
+          <p:cNvPr id="1167683968" name="Slide Image Placeholder 1"/>
           <p:cNvSpPr>
             <a:spLocks noChangeAspect="1" noGrp="1" noRot="1"/>
           </p:cNvSpPr>
@@ -620,7 +809,7 @@
       </p:sp>
       <p:sp>
         <p:nvSpPr>
-          <p:cNvPr id="395733834" name="Notes Placeholder 2"/>
+          <p:cNvPr id="585643441" name="Notes Placeholder 2"/>
           <p:cNvSpPr>
             <a:spLocks noGrp="1"/>
           </p:cNvSpPr>
@@ -645,7 +834,7 @@
       </p:sp>
       <p:sp>
         <p:nvSpPr>
-          <p:cNvPr id="470825806" name="Slide Number Placeholder 3"/>
+          <p:cNvPr id="1319195292" name="Slide Number Placeholder 3"/>
           <p:cNvSpPr>
             <a:spLocks noGrp="1"/>
           </p:cNvSpPr>
@@ -696,7 +885,7 @@
       </p:grpSpPr>
       <p:sp>
         <p:nvSpPr>
-          <p:cNvPr id="490823871" name="Slide Image Placeholder 1"/>
+          <p:cNvPr id="371416525" name="Slide Image Placeholder 1"/>
           <p:cNvSpPr>
             <a:spLocks noChangeAspect="1" noGrp="1" noRot="1"/>
           </p:cNvSpPr>
@@ -713,7 +902,7 @@
       </p:sp>
       <p:sp>
         <p:nvSpPr>
-          <p:cNvPr id="1715391805" name="Notes Placeholder 2"/>
+          <p:cNvPr id="1871535257" name="Notes Placeholder 2"/>
           <p:cNvSpPr>
             <a:spLocks noGrp="1"/>
           </p:cNvSpPr>
@@ -738,7 +927,7 @@
       </p:sp>
       <p:sp>
         <p:nvSpPr>
-          <p:cNvPr id="138447094" name="Slide Number Placeholder 3"/>
+          <p:cNvPr id="1615268758" name="Slide Number Placeholder 3"/>
           <p:cNvSpPr>
             <a:spLocks noGrp="1"/>
           </p:cNvSpPr>
@@ -789,7 +978,7 @@
       </p:grpSpPr>
       <p:sp>
         <p:nvSpPr>
-          <p:cNvPr id="1933850756" name="Slide Image Placeholder 1"/>
+          <p:cNvPr id="388045414" name="Slide Image Placeholder 1"/>
           <p:cNvSpPr>
             <a:spLocks noChangeAspect="1" noGrp="1" noRot="1"/>
           </p:cNvSpPr>
@@ -806,7 +995,7 @@
       </p:sp>
       <p:sp>
         <p:nvSpPr>
-          <p:cNvPr id="116816406" name="Notes Placeholder 2"/>
+          <p:cNvPr id="2002731396" name="Notes Placeholder 2"/>
           <p:cNvSpPr>
             <a:spLocks noGrp="1"/>
           </p:cNvSpPr>
@@ -831,7 +1020,7 @@
       </p:sp>
       <p:sp>
         <p:nvSpPr>
-          <p:cNvPr id="1700549880" name="Slide Number Placeholder 3"/>
+          <p:cNvPr id="1196708611" name="Slide Number Placeholder 3"/>
           <p:cNvSpPr>
             <a:spLocks noGrp="1"/>
           </p:cNvSpPr>
@@ -882,7 +1071,7 @@
       </p:grpSpPr>
       <p:sp>
         <p:nvSpPr>
-          <p:cNvPr id="378715890" name="Slide Image Placeholder 1"/>
+          <p:cNvPr id="1564025491" name="Slide Image Placeholder 1"/>
           <p:cNvSpPr>
             <a:spLocks noChangeAspect="1" noGrp="1" noRot="1"/>
           </p:cNvSpPr>
@@ -899,7 +1088,7 @@
       </p:sp>
       <p:sp>
         <p:nvSpPr>
-          <p:cNvPr id="1409014521" name="Notes Placeholder 2"/>
+          <p:cNvPr id="1041135879" name="Notes Placeholder 2"/>
           <p:cNvSpPr>
             <a:spLocks noGrp="1"/>
           </p:cNvSpPr>
@@ -924,7 +1113,7 @@
       </p:sp>
       <p:sp>
         <p:nvSpPr>
-          <p:cNvPr id="9712326" name="Slide Number Placeholder 3"/>
+          <p:cNvPr id="1688803715" name="Slide Number Placeholder 3"/>
           <p:cNvSpPr>
             <a:spLocks noGrp="1"/>
           </p:cNvSpPr>
@@ -975,7 +1164,7 @@
       </p:grpSpPr>
       <p:sp>
         <p:nvSpPr>
-          <p:cNvPr id="599876797" name="Slide Image Placeholder 1"/>
+          <p:cNvPr id="1906360073" name="Slide Image Placeholder 1"/>
           <p:cNvSpPr>
             <a:spLocks noChangeAspect="1" noGrp="1" noRot="1"/>
           </p:cNvSpPr>
@@ -992,7 +1181,7 @@
       </p:sp>
       <p:sp>
         <p:nvSpPr>
-          <p:cNvPr id="1086293872" name="Notes Placeholder 2"/>
+          <p:cNvPr id="1445038699" name="Notes Placeholder 2"/>
           <p:cNvSpPr>
             <a:spLocks noGrp="1"/>
           </p:cNvSpPr>
@@ -1017,7 +1206,7 @@
       </p:sp>
       <p:sp>
         <p:nvSpPr>
-          <p:cNvPr id="867732221" name="Slide Number Placeholder 3"/>
+          <p:cNvPr id="235431232" name="Slide Number Placeholder 3"/>
           <p:cNvSpPr>
             <a:spLocks noGrp="1"/>
           </p:cNvSpPr>
@@ -1068,7 +1257,7 @@
       </p:grpSpPr>
       <p:sp>
         <p:nvSpPr>
-          <p:cNvPr id="1925963776" name="Slide Image Placeholder 1"/>
+          <p:cNvPr id="346265406" name="Slide Image Placeholder 1"/>
           <p:cNvSpPr>
             <a:spLocks noChangeAspect="1" noGrp="1" noRot="1"/>
           </p:cNvSpPr>
@@ -1085,7 +1274,7 @@
       </p:sp>
       <p:sp>
         <p:nvSpPr>
-          <p:cNvPr id="919364152" name="Notes Placeholder 2"/>
+          <p:cNvPr id="1240672880" name="Notes Placeholder 2"/>
           <p:cNvSpPr>
             <a:spLocks noGrp="1"/>
           </p:cNvSpPr>
@@ -1110,7 +1299,7 @@
       </p:sp>
       <p:sp>
         <p:nvSpPr>
-          <p:cNvPr id="558891271" name="Slide Number Placeholder 3"/>
+          <p:cNvPr id="1983410165" name="Slide Number Placeholder 3"/>
           <p:cNvSpPr>
             <a:spLocks noGrp="1"/>
           </p:cNvSpPr>
@@ -1161,7 +1350,7 @@
       </p:grpSpPr>
       <p:sp>
         <p:nvSpPr>
-          <p:cNvPr id="1833139004" name="Slide Image Placeholder 1"/>
+          <p:cNvPr id="1904842227" name="Slide Image Placeholder 1"/>
           <p:cNvSpPr>
             <a:spLocks noChangeAspect="1" noGrp="1" noRot="1"/>
           </p:cNvSpPr>
@@ -1178,7 +1367,7 @@
       </p:sp>
       <p:sp>
         <p:nvSpPr>
-          <p:cNvPr id="721209884" name="Notes Placeholder 2"/>
+          <p:cNvPr id="1466124772" name="Notes Placeholder 2"/>
           <p:cNvSpPr>
             <a:spLocks noGrp="1"/>
           </p:cNvSpPr>
@@ -1203,7 +1392,7 @@
       </p:sp>
       <p:sp>
         <p:nvSpPr>
-          <p:cNvPr id="960132318" name="Slide Number Placeholder 3"/>
+          <p:cNvPr id="235792479" name="Slide Number Placeholder 3"/>
           <p:cNvSpPr>
             <a:spLocks noGrp="1"/>
           </p:cNvSpPr>
@@ -1220,6 +1409,99 @@
               <a:defRPr/>
             </a:pPr>
             <a:fld id="{220E0A74-FE12-8F78-B2BB-D20785F2180A}" type="slidenum">
+              <a:rPr lang="en-US"/>
+              <a:t/>
+            </a:fld>
+            <a:endParaRPr lang="en-US"/>
+          </a:p>
+        </p:txBody>
+      </p:sp>
+    </p:spTree>
+  </p:cSld>
+  <p:clrMapOvr>
+    <a:masterClrMapping/>
+  </p:clrMapOvr>
+</p:notes>
+</file>
+
+<file path=ppt/notesSlides/notesSlide9.xml><?xml version="1.0" encoding="utf-8"?>
+<p:notes xmlns:a="http://schemas.openxmlformats.org/drawingml/2006/main" xmlns:r="http://schemas.openxmlformats.org/officeDocument/2006/relationships" xmlns:p="http://schemas.openxmlformats.org/presentationml/2006/main" xmlns:m="http://schemas.openxmlformats.org/officeDocument/2006/math" xmlns:w="http://schemas.openxmlformats.org/wordprocessingml/2006/main">
+  <p:cSld name="">
+    <p:spTree>
+      <p:nvGrpSpPr>
+        <p:cNvPr id="1" name=""/>
+        <p:cNvGrpSpPr/>
+        <p:nvPr/>
+      </p:nvGrpSpPr>
+      <p:grpSpPr bwMode="auto">
+        <a:xfrm>
+          <a:off x="0" y="0"/>
+          <a:ext cx="0" cy="0"/>
+          <a:chOff x="0" y="0"/>
+          <a:chExt cx="0" cy="0"/>
+        </a:xfrm>
+      </p:grpSpPr>
+      <p:sp>
+        <p:nvSpPr>
+          <p:cNvPr id="2107291423" name="Slide Image Placeholder 1"/>
+          <p:cNvSpPr>
+            <a:spLocks noChangeAspect="1" noGrp="1" noRot="1"/>
+          </p:cNvSpPr>
+          <p:nvPr>
+            <p:ph type="sldImg"/>
+          </p:nvPr>
+        </p:nvSpPr>
+        <p:spPr bwMode="auto">
+          <a:xfrm>
+            <a:off x="685800" y="1143000"/>
+            <a:ext cx="5486400" cy="3086100"/>
+          </a:xfrm>
+        </p:spPr>
+      </p:sp>
+      <p:sp>
+        <p:nvSpPr>
+          <p:cNvPr id="2015951993" name="Notes Placeholder 2"/>
+          <p:cNvSpPr>
+            <a:spLocks noGrp="1"/>
+          </p:cNvSpPr>
+          <p:nvPr>
+            <p:ph type="body" idx="1"/>
+          </p:nvPr>
+        </p:nvSpPr>
+        <p:spPr bwMode="auto"/>
+        <p:txBody>
+          <a:bodyPr/>
+          <a:lstStyle/>
+          <a:p>
+            <a:pPr>
+              <a:defRPr/>
+            </a:pPr>
+            <a:endParaRPr lang="en-US">
+              <a:latin typeface="Arial"/>
+              <a:cs typeface="Arial"/>
+            </a:endParaRPr>
+          </a:p>
+        </p:txBody>
+      </p:sp>
+      <p:sp>
+        <p:nvSpPr>
+          <p:cNvPr id="1354637095" name="Slide Number Placeholder 3"/>
+          <p:cNvSpPr>
+            <a:spLocks noGrp="1"/>
+          </p:cNvSpPr>
+          <p:nvPr>
+            <p:ph type="sldNum" sz="quarter" idx="10"/>
+          </p:nvPr>
+        </p:nvSpPr>
+        <p:spPr bwMode="auto"/>
+        <p:txBody>
+          <a:bodyPr/>
+          <a:lstStyle/>
+          <a:p>
+            <a:pPr>
+              <a:defRPr/>
+            </a:pPr>
+            <a:fld id="{4A44B117-346C-82ED-8C50-8301F39D88FA}" type="slidenum">
               <a:rPr lang="en-US"/>
               <a:t/>
             </a:fld>
@@ -1254,7 +1536,7 @@
       </p:grpSpPr>
       <p:sp>
         <p:nvSpPr>
-          <p:cNvPr id="1146418233" name="Title 1"/>
+          <p:cNvPr id="1937260876" name="Title 1"/>
           <p:cNvSpPr>
             <a:spLocks noGrp="1"/>
           </p:cNvSpPr>
@@ -1289,7 +1571,7 @@
       </p:sp>
       <p:sp>
         <p:nvSpPr>
-          <p:cNvPr id="881554194" name="Subtitle 2"/>
+          <p:cNvPr id="281795168" name="Subtitle 2"/>
           <p:cNvSpPr>
             <a:spLocks noGrp="1"/>
           </p:cNvSpPr>
@@ -1357,7 +1639,7 @@
       </p:sp>
       <p:sp>
         <p:nvSpPr>
-          <p:cNvPr id="1943649151" name="Date Placeholder 3"/>
+          <p:cNvPr id="1296079812" name="Date Placeholder 3"/>
           <p:cNvSpPr>
             <a:spLocks noGrp="1"/>
           </p:cNvSpPr>
@@ -1383,7 +1665,7 @@
       </p:sp>
       <p:sp>
         <p:nvSpPr>
-          <p:cNvPr id="313009363" name="Footer Placeholder 4"/>
+          <p:cNvPr id="213779703" name="Footer Placeholder 4"/>
           <p:cNvSpPr>
             <a:spLocks noGrp="1"/>
           </p:cNvSpPr>
@@ -1405,7 +1687,7 @@
       </p:sp>
       <p:sp>
         <p:nvSpPr>
-          <p:cNvPr id="497931296" name="Slide Number Placeholder 5"/>
+          <p:cNvPr id="1614233147" name="Slide Number Placeholder 5"/>
           <p:cNvSpPr>
             <a:spLocks noGrp="1"/>
           </p:cNvSpPr>
@@ -1456,7 +1738,7 @@
       </p:grpSpPr>
       <p:sp>
         <p:nvSpPr>
-          <p:cNvPr id="1906682825" name="Title 1"/>
+          <p:cNvPr id="2106076568" name="Title 1"/>
           <p:cNvSpPr>
             <a:spLocks noGrp="1"/>
           </p:cNvSpPr>
@@ -1482,7 +1764,7 @@
       </p:sp>
       <p:sp>
         <p:nvSpPr>
-          <p:cNvPr id="1117253710" name="Vertical Text Placeholder 2"/>
+          <p:cNvPr id="177829499" name="Vertical Text Placeholder 2"/>
           <p:cNvSpPr>
             <a:spLocks noGrp="1"/>
           </p:cNvSpPr>
@@ -1548,7 +1830,7 @@
       </p:sp>
       <p:sp>
         <p:nvSpPr>
-          <p:cNvPr id="1409830251" name="Date Placeholder 3"/>
+          <p:cNvPr id="128345623" name="Date Placeholder 3"/>
           <p:cNvSpPr>
             <a:spLocks noGrp="1"/>
           </p:cNvSpPr>
@@ -1574,7 +1856,7 @@
       </p:sp>
       <p:sp>
         <p:nvSpPr>
-          <p:cNvPr id="945796378" name="Footer Placeholder 4"/>
+          <p:cNvPr id="105249140" name="Footer Placeholder 4"/>
           <p:cNvSpPr>
             <a:spLocks noGrp="1"/>
           </p:cNvSpPr>
@@ -1596,7 +1878,7 @@
       </p:sp>
       <p:sp>
         <p:nvSpPr>
-          <p:cNvPr id="184430853" name="Slide Number Placeholder 5"/>
+          <p:cNvPr id="110301946" name="Slide Number Placeholder 5"/>
           <p:cNvSpPr>
             <a:spLocks noGrp="1"/>
           </p:cNvSpPr>
@@ -1647,7 +1929,7 @@
       </p:grpSpPr>
       <p:sp>
         <p:nvSpPr>
-          <p:cNvPr id="2013509199" name="Vertical Title 1"/>
+          <p:cNvPr id="130360890" name="Vertical Title 1"/>
           <p:cNvSpPr>
             <a:spLocks noGrp="1"/>
           </p:cNvSpPr>
@@ -1678,7 +1960,7 @@
       </p:sp>
       <p:sp>
         <p:nvSpPr>
-          <p:cNvPr id="1340689" name="Vertical Text Placeholder 2"/>
+          <p:cNvPr id="766560995" name="Vertical Text Placeholder 2"/>
           <p:cNvSpPr>
             <a:spLocks noGrp="1"/>
           </p:cNvSpPr>
@@ -1749,7 +2031,7 @@
       </p:sp>
       <p:sp>
         <p:nvSpPr>
-          <p:cNvPr id="412141398" name="Date Placeholder 3"/>
+          <p:cNvPr id="489250484" name="Date Placeholder 3"/>
           <p:cNvSpPr>
             <a:spLocks noGrp="1"/>
           </p:cNvSpPr>
@@ -1775,7 +2057,7 @@
       </p:sp>
       <p:sp>
         <p:nvSpPr>
-          <p:cNvPr id="974063111" name="Footer Placeholder 4"/>
+          <p:cNvPr id="1876578267" name="Footer Placeholder 4"/>
           <p:cNvSpPr>
             <a:spLocks noGrp="1"/>
           </p:cNvSpPr>
@@ -1797,7 +2079,7 @@
       </p:sp>
       <p:sp>
         <p:nvSpPr>
-          <p:cNvPr id="1357933878" name="Slide Number Placeholder 5"/>
+          <p:cNvPr id="53381108" name="Slide Number Placeholder 5"/>
           <p:cNvSpPr>
             <a:spLocks noGrp="1"/>
           </p:cNvSpPr>
@@ -1848,7 +2130,7 @@
       </p:grpSpPr>
       <p:sp>
         <p:nvSpPr>
-          <p:cNvPr id="70030177" name="Title 1"/>
+          <p:cNvPr id="894065513" name="Title 1"/>
           <p:cNvSpPr>
             <a:spLocks noGrp="1"/>
           </p:cNvSpPr>
@@ -1874,7 +2156,7 @@
       </p:sp>
       <p:sp>
         <p:nvSpPr>
-          <p:cNvPr id="507406679" name="Content Placeholder 2"/>
+          <p:cNvPr id="1226552625" name="Content Placeholder 2"/>
           <p:cNvSpPr>
             <a:spLocks noGrp="1"/>
           </p:cNvSpPr>
@@ -1940,7 +2222,7 @@
       </p:sp>
       <p:sp>
         <p:nvSpPr>
-          <p:cNvPr id="1662139261" name="Date Placeholder 3"/>
+          <p:cNvPr id="1488027248" name="Date Placeholder 3"/>
           <p:cNvSpPr>
             <a:spLocks noGrp="1"/>
           </p:cNvSpPr>
@@ -1966,7 +2248,7 @@
       </p:sp>
       <p:sp>
         <p:nvSpPr>
-          <p:cNvPr id="667889894" name="Footer Placeholder 4"/>
+          <p:cNvPr id="1418222841" name="Footer Placeholder 4"/>
           <p:cNvSpPr>
             <a:spLocks noGrp="1"/>
           </p:cNvSpPr>
@@ -1988,7 +2270,7 @@
       </p:sp>
       <p:sp>
         <p:nvSpPr>
-          <p:cNvPr id="2108082691" name="Slide Number Placeholder 5"/>
+          <p:cNvPr id="976496139" name="Slide Number Placeholder 5"/>
           <p:cNvSpPr>
             <a:spLocks noGrp="1"/>
           </p:cNvSpPr>
@@ -2039,7 +2321,7 @@
       </p:grpSpPr>
       <p:sp>
         <p:nvSpPr>
-          <p:cNvPr id="1839806617" name="Title 1"/>
+          <p:cNvPr id="802734155" name="Title 1"/>
           <p:cNvSpPr>
             <a:spLocks noGrp="1"/>
           </p:cNvSpPr>
@@ -2074,7 +2356,7 @@
       </p:sp>
       <p:sp>
         <p:nvSpPr>
-          <p:cNvPr id="634390410" name="Text Placeholder 2"/>
+          <p:cNvPr id="222843510" name="Text Placeholder 2"/>
           <p:cNvSpPr>
             <a:spLocks noGrp="1"/>
           </p:cNvSpPr>
@@ -2196,7 +2478,7 @@
       </p:sp>
       <p:sp>
         <p:nvSpPr>
-          <p:cNvPr id="204984561" name="Date Placeholder 3"/>
+          <p:cNvPr id="638777562" name="Date Placeholder 3"/>
           <p:cNvSpPr>
             <a:spLocks noGrp="1"/>
           </p:cNvSpPr>
@@ -2222,7 +2504,7 @@
       </p:sp>
       <p:sp>
         <p:nvSpPr>
-          <p:cNvPr id="894777857" name="Footer Placeholder 4"/>
+          <p:cNvPr id="1376164602" name="Footer Placeholder 4"/>
           <p:cNvSpPr>
             <a:spLocks noGrp="1"/>
           </p:cNvSpPr>
@@ -2244,7 +2526,7 @@
       </p:sp>
       <p:sp>
         <p:nvSpPr>
-          <p:cNvPr id="1802243056" name="Slide Number Placeholder 5"/>
+          <p:cNvPr id="1469551648" name="Slide Number Placeholder 5"/>
           <p:cNvSpPr>
             <a:spLocks noGrp="1"/>
           </p:cNvSpPr>
@@ -2295,7 +2577,7 @@
       </p:grpSpPr>
       <p:sp>
         <p:nvSpPr>
-          <p:cNvPr id="1020012310" name="Title 1"/>
+          <p:cNvPr id="1502228312" name="Title 1"/>
           <p:cNvSpPr>
             <a:spLocks noGrp="1"/>
           </p:cNvSpPr>
@@ -2321,7 +2603,7 @@
       </p:sp>
       <p:sp>
         <p:nvSpPr>
-          <p:cNvPr id="687393716" name="Content Placeholder 2"/>
+          <p:cNvPr id="621616787" name="Content Placeholder 2"/>
           <p:cNvSpPr>
             <a:spLocks noGrp="1"/>
           </p:cNvSpPr>
@@ -2392,7 +2674,7 @@
       </p:sp>
       <p:sp>
         <p:nvSpPr>
-          <p:cNvPr id="119371141" name="Content Placeholder 3"/>
+          <p:cNvPr id="696607331" name="Content Placeholder 3"/>
           <p:cNvSpPr>
             <a:spLocks noGrp="1"/>
           </p:cNvSpPr>
@@ -2463,7 +2745,7 @@
       </p:sp>
       <p:sp>
         <p:nvSpPr>
-          <p:cNvPr id="1006397459" name="Date Placeholder 4"/>
+          <p:cNvPr id="148197642" name="Date Placeholder 4"/>
           <p:cNvSpPr>
             <a:spLocks noGrp="1"/>
           </p:cNvSpPr>
@@ -2489,7 +2771,7 @@
       </p:sp>
       <p:sp>
         <p:nvSpPr>
-          <p:cNvPr id="772281781" name="Footer Placeholder 5"/>
+          <p:cNvPr id="2077327600" name="Footer Placeholder 5"/>
           <p:cNvSpPr>
             <a:spLocks noGrp="1"/>
           </p:cNvSpPr>
@@ -2511,7 +2793,7 @@
       </p:sp>
       <p:sp>
         <p:nvSpPr>
-          <p:cNvPr id="769129859" name="Slide Number Placeholder 6"/>
+          <p:cNvPr id="1916352595" name="Slide Number Placeholder 6"/>
           <p:cNvSpPr>
             <a:spLocks noGrp="1"/>
           </p:cNvSpPr>
@@ -2562,7 +2844,7 @@
       </p:grpSpPr>
       <p:sp>
         <p:nvSpPr>
-          <p:cNvPr id="1823263542" name="Title 1"/>
+          <p:cNvPr id="698300836" name="Title 1"/>
           <p:cNvSpPr>
             <a:spLocks noGrp="1"/>
           </p:cNvSpPr>
@@ -2593,7 +2875,7 @@
       </p:sp>
       <p:sp>
         <p:nvSpPr>
-          <p:cNvPr id="1338926090" name="Text Placeholder 2"/>
+          <p:cNvPr id="1320896732" name="Text Placeholder 2"/>
           <p:cNvSpPr>
             <a:spLocks noGrp="1"/>
           </p:cNvSpPr>
@@ -2661,7 +2943,7 @@
       </p:sp>
       <p:sp>
         <p:nvSpPr>
-          <p:cNvPr id="1106466428" name="Content Placeholder 3"/>
+          <p:cNvPr id="1416343492" name="Content Placeholder 3"/>
           <p:cNvSpPr>
             <a:spLocks noGrp="1"/>
           </p:cNvSpPr>
@@ -2732,7 +3014,7 @@
       </p:sp>
       <p:sp>
         <p:nvSpPr>
-          <p:cNvPr id="1922380577" name="Text Placeholder 4"/>
+          <p:cNvPr id="919495519" name="Text Placeholder 4"/>
           <p:cNvSpPr>
             <a:spLocks noGrp="1"/>
           </p:cNvSpPr>
@@ -2800,7 +3082,7 @@
       </p:sp>
       <p:sp>
         <p:nvSpPr>
-          <p:cNvPr id="397092476" name="Content Placeholder 5"/>
+          <p:cNvPr id="248814259" name="Content Placeholder 5"/>
           <p:cNvSpPr>
             <a:spLocks noGrp="1"/>
           </p:cNvSpPr>
@@ -2871,7 +3153,7 @@
       </p:sp>
       <p:sp>
         <p:nvSpPr>
-          <p:cNvPr id="834112386" name="Date Placeholder 6"/>
+          <p:cNvPr id="1658104951" name="Date Placeholder 6"/>
           <p:cNvSpPr>
             <a:spLocks noGrp="1"/>
           </p:cNvSpPr>
@@ -2897,7 +3179,7 @@
       </p:sp>
       <p:sp>
         <p:nvSpPr>
-          <p:cNvPr id="654538063" name="Footer Placeholder 7"/>
+          <p:cNvPr id="636115005" name="Footer Placeholder 7"/>
           <p:cNvSpPr>
             <a:spLocks noGrp="1"/>
           </p:cNvSpPr>
@@ -2919,7 +3201,7 @@
       </p:sp>
       <p:sp>
         <p:nvSpPr>
-          <p:cNvPr id="787469494" name="Slide Number Placeholder 8"/>
+          <p:cNvPr id="2005663118" name="Slide Number Placeholder 8"/>
           <p:cNvSpPr>
             <a:spLocks noGrp="1"/>
           </p:cNvSpPr>
@@ -2970,7 +3252,7 @@
       </p:grpSpPr>
       <p:sp>
         <p:nvSpPr>
-          <p:cNvPr id="18895712" name="Title 1"/>
+          <p:cNvPr id="1076081170" name="Title 1"/>
           <p:cNvSpPr>
             <a:spLocks noGrp="1"/>
           </p:cNvSpPr>
@@ -2996,7 +3278,7 @@
       </p:sp>
       <p:sp>
         <p:nvSpPr>
-          <p:cNvPr id="1928934159" name="Date Placeholder 2"/>
+          <p:cNvPr id="1651026755" name="Date Placeholder 2"/>
           <p:cNvSpPr>
             <a:spLocks noGrp="1"/>
           </p:cNvSpPr>
@@ -3022,7 +3304,7 @@
       </p:sp>
       <p:sp>
         <p:nvSpPr>
-          <p:cNvPr id="1544372758" name="Footer Placeholder 3"/>
+          <p:cNvPr id="1246681909" name="Footer Placeholder 3"/>
           <p:cNvSpPr>
             <a:spLocks noGrp="1"/>
           </p:cNvSpPr>
@@ -3044,7 +3326,7 @@
       </p:sp>
       <p:sp>
         <p:nvSpPr>
-          <p:cNvPr id="1555224527" name="Slide Number Placeholder 4"/>
+          <p:cNvPr id="1639945297" name="Slide Number Placeholder 4"/>
           <p:cNvSpPr>
             <a:spLocks noGrp="1"/>
           </p:cNvSpPr>
@@ -3095,7 +3377,7 @@
       </p:grpSpPr>
       <p:sp>
         <p:nvSpPr>
-          <p:cNvPr id="676067577" name="Date Placeholder 1"/>
+          <p:cNvPr id="1888762842" name="Date Placeholder 1"/>
           <p:cNvSpPr>
             <a:spLocks noGrp="1"/>
           </p:cNvSpPr>
@@ -3121,7 +3403,7 @@
       </p:sp>
       <p:sp>
         <p:nvSpPr>
-          <p:cNvPr id="134807120" name="Footer Placeholder 2"/>
+          <p:cNvPr id="907322773" name="Footer Placeholder 2"/>
           <p:cNvSpPr>
             <a:spLocks noGrp="1"/>
           </p:cNvSpPr>
@@ -3143,7 +3425,7 @@
       </p:sp>
       <p:sp>
         <p:nvSpPr>
-          <p:cNvPr id="1867612156" name="Slide Number Placeholder 3"/>
+          <p:cNvPr id="1914428386" name="Slide Number Placeholder 3"/>
           <p:cNvSpPr>
             <a:spLocks noGrp="1"/>
           </p:cNvSpPr>
@@ -3194,7 +3476,7 @@
       </p:grpSpPr>
       <p:sp>
         <p:nvSpPr>
-          <p:cNvPr id="918965170" name="Title 1"/>
+          <p:cNvPr id="316449196" name="Title 1"/>
           <p:cNvSpPr>
             <a:spLocks noGrp="1"/>
           </p:cNvSpPr>
@@ -3229,7 +3511,7 @@
       </p:sp>
       <p:sp>
         <p:nvSpPr>
-          <p:cNvPr id="2141458802" name="Content Placeholder 2"/>
+          <p:cNvPr id="1988300931" name="Content Placeholder 2"/>
           <p:cNvSpPr>
             <a:spLocks noGrp="1"/>
           </p:cNvSpPr>
@@ -3328,7 +3610,7 @@
       </p:sp>
       <p:sp>
         <p:nvSpPr>
-          <p:cNvPr id="260745753" name="Text Placeholder 3"/>
+          <p:cNvPr id="996725079" name="Text Placeholder 3"/>
           <p:cNvSpPr>
             <a:spLocks noGrp="1"/>
           </p:cNvSpPr>
@@ -3396,7 +3678,7 @@
       </p:sp>
       <p:sp>
         <p:nvSpPr>
-          <p:cNvPr id="25486830" name="Date Placeholder 4"/>
+          <p:cNvPr id="154008102" name="Date Placeholder 4"/>
           <p:cNvSpPr>
             <a:spLocks noGrp="1"/>
           </p:cNvSpPr>
@@ -3422,7 +3704,7 @@
       </p:sp>
       <p:sp>
         <p:nvSpPr>
-          <p:cNvPr id="1425458351" name="Footer Placeholder 5"/>
+          <p:cNvPr id="133743554" name="Footer Placeholder 5"/>
           <p:cNvSpPr>
             <a:spLocks noGrp="1"/>
           </p:cNvSpPr>
@@ -3444,7 +3726,7 @@
       </p:sp>
       <p:sp>
         <p:nvSpPr>
-          <p:cNvPr id="1312844226" name="Slide Number Placeholder 6"/>
+          <p:cNvPr id="1991295193" name="Slide Number Placeholder 6"/>
           <p:cNvSpPr>
             <a:spLocks noGrp="1"/>
           </p:cNvSpPr>
@@ -3495,7 +3777,7 @@
       </p:grpSpPr>
       <p:sp>
         <p:nvSpPr>
-          <p:cNvPr id="1927511225" name="Title 1"/>
+          <p:cNvPr id="1245438083" name="Title 1"/>
           <p:cNvSpPr>
             <a:spLocks noGrp="1"/>
           </p:cNvSpPr>
@@ -3530,7 +3812,7 @@
       </p:sp>
       <p:sp>
         <p:nvSpPr>
-          <p:cNvPr id="2096148825" name="Picture Placeholder 2"/>
+          <p:cNvPr id="1293732333" name="Picture Placeholder 2"/>
           <p:cNvSpPr>
             <a:spLocks noChangeAspect="1" noGrp="1"/>
           </p:cNvSpPr>
@@ -3598,7 +3880,7 @@
       </p:sp>
       <p:sp>
         <p:nvSpPr>
-          <p:cNvPr id="1433749081" name="Text Placeholder 3"/>
+          <p:cNvPr id="2074767718" name="Text Placeholder 3"/>
           <p:cNvSpPr>
             <a:spLocks noGrp="1"/>
           </p:cNvSpPr>
@@ -3666,7 +3948,7 @@
       </p:sp>
       <p:sp>
         <p:nvSpPr>
-          <p:cNvPr id="425775599" name="Date Placeholder 4"/>
+          <p:cNvPr id="208215696" name="Date Placeholder 4"/>
           <p:cNvSpPr>
             <a:spLocks noGrp="1"/>
           </p:cNvSpPr>
@@ -3692,7 +3974,7 @@
       </p:sp>
       <p:sp>
         <p:nvSpPr>
-          <p:cNvPr id="99749612" name="Footer Placeholder 5"/>
+          <p:cNvPr id="869895273" name="Footer Placeholder 5"/>
           <p:cNvSpPr>
             <a:spLocks noGrp="1"/>
           </p:cNvSpPr>
@@ -3714,7 +3996,7 @@
       </p:sp>
       <p:sp>
         <p:nvSpPr>
-          <p:cNvPr id="1095088172" name="Slide Number Placeholder 6"/>
+          <p:cNvPr id="1056254292" name="Slide Number Placeholder 6"/>
           <p:cNvSpPr>
             <a:spLocks noGrp="1"/>
           </p:cNvSpPr>
@@ -3770,7 +4052,7 @@
       </p:grpSpPr>
       <p:sp>
         <p:nvSpPr>
-          <p:cNvPr id="1951675417" name="Title Placeholder 1"/>
+          <p:cNvPr id="1993897954" name="Title Placeholder 1"/>
           <p:cNvSpPr>
             <a:spLocks noGrp="1"/>
           </p:cNvSpPr>
@@ -3806,7 +4088,7 @@
       </p:sp>
       <p:sp>
         <p:nvSpPr>
-          <p:cNvPr id="1034607630" name="Text Placeholder 2"/>
+          <p:cNvPr id="1497614342" name="Text Placeholder 2"/>
           <p:cNvSpPr>
             <a:spLocks noGrp="1"/>
           </p:cNvSpPr>
@@ -3882,7 +4164,7 @@
       </p:sp>
       <p:sp>
         <p:nvSpPr>
-          <p:cNvPr id="1355636692" name="Date Placeholder 3"/>
+          <p:cNvPr id="1948563207" name="Date Placeholder 3"/>
           <p:cNvSpPr>
             <a:spLocks noGrp="1"/>
           </p:cNvSpPr>
@@ -3926,7 +4208,7 @@
       </p:sp>
       <p:sp>
         <p:nvSpPr>
-          <p:cNvPr id="231264456" name="Footer Placeholder 4"/>
+          <p:cNvPr id="193860180" name="Footer Placeholder 4"/>
           <p:cNvSpPr>
             <a:spLocks noGrp="1"/>
           </p:cNvSpPr>
@@ -3966,7 +4248,7 @@
       </p:sp>
       <p:sp>
         <p:nvSpPr>
-          <p:cNvPr id="1265050937" name="Slide Number Placeholder 5"/>
+          <p:cNvPr id="374101317" name="Slide Number Placeholder 5"/>
           <p:cNvSpPr>
             <a:spLocks noGrp="1"/>
           </p:cNvSpPr>
@@ -4326,7 +4608,7 @@
       </p:grpSpPr>
       <p:sp>
         <p:nvSpPr>
-          <p:cNvPr id="1478708174" name=""/>
+          <p:cNvPr id="1493502235" name=""/>
           <p:cNvSpPr/>
           <p:nvPr/>
         </p:nvSpPr>
@@ -4365,7 +4647,7 @@
       </p:sp>
       <p:pic>
         <p:nvPicPr>
-          <p:cNvPr id="285587339" name=""/>
+          <p:cNvPr id="167783772" name=""/>
           <p:cNvPicPr>
             <a:picLocks noChangeAspect="1"/>
           </p:cNvPicPr>
@@ -4387,7 +4669,7 @@
       </p:pic>
       <p:sp>
         <p:nvSpPr>
-          <p:cNvPr id="1576148726" name=""/>
+          <p:cNvPr id="1694527868" name=""/>
           <p:cNvSpPr/>
           <p:nvPr/>
         </p:nvSpPr>
@@ -4443,7 +4725,7 @@
       </p:sp>
       <p:sp>
         <p:nvSpPr>
-          <p:cNvPr id="1597008271" name=""/>
+          <p:cNvPr id="640231857" name=""/>
           <p:cNvSpPr txBox="1"/>
           <p:nvPr/>
         </p:nvSpPr>
@@ -4520,7 +4802,7 @@
       </p:sp>
       <p:sp>
         <p:nvSpPr>
-          <p:cNvPr id="1907107114" name=""/>
+          <p:cNvPr id="1416926727" name=""/>
           <p:cNvSpPr txBox="1"/>
           <p:nvPr/>
         </p:nvSpPr>
@@ -4683,7 +4965,7 @@
       </p:sp>
       <p:sp>
         <p:nvSpPr>
-          <p:cNvPr id="1982376923" name=""/>
+          <p:cNvPr id="953550066" name=""/>
           <p:cNvSpPr/>
           <p:nvPr/>
         </p:nvSpPr>
@@ -4748,7 +5030,7 @@
       </p:sp>
       <p:sp>
         <p:nvSpPr>
-          <p:cNvPr id="1307938988" name=""/>
+          <p:cNvPr id="1447490032" name=""/>
           <p:cNvSpPr txBox="1"/>
           <p:nvPr/>
         </p:nvSpPr>
@@ -4815,7 +5097,7 @@
       </p:sp>
       <p:sp>
         <p:nvSpPr>
-          <p:cNvPr id="1435605877" name=""/>
+          <p:cNvPr id="1863393791" name=""/>
           <p:cNvSpPr txBox="1"/>
           <p:nvPr/>
         </p:nvSpPr>
@@ -4898,7 +5180,7 @@
       </p:sp>
       <p:sp>
         <p:nvSpPr>
-          <p:cNvPr id="459467970" name=""/>
+          <p:cNvPr id="1623365796" name=""/>
           <p:cNvSpPr txBox="1"/>
           <p:nvPr/>
         </p:nvSpPr>
@@ -4962,7 +5244,7 @@
       </p:sp>
       <p:sp>
         <p:nvSpPr>
-          <p:cNvPr id="1247880860" name=""/>
+          <p:cNvPr id="468748774" name=""/>
           <p:cNvSpPr/>
           <p:nvPr/>
         </p:nvSpPr>
@@ -5010,7 +5292,7 @@
       </p:sp>
       <p:pic>
         <p:nvPicPr>
-          <p:cNvPr id="1899235356" name=""/>
+          <p:cNvPr id="801261450" name=""/>
           <p:cNvPicPr>
             <a:picLocks noChangeAspect="1"/>
           </p:cNvPicPr>
@@ -5022,7 +5304,7 @@
         </p:blipFill>
         <p:spPr bwMode="auto">
           <a:xfrm flipH="0" flipV="0">
-            <a:off x="-29162562" y="2169641"/>
+            <a:off x="-29162561" y="2169641"/>
             <a:ext cx="2518713" cy="2518713"/>
           </a:xfrm>
           <a:prstGeom prst="rect">
@@ -5043,6 +5325,1712 @@
       <p:transition advClick="1"/>
     </mc:Fallback>
   </mc:AlternateContent>
+</p:sld>
+</file>
+
+<file path=ppt/slides/slide10.xml><?xml version="1.0" encoding="utf-8"?>
+<p:sld xmlns:a="http://schemas.openxmlformats.org/drawingml/2006/main" xmlns:r="http://schemas.openxmlformats.org/officeDocument/2006/relationships" xmlns:p="http://schemas.openxmlformats.org/presentationml/2006/main" xmlns:m="http://schemas.openxmlformats.org/officeDocument/2006/math" xmlns:w="http://schemas.openxmlformats.org/wordprocessingml/2006/main" xmlns:mc="http://schemas.openxmlformats.org/markup-compatibility/2006" showMasterPhAnim="0" showMasterSp="1" show="1">
+  <p:cSld name="">
+    <p:spTree>
+      <p:nvGrpSpPr>
+        <p:cNvPr id="1" name=""/>
+        <p:cNvGrpSpPr/>
+        <p:nvPr/>
+      </p:nvGrpSpPr>
+      <p:grpSpPr bwMode="auto">
+        <a:xfrm>
+          <a:off x="0" y="0"/>
+          <a:ext cx="0" cy="0"/>
+          <a:chOff x="0" y="0"/>
+          <a:chExt cx="0" cy="0"/>
+        </a:xfrm>
+      </p:grpSpPr>
+      <p:sp>
+        <p:nvSpPr>
+          <p:cNvPr id="614318749" name=""/>
+          <p:cNvSpPr/>
+          <p:nvPr/>
+        </p:nvSpPr>
+        <p:spPr bwMode="auto">
+          <a:xfrm rot="0" flipH="0" flipV="0">
+            <a:off x="-283797" y="-35473"/>
+            <a:ext cx="15125697" cy="6928947"/>
+          </a:xfrm>
+          <a:prstGeom prst="homePlate">
+            <a:avLst>
+              <a:gd name="adj" fmla="val 37965"/>
+            </a:avLst>
+          </a:prstGeom>
+          <a:gradFill>
+            <a:gsLst>
+              <a:gs pos="0">
+                <a:schemeClr val="tx1"/>
+              </a:gs>
+              <a:gs pos="100000">
+                <a:schemeClr val="tx1">
+                  <a:lumMod val="90000"/>
+                  <a:lumOff val="5000"/>
+                </a:schemeClr>
+              </a:gs>
+            </a:gsLst>
+            <a:lin ang="5400000" scaled="1"/>
+          </a:gradFill>
+          <a:ln w="12700" cap="flat" cmpd="sng" algn="ctr">
+            <a:noFill/>
+            <a:prstDash val="solid"/>
+            <a:miter lim="800000"/>
+          </a:ln>
+        </p:spPr>
+        <p:style>
+          <a:lnRef idx="2">
+            <a:schemeClr val="accent1">
+              <a:shade val="50000"/>
+            </a:schemeClr>
+          </a:lnRef>
+          <a:fillRef idx="1">
+            <a:schemeClr val="accent1"/>
+          </a:fillRef>
+          <a:effectRef idx="0">
+            <a:schemeClr val="accent1"/>
+          </a:effectRef>
+          <a:fontRef idx="minor">
+            <a:schemeClr val="lt1"/>
+          </a:fontRef>
+        </p:style>
+        <p:txBody>
+          <a:bodyPr anchor="ctr"/>
+          <a:p>
+            <a:pPr algn="ctr">
+              <a:defRPr/>
+            </a:pPr>
+            <a:endParaRPr>
+              <a:latin typeface="Comfortaa"/>
+              <a:cs typeface="Comfortaa"/>
+            </a:endParaRPr>
+          </a:p>
+        </p:txBody>
+      </p:sp>
+      <p:sp>
+        <p:nvSpPr>
+          <p:cNvPr id="1634007967" name=""/>
+          <p:cNvSpPr/>
+          <p:nvPr/>
+        </p:nvSpPr>
+        <p:spPr bwMode="auto">
+          <a:xfrm rot="0" flipH="0" flipV="0">
+            <a:off x="-283797" y="-31748"/>
+            <a:ext cx="3278763" cy="6877597"/>
+          </a:xfrm>
+          <a:prstGeom prst="rect">
+            <a:avLst/>
+          </a:prstGeom>
+          <a:gradFill>
+            <a:gsLst>
+              <a:gs pos="0">
+                <a:srgbClr val="FF944C"/>
+              </a:gs>
+              <a:gs pos="100000">
+                <a:srgbClr val="FFFF00"/>
+              </a:gs>
+            </a:gsLst>
+            <a:lin ang="5400000" scaled="1"/>
+          </a:gradFill>
+          <a:ln w="12700" cap="flat" cmpd="sng" algn="ctr">
+            <a:noFill/>
+            <a:prstDash val="solid"/>
+            <a:miter lim="800000"/>
+          </a:ln>
+        </p:spPr>
+        <p:style>
+          <a:lnRef idx="2">
+            <a:schemeClr val="accent1">
+              <a:shade val="50000"/>
+            </a:schemeClr>
+          </a:lnRef>
+          <a:fillRef idx="1">
+            <a:schemeClr val="accent1"/>
+          </a:fillRef>
+          <a:effectRef idx="0">
+            <a:schemeClr val="accent1"/>
+          </a:effectRef>
+          <a:fontRef idx="minor">
+            <a:schemeClr val="lt1"/>
+          </a:fontRef>
+        </p:style>
+      </p:sp>
+      <p:pic>
+        <p:nvPicPr>
+          <p:cNvPr id="375336130" name=""/>
+          <p:cNvPicPr>
+            <a:picLocks noChangeAspect="1"/>
+          </p:cNvPicPr>
+          <p:nvPr/>
+        </p:nvPicPr>
+        <p:blipFill rotWithShape="1">
+          <a:blip r:embed="rId3"/>
+          <a:stretch/>
+        </p:blipFill>
+        <p:spPr bwMode="auto">
+          <a:xfrm flipH="0" flipV="0">
+            <a:off x="263930" y="9392245"/>
+            <a:ext cx="2183301" cy="2183301"/>
+          </a:xfrm>
+          <a:prstGeom prst="rect">
+            <a:avLst/>
+          </a:prstGeom>
+        </p:spPr>
+      </p:pic>
+      <p:sp>
+        <p:nvSpPr>
+          <p:cNvPr id="157657780" name=""/>
+          <p:cNvSpPr txBox="1"/>
+          <p:nvPr/>
+        </p:nvSpPr>
+        <p:spPr bwMode="auto">
+          <a:xfrm rot="0" flipH="0" flipV="0">
+            <a:off x="3802902" y="-26370219"/>
+            <a:ext cx="8123563" cy="1189078"/>
+          </a:xfrm>
+          <a:prstGeom prst="rect">
+            <a:avLst/>
+          </a:prstGeom>
+          <a:noFill/>
+        </p:spPr>
+        <p:txBody>
+          <a:bodyPr vertOverflow="overflow" horzOverflow="overflow" vert="horz" wrap="square" lIns="91440" tIns="45720" rIns="91440" bIns="45720" numCol="1" spcCol="0" rtlCol="0" fromWordArt="0" anchor="t" anchorCtr="0" forceAA="0" upright="0" compatLnSpc="0">
+            <a:spAutoFit/>
+          </a:bodyPr>
+          <a:p>
+            <a:pPr algn="ctr">
+              <a:defRPr/>
+            </a:pPr>
+            <a:r>
+              <a:rPr sz="3600" b="1">
+                <a:gradFill>
+                  <a:gsLst>
+                    <a:gs pos="0">
+                      <a:srgbClr val="FF944C"/>
+                    </a:gs>
+                    <a:gs pos="100000">
+                      <a:schemeClr val="accent4">
+                        <a:lumMod val="60000"/>
+                        <a:lumOff val="40000"/>
+                      </a:schemeClr>
+                    </a:gs>
+                  </a:gsLst>
+                  <a:lin ang="10800000" scaled="1"/>
+                </a:gradFill>
+                <a:latin typeface="Comfortaa"/>
+                <a:ea typeface="Comfortaa"/>
+                <a:cs typeface="Comfortaa"/>
+              </a:rPr>
+              <a:t>Macam-Macam</a:t>
+            </a:r>
+            <a:r>
+              <a:rPr sz="3600" b="1">
+                <a:gradFill>
+                  <a:gsLst>
+                    <a:gs pos="0">
+                      <a:srgbClr val="FF944C"/>
+                    </a:gs>
+                    <a:gs pos="100000">
+                      <a:schemeClr val="accent4">
+                        <a:lumMod val="60000"/>
+                        <a:lumOff val="40000"/>
+                      </a:schemeClr>
+                    </a:gs>
+                  </a:gsLst>
+                  <a:lin ang="10800000" scaled="1"/>
+                </a:gradFill>
+                <a:latin typeface="Comfortaa"/>
+                <a:ea typeface="Comfortaa"/>
+                <a:cs typeface="Comfortaa"/>
+              </a:rPr>
+              <a:t> Serangan Pada </a:t>
+            </a:r>
+            <a:r>
+              <a:rPr sz="3600" b="1">
+                <a:gradFill>
+                  <a:gsLst>
+                    <a:gs pos="0">
+                      <a:srgbClr val="FF944C"/>
+                    </a:gs>
+                    <a:gs pos="100000">
+                      <a:schemeClr val="accent4">
+                        <a:lumMod val="60000"/>
+                        <a:lumOff val="40000"/>
+                      </a:schemeClr>
+                    </a:gs>
+                  </a:gsLst>
+                  <a:lin ang="10800000" scaled="1"/>
+                </a:gradFill>
+                <a:latin typeface="Comfortaa"/>
+                <a:ea typeface="Comfortaa"/>
+                <a:cs typeface="Comfortaa"/>
+              </a:rPr>
+              <a:t>Website</a:t>
+            </a:r>
+            <a:endParaRPr sz="3600" b="1">
+              <a:gradFill>
+                <a:gsLst>
+                  <a:gs pos="0">
+                    <a:srgbClr val="FF944C"/>
+                  </a:gs>
+                  <a:gs pos="100000">
+                    <a:schemeClr val="accent4">
+                      <a:lumMod val="60000"/>
+                      <a:lumOff val="40000"/>
+                    </a:schemeClr>
+                  </a:gs>
+                </a:gsLst>
+                <a:lin ang="10800000" scaled="1"/>
+              </a:gradFill>
+              <a:highlight>
+                <a:srgbClr val="000000"/>
+              </a:highlight>
+              <a:latin typeface="Comfortaa"/>
+              <a:cs typeface="Comfortaa"/>
+            </a:endParaRPr>
+          </a:p>
+        </p:txBody>
+      </p:sp>
+      <p:pic>
+        <p:nvPicPr>
+          <p:cNvPr id="1145425996" name=""/>
+          <p:cNvPicPr>
+            <a:picLocks noChangeAspect="1"/>
+          </p:cNvPicPr>
+          <p:nvPr/>
+        </p:nvPicPr>
+        <p:blipFill rotWithShape="1">
+          <a:blip r:embed="rId4"/>
+          <a:stretch/>
+        </p:blipFill>
+        <p:spPr bwMode="auto">
+          <a:xfrm flipH="0" flipV="0">
+            <a:off x="176503" y="3332387"/>
+            <a:ext cx="2358154" cy="1907721"/>
+          </a:xfrm>
+          <a:prstGeom prst="rect">
+            <a:avLst/>
+          </a:prstGeom>
+        </p:spPr>
+      </p:pic>
+      <p:sp>
+        <p:nvSpPr>
+          <p:cNvPr id="842748025" name=""/>
+          <p:cNvSpPr txBox="1"/>
+          <p:nvPr/>
+        </p:nvSpPr>
+        <p:spPr bwMode="auto">
+          <a:xfrm rot="0" flipH="0" flipV="0">
+            <a:off x="444822" y="1271332"/>
+            <a:ext cx="1821515" cy="2019642"/>
+          </a:xfrm>
+          <a:prstGeom prst="rect">
+            <a:avLst/>
+          </a:prstGeom>
+          <a:noFill/>
+        </p:spPr>
+        <p:txBody>
+          <a:bodyPr vertOverflow="overflow" horzOverflow="overflow" vert="horz" wrap="square" lIns="91440" tIns="45720" rIns="91440" bIns="45720" numCol="1" spcCol="0" rtlCol="0" fromWordArt="0" anchor="ctr" anchorCtr="0" forceAA="0" upright="0" compatLnSpc="0">
+            <a:spAutoFit/>
+          </a:bodyPr>
+          <a:p>
+            <a:pPr algn="ctr">
+              <a:lnSpc>
+                <a:spcPct val="114999"/>
+              </a:lnSpc>
+              <a:defRPr/>
+            </a:pPr>
+            <a:r>
+              <a:rPr sz="11000" b="1">
+                <a:solidFill>
+                  <a:schemeClr val="tx1"/>
+                </a:solidFill>
+                <a:latin typeface="Comfortaa"/>
+                <a:ea typeface="Comfortaa"/>
+                <a:cs typeface="Comfortaa"/>
+              </a:rPr>
+              <a:t>1.</a:t>
+            </a:r>
+            <a:endParaRPr sz="11000" b="1">
+              <a:solidFill>
+                <a:schemeClr val="tx1"/>
+              </a:solidFill>
+              <a:latin typeface="Comfortaa"/>
+              <a:cs typeface="Comfortaa"/>
+            </a:endParaRPr>
+          </a:p>
+        </p:txBody>
+      </p:sp>
+      <p:sp>
+        <p:nvSpPr>
+          <p:cNvPr id="1783598131" name=""/>
+          <p:cNvSpPr txBox="1"/>
+          <p:nvPr/>
+        </p:nvSpPr>
+        <p:spPr bwMode="auto">
+          <a:xfrm rot="0" flipH="0" flipV="0">
+            <a:off x="3371166" y="-11835315"/>
+            <a:ext cx="8246522" cy="722730"/>
+          </a:xfrm>
+          <a:prstGeom prst="rect">
+            <a:avLst/>
+          </a:prstGeom>
+          <a:noFill/>
+        </p:spPr>
+        <p:txBody>
+          <a:bodyPr vertOverflow="overflow" horzOverflow="overflow" vert="horz" wrap="square" lIns="91440" tIns="45720" rIns="91440" bIns="45720" numCol="1" spcCol="0" rtlCol="0" fromWordArt="0" anchor="ctr" anchorCtr="0" forceAA="0" upright="0" compatLnSpc="0">
+            <a:spAutoFit/>
+          </a:bodyPr>
+          <a:p>
+            <a:pPr algn="ctr">
+              <a:lnSpc>
+                <a:spcPct val="114999"/>
+              </a:lnSpc>
+              <a:defRPr/>
+            </a:pPr>
+            <a:r>
+              <a:rPr sz="3600" b="1">
+                <a:gradFill>
+                  <a:gsLst>
+                    <a:gs pos="0">
+                      <a:srgbClr val="819CFA"/>
+                    </a:gs>
+                    <a:gs pos="100000">
+                      <a:srgbClr val="2F5EFD"/>
+                    </a:gs>
+                  </a:gsLst>
+                  <a:lin ang="13500000" scaled="1"/>
+                </a:gradFill>
+                <a:latin typeface="Comfortaa"/>
+                <a:ea typeface="Comfortaa"/>
+                <a:cs typeface="Comfortaa"/>
+              </a:rPr>
+              <a:t>Contoh Serangan XSS</a:t>
+            </a:r>
+            <a:endParaRPr sz="3600" b="1">
+              <a:gradFill>
+                <a:gsLst>
+                  <a:gs pos="0">
+                    <a:srgbClr val="819CFA"/>
+                  </a:gs>
+                  <a:gs pos="100000">
+                    <a:srgbClr val="2F5EFD"/>
+                  </a:gs>
+                </a:gsLst>
+                <a:lin ang="10800000" scaled="1"/>
+              </a:gradFill>
+              <a:latin typeface="Comfortaa"/>
+              <a:cs typeface="Comfortaa"/>
+            </a:endParaRPr>
+          </a:p>
+        </p:txBody>
+      </p:sp>
+      <p:sp>
+        <p:nvSpPr>
+          <p:cNvPr id="338167592" name=""/>
+          <p:cNvSpPr txBox="1"/>
+          <p:nvPr/>
+        </p:nvSpPr>
+        <p:spPr bwMode="auto">
+          <a:xfrm rot="0" flipH="0" flipV="0">
+            <a:off x="3371166" y="413991"/>
+            <a:ext cx="8252281" cy="722730"/>
+          </a:xfrm>
+          <a:prstGeom prst="rect">
+            <a:avLst/>
+          </a:prstGeom>
+          <a:noFill/>
+        </p:spPr>
+        <p:txBody>
+          <a:bodyPr vertOverflow="overflow" horzOverflow="overflow" vert="horz" wrap="square" lIns="91440" tIns="45720" rIns="91440" bIns="45720" numCol="1" spcCol="0" rtlCol="0" fromWordArt="0" anchor="ctr" anchorCtr="0" forceAA="0" upright="0" compatLnSpc="0">
+            <a:spAutoFit/>
+          </a:bodyPr>
+          <a:p>
+            <a:pPr algn="ctr">
+              <a:lnSpc>
+                <a:spcPct val="114999"/>
+              </a:lnSpc>
+              <a:defRPr/>
+            </a:pPr>
+            <a:r>
+              <a:rPr sz="3600" b="1">
+                <a:gradFill>
+                  <a:gsLst>
+                    <a:gs pos="0">
+                      <a:srgbClr val="819CFA"/>
+                    </a:gs>
+                    <a:gs pos="100000">
+                      <a:srgbClr val="2F5EFD"/>
+                    </a:gs>
+                  </a:gsLst>
+                  <a:lin ang="13500000" scaled="1"/>
+                </a:gradFill>
+                <a:latin typeface="Comfortaa"/>
+                <a:ea typeface="Comfortaa"/>
+                <a:cs typeface="Comfortaa"/>
+              </a:rPr>
+              <a:t>Defend Against XSS</a:t>
+            </a:r>
+            <a:endParaRPr sz="3600" b="1">
+              <a:gradFill>
+                <a:gsLst>
+                  <a:gs pos="0">
+                    <a:srgbClr val="819CFA"/>
+                  </a:gs>
+                  <a:gs pos="100000">
+                    <a:srgbClr val="2F5EFD"/>
+                  </a:gs>
+                </a:gsLst>
+                <a:lin ang="10800000" scaled="1"/>
+              </a:gradFill>
+              <a:latin typeface="Comfortaa"/>
+              <a:cs typeface="Comfortaa"/>
+            </a:endParaRPr>
+          </a:p>
+        </p:txBody>
+      </p:sp>
+      <p:pic>
+        <p:nvPicPr>
+          <p:cNvPr id="18164576" name=""/>
+          <p:cNvPicPr>
+            <a:picLocks noChangeAspect="1"/>
+          </p:cNvPicPr>
+          <p:nvPr/>
+        </p:nvPicPr>
+        <p:blipFill rotWithShape="1">
+          <a:blip r:embed="rId5"/>
+          <a:stretch/>
+        </p:blipFill>
+        <p:spPr bwMode="auto">
+          <a:xfrm flipH="0" flipV="0">
+            <a:off x="3248024" y="1470211"/>
+            <a:ext cx="1578512" cy="1383760"/>
+          </a:xfrm>
+          <a:prstGeom prst="rect">
+            <a:avLst/>
+          </a:prstGeom>
+        </p:spPr>
+      </p:pic>
+      <p:sp>
+        <p:nvSpPr>
+          <p:cNvPr id="1765059451" name=""/>
+          <p:cNvSpPr txBox="1"/>
+          <p:nvPr/>
+        </p:nvSpPr>
+        <p:spPr bwMode="auto">
+          <a:xfrm rot="0" flipH="0" flipV="0">
+            <a:off x="4945599" y="1521831"/>
+            <a:ext cx="6844606" cy="1283567"/>
+          </a:xfrm>
+          <a:prstGeom prst="rect">
+            <a:avLst/>
+          </a:prstGeom>
+          <a:noFill/>
+        </p:spPr>
+        <p:txBody>
+          <a:bodyPr vertOverflow="overflow" horzOverflow="overflow" vert="horz" wrap="square" lIns="91440" tIns="45720" rIns="91440" bIns="45720" numCol="1" spcCol="0" rtlCol="0" fromWordArt="0" anchor="t" anchorCtr="0" forceAA="0" upright="0" compatLnSpc="0">
+            <a:spAutoFit/>
+          </a:bodyPr>
+          <a:p>
+            <a:pPr algn="just">
+              <a:lnSpc>
+                <a:spcPct val="114999"/>
+              </a:lnSpc>
+              <a:defRPr/>
+            </a:pPr>
+            <a:r>
+              <a:rPr sz="2400" b="1">
+                <a:solidFill>
+                  <a:schemeClr val="bg1"/>
+                </a:solidFill>
+                <a:latin typeface="Comfortaa"/>
+                <a:ea typeface="Comfortaa"/>
+                <a:cs typeface="Comfortaa"/>
+              </a:rPr>
+              <a:t>Form Validation :</a:t>
+            </a:r>
+            <a:endParaRPr sz="2200" b="1">
+              <a:solidFill>
+                <a:schemeClr val="bg1"/>
+              </a:solidFill>
+              <a:latin typeface="Comfortaa"/>
+              <a:cs typeface="Comfortaa"/>
+            </a:endParaRPr>
+          </a:p>
+          <a:p>
+            <a:pPr algn="just">
+              <a:lnSpc>
+                <a:spcPct val="114999"/>
+              </a:lnSpc>
+              <a:defRPr/>
+            </a:pPr>
+            <a:r>
+              <a:rPr sz="2200" b="1">
+                <a:solidFill>
+                  <a:schemeClr val="bg1"/>
+                </a:solidFill>
+                <a:latin typeface="Comfortaa"/>
+                <a:ea typeface="Comfortaa"/>
+                <a:cs typeface="Comfortaa"/>
+              </a:rPr>
+              <a:t>Validasi Input Apakah Hanya Berisi Karakter Yang Ditentukan (Angka, Alphabet, dll)</a:t>
+            </a:r>
+            <a:endParaRPr sz="2200" b="1">
+              <a:solidFill>
+                <a:schemeClr val="bg1"/>
+              </a:solidFill>
+              <a:latin typeface="Comfortaa"/>
+              <a:cs typeface="Comfortaa"/>
+            </a:endParaRPr>
+          </a:p>
+        </p:txBody>
+      </p:sp>
+      <p:sp>
+        <p:nvSpPr>
+          <p:cNvPr id="1267304751" name=""/>
+          <p:cNvSpPr txBox="1"/>
+          <p:nvPr/>
+        </p:nvSpPr>
+        <p:spPr bwMode="auto">
+          <a:xfrm rot="0" flipH="0" flipV="0">
+            <a:off x="4945599" y="3228899"/>
+            <a:ext cx="6860446" cy="1283567"/>
+          </a:xfrm>
+          <a:prstGeom prst="rect">
+            <a:avLst/>
+          </a:prstGeom>
+          <a:noFill/>
+        </p:spPr>
+        <p:txBody>
+          <a:bodyPr vertOverflow="overflow" horzOverflow="overflow" vert="horz" wrap="square" lIns="91440" tIns="45720" rIns="91440" bIns="45720" numCol="1" spcCol="0" rtlCol="0" fromWordArt="0" anchor="t" anchorCtr="0" forceAA="0" upright="0" compatLnSpc="0">
+            <a:spAutoFit/>
+          </a:bodyPr>
+          <a:p>
+            <a:pPr algn="just">
+              <a:lnSpc>
+                <a:spcPct val="114999"/>
+              </a:lnSpc>
+              <a:defRPr/>
+            </a:pPr>
+            <a:r>
+              <a:rPr sz="2400" b="1">
+                <a:solidFill>
+                  <a:schemeClr val="bg1"/>
+                </a:solidFill>
+                <a:latin typeface="Comfortaa"/>
+                <a:ea typeface="Comfortaa"/>
+                <a:cs typeface="Comfortaa"/>
+              </a:rPr>
+              <a:t>Output Encryption :</a:t>
+            </a:r>
+            <a:endParaRPr sz="2200" b="1">
+              <a:solidFill>
+                <a:schemeClr val="bg1"/>
+              </a:solidFill>
+              <a:latin typeface="Comfortaa"/>
+              <a:cs typeface="Comfortaa"/>
+            </a:endParaRPr>
+          </a:p>
+          <a:p>
+            <a:pPr algn="just">
+              <a:lnSpc>
+                <a:spcPct val="114999"/>
+              </a:lnSpc>
+              <a:defRPr/>
+            </a:pPr>
+            <a:r>
+              <a:rPr lang="en-US" sz="2200" b="1" i="0" u="none" strike="noStrike" cap="none" spc="0">
+                <a:solidFill>
+                  <a:schemeClr val="bg1"/>
+                </a:solidFill>
+                <a:latin typeface="Comfortaa"/>
+                <a:ea typeface="Comfortaa"/>
+                <a:cs typeface="Comfortaa"/>
+              </a:rPr>
+              <a:t>Perubahan Bentuk Output Data Sehingga Tidak Bisa Dibaca Tanpa Key Yang Sesuai</a:t>
+            </a:r>
+            <a:endParaRPr sz="2200" b="1">
+              <a:solidFill>
+                <a:schemeClr val="bg1"/>
+              </a:solidFill>
+              <a:latin typeface="Comfortaa"/>
+              <a:cs typeface="Comfortaa"/>
+            </a:endParaRPr>
+          </a:p>
+        </p:txBody>
+      </p:sp>
+      <p:pic>
+        <p:nvPicPr>
+          <p:cNvPr id="1975700466" name=""/>
+          <p:cNvPicPr>
+            <a:picLocks noChangeAspect="1"/>
+          </p:cNvPicPr>
+          <p:nvPr/>
+        </p:nvPicPr>
+        <p:blipFill rotWithShape="1">
+          <a:blip r:embed="rId6"/>
+          <a:stretch/>
+        </p:blipFill>
+        <p:spPr bwMode="auto">
+          <a:xfrm flipH="0" flipV="0">
+            <a:off x="3507924" y="3290976"/>
+            <a:ext cx="1105417" cy="1105417"/>
+          </a:xfrm>
+          <a:prstGeom prst="rect">
+            <a:avLst/>
+          </a:prstGeom>
+        </p:spPr>
+      </p:pic>
+      <p:sp>
+        <p:nvSpPr>
+          <p:cNvPr id="1147011714" name=""/>
+          <p:cNvSpPr txBox="1"/>
+          <p:nvPr/>
+        </p:nvSpPr>
+        <p:spPr bwMode="auto">
+          <a:xfrm rot="0" flipH="0" flipV="0">
+            <a:off x="4945599" y="5001976"/>
+            <a:ext cx="6907711" cy="1128119"/>
+          </a:xfrm>
+          <a:prstGeom prst="rect">
+            <a:avLst/>
+          </a:prstGeom>
+          <a:noFill/>
+        </p:spPr>
+        <p:txBody>
+          <a:bodyPr vertOverflow="overflow" horzOverflow="overflow" vert="horz" wrap="square" lIns="91440" tIns="45720" rIns="91440" bIns="45720" numCol="1" spcCol="0" rtlCol="0" fromWordArt="0" anchor="t" anchorCtr="0" forceAA="0" upright="0" compatLnSpc="0">
+            <a:spAutoFit/>
+          </a:bodyPr>
+          <a:p>
+            <a:pPr algn="just">
+              <a:defRPr/>
+            </a:pPr>
+            <a:r>
+              <a:rPr sz="2400" b="1">
+                <a:solidFill>
+                  <a:schemeClr val="bg1"/>
+                </a:solidFill>
+                <a:latin typeface="Comfortaa"/>
+                <a:ea typeface="Comfortaa"/>
+                <a:cs typeface="Comfortaa"/>
+              </a:rPr>
+              <a:t>HTTP Cookie :</a:t>
+            </a:r>
+            <a:endParaRPr sz="2200" b="1">
+              <a:solidFill>
+                <a:schemeClr val="bg1"/>
+              </a:solidFill>
+              <a:latin typeface="Comfortaa"/>
+              <a:cs typeface="Comfortaa"/>
+            </a:endParaRPr>
+          </a:p>
+          <a:p>
+            <a:pPr algn="just">
+              <a:defRPr/>
+            </a:pPr>
+            <a:r>
+              <a:rPr sz="2200" b="1">
+                <a:solidFill>
+                  <a:schemeClr val="bg1"/>
+                </a:solidFill>
+                <a:latin typeface="Comfortaa"/>
+                <a:ea typeface="Comfortaa"/>
+                <a:cs typeface="Comfortaa"/>
+              </a:rPr>
+              <a:t>Pengunaan HTTP Cookie Untuk Mencegah Javascript Mengakses Token Session</a:t>
+            </a:r>
+            <a:endParaRPr sz="2200" b="1">
+              <a:solidFill>
+                <a:schemeClr val="bg1"/>
+              </a:solidFill>
+              <a:latin typeface="Comfortaa"/>
+              <a:cs typeface="Comfortaa"/>
+            </a:endParaRPr>
+          </a:p>
+        </p:txBody>
+      </p:sp>
+      <p:pic>
+        <p:nvPicPr>
+          <p:cNvPr id="699711656" name=""/>
+          <p:cNvPicPr>
+            <a:picLocks noChangeAspect="1"/>
+          </p:cNvPicPr>
+          <p:nvPr/>
+        </p:nvPicPr>
+        <p:blipFill rotWithShape="1">
+          <a:blip r:embed="rId7"/>
+          <a:stretch/>
+        </p:blipFill>
+        <p:spPr bwMode="auto">
+          <a:xfrm flipH="0" flipV="0">
+            <a:off x="3354622" y="4940823"/>
+            <a:ext cx="1365316" cy="1107550"/>
+          </a:xfrm>
+          <a:prstGeom prst="rect">
+            <a:avLst/>
+          </a:prstGeom>
+        </p:spPr>
+      </p:pic>
+      <p:sp>
+        <p:nvSpPr>
+          <p:cNvPr id="1537227548" name=""/>
+          <p:cNvSpPr txBox="1"/>
+          <p:nvPr/>
+        </p:nvSpPr>
+        <p:spPr bwMode="auto">
+          <a:xfrm rot="0" flipH="0" flipV="0">
+            <a:off x="3648106" y="-8402194"/>
+            <a:ext cx="7541755" cy="2194901"/>
+          </a:xfrm>
+          <a:prstGeom prst="rect">
+            <a:avLst/>
+          </a:prstGeom>
+          <a:noFill/>
+        </p:spPr>
+        <p:txBody>
+          <a:bodyPr vertOverflow="overflow" horzOverflow="overflow" vert="horz" wrap="square" lIns="91440" tIns="45720" rIns="91440" bIns="45720" numCol="1" spcCol="0" rtlCol="0" fromWordArt="0" anchor="t" anchorCtr="0" forceAA="0" upright="0" compatLnSpc="0">
+            <a:spAutoFit/>
+          </a:bodyPr>
+          <a:p>
+            <a:pPr algn="just">
+              <a:lnSpc>
+                <a:spcPct val="114999"/>
+              </a:lnSpc>
+              <a:defRPr/>
+            </a:pPr>
+            <a:r>
+              <a:rPr sz="2400" b="1">
+                <a:solidFill>
+                  <a:schemeClr val="bg1"/>
+                </a:solidFill>
+                <a:latin typeface="Comfortaa"/>
+                <a:ea typeface="Comfortaa"/>
+                <a:cs typeface="Comfortaa"/>
+              </a:rPr>
+              <a:t>Pada Tahun 2019, Seorang Penelity Cybersecurity Bernama Gel Weizman Menemukan Kerentanan XSS Pada Whatsapp Web Yang Mampu Menyebabkan Serangan XSS Terus Menurus Melalui Open Redirect.</a:t>
+            </a:r>
+            <a:endParaRPr sz="2400" b="1">
+              <a:solidFill>
+                <a:schemeClr val="bg1"/>
+              </a:solidFill>
+              <a:latin typeface="Comfortaa"/>
+              <a:cs typeface="Comfortaa"/>
+            </a:endParaRPr>
+          </a:p>
+        </p:txBody>
+      </p:sp>
+      <p:sp>
+        <p:nvSpPr>
+          <p:cNvPr id="115714126" name=""/>
+          <p:cNvSpPr txBox="1"/>
+          <p:nvPr/>
+        </p:nvSpPr>
+        <p:spPr bwMode="auto">
+          <a:xfrm rot="0" flipH="0" flipV="0">
+            <a:off x="3648106" y="-3099879"/>
+            <a:ext cx="7541168" cy="2194901"/>
+          </a:xfrm>
+          <a:prstGeom prst="rect">
+            <a:avLst/>
+          </a:prstGeom>
+          <a:noFill/>
+        </p:spPr>
+        <p:txBody>
+          <a:bodyPr vertOverflow="overflow" horzOverflow="overflow" vert="horz" wrap="square" lIns="91440" tIns="45720" rIns="91440" bIns="45720" numCol="1" spcCol="0" rtlCol="0" fromWordArt="0" anchor="t" anchorCtr="0" forceAA="0" upright="0" compatLnSpc="0">
+            <a:spAutoFit/>
+          </a:bodyPr>
+          <a:p>
+            <a:pPr algn="just">
+              <a:lnSpc>
+                <a:spcPct val="114999"/>
+              </a:lnSpc>
+              <a:defRPr/>
+            </a:pPr>
+            <a:r>
+              <a:rPr sz="2400" b="1">
+                <a:solidFill>
+                  <a:schemeClr val="bg1"/>
+                </a:solidFill>
+                <a:latin typeface="Comfortaa"/>
+                <a:ea typeface="Comfortaa"/>
+                <a:cs typeface="Comfortaa"/>
+              </a:rPr>
+              <a:t>Kerentanan Ini Disebabkan Oleh Konfigurasi File Content Security Policy (CSP)</a:t>
+            </a:r>
+            <a:r>
+              <a:rPr sz="2400" b="1">
+                <a:solidFill>
+                  <a:schemeClr val="bg1"/>
+                </a:solidFill>
+                <a:latin typeface="Comfortaa"/>
+                <a:ea typeface="Comfortaa"/>
+                <a:cs typeface="Comfortaa"/>
+              </a:rPr>
+              <a:t> Yang Tidak Benar</a:t>
+            </a:r>
+            <a:r>
+              <a:rPr sz="2400" b="1">
+                <a:solidFill>
+                  <a:schemeClr val="bg1"/>
+                </a:solidFill>
+                <a:latin typeface="Comfortaa"/>
+                <a:ea typeface="Comfortaa"/>
+                <a:cs typeface="Comfortaa"/>
+              </a:rPr>
+              <a:t> Yang Memungkinkan Penyerang Menyisipkan Malicious Code Pada Server Whatsapp</a:t>
+            </a:r>
+            <a:endParaRPr sz="2400" b="1">
+              <a:solidFill>
+                <a:schemeClr val="bg1"/>
+              </a:solidFill>
+              <a:latin typeface="Comfortaa"/>
+              <a:cs typeface="Comfortaa"/>
+            </a:endParaRPr>
+          </a:p>
+        </p:txBody>
+      </p:sp>
+      <p:pic>
+        <p:nvPicPr>
+          <p:cNvPr id="375576132" name=""/>
+          <p:cNvPicPr>
+            <a:picLocks noChangeAspect="1"/>
+          </p:cNvPicPr>
+          <p:nvPr/>
+        </p:nvPicPr>
+        <p:blipFill rotWithShape="1">
+          <a:blip r:embed="rId8"/>
+          <a:stretch/>
+        </p:blipFill>
+        <p:spPr bwMode="auto">
+          <a:xfrm flipH="0" flipV="0">
+            <a:off x="403686" y="-4182033"/>
+            <a:ext cx="2164309" cy="2164309"/>
+          </a:xfrm>
+          <a:prstGeom prst="rect">
+            <a:avLst/>
+          </a:prstGeom>
+        </p:spPr>
+      </p:pic>
+      <p:sp>
+        <p:nvSpPr>
+          <p:cNvPr id="2139134476" name=""/>
+          <p:cNvSpPr txBox="1"/>
+          <p:nvPr/>
+        </p:nvSpPr>
+        <p:spPr bwMode="auto">
+          <a:xfrm rot="0" flipH="0" flipV="0">
+            <a:off x="597222" y="-5848690"/>
+            <a:ext cx="1822954" cy="2019643"/>
+          </a:xfrm>
+          <a:prstGeom prst="rect">
+            <a:avLst/>
+          </a:prstGeom>
+          <a:noFill/>
+        </p:spPr>
+        <p:txBody>
+          <a:bodyPr vertOverflow="overflow" horzOverflow="overflow" vert="horz" wrap="square" lIns="91440" tIns="45720" rIns="91440" bIns="45720" numCol="1" spcCol="0" rtlCol="0" fromWordArt="0" anchor="ctr" anchorCtr="0" forceAA="0" upright="0" compatLnSpc="0">
+            <a:spAutoFit/>
+          </a:bodyPr>
+          <a:p>
+            <a:pPr algn="ctr">
+              <a:lnSpc>
+                <a:spcPct val="114999"/>
+              </a:lnSpc>
+              <a:defRPr/>
+            </a:pPr>
+            <a:r>
+              <a:rPr sz="11000" b="1">
+                <a:solidFill>
+                  <a:schemeClr val="tx1"/>
+                </a:solidFill>
+                <a:latin typeface="Comfortaa"/>
+                <a:ea typeface="Comfortaa"/>
+                <a:cs typeface="Comfortaa"/>
+              </a:rPr>
+              <a:t>2.</a:t>
+            </a:r>
+            <a:endParaRPr sz="11000" b="1">
+              <a:solidFill>
+                <a:schemeClr val="tx1"/>
+              </a:solidFill>
+              <a:latin typeface="Comfortaa"/>
+              <a:cs typeface="Comfortaa"/>
+            </a:endParaRPr>
+          </a:p>
+        </p:txBody>
+      </p:sp>
+    </p:spTree>
+  </p:cSld>
+  <p:clrMapOvr>
+    <a:masterClrMapping/>
+  </p:clrMapOvr>
+  <mc:AlternateContent xmlns:mc="http://schemas.openxmlformats.org/markup-compatibility/2006">
+    <mc:Choice xmlns:p159="http://schemas.microsoft.com/office/powerpoint/2015/09/main" xmlns:p14="http://schemas.microsoft.com/office/powerpoint/2010/main" Requires="p159">
+      <p:transition spd="slow" p14:dur="1500" advClick="1">
+        <p159:morph option="byObject"/>
+      </p:transition>
+    </mc:Choice>
+    <mc:Fallback>
+      <p:transition spd="slow" advClick="1">
+        <p:fade/>
+      </p:transition>
+    </mc:Fallback>
+  </mc:AlternateContent>
+  <p:timing/>
+</p:sld>
+</file>
+
+<file path=ppt/slides/slide11.xml><?xml version="1.0" encoding="utf-8"?>
+<p:sld xmlns:a="http://schemas.openxmlformats.org/drawingml/2006/main" xmlns:r="http://schemas.openxmlformats.org/officeDocument/2006/relationships" xmlns:p="http://schemas.openxmlformats.org/presentationml/2006/main" xmlns:m="http://schemas.openxmlformats.org/officeDocument/2006/math" xmlns:w="http://schemas.openxmlformats.org/wordprocessingml/2006/main" xmlns:mc="http://schemas.openxmlformats.org/markup-compatibility/2006" showMasterPhAnim="0" showMasterSp="1" show="1">
+  <p:cSld name="">
+    <p:spTree>
+      <p:nvGrpSpPr>
+        <p:cNvPr id="1" name=""/>
+        <p:cNvGrpSpPr/>
+        <p:nvPr/>
+      </p:nvGrpSpPr>
+      <p:grpSpPr bwMode="auto">
+        <a:xfrm>
+          <a:off x="0" y="0"/>
+          <a:ext cx="0" cy="0"/>
+          <a:chOff x="0" y="0"/>
+          <a:chExt cx="0" cy="0"/>
+        </a:xfrm>
+      </p:grpSpPr>
+      <p:sp>
+        <p:nvSpPr>
+          <p:cNvPr id="378879932" name=""/>
+          <p:cNvSpPr/>
+          <p:nvPr/>
+        </p:nvSpPr>
+        <p:spPr bwMode="auto">
+          <a:xfrm rot="0" flipH="0" flipV="0">
+            <a:off x="-283797" y="-35473"/>
+            <a:ext cx="15125697" cy="6928947"/>
+          </a:xfrm>
+          <a:prstGeom prst="homePlate">
+            <a:avLst>
+              <a:gd name="adj" fmla="val 37965"/>
+            </a:avLst>
+          </a:prstGeom>
+          <a:gradFill>
+            <a:gsLst>
+              <a:gs pos="0">
+                <a:schemeClr val="tx1"/>
+              </a:gs>
+              <a:gs pos="100000">
+                <a:schemeClr val="tx1">
+                  <a:lumMod val="90000"/>
+                  <a:lumOff val="5000"/>
+                </a:schemeClr>
+              </a:gs>
+            </a:gsLst>
+            <a:lin ang="5400000" scaled="1"/>
+          </a:gradFill>
+          <a:ln w="12700" cap="flat" cmpd="sng" algn="ctr">
+            <a:noFill/>
+            <a:prstDash val="solid"/>
+            <a:miter lim="800000"/>
+          </a:ln>
+        </p:spPr>
+        <p:style>
+          <a:lnRef idx="2">
+            <a:schemeClr val="accent1">
+              <a:shade val="50000"/>
+            </a:schemeClr>
+          </a:lnRef>
+          <a:fillRef idx="1">
+            <a:schemeClr val="accent1"/>
+          </a:fillRef>
+          <a:effectRef idx="0">
+            <a:schemeClr val="accent1"/>
+          </a:effectRef>
+          <a:fontRef idx="minor">
+            <a:schemeClr val="lt1"/>
+          </a:fontRef>
+        </p:style>
+        <p:txBody>
+          <a:bodyPr anchor="ctr"/>
+          <a:p>
+            <a:pPr algn="ctr">
+              <a:defRPr/>
+            </a:pPr>
+            <a:endParaRPr>
+              <a:latin typeface="Comfortaa"/>
+              <a:cs typeface="Comfortaa"/>
+            </a:endParaRPr>
+          </a:p>
+        </p:txBody>
+      </p:sp>
+      <p:sp>
+        <p:nvSpPr>
+          <p:cNvPr id="808647783" name=""/>
+          <p:cNvSpPr/>
+          <p:nvPr/>
+        </p:nvSpPr>
+        <p:spPr bwMode="auto">
+          <a:xfrm rot="0" flipH="0" flipV="0">
+            <a:off x="-283797" y="-31748"/>
+            <a:ext cx="3278763" cy="6877597"/>
+          </a:xfrm>
+          <a:prstGeom prst="rect">
+            <a:avLst/>
+          </a:prstGeom>
+          <a:gradFill>
+            <a:gsLst>
+              <a:gs pos="0">
+                <a:srgbClr val="FF944C"/>
+              </a:gs>
+              <a:gs pos="100000">
+                <a:srgbClr val="FFFF00"/>
+              </a:gs>
+            </a:gsLst>
+            <a:lin ang="5400000" scaled="1"/>
+          </a:gradFill>
+          <a:ln w="12700" cap="flat" cmpd="sng" algn="ctr">
+            <a:noFill/>
+            <a:prstDash val="solid"/>
+            <a:miter lim="800000"/>
+          </a:ln>
+        </p:spPr>
+        <p:style>
+          <a:lnRef idx="2">
+            <a:schemeClr val="accent1">
+              <a:shade val="50000"/>
+            </a:schemeClr>
+          </a:lnRef>
+          <a:fillRef idx="1">
+            <a:schemeClr val="accent1"/>
+          </a:fillRef>
+          <a:effectRef idx="0">
+            <a:schemeClr val="accent1"/>
+          </a:effectRef>
+          <a:fontRef idx="minor">
+            <a:schemeClr val="lt1"/>
+          </a:fontRef>
+        </p:style>
+      </p:sp>
+      <p:sp>
+        <p:nvSpPr>
+          <p:cNvPr id="1284620617" name=""/>
+          <p:cNvSpPr txBox="1"/>
+          <p:nvPr/>
+        </p:nvSpPr>
+        <p:spPr bwMode="auto">
+          <a:xfrm rot="0" flipH="0" flipV="0">
+            <a:off x="3802902" y="-26370219"/>
+            <a:ext cx="8123563" cy="1189078"/>
+          </a:xfrm>
+          <a:prstGeom prst="rect">
+            <a:avLst/>
+          </a:prstGeom>
+          <a:noFill/>
+        </p:spPr>
+        <p:txBody>
+          <a:bodyPr vertOverflow="overflow" horzOverflow="overflow" vert="horz" wrap="square" lIns="91440" tIns="45720" rIns="91440" bIns="45720" numCol="1" spcCol="0" rtlCol="0" fromWordArt="0" anchor="t" anchorCtr="0" forceAA="0" upright="0" compatLnSpc="0">
+            <a:spAutoFit/>
+          </a:bodyPr>
+          <a:p>
+            <a:pPr algn="ctr">
+              <a:defRPr/>
+            </a:pPr>
+            <a:r>
+              <a:rPr sz="3600" b="1">
+                <a:gradFill>
+                  <a:gsLst>
+                    <a:gs pos="0">
+                      <a:srgbClr val="FF944C"/>
+                    </a:gs>
+                    <a:gs pos="100000">
+                      <a:schemeClr val="accent4">
+                        <a:lumMod val="60000"/>
+                        <a:lumOff val="40000"/>
+                      </a:schemeClr>
+                    </a:gs>
+                  </a:gsLst>
+                  <a:lin ang="10800000" scaled="1"/>
+                </a:gradFill>
+                <a:latin typeface="Comfortaa"/>
+                <a:ea typeface="Comfortaa"/>
+                <a:cs typeface="Comfortaa"/>
+              </a:rPr>
+              <a:t>Macam-Macam</a:t>
+            </a:r>
+            <a:r>
+              <a:rPr sz="3600" b="1">
+                <a:gradFill>
+                  <a:gsLst>
+                    <a:gs pos="0">
+                      <a:srgbClr val="FF944C"/>
+                    </a:gs>
+                    <a:gs pos="100000">
+                      <a:schemeClr val="accent4">
+                        <a:lumMod val="60000"/>
+                        <a:lumOff val="40000"/>
+                      </a:schemeClr>
+                    </a:gs>
+                  </a:gsLst>
+                  <a:lin ang="10800000" scaled="1"/>
+                </a:gradFill>
+                <a:latin typeface="Comfortaa"/>
+                <a:ea typeface="Comfortaa"/>
+                <a:cs typeface="Comfortaa"/>
+              </a:rPr>
+              <a:t> Serangan Pada </a:t>
+            </a:r>
+            <a:r>
+              <a:rPr sz="3600" b="1">
+                <a:gradFill>
+                  <a:gsLst>
+                    <a:gs pos="0">
+                      <a:srgbClr val="FF944C"/>
+                    </a:gs>
+                    <a:gs pos="100000">
+                      <a:schemeClr val="accent4">
+                        <a:lumMod val="60000"/>
+                        <a:lumOff val="40000"/>
+                      </a:schemeClr>
+                    </a:gs>
+                  </a:gsLst>
+                  <a:lin ang="10800000" scaled="1"/>
+                </a:gradFill>
+                <a:latin typeface="Comfortaa"/>
+                <a:ea typeface="Comfortaa"/>
+                <a:cs typeface="Comfortaa"/>
+              </a:rPr>
+              <a:t>Website</a:t>
+            </a:r>
+            <a:endParaRPr sz="3600" b="1">
+              <a:gradFill>
+                <a:gsLst>
+                  <a:gs pos="0">
+                    <a:srgbClr val="FF944C"/>
+                  </a:gs>
+                  <a:gs pos="100000">
+                    <a:schemeClr val="accent4">
+                      <a:lumMod val="60000"/>
+                      <a:lumOff val="40000"/>
+                    </a:schemeClr>
+                  </a:gs>
+                </a:gsLst>
+                <a:lin ang="10800000" scaled="1"/>
+              </a:gradFill>
+              <a:highlight>
+                <a:srgbClr val="000000"/>
+              </a:highlight>
+              <a:latin typeface="Comfortaa"/>
+              <a:cs typeface="Comfortaa"/>
+            </a:endParaRPr>
+          </a:p>
+        </p:txBody>
+      </p:sp>
+      <p:pic>
+        <p:nvPicPr>
+          <p:cNvPr id="744084755" name=""/>
+          <p:cNvPicPr>
+            <a:picLocks noChangeAspect="1"/>
+          </p:cNvPicPr>
+          <p:nvPr/>
+        </p:nvPicPr>
+        <p:blipFill rotWithShape="1">
+          <a:blip r:embed="rId3"/>
+          <a:stretch/>
+        </p:blipFill>
+        <p:spPr bwMode="auto">
+          <a:xfrm flipH="0" flipV="0">
+            <a:off x="176503" y="11916794"/>
+            <a:ext cx="2358154" cy="1907721"/>
+          </a:xfrm>
+          <a:prstGeom prst="rect">
+            <a:avLst/>
+          </a:prstGeom>
+        </p:spPr>
+      </p:pic>
+      <p:sp>
+        <p:nvSpPr>
+          <p:cNvPr id="1710876831" name=""/>
+          <p:cNvSpPr txBox="1"/>
+          <p:nvPr/>
+        </p:nvSpPr>
+        <p:spPr bwMode="auto">
+          <a:xfrm rot="0" flipH="0" flipV="0">
+            <a:off x="444822" y="9855739"/>
+            <a:ext cx="1821515" cy="2019642"/>
+          </a:xfrm>
+          <a:prstGeom prst="rect">
+            <a:avLst/>
+          </a:prstGeom>
+          <a:noFill/>
+        </p:spPr>
+        <p:txBody>
+          <a:bodyPr vertOverflow="overflow" horzOverflow="overflow" vert="horz" wrap="square" lIns="91440" tIns="45720" rIns="91440" bIns="45720" numCol="1" spcCol="0" rtlCol="0" fromWordArt="0" anchor="ctr" anchorCtr="0" forceAA="0" upright="0" compatLnSpc="0">
+            <a:spAutoFit/>
+          </a:bodyPr>
+          <a:p>
+            <a:pPr algn="ctr">
+              <a:lnSpc>
+                <a:spcPct val="114999"/>
+              </a:lnSpc>
+              <a:defRPr/>
+            </a:pPr>
+            <a:r>
+              <a:rPr sz="11000" b="1">
+                <a:solidFill>
+                  <a:schemeClr val="tx1"/>
+                </a:solidFill>
+                <a:latin typeface="Comfortaa"/>
+                <a:ea typeface="Comfortaa"/>
+                <a:cs typeface="Comfortaa"/>
+              </a:rPr>
+              <a:t>1.</a:t>
+            </a:r>
+            <a:endParaRPr sz="11000" b="1">
+              <a:solidFill>
+                <a:schemeClr val="tx1"/>
+              </a:solidFill>
+              <a:latin typeface="Comfortaa"/>
+              <a:cs typeface="Comfortaa"/>
+            </a:endParaRPr>
+          </a:p>
+        </p:txBody>
+      </p:sp>
+      <p:sp>
+        <p:nvSpPr>
+          <p:cNvPr id="23027489" name=""/>
+          <p:cNvSpPr txBox="1"/>
+          <p:nvPr/>
+        </p:nvSpPr>
+        <p:spPr bwMode="auto">
+          <a:xfrm rot="0" flipH="0" flipV="0">
+            <a:off x="3371166" y="-15778507"/>
+            <a:ext cx="8252281" cy="722730"/>
+          </a:xfrm>
+          <a:prstGeom prst="rect">
+            <a:avLst/>
+          </a:prstGeom>
+          <a:noFill/>
+        </p:spPr>
+        <p:txBody>
+          <a:bodyPr vertOverflow="overflow" horzOverflow="overflow" vert="horz" wrap="square" lIns="91440" tIns="45720" rIns="91440" bIns="45720" numCol="1" spcCol="0" rtlCol="0" fromWordArt="0" anchor="ctr" anchorCtr="0" forceAA="0" upright="0" compatLnSpc="0">
+            <a:spAutoFit/>
+          </a:bodyPr>
+          <a:p>
+            <a:pPr algn="ctr">
+              <a:lnSpc>
+                <a:spcPct val="114999"/>
+              </a:lnSpc>
+              <a:defRPr/>
+            </a:pPr>
+            <a:r>
+              <a:rPr sz="3600" b="1">
+                <a:gradFill>
+                  <a:gsLst>
+                    <a:gs pos="0">
+                      <a:srgbClr val="819CFA"/>
+                    </a:gs>
+                    <a:gs pos="100000">
+                      <a:srgbClr val="2F5EFD"/>
+                    </a:gs>
+                  </a:gsLst>
+                  <a:lin ang="13500000" scaled="1"/>
+                </a:gradFill>
+                <a:latin typeface="Comfortaa"/>
+                <a:ea typeface="Comfortaa"/>
+                <a:cs typeface="Comfortaa"/>
+              </a:rPr>
+              <a:t>Defend Against XSS</a:t>
+            </a:r>
+            <a:endParaRPr sz="3600" b="1">
+              <a:gradFill>
+                <a:gsLst>
+                  <a:gs pos="0">
+                    <a:srgbClr val="819CFA"/>
+                  </a:gs>
+                  <a:gs pos="100000">
+                    <a:srgbClr val="2F5EFD"/>
+                  </a:gs>
+                </a:gsLst>
+                <a:lin ang="10800000" scaled="1"/>
+              </a:gradFill>
+              <a:latin typeface="Comfortaa"/>
+              <a:cs typeface="Comfortaa"/>
+            </a:endParaRPr>
+          </a:p>
+        </p:txBody>
+      </p:sp>
+      <p:pic>
+        <p:nvPicPr>
+          <p:cNvPr id="122473568" name=""/>
+          <p:cNvPicPr>
+            <a:picLocks noChangeAspect="1"/>
+          </p:cNvPicPr>
+          <p:nvPr/>
+        </p:nvPicPr>
+        <p:blipFill rotWithShape="1">
+          <a:blip r:embed="rId4"/>
+          <a:stretch/>
+        </p:blipFill>
+        <p:spPr bwMode="auto">
+          <a:xfrm flipH="0" flipV="0">
+            <a:off x="3248024" y="-11208420"/>
+            <a:ext cx="1578512" cy="1383760"/>
+          </a:xfrm>
+          <a:prstGeom prst="rect">
+            <a:avLst/>
+          </a:prstGeom>
+        </p:spPr>
+      </p:pic>
+      <p:sp>
+        <p:nvSpPr>
+          <p:cNvPr id="1033010328" name=""/>
+          <p:cNvSpPr txBox="1"/>
+          <p:nvPr/>
+        </p:nvSpPr>
+        <p:spPr bwMode="auto">
+          <a:xfrm rot="0" flipH="0" flipV="0">
+            <a:off x="4945599" y="-11156799"/>
+            <a:ext cx="6844606" cy="1283567"/>
+          </a:xfrm>
+          <a:prstGeom prst="rect">
+            <a:avLst/>
+          </a:prstGeom>
+          <a:noFill/>
+        </p:spPr>
+        <p:txBody>
+          <a:bodyPr vertOverflow="overflow" horzOverflow="overflow" vert="horz" wrap="square" lIns="91440" tIns="45720" rIns="91440" bIns="45720" numCol="1" spcCol="0" rtlCol="0" fromWordArt="0" anchor="t" anchorCtr="0" forceAA="0" upright="0" compatLnSpc="0">
+            <a:spAutoFit/>
+          </a:bodyPr>
+          <a:p>
+            <a:pPr algn="just">
+              <a:lnSpc>
+                <a:spcPct val="114999"/>
+              </a:lnSpc>
+              <a:defRPr/>
+            </a:pPr>
+            <a:r>
+              <a:rPr sz="2400" b="1">
+                <a:solidFill>
+                  <a:schemeClr val="bg1"/>
+                </a:solidFill>
+                <a:latin typeface="Comfortaa"/>
+                <a:ea typeface="Comfortaa"/>
+                <a:cs typeface="Comfortaa"/>
+              </a:rPr>
+              <a:t>Form Validation :</a:t>
+            </a:r>
+            <a:endParaRPr sz="2200" b="1">
+              <a:solidFill>
+                <a:schemeClr val="bg1"/>
+              </a:solidFill>
+              <a:latin typeface="Comfortaa"/>
+              <a:cs typeface="Comfortaa"/>
+            </a:endParaRPr>
+          </a:p>
+          <a:p>
+            <a:pPr algn="just">
+              <a:lnSpc>
+                <a:spcPct val="114999"/>
+              </a:lnSpc>
+              <a:defRPr/>
+            </a:pPr>
+            <a:r>
+              <a:rPr sz="2200" b="1">
+                <a:solidFill>
+                  <a:schemeClr val="bg1"/>
+                </a:solidFill>
+                <a:latin typeface="Comfortaa"/>
+                <a:ea typeface="Comfortaa"/>
+                <a:cs typeface="Comfortaa"/>
+              </a:rPr>
+              <a:t>Validasi Input Apakah Hanya Berisi Karakter Yang Ditentukan (Angka, Alphabet, dll)</a:t>
+            </a:r>
+            <a:endParaRPr sz="2200" b="1">
+              <a:solidFill>
+                <a:schemeClr val="bg1"/>
+              </a:solidFill>
+              <a:latin typeface="Comfortaa"/>
+              <a:cs typeface="Comfortaa"/>
+            </a:endParaRPr>
+          </a:p>
+        </p:txBody>
+      </p:sp>
+      <p:sp>
+        <p:nvSpPr>
+          <p:cNvPr id="2070508331" name=""/>
+          <p:cNvSpPr txBox="1"/>
+          <p:nvPr/>
+        </p:nvSpPr>
+        <p:spPr bwMode="auto">
+          <a:xfrm rot="0" flipH="0" flipV="0">
+            <a:off x="4945599" y="-6473170"/>
+            <a:ext cx="6860446" cy="1283567"/>
+          </a:xfrm>
+          <a:prstGeom prst="rect">
+            <a:avLst/>
+          </a:prstGeom>
+          <a:noFill/>
+        </p:spPr>
+        <p:txBody>
+          <a:bodyPr vertOverflow="overflow" horzOverflow="overflow" vert="horz" wrap="square" lIns="91440" tIns="45720" rIns="91440" bIns="45720" numCol="1" spcCol="0" rtlCol="0" fromWordArt="0" anchor="t" anchorCtr="0" forceAA="0" upright="0" compatLnSpc="0">
+            <a:spAutoFit/>
+          </a:bodyPr>
+          <a:p>
+            <a:pPr algn="just">
+              <a:lnSpc>
+                <a:spcPct val="114999"/>
+              </a:lnSpc>
+              <a:defRPr/>
+            </a:pPr>
+            <a:r>
+              <a:rPr sz="2400" b="1">
+                <a:solidFill>
+                  <a:schemeClr val="bg1"/>
+                </a:solidFill>
+                <a:latin typeface="Comfortaa"/>
+                <a:ea typeface="Comfortaa"/>
+                <a:cs typeface="Comfortaa"/>
+              </a:rPr>
+              <a:t>Output Encryption :</a:t>
+            </a:r>
+            <a:endParaRPr sz="2200" b="1">
+              <a:solidFill>
+                <a:schemeClr val="bg1"/>
+              </a:solidFill>
+              <a:latin typeface="Comfortaa"/>
+              <a:cs typeface="Comfortaa"/>
+            </a:endParaRPr>
+          </a:p>
+          <a:p>
+            <a:pPr algn="just">
+              <a:lnSpc>
+                <a:spcPct val="114999"/>
+              </a:lnSpc>
+              <a:defRPr/>
+            </a:pPr>
+            <a:r>
+              <a:rPr lang="en-US" sz="2200" b="1" i="0" u="none" strike="noStrike" cap="none" spc="0">
+                <a:solidFill>
+                  <a:schemeClr val="bg1"/>
+                </a:solidFill>
+                <a:latin typeface="Comfortaa"/>
+                <a:ea typeface="Comfortaa"/>
+                <a:cs typeface="Comfortaa"/>
+              </a:rPr>
+              <a:t>Perubahan Bentuk Output Data Sehingga Tidak Bisa Dibaca Tanpa Key Yang Sesuai</a:t>
+            </a:r>
+            <a:endParaRPr sz="2200" b="1">
+              <a:solidFill>
+                <a:schemeClr val="bg1"/>
+              </a:solidFill>
+              <a:latin typeface="Comfortaa"/>
+              <a:cs typeface="Comfortaa"/>
+            </a:endParaRPr>
+          </a:p>
+        </p:txBody>
+      </p:sp>
+      <p:pic>
+        <p:nvPicPr>
+          <p:cNvPr id="101839642" name=""/>
+          <p:cNvPicPr>
+            <a:picLocks noChangeAspect="1"/>
+          </p:cNvPicPr>
+          <p:nvPr/>
+        </p:nvPicPr>
+        <p:blipFill rotWithShape="1">
+          <a:blip r:embed="rId5"/>
+          <a:stretch/>
+        </p:blipFill>
+        <p:spPr bwMode="auto">
+          <a:xfrm flipH="0" flipV="0">
+            <a:off x="3507924" y="-6411093"/>
+            <a:ext cx="1105417" cy="1105417"/>
+          </a:xfrm>
+          <a:prstGeom prst="rect">
+            <a:avLst/>
+          </a:prstGeom>
+        </p:spPr>
+      </p:pic>
+      <p:sp>
+        <p:nvSpPr>
+          <p:cNvPr id="40375144" name=""/>
+          <p:cNvSpPr txBox="1"/>
+          <p:nvPr/>
+        </p:nvSpPr>
+        <p:spPr bwMode="auto">
+          <a:xfrm rot="0" flipH="0" flipV="0">
+            <a:off x="4945599" y="-2439429"/>
+            <a:ext cx="6907711" cy="1128119"/>
+          </a:xfrm>
+          <a:prstGeom prst="rect">
+            <a:avLst/>
+          </a:prstGeom>
+          <a:noFill/>
+        </p:spPr>
+        <p:txBody>
+          <a:bodyPr vertOverflow="overflow" horzOverflow="overflow" vert="horz" wrap="square" lIns="91440" tIns="45720" rIns="91440" bIns="45720" numCol="1" spcCol="0" rtlCol="0" fromWordArt="0" anchor="t" anchorCtr="0" forceAA="0" upright="0" compatLnSpc="0">
+            <a:spAutoFit/>
+          </a:bodyPr>
+          <a:p>
+            <a:pPr algn="just">
+              <a:defRPr/>
+            </a:pPr>
+            <a:r>
+              <a:rPr sz="2400" b="1">
+                <a:solidFill>
+                  <a:schemeClr val="bg1"/>
+                </a:solidFill>
+                <a:latin typeface="Comfortaa"/>
+                <a:ea typeface="Comfortaa"/>
+                <a:cs typeface="Comfortaa"/>
+              </a:rPr>
+              <a:t>HTTP Cookie :</a:t>
+            </a:r>
+            <a:endParaRPr sz="2200" b="1">
+              <a:solidFill>
+                <a:schemeClr val="bg1"/>
+              </a:solidFill>
+              <a:latin typeface="Comfortaa"/>
+              <a:cs typeface="Comfortaa"/>
+            </a:endParaRPr>
+          </a:p>
+          <a:p>
+            <a:pPr algn="just">
+              <a:defRPr/>
+            </a:pPr>
+            <a:r>
+              <a:rPr sz="2200" b="1">
+                <a:solidFill>
+                  <a:schemeClr val="bg1"/>
+                </a:solidFill>
+                <a:latin typeface="Comfortaa"/>
+                <a:ea typeface="Comfortaa"/>
+                <a:cs typeface="Comfortaa"/>
+              </a:rPr>
+              <a:t>Pengunaan HTTP Cookie Untuk Mencegah Javascript Mengakses Token Session</a:t>
+            </a:r>
+            <a:endParaRPr sz="2200" b="1">
+              <a:solidFill>
+                <a:schemeClr val="bg1"/>
+              </a:solidFill>
+              <a:latin typeface="Comfortaa"/>
+              <a:cs typeface="Comfortaa"/>
+            </a:endParaRPr>
+          </a:p>
+        </p:txBody>
+      </p:sp>
+      <p:pic>
+        <p:nvPicPr>
+          <p:cNvPr id="1079272826" name=""/>
+          <p:cNvPicPr>
+            <a:picLocks noChangeAspect="1"/>
+          </p:cNvPicPr>
+          <p:nvPr/>
+        </p:nvPicPr>
+        <p:blipFill rotWithShape="1">
+          <a:blip r:embed="rId6"/>
+          <a:stretch/>
+        </p:blipFill>
+        <p:spPr bwMode="auto">
+          <a:xfrm flipH="0" flipV="0">
+            <a:off x="3354622" y="-2499058"/>
+            <a:ext cx="1365316" cy="1107550"/>
+          </a:xfrm>
+          <a:prstGeom prst="rect">
+            <a:avLst/>
+          </a:prstGeom>
+        </p:spPr>
+      </p:pic>
+      <p:pic>
+        <p:nvPicPr>
+          <p:cNvPr id="92129341" name=""/>
+          <p:cNvPicPr>
+            <a:picLocks noChangeAspect="1"/>
+          </p:cNvPicPr>
+          <p:nvPr/>
+        </p:nvPicPr>
+        <p:blipFill rotWithShape="1">
+          <a:blip r:embed="rId7"/>
+          <a:stretch/>
+        </p:blipFill>
+        <p:spPr bwMode="auto">
+          <a:xfrm flipH="0" flipV="0">
+            <a:off x="251286" y="2938708"/>
+            <a:ext cx="2164309" cy="2164309"/>
+          </a:xfrm>
+          <a:prstGeom prst="rect">
+            <a:avLst/>
+          </a:prstGeom>
+        </p:spPr>
+      </p:pic>
+      <p:sp>
+        <p:nvSpPr>
+          <p:cNvPr id="1681946891" name=""/>
+          <p:cNvSpPr txBox="1"/>
+          <p:nvPr/>
+        </p:nvSpPr>
+        <p:spPr bwMode="auto">
+          <a:xfrm rot="0" flipH="0" flipV="0">
+            <a:off x="444822" y="1271872"/>
+            <a:ext cx="1822595" cy="2019643"/>
+          </a:xfrm>
+          <a:prstGeom prst="rect">
+            <a:avLst/>
+          </a:prstGeom>
+          <a:noFill/>
+        </p:spPr>
+        <p:txBody>
+          <a:bodyPr vertOverflow="overflow" horzOverflow="overflow" vert="horz" wrap="square" lIns="91440" tIns="45720" rIns="91440" bIns="45720" numCol="1" spcCol="0" rtlCol="0" fromWordArt="0" anchor="ctr" anchorCtr="0" forceAA="0" upright="0" compatLnSpc="0">
+            <a:spAutoFit/>
+          </a:bodyPr>
+          <a:p>
+            <a:pPr algn="ctr">
+              <a:lnSpc>
+                <a:spcPct val="114999"/>
+              </a:lnSpc>
+              <a:defRPr/>
+            </a:pPr>
+            <a:r>
+              <a:rPr sz="11000" b="1">
+                <a:solidFill>
+                  <a:schemeClr val="tx1"/>
+                </a:solidFill>
+                <a:latin typeface="Comfortaa"/>
+                <a:ea typeface="Comfortaa"/>
+                <a:cs typeface="Comfortaa"/>
+              </a:rPr>
+              <a:t>2.</a:t>
+            </a:r>
+            <a:endParaRPr sz="11000" b="1">
+              <a:solidFill>
+                <a:schemeClr val="tx1"/>
+              </a:solidFill>
+              <a:latin typeface="Comfortaa"/>
+              <a:cs typeface="Comfortaa"/>
+            </a:endParaRPr>
+          </a:p>
+        </p:txBody>
+      </p:sp>
+    </p:spTree>
+  </p:cSld>
+  <p:clrMapOvr>
+    <a:masterClrMapping/>
+  </p:clrMapOvr>
+  <mc:AlternateContent xmlns:mc="http://schemas.openxmlformats.org/markup-compatibility/2006">
+    <mc:Choice xmlns:p159="http://schemas.microsoft.com/office/powerpoint/2015/09/main" xmlns:p14="http://schemas.microsoft.com/office/powerpoint/2010/main" Requires="p159">
+      <p:transition spd="slow" p14:dur="1500" advClick="1">
+        <p159:morph option="byObject"/>
+      </p:transition>
+    </mc:Choice>
+    <mc:Fallback>
+      <p:transition spd="slow" advClick="1">
+        <p:fade/>
+      </p:transition>
+    </mc:Fallback>
+  </mc:AlternateContent>
+  <p:timing/>
 </p:sld>
 </file>
 
@@ -5065,7 +7053,7 @@
       </p:grpSpPr>
       <p:pic>
         <p:nvPicPr>
-          <p:cNvPr id="1549666232" name=""/>
+          <p:cNvPr id="1778425327" name=""/>
           <p:cNvPicPr>
             <a:picLocks noChangeAspect="1"/>
           </p:cNvPicPr>
@@ -5087,13 +7075,13 @@
       </p:pic>
       <p:sp>
         <p:nvSpPr>
-          <p:cNvPr id="1182539809" name=""/>
+          <p:cNvPr id="1096144160" name=""/>
           <p:cNvSpPr/>
           <p:nvPr/>
         </p:nvSpPr>
         <p:spPr bwMode="auto">
           <a:xfrm rot="0" flipH="0" flipV="0">
-            <a:off x="5932039" y="-89996"/>
+            <a:off x="5932038" y="-89996"/>
             <a:ext cx="11201399" cy="6928947"/>
           </a:xfrm>
           <a:prstGeom prst="homePlate">
@@ -5143,7 +7131,7 @@
       </p:sp>
       <p:sp>
         <p:nvSpPr>
-          <p:cNvPr id="834729526" name=""/>
+          <p:cNvPr id="1678904736" name=""/>
           <p:cNvSpPr txBox="1"/>
           <p:nvPr/>
         </p:nvSpPr>
@@ -5220,7 +7208,7 @@
       </p:sp>
       <p:sp>
         <p:nvSpPr>
-          <p:cNvPr id="577612149" name=""/>
+          <p:cNvPr id="948182145" name=""/>
           <p:cNvSpPr txBox="1"/>
           <p:nvPr/>
         </p:nvSpPr>
@@ -5383,7 +7371,7 @@
       </p:sp>
       <p:sp>
         <p:nvSpPr>
-          <p:cNvPr id="237069869" name=""/>
+          <p:cNvPr id="440500678" name=""/>
           <p:cNvSpPr/>
           <p:nvPr/>
         </p:nvSpPr>
@@ -5422,7 +7410,7 @@
       </p:sp>
       <p:sp>
         <p:nvSpPr>
-          <p:cNvPr id="1144294233" name=""/>
+          <p:cNvPr id="1773437799" name=""/>
           <p:cNvSpPr/>
           <p:nvPr/>
         </p:nvSpPr>
@@ -5487,7 +7475,7 @@
       </p:sp>
       <p:sp>
         <p:nvSpPr>
-          <p:cNvPr id="2048009457" name=""/>
+          <p:cNvPr id="1315582008" name=""/>
           <p:cNvSpPr txBox="1"/>
           <p:nvPr/>
         </p:nvSpPr>
@@ -5554,7 +7542,7 @@
       </p:sp>
       <p:sp>
         <p:nvSpPr>
-          <p:cNvPr id="1702804747" name=""/>
+          <p:cNvPr id="840518613" name=""/>
           <p:cNvSpPr txBox="1"/>
           <p:nvPr/>
         </p:nvSpPr>
@@ -5637,7 +7625,7 @@
       </p:sp>
       <p:sp>
         <p:nvSpPr>
-          <p:cNvPr id="261389760" name=""/>
+          <p:cNvPr id="215180089" name=""/>
           <p:cNvSpPr txBox="1"/>
           <p:nvPr/>
         </p:nvSpPr>
@@ -5701,14 +7689,14 @@
       </p:sp>
       <p:sp>
         <p:nvSpPr>
-          <p:cNvPr id="1005295928" name=""/>
+          <p:cNvPr id="1095761406" name=""/>
           <p:cNvSpPr/>
           <p:nvPr/>
         </p:nvSpPr>
         <p:spPr bwMode="auto">
           <a:xfrm rot="0" flipH="0" flipV="0">
             <a:off x="-283798" y="-31749"/>
-            <a:ext cx="3278763" cy="6877598"/>
+            <a:ext cx="3278763" cy="6877597"/>
           </a:xfrm>
           <a:prstGeom prst="rect">
             <a:avLst/>
@@ -5749,7 +7737,7 @@
       </p:sp>
       <p:pic>
         <p:nvPicPr>
-          <p:cNvPr id="216822203" name=""/>
+          <p:cNvPr id="549948463" name=""/>
           <p:cNvPicPr>
             <a:picLocks noChangeAspect="1"/>
           </p:cNvPicPr>
@@ -5771,7 +7759,7 @@
       </p:pic>
       <p:sp>
         <p:nvSpPr>
-          <p:cNvPr id="1952125932" name=""/>
+          <p:cNvPr id="1238760967" name=""/>
           <p:cNvSpPr txBox="1"/>
           <p:nvPr/>
         </p:nvSpPr>
@@ -5841,7 +7829,7 @@
       </p:sp>
       <p:sp>
         <p:nvSpPr>
-          <p:cNvPr id="248228221" name=""/>
+          <p:cNvPr id="273871403" name=""/>
           <p:cNvSpPr txBox="1"/>
           <p:nvPr/>
         </p:nvSpPr>
@@ -5924,14 +7912,14 @@
       </p:sp>
       <p:sp>
         <p:nvSpPr>
-          <p:cNvPr id="1782656515" name=""/>
+          <p:cNvPr id="1691013780" name=""/>
           <p:cNvSpPr txBox="1"/>
           <p:nvPr/>
         </p:nvSpPr>
         <p:spPr bwMode="auto">
           <a:xfrm rot="0" flipH="0" flipV="0">
             <a:off x="3704061" y="13563222"/>
-            <a:ext cx="8222405" cy="2019643"/>
+            <a:ext cx="8222404" cy="2019643"/>
           </a:xfrm>
           <a:prstGeom prst="rect">
             <a:avLst/>
@@ -6007,7 +7995,7 @@
       </p:sp>
       <p:pic>
         <p:nvPicPr>
-          <p:cNvPr id="486097900" name=""/>
+          <p:cNvPr id="1271898792" name=""/>
           <p:cNvPicPr>
             <a:picLocks noChangeAspect="1"/>
           </p:cNvPicPr>
@@ -6066,7 +8054,7 @@
       </p:grpSpPr>
       <p:sp>
         <p:nvSpPr>
-          <p:cNvPr id="1623635718" name=""/>
+          <p:cNvPr id="208273822" name=""/>
           <p:cNvSpPr/>
           <p:nvPr/>
         </p:nvSpPr>
@@ -6105,7 +8093,7 @@
       </p:sp>
       <p:sp>
         <p:nvSpPr>
-          <p:cNvPr id="1376103022" name=""/>
+          <p:cNvPr id="349721687" name=""/>
           <p:cNvSpPr/>
           <p:nvPr/>
         </p:nvSpPr>
@@ -6170,7 +8158,7 @@
       </p:sp>
       <p:sp>
         <p:nvSpPr>
-          <p:cNvPr id="446665651" name=""/>
+          <p:cNvPr id="1373444811" name=""/>
           <p:cNvSpPr txBox="1"/>
           <p:nvPr/>
         </p:nvSpPr>
@@ -6237,7 +8225,7 @@
       </p:sp>
       <p:sp>
         <p:nvSpPr>
-          <p:cNvPr id="1365861576" name=""/>
+          <p:cNvPr id="1328592911" name=""/>
           <p:cNvSpPr txBox="1"/>
           <p:nvPr/>
         </p:nvSpPr>
@@ -6320,7 +8308,7 @@
       </p:sp>
       <p:sp>
         <p:nvSpPr>
-          <p:cNvPr id="708028676" name=""/>
+          <p:cNvPr id="867982342" name=""/>
           <p:cNvSpPr txBox="1"/>
           <p:nvPr/>
         </p:nvSpPr>
@@ -6384,14 +8372,14 @@
       </p:sp>
       <p:sp>
         <p:nvSpPr>
-          <p:cNvPr id="1606528822" name=""/>
+          <p:cNvPr id="1071159065" name=""/>
           <p:cNvSpPr/>
           <p:nvPr/>
         </p:nvSpPr>
         <p:spPr bwMode="auto">
           <a:xfrm rot="0" flipH="0" flipV="0">
             <a:off x="-283798" y="-31749"/>
-            <a:ext cx="3278763" cy="6877598"/>
+            <a:ext cx="3278763" cy="6877597"/>
           </a:xfrm>
           <a:prstGeom prst="rect">
             <a:avLst/>
@@ -6432,7 +8420,7 @@
       </p:sp>
       <p:sp>
         <p:nvSpPr>
-          <p:cNvPr id="1924177156" name=""/>
+          <p:cNvPr id="686764845" name=""/>
           <p:cNvSpPr txBox="1"/>
           <p:nvPr/>
         </p:nvSpPr>
@@ -6502,14 +8490,14 @@
       </p:sp>
       <p:sp>
         <p:nvSpPr>
-          <p:cNvPr id="16588426" name=""/>
+          <p:cNvPr id="95920411" name=""/>
           <p:cNvSpPr txBox="1"/>
           <p:nvPr/>
         </p:nvSpPr>
         <p:spPr bwMode="auto">
           <a:xfrm rot="0" flipH="0" flipV="0">
             <a:off x="3704062" y="1657501"/>
-            <a:ext cx="8120887" cy="2019659"/>
+            <a:ext cx="8120886" cy="2019658"/>
           </a:xfrm>
           <a:prstGeom prst="rect">
             <a:avLst/>
@@ -6585,14 +8573,14 @@
       </p:sp>
       <p:sp>
         <p:nvSpPr>
-          <p:cNvPr id="1176480158" name=""/>
+          <p:cNvPr id="222582296" name=""/>
           <p:cNvSpPr txBox="1"/>
           <p:nvPr/>
         </p:nvSpPr>
         <p:spPr bwMode="auto">
           <a:xfrm rot="0" flipH="0" flipV="0">
             <a:off x="3704062" y="3978504"/>
-            <a:ext cx="8222046" cy="2019659"/>
+            <a:ext cx="8222046" cy="2019658"/>
           </a:xfrm>
           <a:prstGeom prst="rect">
             <a:avLst/>
@@ -6668,7 +8656,7 @@
       </p:sp>
       <p:pic>
         <p:nvPicPr>
-          <p:cNvPr id="1541131775" name=""/>
+          <p:cNvPr id="1643203829" name=""/>
           <p:cNvPicPr>
             <a:picLocks noChangeAspect="1"/>
           </p:cNvPicPr>
@@ -6690,7 +8678,7 @@
       </p:pic>
       <p:sp>
         <p:nvSpPr>
-          <p:cNvPr id="217377675" name=""/>
+          <p:cNvPr id="1272275148" name=""/>
           <p:cNvSpPr txBox="1"/>
           <p:nvPr/>
         </p:nvSpPr>
@@ -6804,7 +8792,7 @@
       </p:sp>
       <p:pic>
         <p:nvPicPr>
-          <p:cNvPr id="1249402964" name=""/>
+          <p:cNvPr id="2119633401" name=""/>
           <p:cNvPicPr>
             <a:picLocks noChangeAspect="1"/>
           </p:cNvPicPr>
@@ -6826,7 +8814,7 @@
       </p:pic>
       <p:pic>
         <p:nvPicPr>
-          <p:cNvPr id="1376054084" name=""/>
+          <p:cNvPr id="1803997457" name=""/>
           <p:cNvPicPr>
             <a:picLocks noChangeAspect="1"/>
           </p:cNvPicPr>
@@ -6848,7 +8836,7 @@
       </p:pic>
       <p:pic>
         <p:nvPicPr>
-          <p:cNvPr id="615581548" name=""/>
+          <p:cNvPr id="592031556" name=""/>
           <p:cNvPicPr>
             <a:picLocks noChangeAspect="1"/>
           </p:cNvPicPr>
@@ -6870,7 +8858,7 @@
       </p:pic>
       <p:pic>
         <p:nvPicPr>
-          <p:cNvPr id="287321898" name=""/>
+          <p:cNvPr id="599015527" name=""/>
           <p:cNvPicPr>
             <a:picLocks noChangeAspect="1"/>
           </p:cNvPicPr>
@@ -6892,7 +8880,7 @@
       </p:pic>
       <p:pic>
         <p:nvPicPr>
-          <p:cNvPr id="1827410160" name=""/>
+          <p:cNvPr id="402075470" name=""/>
           <p:cNvPicPr>
             <a:picLocks noChangeAspect="1"/>
           </p:cNvPicPr>
@@ -6914,7 +8902,7 @@
       </p:pic>
       <p:pic>
         <p:nvPicPr>
-          <p:cNvPr id="1678323071" name=""/>
+          <p:cNvPr id="1026159330" name=""/>
           <p:cNvPicPr>
             <a:picLocks noChangeAspect="1"/>
           </p:cNvPicPr>
@@ -6927,7 +8915,7 @@
         <p:spPr bwMode="auto">
           <a:xfrm flipH="0" flipV="0">
             <a:off x="3371166" y="10505858"/>
-            <a:ext cx="904452" cy="789562"/>
+            <a:ext cx="904451" cy="789562"/>
           </a:xfrm>
           <a:prstGeom prst="rect">
             <a:avLst/>
@@ -6973,7 +8961,7 @@
       </p:grpSpPr>
       <p:sp>
         <p:nvSpPr>
-          <p:cNvPr id="1994945781" name=""/>
+          <p:cNvPr id="1414772821" name=""/>
           <p:cNvSpPr/>
           <p:nvPr/>
         </p:nvSpPr>
@@ -7012,7 +9000,7 @@
       </p:sp>
       <p:sp>
         <p:nvSpPr>
-          <p:cNvPr id="2105099011" name=""/>
+          <p:cNvPr id="128556412" name=""/>
           <p:cNvSpPr/>
           <p:nvPr/>
         </p:nvSpPr>
@@ -7077,14 +9065,14 @@
       </p:sp>
       <p:sp>
         <p:nvSpPr>
-          <p:cNvPr id="1864086964" name=""/>
+          <p:cNvPr id="1150293376" name=""/>
           <p:cNvSpPr/>
           <p:nvPr/>
         </p:nvSpPr>
         <p:spPr bwMode="auto">
           <a:xfrm rot="0" flipH="0" flipV="0">
             <a:off x="-283798" y="-31749"/>
-            <a:ext cx="3278763" cy="6877598"/>
+            <a:ext cx="3278763" cy="6877597"/>
           </a:xfrm>
           <a:prstGeom prst="rect">
             <a:avLst/>
@@ -7125,7 +9113,7 @@
       </p:sp>
       <p:sp>
         <p:nvSpPr>
-          <p:cNvPr id="1692936796" name=""/>
+          <p:cNvPr id="1720891973" name=""/>
           <p:cNvSpPr txBox="1"/>
           <p:nvPr/>
         </p:nvSpPr>
@@ -7195,14 +9183,14 @@
       </p:sp>
       <p:sp>
         <p:nvSpPr>
-          <p:cNvPr id="65396850" name=""/>
+          <p:cNvPr id="738942735" name=""/>
           <p:cNvSpPr txBox="1"/>
           <p:nvPr/>
         </p:nvSpPr>
         <p:spPr bwMode="auto">
           <a:xfrm rot="0" flipH="0" flipV="0">
             <a:off x="3704062" y="-7200747"/>
-            <a:ext cx="8120887" cy="2019659"/>
+            <a:ext cx="8120886" cy="2019658"/>
           </a:xfrm>
           <a:prstGeom prst="rect">
             <a:avLst/>
@@ -7278,14 +9266,14 @@
       </p:sp>
       <p:sp>
         <p:nvSpPr>
-          <p:cNvPr id="2131994983" name=""/>
+          <p:cNvPr id="337349952" name=""/>
           <p:cNvSpPr txBox="1"/>
           <p:nvPr/>
         </p:nvSpPr>
         <p:spPr bwMode="auto">
           <a:xfrm rot="0" flipH="0" flipV="0">
             <a:off x="3704062" y="-3260495"/>
-            <a:ext cx="8222046" cy="2019659"/>
+            <a:ext cx="8222046" cy="2019658"/>
           </a:xfrm>
           <a:prstGeom prst="rect">
             <a:avLst/>
@@ -7361,7 +9349,7 @@
       </p:sp>
       <p:pic>
         <p:nvPicPr>
-          <p:cNvPr id="1941403830" name=""/>
+          <p:cNvPr id="1942947559" name=""/>
           <p:cNvPicPr>
             <a:picLocks noChangeAspect="1"/>
           </p:cNvPicPr>
@@ -7383,7 +9371,7 @@
       </p:pic>
       <p:pic>
         <p:nvPicPr>
-          <p:cNvPr id="1076560864" name=""/>
+          <p:cNvPr id="170633336" name=""/>
           <p:cNvPicPr>
             <a:picLocks noChangeAspect="1"/>
           </p:cNvPicPr>
@@ -7405,7 +9393,7 @@
       </p:pic>
       <p:sp>
         <p:nvSpPr>
-          <p:cNvPr id="1625662702" name=""/>
+          <p:cNvPr id="223618580" name=""/>
           <p:cNvSpPr txBox="1"/>
           <p:nvPr/>
         </p:nvSpPr>
@@ -7519,7 +9507,7 @@
       </p:sp>
       <p:pic>
         <p:nvPicPr>
-          <p:cNvPr id="336854283" name=""/>
+          <p:cNvPr id="943824861" name=""/>
           <p:cNvPicPr>
             <a:picLocks noChangeAspect="1"/>
           </p:cNvPicPr>
@@ -7541,7 +9529,7 @@
       </p:pic>
       <p:pic>
         <p:nvPicPr>
-          <p:cNvPr id="564279759" name=""/>
+          <p:cNvPr id="1421659856" name=""/>
           <p:cNvPicPr>
             <a:picLocks noChangeAspect="1"/>
           </p:cNvPicPr>
@@ -7563,7 +9551,7 @@
       </p:pic>
       <p:pic>
         <p:nvPicPr>
-          <p:cNvPr id="223504713" name=""/>
+          <p:cNvPr id="455318714" name=""/>
           <p:cNvPicPr>
             <a:picLocks noChangeAspect="1"/>
           </p:cNvPicPr>
@@ -7585,7 +9573,7 @@
       </p:pic>
       <p:pic>
         <p:nvPicPr>
-          <p:cNvPr id="1482230658" name=""/>
+          <p:cNvPr id="178665343" name=""/>
           <p:cNvPicPr>
             <a:picLocks noChangeAspect="1"/>
           </p:cNvPicPr>
@@ -7607,7 +9595,7 @@
       </p:pic>
       <p:pic>
         <p:nvPicPr>
-          <p:cNvPr id="791134348" name=""/>
+          <p:cNvPr id="1931416721" name=""/>
           <p:cNvPicPr>
             <a:picLocks noChangeAspect="1"/>
           </p:cNvPicPr>
@@ -7667,7 +9655,7 @@
       </p:grpSpPr>
       <p:sp>
         <p:nvSpPr>
-          <p:cNvPr id="255181279" name=""/>
+          <p:cNvPr id="1053160685" name=""/>
           <p:cNvSpPr/>
           <p:nvPr/>
         </p:nvSpPr>
@@ -7706,7 +9694,7 @@
       </p:sp>
       <p:sp>
         <p:nvSpPr>
-          <p:cNvPr id="748201572" name=""/>
+          <p:cNvPr id="1665758880" name=""/>
           <p:cNvSpPr/>
           <p:nvPr/>
         </p:nvSpPr>
@@ -7771,14 +9759,14 @@
       </p:sp>
       <p:sp>
         <p:nvSpPr>
-          <p:cNvPr id="301800794" name=""/>
+          <p:cNvPr id="494184108" name=""/>
           <p:cNvSpPr/>
           <p:nvPr/>
         </p:nvSpPr>
         <p:spPr bwMode="auto">
           <a:xfrm rot="0" flipH="0" flipV="0">
             <a:off x="-283798" y="-31749"/>
-            <a:ext cx="3278763" cy="6877598"/>
+            <a:ext cx="3278763" cy="6877597"/>
           </a:xfrm>
           <a:prstGeom prst="rect">
             <a:avLst/>
@@ -7819,7 +9807,7 @@
       </p:sp>
       <p:sp>
         <p:nvSpPr>
-          <p:cNvPr id="664077447" name=""/>
+          <p:cNvPr id="664642189" name=""/>
           <p:cNvSpPr txBox="1"/>
           <p:nvPr/>
         </p:nvSpPr>
@@ -7889,14 +9877,14 @@
       </p:sp>
       <p:sp>
         <p:nvSpPr>
-          <p:cNvPr id="436460847" name=""/>
+          <p:cNvPr id="944571212" name=""/>
           <p:cNvSpPr txBox="1"/>
           <p:nvPr/>
         </p:nvSpPr>
         <p:spPr bwMode="auto">
           <a:xfrm rot="0" flipH="0" flipV="0">
             <a:off x="3704062" y="-7200747"/>
-            <a:ext cx="8120887" cy="2019659"/>
+            <a:ext cx="8120886" cy="2019658"/>
           </a:xfrm>
           <a:prstGeom prst="rect">
             <a:avLst/>
@@ -7972,14 +9960,14 @@
       </p:sp>
       <p:sp>
         <p:nvSpPr>
-          <p:cNvPr id="20610837" name=""/>
+          <p:cNvPr id="1234828119" name=""/>
           <p:cNvSpPr txBox="1"/>
           <p:nvPr/>
         </p:nvSpPr>
         <p:spPr bwMode="auto">
           <a:xfrm rot="0" flipH="0" flipV="0">
             <a:off x="3704062" y="-3260495"/>
-            <a:ext cx="8222046" cy="2019659"/>
+            <a:ext cx="8222046" cy="2019658"/>
           </a:xfrm>
           <a:prstGeom prst="rect">
             <a:avLst/>
@@ -8055,7 +10043,7 @@
       </p:sp>
       <p:pic>
         <p:nvPicPr>
-          <p:cNvPr id="1123061546" name=""/>
+          <p:cNvPr id="1127400307" name=""/>
           <p:cNvPicPr>
             <a:picLocks noChangeAspect="1"/>
           </p:cNvPicPr>
@@ -8077,7 +10065,7 @@
       </p:pic>
       <p:pic>
         <p:nvPicPr>
-          <p:cNvPr id="1914605704" name=""/>
+          <p:cNvPr id="747768396" name=""/>
           <p:cNvPicPr>
             <a:picLocks noChangeAspect="1"/>
           </p:cNvPicPr>
@@ -8099,7 +10087,7 @@
       </p:pic>
       <p:sp>
         <p:nvSpPr>
-          <p:cNvPr id="1750979351" name=""/>
+          <p:cNvPr id="2041054427" name=""/>
           <p:cNvSpPr txBox="1"/>
           <p:nvPr/>
         </p:nvSpPr>
@@ -8213,7 +10201,7 @@
       </p:sp>
       <p:pic>
         <p:nvPicPr>
-          <p:cNvPr id="1772817306" name=""/>
+          <p:cNvPr id="1885976905" name=""/>
           <p:cNvPicPr>
             <a:picLocks noChangeAspect="1"/>
           </p:cNvPicPr>
@@ -8235,7 +10223,7 @@
       </p:pic>
       <p:pic>
         <p:nvPicPr>
-          <p:cNvPr id="56512646" name=""/>
+          <p:cNvPr id="74021828" name=""/>
           <p:cNvPicPr>
             <a:picLocks noChangeAspect="1"/>
           </p:cNvPicPr>
@@ -8257,7 +10245,7 @@
       </p:pic>
       <p:pic>
         <p:nvPicPr>
-          <p:cNvPr id="1336257289" name=""/>
+          <p:cNvPr id="1141550645" name=""/>
           <p:cNvPicPr>
             <a:picLocks noChangeAspect="1"/>
           </p:cNvPicPr>
@@ -8279,7 +10267,7 @@
       </p:pic>
       <p:pic>
         <p:nvPicPr>
-          <p:cNvPr id="976436611" name=""/>
+          <p:cNvPr id="118452560" name=""/>
           <p:cNvPicPr>
             <a:picLocks noChangeAspect="1"/>
           </p:cNvPicPr>
@@ -8301,7 +10289,7 @@
       </p:pic>
       <p:pic>
         <p:nvPicPr>
-          <p:cNvPr id="770328353" name=""/>
+          <p:cNvPr id="700783661" name=""/>
           <p:cNvPicPr>
             <a:picLocks noChangeAspect="1"/>
           </p:cNvPicPr>
@@ -8323,7 +10311,7 @@
       </p:pic>
       <p:sp>
         <p:nvSpPr>
-          <p:cNvPr id="251379850" name=""/>
+          <p:cNvPr id="1939738252" name=""/>
           <p:cNvSpPr txBox="1"/>
           <p:nvPr/>
         </p:nvSpPr>
@@ -8387,7 +10375,7 @@
       </p:sp>
       <p:sp>
         <p:nvSpPr>
-          <p:cNvPr id="5567533" name=""/>
+          <p:cNvPr id="423404568" name=""/>
           <p:cNvSpPr txBox="1"/>
           <p:nvPr/>
         </p:nvSpPr>
@@ -8451,7 +10439,7 @@
       </p:sp>
       <p:sp>
         <p:nvSpPr>
-          <p:cNvPr id="1354716765" name=""/>
+          <p:cNvPr id="779262151" name=""/>
           <p:cNvSpPr txBox="1"/>
           <p:nvPr/>
         </p:nvSpPr>
@@ -8515,7 +10503,7 @@
       </p:sp>
       <p:sp>
         <p:nvSpPr>
-          <p:cNvPr id="1131665659" name=""/>
+          <p:cNvPr id="1922550334" name=""/>
           <p:cNvSpPr txBox="1"/>
           <p:nvPr/>
         </p:nvSpPr>
@@ -8579,7 +10567,7 @@
       </p:sp>
       <p:sp>
         <p:nvSpPr>
-          <p:cNvPr id="855011832" name=""/>
+          <p:cNvPr id="807227219" name=""/>
           <p:cNvSpPr txBox="1"/>
           <p:nvPr/>
         </p:nvSpPr>
@@ -8691,7 +10679,7 @@
                                           </p:stCondLst>
                                         </p:cTn>
                                         <p:tgtEl>
-                                          <p:spTgt spid="251379850"/>
+                                          <p:spTgt spid="1939738252"/>
                                         </p:tgtEl>
                                         <p:attrNameLst>
                                           <p:attrName>style.visibility</p:attrName>
@@ -8705,7 +10693,7 @@
                                       <p:cBhvr>
                                         <p:cTn id="18" dur="500"/>
                                         <p:tgtEl>
-                                          <p:spTgt spid="251379850"/>
+                                          <p:spTgt spid="1939738252"/>
                                         </p:tgtEl>
                                       </p:cBhvr>
                                     </p:animEffect>
@@ -8726,7 +10714,7 @@
                                           </p:stCondLst>
                                         </p:cTn>
                                         <p:tgtEl>
-                                          <p:spTgt spid="5567533"/>
+                                          <p:spTgt spid="423404568"/>
                                         </p:tgtEl>
                                         <p:attrNameLst>
                                           <p:attrName>style.visibility</p:attrName>
@@ -8740,7 +10728,7 @@
                                       <p:cBhvr>
                                         <p:cTn id="15" dur="500"/>
                                         <p:tgtEl>
-                                          <p:spTgt spid="5567533"/>
+                                          <p:spTgt spid="423404568"/>
                                         </p:tgtEl>
                                       </p:cBhvr>
                                     </p:animEffect>
@@ -8761,7 +10749,7 @@
                                           </p:stCondLst>
                                         </p:cTn>
                                         <p:tgtEl>
-                                          <p:spTgt spid="1354716765"/>
+                                          <p:spTgt spid="779262151"/>
                                         </p:tgtEl>
                                         <p:attrNameLst>
                                           <p:attrName>style.visibility</p:attrName>
@@ -8775,7 +10763,7 @@
                                       <p:cBhvr>
                                         <p:cTn id="12" dur="500"/>
                                         <p:tgtEl>
-                                          <p:spTgt spid="1354716765"/>
+                                          <p:spTgt spid="779262151"/>
                                         </p:tgtEl>
                                       </p:cBhvr>
                                     </p:animEffect>
@@ -8796,7 +10784,7 @@
                                           </p:stCondLst>
                                         </p:cTn>
                                         <p:tgtEl>
-                                          <p:spTgt spid="1131665659"/>
+                                          <p:spTgt spid="1922550334"/>
                                         </p:tgtEl>
                                         <p:attrNameLst>
                                           <p:attrName>style.visibility</p:attrName>
@@ -8810,7 +10798,7 @@
                                       <p:cBhvr>
                                         <p:cTn id="9" dur="500"/>
                                         <p:tgtEl>
-                                          <p:spTgt spid="1131665659"/>
+                                          <p:spTgt spid="1922550334"/>
                                         </p:tgtEl>
                                       </p:cBhvr>
                                     </p:animEffect>
@@ -8831,7 +10819,7 @@
                                           </p:stCondLst>
                                         </p:cTn>
                                         <p:tgtEl>
-                                          <p:spTgt spid="855011832"/>
+                                          <p:spTgt spid="807227219"/>
                                         </p:tgtEl>
                                         <p:attrNameLst>
                                           <p:attrName>style.visibility</p:attrName>
@@ -8845,7 +10833,7 @@
                                       <p:cBhvr>
                                         <p:cTn id="6" dur="500"/>
                                         <p:tgtEl>
-                                          <p:spTgt spid="855011832"/>
+                                          <p:spTgt spid="807227219"/>
                                         </p:tgtEl>
                                       </p:cBhvr>
                                     </p:animEffect>
@@ -8902,7 +10890,7 @@
       </p:grpSpPr>
       <p:sp>
         <p:nvSpPr>
-          <p:cNvPr id="2038422456" name=""/>
+          <p:cNvPr id="1227871435" name=""/>
           <p:cNvSpPr/>
           <p:nvPr/>
         </p:nvSpPr>
@@ -8941,7 +10929,7 @@
       </p:sp>
       <p:sp>
         <p:nvSpPr>
-          <p:cNvPr id="696795244" name=""/>
+          <p:cNvPr id="1315002740" name=""/>
           <p:cNvSpPr/>
           <p:nvPr/>
         </p:nvSpPr>
@@ -9006,14 +10994,14 @@
       </p:sp>
       <p:sp>
         <p:nvSpPr>
-          <p:cNvPr id="430269939" name=""/>
+          <p:cNvPr id="1206714219" name=""/>
           <p:cNvSpPr/>
           <p:nvPr/>
         </p:nvSpPr>
         <p:spPr bwMode="auto">
           <a:xfrm rot="0" flipH="0" flipV="0">
             <a:off x="-283798" y="-31749"/>
-            <a:ext cx="3278763" cy="6877598"/>
+            <a:ext cx="3278763" cy="6877597"/>
           </a:xfrm>
           <a:prstGeom prst="rect">
             <a:avLst/>
@@ -9054,7 +11042,7 @@
       </p:sp>
       <p:pic>
         <p:nvPicPr>
-          <p:cNvPr id="1048172366" name=""/>
+          <p:cNvPr id="1628637551" name=""/>
           <p:cNvPicPr>
             <a:picLocks noChangeAspect="1"/>
           </p:cNvPicPr>
@@ -9076,7 +11064,7 @@
       </p:pic>
       <p:sp>
         <p:nvSpPr>
-          <p:cNvPr id="744039272" name=""/>
+          <p:cNvPr id="1593933018" name=""/>
           <p:cNvSpPr txBox="1"/>
           <p:nvPr/>
         </p:nvSpPr>
@@ -9190,7 +11178,7 @@
       </p:sp>
       <p:pic>
         <p:nvPicPr>
-          <p:cNvPr id="1753285775" name=""/>
+          <p:cNvPr id="1147464929" name=""/>
           <p:cNvPicPr>
             <a:picLocks noChangeAspect="1"/>
           </p:cNvPicPr>
@@ -9212,7 +11200,7 @@
       </p:pic>
       <p:pic>
         <p:nvPicPr>
-          <p:cNvPr id="238726568" name=""/>
+          <p:cNvPr id="655655940" name=""/>
           <p:cNvPicPr>
             <a:picLocks noChangeAspect="1"/>
           </p:cNvPicPr>
@@ -9234,7 +11222,7 @@
       </p:pic>
       <p:pic>
         <p:nvPicPr>
-          <p:cNvPr id="1807321285" name=""/>
+          <p:cNvPr id="1281143839" name=""/>
           <p:cNvPicPr>
             <a:picLocks noChangeAspect="1"/>
           </p:cNvPicPr>
@@ -9256,7 +11244,7 @@
       </p:pic>
       <p:pic>
         <p:nvPicPr>
-          <p:cNvPr id="1523843681" name=""/>
+          <p:cNvPr id="348871685" name=""/>
           <p:cNvPicPr>
             <a:picLocks noChangeAspect="1"/>
           </p:cNvPicPr>
@@ -9278,7 +11266,7 @@
       </p:pic>
       <p:pic>
         <p:nvPicPr>
-          <p:cNvPr id="2059333713" name=""/>
+          <p:cNvPr id="980072300" name=""/>
           <p:cNvPicPr>
             <a:picLocks noChangeAspect="1"/>
           </p:cNvPicPr>
@@ -9300,7 +11288,7 @@
       </p:pic>
       <p:sp>
         <p:nvSpPr>
-          <p:cNvPr id="1971413954" name=""/>
+          <p:cNvPr id="900782389" name=""/>
           <p:cNvSpPr txBox="1"/>
           <p:nvPr/>
         </p:nvSpPr>
@@ -9364,7 +11352,7 @@
       </p:sp>
       <p:sp>
         <p:nvSpPr>
-          <p:cNvPr id="380467137" name=""/>
+          <p:cNvPr id="576737789" name=""/>
           <p:cNvSpPr txBox="1"/>
           <p:nvPr/>
         </p:nvSpPr>
@@ -9428,7 +11416,7 @@
       </p:sp>
       <p:sp>
         <p:nvSpPr>
-          <p:cNvPr id="982756038" name=""/>
+          <p:cNvPr id="1652705133" name=""/>
           <p:cNvSpPr txBox="1"/>
           <p:nvPr/>
         </p:nvSpPr>
@@ -9492,7 +11480,7 @@
       </p:sp>
       <p:sp>
         <p:nvSpPr>
-          <p:cNvPr id="1926288905" name=""/>
+          <p:cNvPr id="1222571701" name=""/>
           <p:cNvSpPr txBox="1"/>
           <p:nvPr/>
         </p:nvSpPr>
@@ -9556,7 +11544,7 @@
       </p:sp>
       <p:sp>
         <p:nvSpPr>
-          <p:cNvPr id="1954449061" name=""/>
+          <p:cNvPr id="1344597126" name=""/>
           <p:cNvSpPr txBox="1"/>
           <p:nvPr/>
         </p:nvSpPr>
@@ -9620,7 +11608,7 @@
       </p:sp>
       <p:pic>
         <p:nvPicPr>
-          <p:cNvPr id="1354703445" name=""/>
+          <p:cNvPr id="759870026" name=""/>
           <p:cNvPicPr>
             <a:picLocks noChangeAspect="1"/>
           </p:cNvPicPr>
@@ -9642,7 +11630,7 @@
       </p:pic>
       <p:sp>
         <p:nvSpPr>
-          <p:cNvPr id="147015554" name=""/>
+          <p:cNvPr id="93116017" name=""/>
           <p:cNvSpPr txBox="1"/>
           <p:nvPr/>
         </p:nvSpPr>
@@ -9690,7 +11678,7 @@
       </p:sp>
       <p:sp>
         <p:nvSpPr>
-          <p:cNvPr id="1999929205" name=""/>
+          <p:cNvPr id="490852443" name=""/>
           <p:cNvSpPr txBox="1"/>
           <p:nvPr/>
         </p:nvSpPr>
@@ -9754,7 +11742,7 @@
       </p:sp>
       <p:sp>
         <p:nvSpPr>
-          <p:cNvPr id="1570843474" name=""/>
+          <p:cNvPr id="932042638" name=""/>
           <p:cNvSpPr txBox="1"/>
           <p:nvPr/>
         </p:nvSpPr>
@@ -9813,7 +11801,7 @@
       </p:sp>
       <p:sp>
         <p:nvSpPr>
-          <p:cNvPr id="262599990" name=""/>
+          <p:cNvPr id="185934284" name=""/>
           <p:cNvSpPr txBox="1"/>
           <p:nvPr/>
         </p:nvSpPr>
@@ -9902,13 +11890,13 @@
       </p:sp>
       <p:sp>
         <p:nvSpPr>
-          <p:cNvPr id="1631704259" name=""/>
+          <p:cNvPr id="1043004884" name=""/>
           <p:cNvSpPr txBox="1"/>
           <p:nvPr/>
         </p:nvSpPr>
         <p:spPr bwMode="auto">
           <a:xfrm rot="0" flipH="0" flipV="0">
-            <a:off x="3460737" y="19517013"/>
+            <a:off x="3460737" y="19517012"/>
             <a:ext cx="2404590" cy="457560"/>
           </a:xfrm>
           <a:prstGeom prst="rect">
@@ -9947,7 +11935,7 @@
       </p:sp>
       <p:sp>
         <p:nvSpPr>
-          <p:cNvPr id="1171405097" name=""/>
+          <p:cNvPr id="403759644" name=""/>
           <p:cNvSpPr/>
           <p:nvPr/>
         </p:nvSpPr>
@@ -10013,7 +12001,7 @@
       </p:sp>
       <p:sp>
         <p:nvSpPr>
-          <p:cNvPr id="424726747" name=""/>
+          <p:cNvPr id="180046856" name=""/>
           <p:cNvSpPr txBox="1"/>
           <p:nvPr/>
         </p:nvSpPr>
@@ -10102,7 +12090,7 @@
       </p:sp>
       <p:sp>
         <p:nvSpPr>
-          <p:cNvPr id="725115337" name=""/>
+          <p:cNvPr id="718948780" name=""/>
           <p:cNvSpPr txBox="1"/>
           <p:nvPr/>
         </p:nvSpPr>
@@ -10181,7 +12169,7 @@
       </p:grpSpPr>
       <p:sp>
         <p:nvSpPr>
-          <p:cNvPr id="1863596920" name=""/>
+          <p:cNvPr id="1622513735" name=""/>
           <p:cNvSpPr/>
           <p:nvPr/>
         </p:nvSpPr>
@@ -10220,7 +12208,7 @@
       </p:sp>
       <p:sp>
         <p:nvSpPr>
-          <p:cNvPr id="1001101810" name=""/>
+          <p:cNvPr id="904387141" name=""/>
           <p:cNvSpPr/>
           <p:nvPr/>
         </p:nvSpPr>
@@ -10285,14 +12273,14 @@
       </p:sp>
       <p:sp>
         <p:nvSpPr>
-          <p:cNvPr id="1560890077" name=""/>
+          <p:cNvPr id="1459435925" name=""/>
           <p:cNvSpPr/>
           <p:nvPr/>
         </p:nvSpPr>
         <p:spPr bwMode="auto">
           <a:xfrm rot="0" flipH="0" flipV="0">
             <a:off x="-283798" y="-31749"/>
-            <a:ext cx="3278763" cy="6877598"/>
+            <a:ext cx="3278763" cy="6877597"/>
           </a:xfrm>
           <a:prstGeom prst="rect">
             <a:avLst/>
@@ -10333,7 +12321,7 @@
       </p:sp>
       <p:pic>
         <p:nvPicPr>
-          <p:cNvPr id="932269152" name=""/>
+          <p:cNvPr id="108073871" name=""/>
           <p:cNvPicPr>
             <a:picLocks noChangeAspect="1"/>
           </p:cNvPicPr>
@@ -10355,7 +12343,7 @@
       </p:pic>
       <p:sp>
         <p:nvSpPr>
-          <p:cNvPr id="1658377132" name=""/>
+          <p:cNvPr id="1390638477" name=""/>
           <p:cNvSpPr txBox="1"/>
           <p:nvPr/>
         </p:nvSpPr>
@@ -10469,7 +12457,7 @@
       </p:sp>
       <p:pic>
         <p:nvPicPr>
-          <p:cNvPr id="729859624" name=""/>
+          <p:cNvPr id="2002514624" name=""/>
           <p:cNvPicPr>
             <a:picLocks noChangeAspect="1"/>
           </p:cNvPicPr>
@@ -10491,7 +12479,7 @@
       </p:pic>
       <p:pic>
         <p:nvPicPr>
-          <p:cNvPr id="1906445589" name=""/>
+          <p:cNvPr id="1301404270" name=""/>
           <p:cNvPicPr>
             <a:picLocks noChangeAspect="1"/>
           </p:cNvPicPr>
@@ -10513,7 +12501,7 @@
       </p:pic>
       <p:pic>
         <p:nvPicPr>
-          <p:cNvPr id="2022759194" name=""/>
+          <p:cNvPr id="1733011009" name=""/>
           <p:cNvPicPr>
             <a:picLocks noChangeAspect="1"/>
           </p:cNvPicPr>
@@ -10535,7 +12523,7 @@
       </p:pic>
       <p:pic>
         <p:nvPicPr>
-          <p:cNvPr id="1123613969" name=""/>
+          <p:cNvPr id="1744221452" name=""/>
           <p:cNvPicPr>
             <a:picLocks noChangeAspect="1"/>
           </p:cNvPicPr>
@@ -10557,7 +12545,7 @@
       </p:pic>
       <p:pic>
         <p:nvPicPr>
-          <p:cNvPr id="1942647243" name=""/>
+          <p:cNvPr id="1378796091" name=""/>
           <p:cNvPicPr>
             <a:picLocks noChangeAspect="1"/>
           </p:cNvPicPr>
@@ -10579,7 +12567,7 @@
       </p:pic>
       <p:sp>
         <p:nvSpPr>
-          <p:cNvPr id="589224082" name=""/>
+          <p:cNvPr id="1311491679" name=""/>
           <p:cNvSpPr txBox="1"/>
           <p:nvPr/>
         </p:nvSpPr>
@@ -10643,7 +12631,7 @@
       </p:sp>
       <p:sp>
         <p:nvSpPr>
-          <p:cNvPr id="322097129" name=""/>
+          <p:cNvPr id="652278712" name=""/>
           <p:cNvSpPr txBox="1"/>
           <p:nvPr/>
         </p:nvSpPr>
@@ -10707,7 +12695,7 @@
       </p:sp>
       <p:sp>
         <p:nvSpPr>
-          <p:cNvPr id="754317758" name=""/>
+          <p:cNvPr id="292979095" name=""/>
           <p:cNvSpPr txBox="1"/>
           <p:nvPr/>
         </p:nvSpPr>
@@ -10771,7 +12759,7 @@
       </p:sp>
       <p:sp>
         <p:nvSpPr>
-          <p:cNvPr id="1188763777" name=""/>
+          <p:cNvPr id="231769861" name=""/>
           <p:cNvSpPr txBox="1"/>
           <p:nvPr/>
         </p:nvSpPr>
@@ -10835,7 +12823,7 @@
       </p:sp>
       <p:sp>
         <p:nvSpPr>
-          <p:cNvPr id="90276687" name=""/>
+          <p:cNvPr id="1887070264" name=""/>
           <p:cNvSpPr txBox="1"/>
           <p:nvPr/>
         </p:nvSpPr>
@@ -10899,7 +12887,7 @@
       </p:sp>
       <p:pic>
         <p:nvPicPr>
-          <p:cNvPr id="1559121388" name=""/>
+          <p:cNvPr id="912291336" name=""/>
           <p:cNvPicPr>
             <a:picLocks noChangeAspect="1"/>
           </p:cNvPicPr>
@@ -10921,7 +12909,7 @@
       </p:pic>
       <p:sp>
         <p:nvSpPr>
-          <p:cNvPr id="1272429328" name=""/>
+          <p:cNvPr id="2092346186" name=""/>
           <p:cNvSpPr txBox="1"/>
           <p:nvPr/>
         </p:nvSpPr>
@@ -10969,7 +12957,7 @@
       </p:sp>
       <p:sp>
         <p:nvSpPr>
-          <p:cNvPr id="796680162" name=""/>
+          <p:cNvPr id="199993923" name=""/>
           <p:cNvSpPr txBox="1"/>
           <p:nvPr/>
         </p:nvSpPr>
@@ -11033,14 +13021,14 @@
       </p:sp>
       <p:sp>
         <p:nvSpPr>
-          <p:cNvPr id="380597852" name=""/>
+          <p:cNvPr id="1399212801" name=""/>
           <p:cNvSpPr txBox="1"/>
           <p:nvPr/>
         </p:nvSpPr>
         <p:spPr bwMode="auto">
           <a:xfrm rot="0" flipH="0" flipV="0">
             <a:off x="3450541" y="1409339"/>
-            <a:ext cx="8009935" cy="2019659"/>
+            <a:ext cx="8009935" cy="2019658"/>
           </a:xfrm>
           <a:prstGeom prst="rect">
             <a:avLst/>
@@ -11092,7 +13080,7 @@
       </p:sp>
       <p:sp>
         <p:nvSpPr>
-          <p:cNvPr id="1713825798" name=""/>
+          <p:cNvPr id="406412672" name=""/>
           <p:cNvSpPr txBox="1"/>
           <p:nvPr/>
         </p:nvSpPr>
@@ -11181,7 +13169,7 @@
       </p:sp>
       <p:sp>
         <p:nvSpPr>
-          <p:cNvPr id="2035713741" name=""/>
+          <p:cNvPr id="78358863" name=""/>
           <p:cNvSpPr txBox="1"/>
           <p:nvPr/>
         </p:nvSpPr>
@@ -11226,7 +13214,7 @@
       </p:sp>
       <p:sp>
         <p:nvSpPr>
-          <p:cNvPr id="1635774089" name=""/>
+          <p:cNvPr id="1830798164" name=""/>
           <p:cNvSpPr/>
           <p:nvPr/>
         </p:nvSpPr>
@@ -11292,7 +13280,7 @@
       </p:sp>
       <p:sp>
         <p:nvSpPr>
-          <p:cNvPr id="436571351" name=""/>
+          <p:cNvPr id="383032183" name=""/>
           <p:cNvSpPr txBox="1"/>
           <p:nvPr/>
         </p:nvSpPr>
@@ -11381,7 +13369,7 @@
       </p:sp>
       <p:sp>
         <p:nvSpPr>
-          <p:cNvPr id="428910747" name=""/>
+          <p:cNvPr id="218881298" name=""/>
           <p:cNvSpPr txBox="1"/>
           <p:nvPr/>
         </p:nvSpPr>
@@ -11426,7 +13414,7 @@
       </p:sp>
       <p:sp>
         <p:nvSpPr>
-          <p:cNvPr id="1659161470" name=""/>
+          <p:cNvPr id="1438455600" name=""/>
           <p:cNvSpPr txBox="1"/>
           <p:nvPr/>
         </p:nvSpPr>
@@ -11490,7 +13478,7 @@
       </p:sp>
       <p:sp>
         <p:nvSpPr>
-          <p:cNvPr id="1061498808" name=""/>
+          <p:cNvPr id="458313174" name=""/>
           <p:cNvSpPr/>
           <p:nvPr/>
         </p:nvSpPr>
@@ -11610,7 +13598,7 @@
       </p:sp>
       <p:pic>
         <p:nvPicPr>
-          <p:cNvPr id="1655701220" name=""/>
+          <p:cNvPr id="126716875" name=""/>
           <p:cNvPicPr>
             <a:picLocks noChangeAspect="1"/>
           </p:cNvPicPr>
@@ -11632,7 +13620,7 @@
       </p:pic>
       <p:sp>
         <p:nvSpPr>
-          <p:cNvPr id="1816108348" name=""/>
+          <p:cNvPr id="1113514569" name=""/>
           <p:cNvSpPr/>
           <p:nvPr/>
         </p:nvSpPr>
@@ -11769,7 +13757,7 @@
       </p:sp>
       <p:sp>
         <p:nvSpPr>
-          <p:cNvPr id="1017136037" name=""/>
+          <p:cNvPr id="312081624" name=""/>
           <p:cNvSpPr/>
           <p:nvPr/>
         </p:nvSpPr>
@@ -11921,7 +13909,7 @@
       </p:sp>
       <p:pic>
         <p:nvPicPr>
-          <p:cNvPr id="1310699953" name=""/>
+          <p:cNvPr id="909814562" name=""/>
           <p:cNvPicPr>
             <a:picLocks noChangeAspect="1"/>
           </p:cNvPicPr>
@@ -11943,7 +13931,7 @@
       </p:pic>
       <p:pic>
         <p:nvPicPr>
-          <p:cNvPr id="711283232" name=""/>
+          <p:cNvPr id="1094371488" name=""/>
           <p:cNvPicPr>
             <a:picLocks noChangeAspect="1"/>
           </p:cNvPicPr>
@@ -12003,7 +13991,7 @@
       </p:grpSpPr>
       <p:sp>
         <p:nvSpPr>
-          <p:cNvPr id="2135756094" name=""/>
+          <p:cNvPr id="2015643624" name=""/>
           <p:cNvSpPr/>
           <p:nvPr/>
         </p:nvSpPr>
@@ -12042,7 +14030,7 @@
       </p:sp>
       <p:sp>
         <p:nvSpPr>
-          <p:cNvPr id="1140825841" name=""/>
+          <p:cNvPr id="1314928682" name=""/>
           <p:cNvSpPr/>
           <p:nvPr/>
         </p:nvSpPr>
@@ -12107,14 +14095,14 @@
       </p:sp>
       <p:sp>
         <p:nvSpPr>
-          <p:cNvPr id="1987967187" name=""/>
+          <p:cNvPr id="202251993" name=""/>
           <p:cNvSpPr/>
           <p:nvPr/>
         </p:nvSpPr>
         <p:spPr bwMode="auto">
           <a:xfrm rot="0" flipH="0" flipV="0">
             <a:off x="-283798" y="-31749"/>
-            <a:ext cx="3278763" cy="6877598"/>
+            <a:ext cx="3278763" cy="6877597"/>
           </a:xfrm>
           <a:prstGeom prst="rect">
             <a:avLst/>
@@ -12155,7 +14143,7 @@
       </p:sp>
       <p:pic>
         <p:nvPicPr>
-          <p:cNvPr id="1505630610" name=""/>
+          <p:cNvPr id="533722238" name=""/>
           <p:cNvPicPr>
             <a:picLocks noChangeAspect="1"/>
           </p:cNvPicPr>
@@ -12175,123 +14163,9 @@
           </a:prstGeom>
         </p:spPr>
       </p:pic>
-      <p:sp>
-        <p:nvSpPr>
-          <p:cNvPr id="1134141343" name=""/>
-          <p:cNvSpPr txBox="1"/>
-          <p:nvPr/>
-        </p:nvSpPr>
-        <p:spPr bwMode="auto">
-          <a:xfrm rot="0" flipH="0" flipV="0">
-            <a:off x="3802903" y="-26370220"/>
-            <a:ext cx="8123564" cy="1189079"/>
-          </a:xfrm>
-          <a:prstGeom prst="rect">
-            <a:avLst/>
-          </a:prstGeom>
-          <a:noFill/>
-        </p:spPr>
-        <p:txBody>
-          <a:bodyPr vertOverflow="overflow" horzOverflow="overflow" vert="horz" wrap="square" lIns="91440" tIns="45720" rIns="91440" bIns="45720" numCol="1" spcCol="0" rtlCol="0" fromWordArt="0" anchor="t" anchorCtr="0" forceAA="0" upright="0" compatLnSpc="0">
-            <a:spAutoFit/>
-          </a:bodyPr>
-          <a:p>
-            <a:pPr algn="ctr">
-              <a:defRPr/>
-            </a:pPr>
-            <a:r>
-              <a:rPr sz="3600" b="1">
-                <a:gradFill>
-                  <a:gsLst>
-                    <a:gs pos="0">
-                      <a:srgbClr val="FF944C"/>
-                    </a:gs>
-                    <a:gs pos="100000">
-                      <a:schemeClr val="accent4">
-                        <a:lumMod val="60000"/>
-                        <a:lumOff val="40000"/>
-                      </a:schemeClr>
-                    </a:gs>
-                  </a:gsLst>
-                  <a:lin ang="10800000" scaled="1"/>
-                </a:gradFill>
-                <a:latin typeface="Comfortaa"/>
-                <a:ea typeface="Comfortaa"/>
-                <a:cs typeface="Comfortaa"/>
-              </a:rPr>
-              <a:t>Macam-Macam</a:t>
-            </a:r>
-            <a:r>
-              <a:rPr sz="3600" b="1">
-                <a:gradFill>
-                  <a:gsLst>
-                    <a:gs pos="0">
-                      <a:srgbClr val="FF944C"/>
-                    </a:gs>
-                    <a:gs pos="100000">
-                      <a:schemeClr val="accent4">
-                        <a:lumMod val="60000"/>
-                        <a:lumOff val="40000"/>
-                      </a:schemeClr>
-                    </a:gs>
-                  </a:gsLst>
-                  <a:lin ang="10800000" scaled="1"/>
-                </a:gradFill>
-                <a:latin typeface="Comfortaa"/>
-                <a:ea typeface="Comfortaa"/>
-                <a:cs typeface="Comfortaa"/>
-              </a:rPr>
-              <a:t> Serangan Pada </a:t>
-            </a:r>
-            <a:r>
-              <a:rPr sz="3600" b="1">
-                <a:gradFill>
-                  <a:gsLst>
-                    <a:gs pos="0">
-                      <a:srgbClr val="FF944C"/>
-                    </a:gs>
-                    <a:gs pos="100000">
-                      <a:schemeClr val="accent4">
-                        <a:lumMod val="60000"/>
-                        <a:lumOff val="40000"/>
-                      </a:schemeClr>
-                    </a:gs>
-                  </a:gsLst>
-                  <a:lin ang="10800000" scaled="1"/>
-                </a:gradFill>
-                <a:latin typeface="Comfortaa"/>
-                <a:ea typeface="Comfortaa"/>
-                <a:cs typeface="Comfortaa"/>
-              </a:rPr>
-              <a:t>Website</a:t>
-            </a:r>
-            <a:endParaRPr sz="3600" b="1">
-              <a:gradFill>
-                <a:gsLst>
-                  <a:gs pos="0">
-                    <a:srgbClr val="FF944C"/>
-                  </a:gs>
-                  <a:gs pos="100000">
-                    <a:schemeClr val="accent4">
-                      <a:lumMod val="60000"/>
-                      <a:lumOff val="40000"/>
-                    </a:schemeClr>
-                  </a:gs>
-                </a:gsLst>
-                <a:lin ang="10800000" scaled="1"/>
-              </a:gradFill>
-              <a:highlight>
-                <a:srgbClr val="000000"/>
-              </a:highlight>
-              <a:latin typeface="Comfortaa"/>
-              <a:cs typeface="Comfortaa"/>
-            </a:endParaRPr>
-          </a:p>
-        </p:txBody>
-      </p:sp>
       <p:pic>
         <p:nvPicPr>
-          <p:cNvPr id="1948194982" name=""/>
+          <p:cNvPr id="1783852915" name=""/>
           <p:cNvPicPr>
             <a:picLocks noChangeAspect="1"/>
           </p:cNvPicPr>
@@ -12303,436 +14177,6 @@
         </p:blipFill>
         <p:spPr bwMode="auto">
           <a:xfrm flipH="0" flipV="0">
-            <a:off x="3371166" y="-20283703"/>
-            <a:ext cx="904453" cy="789563"/>
-          </a:xfrm>
-          <a:prstGeom prst="rect">
-            <a:avLst/>
-          </a:prstGeom>
-        </p:spPr>
-      </p:pic>
-      <p:pic>
-        <p:nvPicPr>
-          <p:cNvPr id="1210419243" name=""/>
-          <p:cNvPicPr>
-            <a:picLocks noChangeAspect="1"/>
-          </p:cNvPicPr>
-          <p:nvPr/>
-        </p:nvPicPr>
-        <p:blipFill rotWithShape="1">
-          <a:blip r:embed="rId5"/>
-          <a:stretch/>
-        </p:blipFill>
-        <p:spPr bwMode="auto">
-          <a:xfrm rot="0" flipH="0" flipV="0">
-            <a:off x="3490229" y="-14239395"/>
-            <a:ext cx="826873" cy="789881"/>
-          </a:xfrm>
-          <a:prstGeom prst="rect">
-            <a:avLst/>
-          </a:prstGeom>
-        </p:spPr>
-      </p:pic>
-      <p:pic>
-        <p:nvPicPr>
-          <p:cNvPr id="230248499" name=""/>
-          <p:cNvPicPr>
-            <a:picLocks noChangeAspect="1"/>
-          </p:cNvPicPr>
-          <p:nvPr/>
-        </p:nvPicPr>
-        <p:blipFill rotWithShape="1">
-          <a:blip r:embed="rId6"/>
-          <a:stretch/>
-        </p:blipFill>
-        <p:spPr bwMode="auto">
-          <a:xfrm rot="0" flipH="0" flipV="0">
-            <a:off x="3450541" y="-9093072"/>
-            <a:ext cx="941857" cy="941857"/>
-          </a:xfrm>
-          <a:prstGeom prst="rect">
-            <a:avLst/>
-          </a:prstGeom>
-        </p:spPr>
-      </p:pic>
-      <p:pic>
-        <p:nvPicPr>
-          <p:cNvPr id="370828600" name=""/>
-          <p:cNvPicPr>
-            <a:picLocks noChangeAspect="1"/>
-          </p:cNvPicPr>
-          <p:nvPr/>
-        </p:nvPicPr>
-        <p:blipFill rotWithShape="1">
-          <a:blip r:embed="rId7"/>
-          <a:stretch/>
-        </p:blipFill>
-        <p:spPr bwMode="auto">
-          <a:xfrm rot="0" flipH="0" flipV="0">
-            <a:off x="3490229" y="-5033024"/>
-            <a:ext cx="836974" cy="836974"/>
-          </a:xfrm>
-          <a:prstGeom prst="rect">
-            <a:avLst/>
-          </a:prstGeom>
-        </p:spPr>
-      </p:pic>
-      <p:pic>
-        <p:nvPicPr>
-          <p:cNvPr id="1602679286" name=""/>
-          <p:cNvPicPr>
-            <a:picLocks noChangeAspect="1"/>
-          </p:cNvPicPr>
-          <p:nvPr/>
-        </p:nvPicPr>
-        <p:blipFill rotWithShape="1">
-          <a:blip r:embed="rId8"/>
-          <a:stretch/>
-        </p:blipFill>
-        <p:spPr bwMode="auto">
-          <a:xfrm rot="0" flipH="0" flipV="0">
-            <a:off x="3490229" y="-2125609"/>
-            <a:ext cx="843876" cy="843876"/>
-          </a:xfrm>
-          <a:prstGeom prst="rect">
-            <a:avLst/>
-          </a:prstGeom>
-        </p:spPr>
-      </p:pic>
-      <p:sp>
-        <p:nvSpPr>
-          <p:cNvPr id="2066784392" name=""/>
-          <p:cNvSpPr txBox="1"/>
-          <p:nvPr/>
-        </p:nvSpPr>
-        <p:spPr bwMode="auto">
-          <a:xfrm rot="0" flipH="0" flipV="0">
-            <a:off x="4499435" y="-20180183"/>
-            <a:ext cx="8235005" cy="582523"/>
-          </a:xfrm>
-          <a:prstGeom prst="rect">
-            <a:avLst/>
-          </a:prstGeom>
-          <a:noFill/>
-        </p:spPr>
-        <p:txBody>
-          <a:bodyPr vertOverflow="overflow" horzOverflow="overflow" vert="horz" wrap="square" lIns="91440" tIns="45720" rIns="91440" bIns="45720" numCol="1" spcCol="0" rtlCol="0" fromWordArt="0" anchor="ctr" anchorCtr="0" forceAA="0" upright="0" compatLnSpc="0">
-            <a:spAutoFit/>
-          </a:bodyPr>
-          <a:p>
-            <a:pPr algn="just">
-              <a:lnSpc>
-                <a:spcPct val="114999"/>
-              </a:lnSpc>
-              <a:defRPr/>
-            </a:pPr>
-            <a:r>
-              <a:rPr sz="2800" b="1">
-                <a:gradFill>
-                  <a:gsLst>
-                    <a:gs pos="0">
-                      <a:srgbClr val="819CFA"/>
-                    </a:gs>
-                    <a:gs pos="100000">
-                      <a:srgbClr val="2F5EFD"/>
-                    </a:gs>
-                  </a:gsLst>
-                  <a:lin ang="13500000" scaled="1"/>
-                </a:gradFill>
-                <a:latin typeface="Comfortaa"/>
-                <a:ea typeface="Comfortaa"/>
-                <a:cs typeface="Comfortaa"/>
-              </a:rPr>
-              <a:t>Cross-Site Scripting (XSS)</a:t>
-            </a:r>
-            <a:endParaRPr sz="2800" b="1">
-              <a:gradFill>
-                <a:gsLst>
-                  <a:gs pos="0">
-                    <a:srgbClr val="819CFA"/>
-                  </a:gs>
-                  <a:gs pos="100000">
-                    <a:srgbClr val="2F5EFD"/>
-                  </a:gs>
-                </a:gsLst>
-                <a:lin ang="10800000" scaled="1"/>
-              </a:gradFill>
-              <a:latin typeface="Comfortaa"/>
-              <a:cs typeface="Comfortaa"/>
-            </a:endParaRPr>
-          </a:p>
-        </p:txBody>
-      </p:sp>
-      <p:sp>
-        <p:nvSpPr>
-          <p:cNvPr id="1778984438" name=""/>
-          <p:cNvSpPr txBox="1"/>
-          <p:nvPr/>
-        </p:nvSpPr>
-        <p:spPr bwMode="auto">
-          <a:xfrm rot="0" flipH="0" flipV="0">
-            <a:off x="4505555" y="-14132116"/>
-            <a:ext cx="8240765" cy="582523"/>
-          </a:xfrm>
-          <a:prstGeom prst="rect">
-            <a:avLst/>
-          </a:prstGeom>
-          <a:noFill/>
-        </p:spPr>
-        <p:txBody>
-          <a:bodyPr vertOverflow="overflow" horzOverflow="overflow" vert="horz" wrap="square" lIns="91440" tIns="45720" rIns="91440" bIns="45720" numCol="1" spcCol="0" rtlCol="0" fromWordArt="0" anchor="ctr" anchorCtr="0" forceAA="0" upright="0" compatLnSpc="0">
-            <a:spAutoFit/>
-          </a:bodyPr>
-          <a:p>
-            <a:pPr algn="just">
-              <a:lnSpc>
-                <a:spcPct val="114999"/>
-              </a:lnSpc>
-              <a:defRPr/>
-            </a:pPr>
-            <a:r>
-              <a:rPr sz="2800" b="1">
-                <a:gradFill>
-                  <a:gsLst>
-                    <a:gs pos="0">
-                      <a:srgbClr val="00B0F0"/>
-                    </a:gs>
-                    <a:gs pos="100000">
-                      <a:srgbClr val="00F0E0"/>
-                    </a:gs>
-                  </a:gsLst>
-                  <a:lin ang="13500000" scaled="1"/>
-                </a:gradFill>
-                <a:latin typeface="Comfortaa"/>
-                <a:ea typeface="Comfortaa"/>
-                <a:cs typeface="Comfortaa"/>
-              </a:rPr>
-              <a:t>SQL Injection</a:t>
-            </a:r>
-            <a:endParaRPr sz="2800" b="1">
-              <a:gradFill>
-                <a:gsLst>
-                  <a:gs pos="0">
-                    <a:srgbClr val="00B0F0"/>
-                  </a:gs>
-                  <a:gs pos="100000">
-                    <a:srgbClr val="00F0E0"/>
-                  </a:gs>
-                </a:gsLst>
-                <a:lin ang="13500000" scaled="1"/>
-              </a:gradFill>
-              <a:latin typeface="Comfortaa"/>
-              <a:cs typeface="Comfortaa"/>
-            </a:endParaRPr>
-          </a:p>
-        </p:txBody>
-      </p:sp>
-      <p:sp>
-        <p:nvSpPr>
-          <p:cNvPr id="1903436562" name=""/>
-          <p:cNvSpPr txBox="1"/>
-          <p:nvPr/>
-        </p:nvSpPr>
-        <p:spPr bwMode="auto">
-          <a:xfrm rot="0" flipH="0" flipV="0">
-            <a:off x="4499435" y="-8906745"/>
-            <a:ext cx="8253005" cy="582523"/>
-          </a:xfrm>
-          <a:prstGeom prst="rect">
-            <a:avLst/>
-          </a:prstGeom>
-          <a:noFill/>
-        </p:spPr>
-        <p:txBody>
-          <a:bodyPr vertOverflow="overflow" horzOverflow="overflow" vert="horz" wrap="square" lIns="91440" tIns="45720" rIns="91440" bIns="45720" numCol="1" spcCol="0" rtlCol="0" fromWordArt="0" anchor="ctr" anchorCtr="0" forceAA="0" upright="0" compatLnSpc="0">
-            <a:spAutoFit/>
-          </a:bodyPr>
-          <a:p>
-            <a:pPr algn="just">
-              <a:lnSpc>
-                <a:spcPct val="114999"/>
-              </a:lnSpc>
-              <a:defRPr/>
-            </a:pPr>
-            <a:r>
-              <a:rPr sz="2800" b="1">
-                <a:gradFill>
-                  <a:gsLst>
-                    <a:gs pos="0">
-                      <a:srgbClr val="00B0F0"/>
-                    </a:gs>
-                    <a:gs pos="100000">
-                      <a:srgbClr val="00F0E0"/>
-                    </a:gs>
-                  </a:gsLst>
-                  <a:lin ang="13500000" scaled="1"/>
-                </a:gradFill>
-                <a:latin typeface="Comfortaa"/>
-                <a:ea typeface="Comfortaa"/>
-                <a:cs typeface="Comfortaa"/>
-              </a:rPr>
-              <a:t>Cross-Site Forgery Request (CSRF)</a:t>
-            </a:r>
-            <a:endParaRPr sz="2800" b="1">
-              <a:gradFill>
-                <a:gsLst>
-                  <a:gs pos="0">
-                    <a:srgbClr val="00B0F0"/>
-                  </a:gs>
-                  <a:gs pos="100000">
-                    <a:srgbClr val="00F0E0"/>
-                  </a:gs>
-                </a:gsLst>
-                <a:lin ang="13500000" scaled="1"/>
-              </a:gradFill>
-              <a:latin typeface="Comfortaa"/>
-              <a:cs typeface="Comfortaa"/>
-            </a:endParaRPr>
-          </a:p>
-        </p:txBody>
-      </p:sp>
-      <p:sp>
-        <p:nvSpPr>
-          <p:cNvPr id="1251423891" name=""/>
-          <p:cNvSpPr txBox="1"/>
-          <p:nvPr/>
-        </p:nvSpPr>
-        <p:spPr bwMode="auto">
-          <a:xfrm rot="0" flipH="0" flipV="0">
-            <a:off x="4505555" y="-4836510"/>
-            <a:ext cx="8259125" cy="582523"/>
-          </a:xfrm>
-          <a:prstGeom prst="rect">
-            <a:avLst/>
-          </a:prstGeom>
-          <a:noFill/>
-        </p:spPr>
-        <p:txBody>
-          <a:bodyPr vertOverflow="overflow" horzOverflow="overflow" vert="horz" wrap="square" lIns="91440" tIns="45720" rIns="91440" bIns="45720" numCol="1" spcCol="0" rtlCol="0" fromWordArt="0" anchor="ctr" anchorCtr="0" forceAA="0" upright="0" compatLnSpc="0">
-            <a:spAutoFit/>
-          </a:bodyPr>
-          <a:p>
-            <a:pPr algn="just">
-              <a:lnSpc>
-                <a:spcPct val="114999"/>
-              </a:lnSpc>
-              <a:defRPr/>
-            </a:pPr>
-            <a:r>
-              <a:rPr sz="2800" b="1">
-                <a:gradFill>
-                  <a:gsLst>
-                    <a:gs pos="0">
-                      <a:srgbClr val="FF337C"/>
-                    </a:gs>
-                    <a:gs pos="100000">
-                      <a:srgbClr val="FF0DDC"/>
-                    </a:gs>
-                  </a:gsLst>
-                  <a:lin ang="13500000" scaled="1"/>
-                </a:gradFill>
-                <a:latin typeface="Comfortaa"/>
-                <a:ea typeface="Comfortaa"/>
-                <a:cs typeface="Comfortaa"/>
-              </a:rPr>
-              <a:t>DoS / DDoS</a:t>
-            </a:r>
-            <a:endParaRPr sz="2800" b="1">
-              <a:gradFill>
-                <a:gsLst>
-                  <a:gs pos="0">
-                    <a:srgbClr val="FF337C"/>
-                  </a:gs>
-                  <a:gs pos="100000">
-                    <a:srgbClr val="FF0DDC"/>
-                  </a:gs>
-                </a:gsLst>
-                <a:lin ang="13500000" scaled="1"/>
-              </a:gradFill>
-              <a:latin typeface="Comfortaa"/>
-              <a:cs typeface="Comfortaa"/>
-            </a:endParaRPr>
-          </a:p>
-        </p:txBody>
-      </p:sp>
-      <p:sp>
-        <p:nvSpPr>
-          <p:cNvPr id="845609767" name=""/>
-          <p:cNvSpPr txBox="1"/>
-          <p:nvPr/>
-        </p:nvSpPr>
-        <p:spPr bwMode="auto">
-          <a:xfrm rot="0" flipH="0" flipV="0">
-            <a:off x="4505555" y="-1989172"/>
-            <a:ext cx="8269565" cy="582523"/>
-          </a:xfrm>
-          <a:prstGeom prst="rect">
-            <a:avLst/>
-          </a:prstGeom>
-          <a:noFill/>
-        </p:spPr>
-        <p:txBody>
-          <a:bodyPr vertOverflow="overflow" horzOverflow="overflow" vert="horz" wrap="square" lIns="91440" tIns="45720" rIns="91440" bIns="45720" numCol="1" spcCol="0" rtlCol="0" fromWordArt="0" anchor="ctr" anchorCtr="0" forceAA="0" upright="0" compatLnSpc="0">
-            <a:spAutoFit/>
-          </a:bodyPr>
-          <a:p>
-            <a:pPr algn="just">
-              <a:lnSpc>
-                <a:spcPct val="114999"/>
-              </a:lnSpc>
-              <a:defRPr/>
-            </a:pPr>
-            <a:r>
-              <a:rPr sz="2800" b="1">
-                <a:gradFill>
-                  <a:gsLst>
-                    <a:gs pos="0">
-                      <a:srgbClr val="FFABAB"/>
-                    </a:gs>
-                    <a:gs pos="100000">
-                      <a:srgbClr val="FF2424"/>
-                    </a:gs>
-                  </a:gsLst>
-                  <a:lin ang="0" scaled="1"/>
-                </a:gradFill>
-                <a:latin typeface="Comfortaa"/>
-                <a:ea typeface="Comfortaa"/>
-                <a:cs typeface="Comfortaa"/>
-              </a:rPr>
-              <a:t>Man in the Middle (MITM)</a:t>
-            </a:r>
-            <a:endParaRPr sz="2800" b="1">
-              <a:gradFill>
-                <a:gsLst>
-                  <a:gs pos="0">
-                    <a:srgbClr val="FFABAB"/>
-                  </a:gs>
-                  <a:gs pos="100000">
-                    <a:srgbClr val="FF2424"/>
-                  </a:gs>
-                </a:gsLst>
-                <a:lin ang="0" scaled="1"/>
-              </a:gradFill>
-              <a:latin typeface="Comfortaa"/>
-              <a:cs typeface="Comfortaa"/>
-            </a:endParaRPr>
-          </a:p>
-        </p:txBody>
-      </p:sp>
-      <p:pic>
-        <p:nvPicPr>
-          <p:cNvPr id="1830738320" name=""/>
-          <p:cNvPicPr>
-            <a:picLocks noChangeAspect="1"/>
-          </p:cNvPicPr>
-          <p:nvPr/>
-        </p:nvPicPr>
-        <p:blipFill rotWithShape="1">
-          <a:blip r:embed="rId9"/>
-          <a:stretch/>
-        </p:blipFill>
-        <p:spPr bwMode="auto">
-          <a:xfrm flipH="0" flipV="0">
             <a:off x="176504" y="3332388"/>
             <a:ext cx="2358155" cy="1907721"/>
           </a:xfrm>
@@ -12743,7 +14187,7 @@
       </p:pic>
       <p:sp>
         <p:nvSpPr>
-          <p:cNvPr id="1278322862" name=""/>
+          <p:cNvPr id="27630807" name=""/>
           <p:cNvSpPr txBox="1"/>
           <p:nvPr/>
         </p:nvSpPr>
@@ -12791,7 +14235,7 @@
       </p:sp>
       <p:sp>
         <p:nvSpPr>
-          <p:cNvPr id="1654697025" name=""/>
+          <p:cNvPr id="172760529" name=""/>
           <p:cNvSpPr txBox="1"/>
           <p:nvPr/>
         </p:nvSpPr>
@@ -12855,14 +14299,14 @@
       </p:sp>
       <p:sp>
         <p:nvSpPr>
-          <p:cNvPr id="1810933500" name=""/>
+          <p:cNvPr id="414547080" name=""/>
           <p:cNvSpPr txBox="1"/>
           <p:nvPr/>
         </p:nvSpPr>
         <p:spPr bwMode="auto">
           <a:xfrm rot="0" flipH="0" flipV="0">
             <a:off x="3450541" y="-8687159"/>
-            <a:ext cx="8009935" cy="2019659"/>
+            <a:ext cx="8009935" cy="2019658"/>
           </a:xfrm>
           <a:prstGeom prst="rect">
             <a:avLst/>
@@ -12914,7 +14358,7 @@
       </p:sp>
       <p:sp>
         <p:nvSpPr>
-          <p:cNvPr id="663313228" name=""/>
+          <p:cNvPr id="565690708" name=""/>
           <p:cNvSpPr txBox="1"/>
           <p:nvPr/>
         </p:nvSpPr>
@@ -13003,7 +14447,7 @@
       </p:sp>
       <p:sp>
         <p:nvSpPr>
-          <p:cNvPr id="1913302618" name=""/>
+          <p:cNvPr id="1855845519" name=""/>
           <p:cNvSpPr txBox="1"/>
           <p:nvPr/>
         </p:nvSpPr>
@@ -13048,13 +14492,13 @@
       </p:sp>
       <p:sp>
         <p:nvSpPr>
-          <p:cNvPr id="351672831" name=""/>
+          <p:cNvPr id="1243231478" name=""/>
           <p:cNvSpPr/>
           <p:nvPr/>
         </p:nvSpPr>
         <p:spPr bwMode="auto">
           <a:xfrm rot="0" flipH="0" flipV="0">
-            <a:off x="5514774" y="-4012549"/>
+            <a:off x="5514774" y="-4012548"/>
             <a:ext cx="3528551" cy="380998"/>
           </a:xfrm>
           <a:prstGeom prst="flowChartAlternateProcess">
@@ -13114,7 +14558,7 @@
       </p:sp>
       <p:sp>
         <p:nvSpPr>
-          <p:cNvPr id="370519320" name=""/>
+          <p:cNvPr id="1385703577" name=""/>
           <p:cNvSpPr txBox="1"/>
           <p:nvPr/>
         </p:nvSpPr>
@@ -13203,7 +14647,7 @@
       </p:sp>
       <p:sp>
         <p:nvSpPr>
-          <p:cNvPr id="196424665" name=""/>
+          <p:cNvPr id="279072245" name=""/>
           <p:cNvSpPr txBox="1"/>
           <p:nvPr/>
         </p:nvSpPr>
@@ -13248,7 +14692,7 @@
       </p:sp>
       <p:sp>
         <p:nvSpPr>
-          <p:cNvPr id="1587058448" name=""/>
+          <p:cNvPr id="1018330215" name=""/>
           <p:cNvSpPr txBox="1"/>
           <p:nvPr/>
         </p:nvSpPr>
@@ -13312,7 +14756,7 @@
       </p:sp>
       <p:sp>
         <p:nvSpPr>
-          <p:cNvPr id="591552645" name=""/>
+          <p:cNvPr id="1861703623" name=""/>
           <p:cNvSpPr/>
           <p:nvPr/>
         </p:nvSpPr>
@@ -13432,14 +14876,14 @@
       </p:sp>
       <p:pic>
         <p:nvPicPr>
-          <p:cNvPr id="688022170" name=""/>
+          <p:cNvPr id="73548260" name=""/>
           <p:cNvPicPr>
             <a:picLocks noChangeAspect="1"/>
           </p:cNvPicPr>
           <p:nvPr/>
         </p:nvPicPr>
         <p:blipFill rotWithShape="1">
-          <a:blip r:embed="rId10"/>
+          <a:blip r:embed="rId5"/>
           <a:stretch/>
         </p:blipFill>
         <p:spPr bwMode="auto">
@@ -13454,7 +14898,7 @@
       </p:pic>
       <p:sp>
         <p:nvSpPr>
-          <p:cNvPr id="1030521087" name=""/>
+          <p:cNvPr id="558619635" name=""/>
           <p:cNvSpPr/>
           <p:nvPr/>
         </p:nvSpPr>
@@ -13591,7 +15035,7 @@
       </p:sp>
       <p:sp>
         <p:nvSpPr>
-          <p:cNvPr id="24349362" name=""/>
+          <p:cNvPr id="1963796910" name=""/>
           <p:cNvSpPr/>
           <p:nvPr/>
         </p:nvSpPr>
@@ -13743,14 +15187,14 @@
       </p:sp>
       <p:pic>
         <p:nvPicPr>
-          <p:cNvPr id="1461393781" name=""/>
+          <p:cNvPr id="1873802464" name=""/>
           <p:cNvPicPr>
             <a:picLocks noChangeAspect="1"/>
           </p:cNvPicPr>
           <p:nvPr/>
         </p:nvPicPr>
         <p:blipFill rotWithShape="1">
-          <a:blip r:embed="rId11"/>
+          <a:blip r:embed="rId6"/>
           <a:stretch/>
         </p:blipFill>
         <p:spPr bwMode="auto">
@@ -13765,20 +15209,1551 @@
       </p:pic>
       <p:pic>
         <p:nvPicPr>
-          <p:cNvPr id="629493429" name=""/>
+          <p:cNvPr id="9185850" name=""/>
           <p:cNvPicPr>
             <a:picLocks noChangeAspect="1"/>
           </p:cNvPicPr>
           <p:nvPr/>
         </p:nvPicPr>
         <p:blipFill rotWithShape="1">
-          <a:blip r:embed="rId12"/>
+          <a:blip r:embed="rId7"/>
           <a:stretch/>
         </p:blipFill>
         <p:spPr bwMode="auto">
           <a:xfrm flipH="0" flipV="0">
             <a:off x="6843507" y="5717725"/>
             <a:ext cx="1477586" cy="831142"/>
+          </a:xfrm>
+          <a:prstGeom prst="rect">
+            <a:avLst/>
+          </a:prstGeom>
+        </p:spPr>
+      </p:pic>
+      <p:sp>
+        <p:nvSpPr>
+          <p:cNvPr id="1808707108" name=""/>
+          <p:cNvSpPr txBox="1"/>
+          <p:nvPr/>
+        </p:nvSpPr>
+        <p:spPr bwMode="auto">
+          <a:xfrm rot="0" flipH="0" flipV="0">
+            <a:off x="3371166" y="7418970"/>
+            <a:ext cx="8246881" cy="722730"/>
+          </a:xfrm>
+          <a:prstGeom prst="rect">
+            <a:avLst/>
+          </a:prstGeom>
+          <a:noFill/>
+        </p:spPr>
+        <p:txBody>
+          <a:bodyPr vertOverflow="overflow" horzOverflow="overflow" vert="horz" wrap="square" lIns="91440" tIns="45720" rIns="91440" bIns="45720" numCol="1" spcCol="0" rtlCol="0" fromWordArt="0" anchor="ctr" anchorCtr="0" forceAA="0" upright="0" compatLnSpc="0">
+            <a:spAutoFit/>
+          </a:bodyPr>
+          <a:p>
+            <a:pPr algn="ctr">
+              <a:lnSpc>
+                <a:spcPct val="114999"/>
+              </a:lnSpc>
+              <a:defRPr/>
+            </a:pPr>
+            <a:r>
+              <a:rPr sz="3600" b="1">
+                <a:gradFill>
+                  <a:gsLst>
+                    <a:gs pos="0">
+                      <a:srgbClr val="819CFA"/>
+                    </a:gs>
+                    <a:gs pos="100000">
+                      <a:srgbClr val="2F5EFD"/>
+                    </a:gs>
+                  </a:gsLst>
+                  <a:lin ang="13500000" scaled="1"/>
+                </a:gradFill>
+                <a:latin typeface="Comfortaa"/>
+                <a:ea typeface="Comfortaa"/>
+                <a:cs typeface="Comfortaa"/>
+              </a:rPr>
+              <a:t>Contoh Serangan XSS</a:t>
+            </a:r>
+            <a:endParaRPr sz="3600" b="1">
+              <a:gradFill>
+                <a:gsLst>
+                  <a:gs pos="0">
+                    <a:srgbClr val="819CFA"/>
+                  </a:gs>
+                  <a:gs pos="100000">
+                    <a:srgbClr val="2F5EFD"/>
+                  </a:gs>
+                </a:gsLst>
+                <a:lin ang="10800000" scaled="1"/>
+              </a:gradFill>
+              <a:latin typeface="Comfortaa"/>
+              <a:cs typeface="Comfortaa"/>
+            </a:endParaRPr>
+          </a:p>
+        </p:txBody>
+      </p:sp>
+      <p:sp>
+        <p:nvSpPr>
+          <p:cNvPr id="1129603798" name=""/>
+          <p:cNvSpPr txBox="1"/>
+          <p:nvPr/>
+        </p:nvSpPr>
+        <p:spPr bwMode="auto">
+          <a:xfrm rot="0" flipH="0" flipV="0">
+            <a:off x="3648106" y="10564461"/>
+            <a:ext cx="7541755" cy="2194901"/>
+          </a:xfrm>
+          <a:prstGeom prst="rect">
+            <a:avLst/>
+          </a:prstGeom>
+          <a:noFill/>
+        </p:spPr>
+        <p:txBody>
+          <a:bodyPr vertOverflow="overflow" horzOverflow="overflow" vert="horz" wrap="square" lIns="91440" tIns="45720" rIns="91440" bIns="45720" numCol="1" spcCol="0" rtlCol="0" fromWordArt="0" anchor="t" anchorCtr="0" forceAA="0" upright="0" compatLnSpc="0">
+            <a:spAutoFit/>
+          </a:bodyPr>
+          <a:p>
+            <a:pPr algn="just">
+              <a:lnSpc>
+                <a:spcPct val="114999"/>
+              </a:lnSpc>
+              <a:defRPr/>
+            </a:pPr>
+            <a:r>
+              <a:rPr sz="2400" b="1">
+                <a:solidFill>
+                  <a:schemeClr val="bg1"/>
+                </a:solidFill>
+                <a:latin typeface="Comfortaa"/>
+                <a:ea typeface="Comfortaa"/>
+                <a:cs typeface="Comfortaa"/>
+              </a:rPr>
+              <a:t>Pada Tahun 2019, Seorang Penelity Cybersecurity Bernama Gel Weizman Menemukan Kerentanan XSS Pada Whatsapp Web Yang Mampu Menyebabkan Serangan XSS Terus Menurus Melalui Open Redirect.</a:t>
+            </a:r>
+            <a:endParaRPr sz="2400" b="1">
+              <a:solidFill>
+                <a:schemeClr val="bg1"/>
+              </a:solidFill>
+              <a:latin typeface="Comfortaa"/>
+              <a:cs typeface="Comfortaa"/>
+            </a:endParaRPr>
+          </a:p>
+        </p:txBody>
+      </p:sp>
+      <p:sp>
+        <p:nvSpPr>
+          <p:cNvPr id="1338079434" name=""/>
+          <p:cNvSpPr txBox="1"/>
+          <p:nvPr/>
+        </p:nvSpPr>
+        <p:spPr bwMode="auto">
+          <a:xfrm rot="0" flipH="0" flipV="0">
+            <a:off x="3648106" y="19117182"/>
+            <a:ext cx="7541168" cy="2194901"/>
+          </a:xfrm>
+          <a:prstGeom prst="rect">
+            <a:avLst/>
+          </a:prstGeom>
+          <a:noFill/>
+        </p:spPr>
+        <p:txBody>
+          <a:bodyPr vertOverflow="overflow" horzOverflow="overflow" vert="horz" wrap="square" lIns="91440" tIns="45720" rIns="91440" bIns="45720" numCol="1" spcCol="0" rtlCol="0" fromWordArt="0" anchor="t" anchorCtr="0" forceAA="0" upright="0" compatLnSpc="0">
+            <a:spAutoFit/>
+          </a:bodyPr>
+          <a:p>
+            <a:pPr algn="just">
+              <a:lnSpc>
+                <a:spcPct val="114999"/>
+              </a:lnSpc>
+              <a:defRPr/>
+            </a:pPr>
+            <a:r>
+              <a:rPr sz="2400" b="1">
+                <a:solidFill>
+                  <a:schemeClr val="bg1"/>
+                </a:solidFill>
+                <a:latin typeface="Comfortaa"/>
+                <a:ea typeface="Comfortaa"/>
+                <a:cs typeface="Comfortaa"/>
+              </a:rPr>
+              <a:t>Kerentanan Ini Disebabkan Oleh Konfigurasi File Content Security Policy (CSP)</a:t>
+            </a:r>
+            <a:r>
+              <a:rPr sz="2400" b="1">
+                <a:solidFill>
+                  <a:schemeClr val="bg1"/>
+                </a:solidFill>
+                <a:latin typeface="Comfortaa"/>
+                <a:ea typeface="Comfortaa"/>
+                <a:cs typeface="Comfortaa"/>
+              </a:rPr>
+              <a:t> Yang Tidak Benar</a:t>
+            </a:r>
+            <a:r>
+              <a:rPr sz="2400" b="1">
+                <a:solidFill>
+                  <a:schemeClr val="bg1"/>
+                </a:solidFill>
+                <a:latin typeface="Comfortaa"/>
+                <a:ea typeface="Comfortaa"/>
+                <a:cs typeface="Comfortaa"/>
+              </a:rPr>
+              <a:t> Yang Memungkinkan Penyerang Menyisipkan Malicious Code Pada Server Whatsapp</a:t>
+            </a:r>
+            <a:endParaRPr sz="2400" b="1">
+              <a:solidFill>
+                <a:schemeClr val="bg1"/>
+              </a:solidFill>
+              <a:latin typeface="Comfortaa"/>
+              <a:cs typeface="Comfortaa"/>
+            </a:endParaRPr>
+          </a:p>
+        </p:txBody>
+      </p:sp>
+    </p:spTree>
+  </p:cSld>
+  <p:clrMapOvr>
+    <a:masterClrMapping/>
+  </p:clrMapOvr>
+  <mc:AlternateContent xmlns:mc="http://schemas.openxmlformats.org/markup-compatibility/2006">
+    <mc:Choice xmlns:p159="http://schemas.microsoft.com/office/powerpoint/2015/09/main" xmlns:p14="http://schemas.microsoft.com/office/powerpoint/2010/main" Requires="p159">
+      <p:transition spd="slow" p14:dur="1500" advClick="1">
+        <p159:morph option="byObject"/>
+      </p:transition>
+    </mc:Choice>
+    <mc:Fallback>
+      <p:transition spd="slow" advClick="1">
+        <p:fade/>
+      </p:transition>
+    </mc:Fallback>
+  </mc:AlternateContent>
+  <p:timing/>
+</p:sld>
+</file>
+
+<file path=ppt/slides/slide9.xml><?xml version="1.0" encoding="utf-8"?>
+<p:sld xmlns:a="http://schemas.openxmlformats.org/drawingml/2006/main" xmlns:r="http://schemas.openxmlformats.org/officeDocument/2006/relationships" xmlns:p="http://schemas.openxmlformats.org/presentationml/2006/main" xmlns:m="http://schemas.openxmlformats.org/officeDocument/2006/math" xmlns:w="http://schemas.openxmlformats.org/wordprocessingml/2006/main" xmlns:mc="http://schemas.openxmlformats.org/markup-compatibility/2006" showMasterPhAnim="0" showMasterSp="1" show="1">
+  <p:cSld name="">
+    <p:spTree>
+      <p:nvGrpSpPr>
+        <p:cNvPr id="1" name=""/>
+        <p:cNvGrpSpPr/>
+        <p:nvPr/>
+      </p:nvGrpSpPr>
+      <p:grpSpPr bwMode="auto">
+        <a:xfrm>
+          <a:off x="0" y="0"/>
+          <a:ext cx="0" cy="0"/>
+          <a:chOff x="0" y="0"/>
+          <a:chExt cx="0" cy="0"/>
+        </a:xfrm>
+      </p:grpSpPr>
+      <p:sp>
+        <p:nvSpPr>
+          <p:cNvPr id="14173504" name=""/>
+          <p:cNvSpPr/>
+          <p:nvPr/>
+        </p:nvSpPr>
+        <p:spPr bwMode="auto">
+          <a:xfrm flipH="0" flipV="0">
+            <a:off x="106119" y="1488497"/>
+            <a:ext cx="173016" cy="366118"/>
+          </a:xfrm>
+        </p:spPr>
+        <p:txBody>
+          <a:bodyPr rot="0" spcFirstLastPara="0" vertOverflow="overflow" horzOverflow="overflow" vert="horz" wrap="square" lIns="91440" tIns="45720" rIns="91440" bIns="45720" numCol="1" spcCol="0" rtlCol="0" fromWordArt="0" anchor="t" anchorCtr="0" forceAA="0" upright="0" compatLnSpc="1">
+            <a:prstTxWarp prst="textNoShape"/>
+            <a:spAutoFit/>
+          </a:bodyPr>
+          <a:p>
+            <a:pPr>
+              <a:defRPr/>
+            </a:pPr>
+            <a:r>
+              <a:rPr sz="1200" b="0" i="0" u="none">
+                <a:solidFill>
+                  <a:srgbClr val="000000"/>
+                </a:solidFill>
+                <a:latin typeface="Comfortaa"/>
+                <a:ea typeface="Comfortaa"/>
+                <a:cs typeface="Comfortaa"/>
+              </a:rPr>
+              <a:t> </a:t>
+            </a:r>
+            <a:endParaRPr>
+              <a:latin typeface="Comfortaa"/>
+              <a:cs typeface="Comfortaa"/>
+            </a:endParaRPr>
+          </a:p>
+        </p:txBody>
+      </p:sp>
+      <p:sp>
+        <p:nvSpPr>
+          <p:cNvPr id="614034534" name=""/>
+          <p:cNvSpPr/>
+          <p:nvPr/>
+        </p:nvSpPr>
+        <p:spPr bwMode="auto">
+          <a:xfrm rot="0" flipH="0" flipV="0">
+            <a:off x="-283797" y="-35473"/>
+            <a:ext cx="15125697" cy="6928947"/>
+          </a:xfrm>
+          <a:prstGeom prst="homePlate">
+            <a:avLst>
+              <a:gd name="adj" fmla="val 37965"/>
+            </a:avLst>
+          </a:prstGeom>
+          <a:gradFill>
+            <a:gsLst>
+              <a:gs pos="0">
+                <a:schemeClr val="tx1"/>
+              </a:gs>
+              <a:gs pos="100000">
+                <a:schemeClr val="tx1">
+                  <a:lumMod val="90000"/>
+                  <a:lumOff val="5000"/>
+                </a:schemeClr>
+              </a:gs>
+            </a:gsLst>
+            <a:lin ang="5400000" scaled="1"/>
+          </a:gradFill>
+          <a:ln w="12700" cap="flat" cmpd="sng" algn="ctr">
+            <a:noFill/>
+            <a:prstDash val="solid"/>
+            <a:miter lim="800000"/>
+          </a:ln>
+        </p:spPr>
+        <p:style>
+          <a:lnRef idx="2">
+            <a:schemeClr val="accent1">
+              <a:shade val="50000"/>
+            </a:schemeClr>
+          </a:lnRef>
+          <a:fillRef idx="1">
+            <a:schemeClr val="accent1"/>
+          </a:fillRef>
+          <a:effectRef idx="0">
+            <a:schemeClr val="accent1"/>
+          </a:effectRef>
+          <a:fontRef idx="minor">
+            <a:schemeClr val="lt1"/>
+          </a:fontRef>
+        </p:style>
+        <p:txBody>
+          <a:bodyPr anchor="ctr"/>
+          <a:p>
+            <a:pPr algn="ctr">
+              <a:defRPr/>
+            </a:pPr>
+            <a:endParaRPr>
+              <a:latin typeface="Comfortaa"/>
+              <a:cs typeface="Comfortaa"/>
+            </a:endParaRPr>
+          </a:p>
+        </p:txBody>
+      </p:sp>
+      <p:sp>
+        <p:nvSpPr>
+          <p:cNvPr id="638363652" name=""/>
+          <p:cNvSpPr/>
+          <p:nvPr/>
+        </p:nvSpPr>
+        <p:spPr bwMode="auto">
+          <a:xfrm rot="0" flipH="0" flipV="0">
+            <a:off x="-283797" y="-31748"/>
+            <a:ext cx="3278763" cy="6877597"/>
+          </a:xfrm>
+          <a:prstGeom prst="rect">
+            <a:avLst/>
+          </a:prstGeom>
+          <a:gradFill>
+            <a:gsLst>
+              <a:gs pos="0">
+                <a:srgbClr val="FF944C"/>
+              </a:gs>
+              <a:gs pos="100000">
+                <a:srgbClr val="FFFF00"/>
+              </a:gs>
+            </a:gsLst>
+            <a:lin ang="5400000" scaled="1"/>
+          </a:gradFill>
+          <a:ln w="12700" cap="flat" cmpd="sng" algn="ctr">
+            <a:noFill/>
+            <a:prstDash val="solid"/>
+            <a:miter lim="800000"/>
+          </a:ln>
+        </p:spPr>
+        <p:style>
+          <a:lnRef idx="2">
+            <a:schemeClr val="accent1">
+              <a:shade val="50000"/>
+            </a:schemeClr>
+          </a:lnRef>
+          <a:fillRef idx="1">
+            <a:schemeClr val="accent1"/>
+          </a:fillRef>
+          <a:effectRef idx="0">
+            <a:schemeClr val="accent1"/>
+          </a:effectRef>
+          <a:fontRef idx="minor">
+            <a:schemeClr val="lt1"/>
+          </a:fontRef>
+        </p:style>
+      </p:sp>
+      <p:pic>
+        <p:nvPicPr>
+          <p:cNvPr id="787540876" name=""/>
+          <p:cNvPicPr>
+            <a:picLocks noChangeAspect="1"/>
+          </p:cNvPicPr>
+          <p:nvPr/>
+        </p:nvPicPr>
+        <p:blipFill rotWithShape="1">
+          <a:blip r:embed="rId3"/>
+          <a:stretch/>
+        </p:blipFill>
+        <p:spPr bwMode="auto">
+          <a:xfrm flipH="0" flipV="0">
+            <a:off x="263930" y="9392245"/>
+            <a:ext cx="2183301" cy="2183301"/>
+          </a:xfrm>
+          <a:prstGeom prst="rect">
+            <a:avLst/>
+          </a:prstGeom>
+        </p:spPr>
+      </p:pic>
+      <p:pic>
+        <p:nvPicPr>
+          <p:cNvPr id="961178240" name=""/>
+          <p:cNvPicPr>
+            <a:picLocks noChangeAspect="1"/>
+          </p:cNvPicPr>
+          <p:nvPr/>
+        </p:nvPicPr>
+        <p:blipFill rotWithShape="1">
+          <a:blip r:embed="rId4"/>
+          <a:stretch/>
+        </p:blipFill>
+        <p:spPr bwMode="auto">
+          <a:xfrm flipH="0" flipV="0">
+            <a:off x="176503" y="3332387"/>
+            <a:ext cx="2358154" cy="1907721"/>
+          </a:xfrm>
+          <a:prstGeom prst="rect">
+            <a:avLst/>
+          </a:prstGeom>
+        </p:spPr>
+      </p:pic>
+      <p:sp>
+        <p:nvSpPr>
+          <p:cNvPr id="1164653199" name=""/>
+          <p:cNvSpPr txBox="1"/>
+          <p:nvPr/>
+        </p:nvSpPr>
+        <p:spPr bwMode="auto">
+          <a:xfrm rot="0" flipH="0" flipV="0">
+            <a:off x="444822" y="1271332"/>
+            <a:ext cx="1821515" cy="2019642"/>
+          </a:xfrm>
+          <a:prstGeom prst="rect">
+            <a:avLst/>
+          </a:prstGeom>
+          <a:noFill/>
+        </p:spPr>
+        <p:txBody>
+          <a:bodyPr vertOverflow="overflow" horzOverflow="overflow" vert="horz" wrap="square" lIns="91440" tIns="45720" rIns="91440" bIns="45720" numCol="1" spcCol="0" rtlCol="0" fromWordArt="0" anchor="ctr" anchorCtr="0" forceAA="0" upright="0" compatLnSpc="0">
+            <a:spAutoFit/>
+          </a:bodyPr>
+          <a:p>
+            <a:pPr algn="ctr">
+              <a:lnSpc>
+                <a:spcPct val="114999"/>
+              </a:lnSpc>
+              <a:defRPr/>
+            </a:pPr>
+            <a:r>
+              <a:rPr sz="11000" b="1">
+                <a:solidFill>
+                  <a:schemeClr val="tx1"/>
+                </a:solidFill>
+                <a:latin typeface="Comfortaa"/>
+                <a:ea typeface="Comfortaa"/>
+                <a:cs typeface="Comfortaa"/>
+              </a:rPr>
+              <a:t>1.</a:t>
+            </a:r>
+            <a:endParaRPr sz="11000" b="1">
+              <a:solidFill>
+                <a:schemeClr val="tx1"/>
+              </a:solidFill>
+              <a:latin typeface="Comfortaa"/>
+              <a:cs typeface="Comfortaa"/>
+            </a:endParaRPr>
+          </a:p>
+        </p:txBody>
+      </p:sp>
+      <p:sp>
+        <p:nvSpPr>
+          <p:cNvPr id="1265249181" name=""/>
+          <p:cNvSpPr txBox="1"/>
+          <p:nvPr/>
+        </p:nvSpPr>
+        <p:spPr bwMode="auto">
+          <a:xfrm rot="0" flipH="0" flipV="0">
+            <a:off x="3371166" y="-12318013"/>
+            <a:ext cx="8238962" cy="722729"/>
+          </a:xfrm>
+          <a:prstGeom prst="rect">
+            <a:avLst/>
+          </a:prstGeom>
+          <a:noFill/>
+        </p:spPr>
+        <p:txBody>
+          <a:bodyPr vertOverflow="overflow" horzOverflow="overflow" vert="horz" wrap="square" lIns="91440" tIns="45720" rIns="91440" bIns="45720" numCol="1" spcCol="0" rtlCol="0" fromWordArt="0" anchor="ctr" anchorCtr="0" forceAA="0" upright="0" compatLnSpc="0">
+            <a:spAutoFit/>
+          </a:bodyPr>
+          <a:p>
+            <a:pPr algn="ctr">
+              <a:lnSpc>
+                <a:spcPct val="114999"/>
+              </a:lnSpc>
+              <a:defRPr/>
+            </a:pPr>
+            <a:r>
+              <a:rPr sz="3600" b="1">
+                <a:gradFill>
+                  <a:gsLst>
+                    <a:gs pos="0">
+                      <a:srgbClr val="819CFA"/>
+                    </a:gs>
+                    <a:gs pos="100000">
+                      <a:srgbClr val="2F5EFD"/>
+                    </a:gs>
+                  </a:gsLst>
+                  <a:lin ang="13500000" scaled="1"/>
+                </a:gradFill>
+                <a:latin typeface="Comfortaa"/>
+                <a:ea typeface="Comfortaa"/>
+                <a:cs typeface="Comfortaa"/>
+              </a:rPr>
+              <a:t>Tipe Cross-Site Scripting (XSS)</a:t>
+            </a:r>
+            <a:endParaRPr sz="3600" b="1">
+              <a:gradFill>
+                <a:gsLst>
+                  <a:gs pos="0">
+                    <a:srgbClr val="819CFA"/>
+                  </a:gs>
+                  <a:gs pos="100000">
+                    <a:srgbClr val="2F5EFD"/>
+                  </a:gs>
+                </a:gsLst>
+                <a:lin ang="10800000" scaled="1"/>
+              </a:gradFill>
+              <a:latin typeface="Comfortaa"/>
+              <a:cs typeface="Comfortaa"/>
+            </a:endParaRPr>
+          </a:p>
+        </p:txBody>
+      </p:sp>
+      <p:sp>
+        <p:nvSpPr>
+          <p:cNvPr id="1712399808" name=""/>
+          <p:cNvSpPr/>
+          <p:nvPr/>
+        </p:nvSpPr>
+        <p:spPr bwMode="auto">
+          <a:xfrm flipH="0" flipV="0">
+            <a:off x="3360341" y="-9415155"/>
+            <a:ext cx="2648363" cy="4242740"/>
+          </a:xfrm>
+          <a:custGeom>
+            <a:avLst/>
+            <a:gdLst/>
+            <a:ahLst/>
+            <a:cxnLst/>
+            <a:rect l="0" t="0" r="r" b="b"/>
+            <a:pathLst>
+              <a:path w="1866900" h="4242742" fill="norm" stroke="1" extrusionOk="0">
+                <a:moveTo>
+                  <a:pt x="0" y="4242742"/>
+                </a:moveTo>
+                <a:cubicBezTo>
+                  <a:pt x="0" y="4242742"/>
+                  <a:pt x="0" y="557195"/>
+                  <a:pt x="0" y="557195"/>
+                </a:cubicBezTo>
+                <a:cubicBezTo>
+                  <a:pt x="0" y="557195"/>
+                  <a:pt x="933449" y="0"/>
+                  <a:pt x="933449" y="0"/>
+                </a:cubicBezTo>
+                <a:cubicBezTo>
+                  <a:pt x="933449" y="0"/>
+                  <a:pt x="1866900" y="557195"/>
+                  <a:pt x="1866900" y="557195"/>
+                </a:cubicBezTo>
+                <a:cubicBezTo>
+                  <a:pt x="1866900" y="557195"/>
+                  <a:pt x="1866900" y="4242742"/>
+                  <a:pt x="1866900" y="4242742"/>
+                </a:cubicBezTo>
+                <a:cubicBezTo>
+                  <a:pt x="1866900" y="4242742"/>
+                  <a:pt x="933449" y="3644029"/>
+                  <a:pt x="933449" y="3644029"/>
+                </a:cubicBezTo>
+                <a:cubicBezTo>
+                  <a:pt x="933449" y="3644029"/>
+                  <a:pt x="0" y="4242742"/>
+                  <a:pt x="0" y="4242742"/>
+                </a:cubicBezTo>
+                <a:close/>
+              </a:path>
+            </a:pathLst>
+          </a:custGeom>
+          <a:gradFill>
+            <a:gsLst>
+              <a:gs pos="0">
+                <a:srgbClr val="2F5EFD"/>
+              </a:gs>
+              <a:gs pos="100000">
+                <a:srgbClr val="0DAEFF"/>
+              </a:gs>
+            </a:gsLst>
+            <a:lin ang="5400000" scaled="1"/>
+          </a:gradFill>
+          <a:ln w="12700" cap="flat" cmpd="sng" algn="ctr">
+            <a:noFill/>
+            <a:prstDash val="solid"/>
+            <a:miter lim="800000"/>
+          </a:ln>
+        </p:spPr>
+        <p:txBody>
+          <a:bodyPr anchor="ctr"/>
+          <a:p>
+            <a:pPr algn="ctr">
+              <a:lnSpc>
+                <a:spcPct val="114999"/>
+              </a:lnSpc>
+              <a:defRPr/>
+            </a:pPr>
+            <a:r>
+              <a:rPr sz="2200">
+                <a:latin typeface="Comfortaa"/>
+                <a:ea typeface="Comfortaa"/>
+                <a:cs typeface="Comfortaa"/>
+              </a:rPr>
+              <a:t>Storage XSS</a:t>
+            </a:r>
+            <a:endParaRPr>
+              <a:latin typeface="Comfortaa"/>
+              <a:cs typeface="Comfortaa"/>
+            </a:endParaRPr>
+          </a:p>
+          <a:p>
+            <a:pPr algn="ctr">
+              <a:lnSpc>
+                <a:spcPct val="114999"/>
+              </a:lnSpc>
+              <a:defRPr/>
+            </a:pPr>
+            <a:r>
+              <a:rPr lang="en-US" sz="1800" b="1" i="0" u="none" strike="noStrike" cap="none" spc="0">
+                <a:solidFill>
+                  <a:schemeClr val="bg1"/>
+                </a:solidFill>
+                <a:latin typeface="Comfortaa"/>
+                <a:ea typeface="Comfortaa"/>
+                <a:cs typeface="Comfortaa"/>
+              </a:rPr>
+              <a:t>XSS Tersimpan Pada Penyimpanan Server dan Dijalankan Ketika User Lain Mengakses Website</a:t>
+            </a:r>
+            <a:endParaRPr>
+              <a:latin typeface="Comfortaa"/>
+              <a:cs typeface="Comfortaa"/>
+            </a:endParaRPr>
+          </a:p>
+        </p:txBody>
+      </p:sp>
+      <p:pic>
+        <p:nvPicPr>
+          <p:cNvPr id="1045992014" name=""/>
+          <p:cNvPicPr>
+            <a:picLocks noChangeAspect="1"/>
+          </p:cNvPicPr>
+          <p:nvPr/>
+        </p:nvPicPr>
+        <p:blipFill rotWithShape="1">
+          <a:blip r:embed="rId5"/>
+          <a:stretch/>
+        </p:blipFill>
+        <p:spPr bwMode="auto">
+          <a:xfrm flipH="0" flipV="0">
+            <a:off x="4003024" y="-5323580"/>
+            <a:ext cx="1133476" cy="1133476"/>
+          </a:xfrm>
+          <a:prstGeom prst="rect">
+            <a:avLst/>
+          </a:prstGeom>
+        </p:spPr>
+      </p:pic>
+      <p:sp>
+        <p:nvSpPr>
+          <p:cNvPr id="1722527463" name=""/>
+          <p:cNvSpPr/>
+          <p:nvPr/>
+        </p:nvSpPr>
+        <p:spPr bwMode="auto">
+          <a:xfrm flipH="0" flipV="0">
+            <a:off x="6258117" y="-7314052"/>
+            <a:ext cx="2648363" cy="4242740"/>
+          </a:xfrm>
+          <a:custGeom>
+            <a:avLst/>
+            <a:gdLst/>
+            <a:ahLst/>
+            <a:cxnLst/>
+            <a:rect l="0" t="0" r="r" b="b"/>
+            <a:pathLst>
+              <a:path w="1866900" h="4242742" fill="norm" stroke="1" extrusionOk="0">
+                <a:moveTo>
+                  <a:pt x="0" y="4242742"/>
+                </a:moveTo>
+                <a:cubicBezTo>
+                  <a:pt x="0" y="4242742"/>
+                  <a:pt x="0" y="557195"/>
+                  <a:pt x="0" y="557195"/>
+                </a:cubicBezTo>
+                <a:cubicBezTo>
+                  <a:pt x="0" y="557195"/>
+                  <a:pt x="933449" y="0"/>
+                  <a:pt x="933449" y="0"/>
+                </a:cubicBezTo>
+                <a:cubicBezTo>
+                  <a:pt x="933449" y="0"/>
+                  <a:pt x="1866900" y="557195"/>
+                  <a:pt x="1866900" y="557195"/>
+                </a:cubicBezTo>
+                <a:cubicBezTo>
+                  <a:pt x="1866900" y="557195"/>
+                  <a:pt x="1866900" y="4242742"/>
+                  <a:pt x="1866900" y="4242742"/>
+                </a:cubicBezTo>
+                <a:cubicBezTo>
+                  <a:pt x="1866900" y="4242742"/>
+                  <a:pt x="933449" y="3644029"/>
+                  <a:pt x="933449" y="3644029"/>
+                </a:cubicBezTo>
+                <a:cubicBezTo>
+                  <a:pt x="933449" y="3644029"/>
+                  <a:pt x="0" y="4242742"/>
+                  <a:pt x="0" y="4242742"/>
+                </a:cubicBezTo>
+                <a:close/>
+              </a:path>
+            </a:pathLst>
+          </a:custGeom>
+          <a:gradFill>
+            <a:gsLst>
+              <a:gs pos="0">
+                <a:srgbClr val="2F5EFD"/>
+              </a:gs>
+              <a:gs pos="100000">
+                <a:srgbClr val="0DAEFF"/>
+              </a:gs>
+            </a:gsLst>
+            <a:lin ang="16200000" scaled="1"/>
+          </a:gradFill>
+          <a:ln w="12700" cap="flat" cmpd="sng" algn="ctr">
+            <a:noFill/>
+            <a:prstDash val="solid"/>
+            <a:miter lim="800000"/>
+          </a:ln>
+        </p:spPr>
+        <p:txBody>
+          <a:bodyPr anchor="ctr"/>
+          <a:p>
+            <a:pPr algn="ctr">
+              <a:lnSpc>
+                <a:spcPct val="114999"/>
+              </a:lnSpc>
+              <a:defRPr/>
+            </a:pPr>
+            <a:r>
+              <a:rPr sz="2200">
+                <a:solidFill>
+                  <a:schemeClr val="bg1"/>
+                </a:solidFill>
+                <a:latin typeface="Comfortaa"/>
+                <a:ea typeface="Comfortaa"/>
+                <a:cs typeface="Comfortaa"/>
+              </a:rPr>
+              <a:t>Reflected XSS</a:t>
+            </a:r>
+            <a:endParaRPr>
+              <a:solidFill>
+                <a:schemeClr val="bg1"/>
+              </a:solidFill>
+              <a:latin typeface="Comfortaa"/>
+              <a:cs typeface="Comfortaa"/>
+            </a:endParaRPr>
+          </a:p>
+          <a:p>
+            <a:pPr algn="ctr">
+              <a:lnSpc>
+                <a:spcPct val="114999"/>
+              </a:lnSpc>
+              <a:defRPr/>
+            </a:pPr>
+            <a:r>
+              <a:rPr lang="en-US" sz="1800" b="1" i="0" u="none" strike="noStrike" cap="none" spc="0">
+                <a:solidFill>
+                  <a:schemeClr val="tx1"/>
+                </a:solidFill>
+                <a:latin typeface="Comfortaa"/>
+                <a:ea typeface="Comfortaa"/>
+                <a:cs typeface="Comfortaa"/>
+              </a:rPr>
+              <a:t>XSS Tersimpan </a:t>
+            </a:r>
+            <a:r>
+              <a:rPr lang="en-US" sz="1800" b="1" i="0" u="none" strike="noStrike" cap="none" spc="0">
+                <a:solidFill>
+                  <a:schemeClr val="tx1"/>
+                </a:solidFill>
+                <a:latin typeface="Comfortaa"/>
+                <a:ea typeface="Comfortaa"/>
+                <a:cs typeface="Comfortaa"/>
+              </a:rPr>
+              <a:t>Pada Url Website Dan Akan Dijalankan  Ketika Url  Tersebut Dimuat</a:t>
+            </a:r>
+            <a:endParaRPr>
+              <a:latin typeface="Comfortaa"/>
+              <a:cs typeface="Comfortaa"/>
+            </a:endParaRPr>
+          </a:p>
+        </p:txBody>
+      </p:sp>
+      <p:sp>
+        <p:nvSpPr>
+          <p:cNvPr id="2071621289" name=""/>
+          <p:cNvSpPr/>
+          <p:nvPr/>
+        </p:nvSpPr>
+        <p:spPr bwMode="auto">
+          <a:xfrm flipH="0" flipV="0">
+            <a:off x="9155893" y="-5539787"/>
+            <a:ext cx="2648363" cy="4242740"/>
+          </a:xfrm>
+          <a:custGeom>
+            <a:avLst/>
+            <a:gdLst/>
+            <a:ahLst/>
+            <a:cxnLst/>
+            <a:rect l="0" t="0" r="r" b="b"/>
+            <a:pathLst>
+              <a:path w="1866900" h="4242742" fill="norm" stroke="1" extrusionOk="0">
+                <a:moveTo>
+                  <a:pt x="0" y="4242742"/>
+                </a:moveTo>
+                <a:cubicBezTo>
+                  <a:pt x="0" y="4242742"/>
+                  <a:pt x="0" y="557195"/>
+                  <a:pt x="0" y="557195"/>
+                </a:cubicBezTo>
+                <a:cubicBezTo>
+                  <a:pt x="0" y="557195"/>
+                  <a:pt x="933449" y="0"/>
+                  <a:pt x="933449" y="0"/>
+                </a:cubicBezTo>
+                <a:cubicBezTo>
+                  <a:pt x="933449" y="0"/>
+                  <a:pt x="1866900" y="557195"/>
+                  <a:pt x="1866900" y="557195"/>
+                </a:cubicBezTo>
+                <a:cubicBezTo>
+                  <a:pt x="1866900" y="557195"/>
+                  <a:pt x="1866900" y="4242742"/>
+                  <a:pt x="1866900" y="4242742"/>
+                </a:cubicBezTo>
+                <a:cubicBezTo>
+                  <a:pt x="1866900" y="4242742"/>
+                  <a:pt x="933449" y="3644029"/>
+                  <a:pt x="933449" y="3644029"/>
+                </a:cubicBezTo>
+                <a:cubicBezTo>
+                  <a:pt x="933449" y="3644029"/>
+                  <a:pt x="0" y="4242742"/>
+                  <a:pt x="0" y="4242742"/>
+                </a:cubicBezTo>
+                <a:close/>
+              </a:path>
+            </a:pathLst>
+          </a:custGeom>
+          <a:gradFill>
+            <a:gsLst>
+              <a:gs pos="0">
+                <a:srgbClr val="2F5EFD"/>
+              </a:gs>
+              <a:gs pos="100000">
+                <a:srgbClr val="0DAEFF"/>
+              </a:gs>
+            </a:gsLst>
+            <a:lin ang="5400000" scaled="1"/>
+          </a:gradFill>
+          <a:ln w="12700" cap="flat" cmpd="sng" algn="ctr">
+            <a:noFill/>
+            <a:prstDash val="solid"/>
+            <a:miter lim="800000"/>
+          </a:ln>
+        </p:spPr>
+        <p:txBody>
+          <a:bodyPr anchor="ctr"/>
+          <a:p>
+            <a:pPr algn="ctr">
+              <a:lnSpc>
+                <a:spcPct val="114999"/>
+              </a:lnSpc>
+              <a:defRPr/>
+            </a:pPr>
+            <a:r>
+              <a:rPr sz="2200">
+                <a:solidFill>
+                  <a:schemeClr val="bg1"/>
+                </a:solidFill>
+                <a:latin typeface="Comfortaa"/>
+                <a:ea typeface="Comfortaa"/>
+                <a:cs typeface="Comfortaa"/>
+              </a:rPr>
+              <a:t>DOM Based XSS</a:t>
+            </a:r>
+            <a:endParaRPr>
+              <a:solidFill>
+                <a:schemeClr val="bg1"/>
+              </a:solidFill>
+              <a:latin typeface="Comfortaa"/>
+              <a:cs typeface="Comfortaa"/>
+            </a:endParaRPr>
+          </a:p>
+          <a:p>
+            <a:pPr algn="ctr">
+              <a:lnSpc>
+                <a:spcPct val="114999"/>
+              </a:lnSpc>
+              <a:defRPr/>
+            </a:pPr>
+            <a:r>
+              <a:rPr lang="en-US" sz="1800" b="1" i="0" u="none" strike="noStrike" cap="none" spc="0">
+                <a:solidFill>
+                  <a:schemeClr val="tx1"/>
+                </a:solidFill>
+                <a:latin typeface="Comfortaa"/>
+                <a:ea typeface="Comfortaa"/>
+                <a:cs typeface="Comfortaa"/>
+              </a:rPr>
+              <a:t>XSS Tersimpan </a:t>
+            </a:r>
+            <a:r>
+              <a:rPr lang="en-US" sz="1800" b="1" i="0" u="none" strike="noStrike" cap="none" spc="0">
+                <a:solidFill>
+                  <a:schemeClr val="tx1"/>
+                </a:solidFill>
+                <a:latin typeface="Comfortaa"/>
+                <a:ea typeface="Comfortaa"/>
+                <a:cs typeface="Comfortaa"/>
+              </a:rPr>
+              <a:t>Pada Client Browser Sehingga Sulit Terdeteksi Oleh Server</a:t>
+            </a:r>
+            <a:endParaRPr lang="en-US" sz="1800" b="1" i="0" u="none" strike="noStrike" cap="none" spc="0">
+              <a:solidFill>
+                <a:schemeClr val="tx1"/>
+              </a:solidFill>
+              <a:latin typeface="Times New Roman"/>
+              <a:cs typeface="Times New Roman"/>
+            </a:endParaRPr>
+          </a:p>
+          <a:p>
+            <a:pPr algn="ctr">
+              <a:lnSpc>
+                <a:spcPct val="114999"/>
+              </a:lnSpc>
+              <a:defRPr/>
+            </a:pPr>
+            <a:endParaRPr>
+              <a:latin typeface="Comfortaa"/>
+              <a:cs typeface="Comfortaa"/>
+            </a:endParaRPr>
+          </a:p>
+        </p:txBody>
+      </p:sp>
+      <p:pic>
+        <p:nvPicPr>
+          <p:cNvPr id="421377771" name=""/>
+          <p:cNvPicPr>
+            <a:picLocks noChangeAspect="1"/>
+          </p:cNvPicPr>
+          <p:nvPr/>
+        </p:nvPicPr>
+        <p:blipFill rotWithShape="1">
+          <a:blip r:embed="rId6"/>
+          <a:stretch/>
+        </p:blipFill>
+        <p:spPr bwMode="auto">
+          <a:xfrm flipH="0" flipV="0">
+            <a:off x="9977253" y="-1297045"/>
+            <a:ext cx="1005643" cy="982308"/>
+          </a:xfrm>
+          <a:prstGeom prst="rect">
+            <a:avLst/>
+          </a:prstGeom>
+        </p:spPr>
+      </p:pic>
+      <p:pic>
+        <p:nvPicPr>
+          <p:cNvPr id="316048041" name=""/>
+          <p:cNvPicPr>
+            <a:picLocks noChangeAspect="1"/>
+          </p:cNvPicPr>
+          <p:nvPr/>
+        </p:nvPicPr>
+        <p:blipFill rotWithShape="1">
+          <a:blip r:embed="rId7"/>
+          <a:stretch/>
+        </p:blipFill>
+        <p:spPr bwMode="auto">
+          <a:xfrm flipH="0" flipV="0">
+            <a:off x="6843506" y="-2920142"/>
+            <a:ext cx="1477585" cy="831141"/>
+          </a:xfrm>
+          <a:prstGeom prst="rect">
+            <a:avLst/>
+          </a:prstGeom>
+        </p:spPr>
+      </p:pic>
+      <p:sp>
+        <p:nvSpPr>
+          <p:cNvPr id="1850398503" name=""/>
+          <p:cNvSpPr txBox="1"/>
+          <p:nvPr/>
+        </p:nvSpPr>
+        <p:spPr bwMode="auto">
+          <a:xfrm rot="0" flipH="0" flipV="0">
+            <a:off x="3371166" y="479148"/>
+            <a:ext cx="8246522" cy="722730"/>
+          </a:xfrm>
+          <a:prstGeom prst="rect">
+            <a:avLst/>
+          </a:prstGeom>
+          <a:noFill/>
+        </p:spPr>
+        <p:txBody>
+          <a:bodyPr vertOverflow="overflow" horzOverflow="overflow" vert="horz" wrap="square" lIns="91440" tIns="45720" rIns="91440" bIns="45720" numCol="1" spcCol="0" rtlCol="0" fromWordArt="0" anchor="ctr" anchorCtr="0" forceAA="0" upright="0" compatLnSpc="0">
+            <a:spAutoFit/>
+          </a:bodyPr>
+          <a:p>
+            <a:pPr algn="ctr">
+              <a:lnSpc>
+                <a:spcPct val="114999"/>
+              </a:lnSpc>
+              <a:defRPr/>
+            </a:pPr>
+            <a:r>
+              <a:rPr sz="3600" b="1">
+                <a:gradFill>
+                  <a:gsLst>
+                    <a:gs pos="0">
+                      <a:srgbClr val="819CFA"/>
+                    </a:gs>
+                    <a:gs pos="100000">
+                      <a:srgbClr val="2F5EFD"/>
+                    </a:gs>
+                  </a:gsLst>
+                  <a:lin ang="13500000" scaled="1"/>
+                </a:gradFill>
+                <a:latin typeface="Comfortaa"/>
+                <a:ea typeface="Comfortaa"/>
+                <a:cs typeface="Comfortaa"/>
+              </a:rPr>
+              <a:t>Contoh Serangan XSS</a:t>
+            </a:r>
+            <a:endParaRPr sz="3600" b="1">
+              <a:gradFill>
+                <a:gsLst>
+                  <a:gs pos="0">
+                    <a:srgbClr val="819CFA"/>
+                  </a:gs>
+                  <a:gs pos="100000">
+                    <a:srgbClr val="2F5EFD"/>
+                  </a:gs>
+                </a:gsLst>
+                <a:lin ang="10800000" scaled="1"/>
+              </a:gradFill>
+              <a:latin typeface="Comfortaa"/>
+              <a:cs typeface="Comfortaa"/>
+            </a:endParaRPr>
+          </a:p>
+        </p:txBody>
+      </p:sp>
+      <p:sp>
+        <p:nvSpPr>
+          <p:cNvPr id="1115640445" name=""/>
+          <p:cNvSpPr txBox="1"/>
+          <p:nvPr/>
+        </p:nvSpPr>
+        <p:spPr bwMode="auto">
+          <a:xfrm rot="0" flipH="0" flipV="0">
+            <a:off x="3648106" y="1539524"/>
+            <a:ext cx="7541396" cy="2194919"/>
+          </a:xfrm>
+          <a:prstGeom prst="rect">
+            <a:avLst/>
+          </a:prstGeom>
+          <a:noFill/>
+        </p:spPr>
+        <p:txBody>
+          <a:bodyPr vertOverflow="overflow" horzOverflow="overflow" vert="horz" wrap="square" lIns="91440" tIns="45720" rIns="91440" bIns="45720" numCol="1" spcCol="0" rtlCol="0" fromWordArt="0" anchor="t" anchorCtr="0" forceAA="0" upright="0" compatLnSpc="0">
+            <a:spAutoFit/>
+          </a:bodyPr>
+          <a:p>
+            <a:pPr algn="just">
+              <a:lnSpc>
+                <a:spcPct val="114999"/>
+              </a:lnSpc>
+              <a:defRPr/>
+            </a:pPr>
+            <a:r>
+              <a:rPr sz="2400" b="1">
+                <a:solidFill>
+                  <a:schemeClr val="bg1"/>
+                </a:solidFill>
+                <a:latin typeface="Comfortaa"/>
+                <a:ea typeface="Comfortaa"/>
+                <a:cs typeface="Comfortaa"/>
+              </a:rPr>
+              <a:t>Pada Tahun 2019, Seorang Penelity Cybersecurity Bernama Gel Weizman Menemukan Kerentanan XSS Pada Whatsapp Web Yang Mampu Menyebabkan Serangan XSS Terus Menurus Melalui Open Redirect.</a:t>
+            </a:r>
+            <a:endParaRPr sz="2400" b="1">
+              <a:solidFill>
+                <a:schemeClr val="bg1"/>
+              </a:solidFill>
+              <a:latin typeface="Comfortaa"/>
+              <a:cs typeface="Comfortaa"/>
+            </a:endParaRPr>
+          </a:p>
+        </p:txBody>
+      </p:sp>
+      <p:sp>
+        <p:nvSpPr>
+          <p:cNvPr id="220612231" name=""/>
+          <p:cNvSpPr txBox="1"/>
+          <p:nvPr/>
+        </p:nvSpPr>
+        <p:spPr bwMode="auto">
+          <a:xfrm rot="0" flipH="0" flipV="0">
+            <a:off x="3648106" y="4103402"/>
+            <a:ext cx="7540809" cy="2194919"/>
+          </a:xfrm>
+          <a:prstGeom prst="rect">
+            <a:avLst/>
+          </a:prstGeom>
+          <a:noFill/>
+        </p:spPr>
+        <p:txBody>
+          <a:bodyPr vertOverflow="overflow" horzOverflow="overflow" vert="horz" wrap="square" lIns="91440" tIns="45720" rIns="91440" bIns="45720" numCol="1" spcCol="0" rtlCol="0" fromWordArt="0" anchor="t" anchorCtr="0" forceAA="0" upright="0" compatLnSpc="0">
+            <a:spAutoFit/>
+          </a:bodyPr>
+          <a:p>
+            <a:pPr algn="just">
+              <a:lnSpc>
+                <a:spcPct val="114999"/>
+              </a:lnSpc>
+              <a:defRPr/>
+            </a:pPr>
+            <a:r>
+              <a:rPr sz="2400" b="1">
+                <a:solidFill>
+                  <a:schemeClr val="bg1"/>
+                </a:solidFill>
+                <a:latin typeface="Comfortaa"/>
+                <a:ea typeface="Comfortaa"/>
+                <a:cs typeface="Comfortaa"/>
+              </a:rPr>
+              <a:t>Kerentanan Ini Disebabkan Oleh Konfigurasi File Content Security Policy (CSP)</a:t>
+            </a:r>
+            <a:r>
+              <a:rPr sz="2400" b="1">
+                <a:solidFill>
+                  <a:schemeClr val="bg1"/>
+                </a:solidFill>
+                <a:latin typeface="Comfortaa"/>
+                <a:ea typeface="Comfortaa"/>
+                <a:cs typeface="Comfortaa"/>
+              </a:rPr>
+              <a:t> Yang Tidak Benar</a:t>
+            </a:r>
+            <a:r>
+              <a:rPr sz="2400" b="1">
+                <a:solidFill>
+                  <a:schemeClr val="bg1"/>
+                </a:solidFill>
+                <a:latin typeface="Comfortaa"/>
+                <a:ea typeface="Comfortaa"/>
+                <a:cs typeface="Comfortaa"/>
+              </a:rPr>
+              <a:t> Yang Memungkinkan Penyerang Menyisipkan Malicious Code Pada Server Whatsapp</a:t>
+            </a:r>
+            <a:endParaRPr sz="2400" b="1">
+              <a:solidFill>
+                <a:schemeClr val="bg1"/>
+              </a:solidFill>
+              <a:latin typeface="Comfortaa"/>
+              <a:cs typeface="Comfortaa"/>
+            </a:endParaRPr>
+          </a:p>
+        </p:txBody>
+      </p:sp>
+      <p:sp>
+        <p:nvSpPr>
+          <p:cNvPr id="462879374" name=""/>
+          <p:cNvSpPr txBox="1"/>
+          <p:nvPr/>
+        </p:nvSpPr>
+        <p:spPr bwMode="auto">
+          <a:xfrm rot="0" flipH="0" flipV="0">
+            <a:off x="3371166" y="7498390"/>
+            <a:ext cx="8252640" cy="722730"/>
+          </a:xfrm>
+          <a:prstGeom prst="rect">
+            <a:avLst/>
+          </a:prstGeom>
+          <a:noFill/>
+        </p:spPr>
+        <p:txBody>
+          <a:bodyPr vertOverflow="overflow" horzOverflow="overflow" vert="horz" wrap="square" lIns="91440" tIns="45720" rIns="91440" bIns="45720" numCol="1" spcCol="0" rtlCol="0" fromWordArt="0" anchor="ctr" anchorCtr="0" forceAA="0" upright="0" compatLnSpc="0">
+            <a:spAutoFit/>
+          </a:bodyPr>
+          <a:p>
+            <a:pPr algn="ctr">
+              <a:lnSpc>
+                <a:spcPct val="114999"/>
+              </a:lnSpc>
+              <a:defRPr/>
+            </a:pPr>
+            <a:r>
+              <a:rPr sz="3600" b="1">
+                <a:gradFill>
+                  <a:gsLst>
+                    <a:gs pos="0">
+                      <a:srgbClr val="819CFA"/>
+                    </a:gs>
+                    <a:gs pos="100000">
+                      <a:srgbClr val="2F5EFD"/>
+                    </a:gs>
+                  </a:gsLst>
+                  <a:lin ang="13500000" scaled="1"/>
+                </a:gradFill>
+                <a:latin typeface="Comfortaa"/>
+                <a:ea typeface="Comfortaa"/>
+                <a:cs typeface="Comfortaa"/>
+              </a:rPr>
+              <a:t>Defend Against XSS</a:t>
+            </a:r>
+            <a:endParaRPr sz="3600" b="1">
+              <a:gradFill>
+                <a:gsLst>
+                  <a:gs pos="0">
+                    <a:srgbClr val="819CFA"/>
+                  </a:gs>
+                  <a:gs pos="100000">
+                    <a:srgbClr val="2F5EFD"/>
+                  </a:gs>
+                </a:gsLst>
+                <a:lin ang="10800000" scaled="1"/>
+              </a:gradFill>
+              <a:latin typeface="Comfortaa"/>
+              <a:cs typeface="Comfortaa"/>
+            </a:endParaRPr>
+          </a:p>
+        </p:txBody>
+      </p:sp>
+      <p:pic>
+        <p:nvPicPr>
+          <p:cNvPr id="557995146" name=""/>
+          <p:cNvPicPr>
+            <a:picLocks noChangeAspect="1"/>
+          </p:cNvPicPr>
+          <p:nvPr/>
+        </p:nvPicPr>
+        <p:blipFill rotWithShape="1">
+          <a:blip r:embed="rId8"/>
+          <a:stretch/>
+        </p:blipFill>
+        <p:spPr bwMode="auto">
+          <a:xfrm flipH="0" flipV="0">
+            <a:off x="3248023" y="9804585"/>
+            <a:ext cx="1578511" cy="1383759"/>
+          </a:xfrm>
+          <a:prstGeom prst="rect">
+            <a:avLst/>
+          </a:prstGeom>
+        </p:spPr>
+      </p:pic>
+      <p:sp>
+        <p:nvSpPr>
+          <p:cNvPr id="2037276237" name=""/>
+          <p:cNvSpPr txBox="1"/>
+          <p:nvPr/>
+        </p:nvSpPr>
+        <p:spPr bwMode="auto">
+          <a:xfrm rot="0" flipH="0" flipV="0">
+            <a:off x="4945599" y="9856206"/>
+            <a:ext cx="6844965" cy="1283557"/>
+          </a:xfrm>
+          <a:prstGeom prst="rect">
+            <a:avLst/>
+          </a:prstGeom>
+          <a:noFill/>
+        </p:spPr>
+        <p:txBody>
+          <a:bodyPr vertOverflow="overflow" horzOverflow="overflow" vert="horz" wrap="square" lIns="91440" tIns="45720" rIns="91440" bIns="45720" numCol="1" spcCol="0" rtlCol="0" fromWordArt="0" anchor="t" anchorCtr="0" forceAA="0" upright="0" compatLnSpc="0">
+            <a:spAutoFit/>
+          </a:bodyPr>
+          <a:p>
+            <a:pPr algn="just">
+              <a:lnSpc>
+                <a:spcPct val="114999"/>
+              </a:lnSpc>
+              <a:defRPr/>
+            </a:pPr>
+            <a:r>
+              <a:rPr sz="2400" b="1">
+                <a:solidFill>
+                  <a:schemeClr val="bg1"/>
+                </a:solidFill>
+                <a:latin typeface="Comfortaa"/>
+                <a:ea typeface="Comfortaa"/>
+                <a:cs typeface="Comfortaa"/>
+              </a:rPr>
+              <a:t>Form Validation :</a:t>
+            </a:r>
+            <a:endParaRPr sz="2200" b="1">
+              <a:solidFill>
+                <a:schemeClr val="bg1"/>
+              </a:solidFill>
+              <a:latin typeface="Comfortaa"/>
+              <a:cs typeface="Comfortaa"/>
+            </a:endParaRPr>
+          </a:p>
+          <a:p>
+            <a:pPr algn="just">
+              <a:lnSpc>
+                <a:spcPct val="114999"/>
+              </a:lnSpc>
+              <a:defRPr/>
+            </a:pPr>
+            <a:r>
+              <a:rPr sz="2200" b="1">
+                <a:solidFill>
+                  <a:schemeClr val="bg1"/>
+                </a:solidFill>
+                <a:latin typeface="Comfortaa"/>
+                <a:ea typeface="Comfortaa"/>
+                <a:cs typeface="Comfortaa"/>
+              </a:rPr>
+              <a:t>Validasi Input Apakah Hanya Berisi Karakter Yang Ditentukan (Angka, Alphabet, dll)</a:t>
+            </a:r>
+            <a:endParaRPr sz="2200" b="1">
+              <a:solidFill>
+                <a:schemeClr val="bg1"/>
+              </a:solidFill>
+              <a:latin typeface="Comfortaa"/>
+              <a:cs typeface="Comfortaa"/>
+            </a:endParaRPr>
+          </a:p>
+        </p:txBody>
+      </p:sp>
+      <p:sp>
+        <p:nvSpPr>
+          <p:cNvPr id="1158796476" name=""/>
+          <p:cNvSpPr txBox="1"/>
+          <p:nvPr/>
+        </p:nvSpPr>
+        <p:spPr bwMode="auto">
+          <a:xfrm rot="0" flipH="0" flipV="0">
+            <a:off x="4945599" y="14777961"/>
+            <a:ext cx="6860805" cy="1283557"/>
+          </a:xfrm>
+          <a:prstGeom prst="rect">
+            <a:avLst/>
+          </a:prstGeom>
+          <a:noFill/>
+        </p:spPr>
+        <p:txBody>
+          <a:bodyPr vertOverflow="overflow" horzOverflow="overflow" vert="horz" wrap="square" lIns="91440" tIns="45720" rIns="91440" bIns="45720" numCol="1" spcCol="0" rtlCol="0" fromWordArt="0" anchor="t" anchorCtr="0" forceAA="0" upright="0" compatLnSpc="0">
+            <a:spAutoFit/>
+          </a:bodyPr>
+          <a:p>
+            <a:pPr algn="just">
+              <a:lnSpc>
+                <a:spcPct val="114999"/>
+              </a:lnSpc>
+              <a:defRPr/>
+            </a:pPr>
+            <a:r>
+              <a:rPr sz="2400" b="1">
+                <a:solidFill>
+                  <a:schemeClr val="bg1"/>
+                </a:solidFill>
+                <a:latin typeface="Comfortaa"/>
+                <a:ea typeface="Comfortaa"/>
+                <a:cs typeface="Comfortaa"/>
+              </a:rPr>
+              <a:t>Output Encryption :</a:t>
+            </a:r>
+            <a:endParaRPr sz="2200" b="1">
+              <a:solidFill>
+                <a:schemeClr val="bg1"/>
+              </a:solidFill>
+              <a:latin typeface="Comfortaa"/>
+              <a:cs typeface="Comfortaa"/>
+            </a:endParaRPr>
+          </a:p>
+          <a:p>
+            <a:pPr algn="just">
+              <a:lnSpc>
+                <a:spcPct val="114999"/>
+              </a:lnSpc>
+              <a:defRPr/>
+            </a:pPr>
+            <a:r>
+              <a:rPr lang="en-US" sz="2200" b="1" i="0" u="none" strike="noStrike" cap="none" spc="0">
+                <a:solidFill>
+                  <a:schemeClr val="bg1"/>
+                </a:solidFill>
+                <a:latin typeface="Comfortaa"/>
+                <a:ea typeface="Comfortaa"/>
+                <a:cs typeface="Comfortaa"/>
+              </a:rPr>
+              <a:t>Perubahan Bentuk Output Data Sehingga Tidak Bisa Dibaca Tanpa Key Yang Sesuai</a:t>
+            </a:r>
+            <a:endParaRPr sz="2200" b="1">
+              <a:solidFill>
+                <a:schemeClr val="bg1"/>
+              </a:solidFill>
+              <a:latin typeface="Comfortaa"/>
+              <a:cs typeface="Comfortaa"/>
+            </a:endParaRPr>
+          </a:p>
+        </p:txBody>
+      </p:sp>
+      <p:pic>
+        <p:nvPicPr>
+          <p:cNvPr id="813176413" name=""/>
+          <p:cNvPicPr>
+            <a:picLocks noChangeAspect="1"/>
+          </p:cNvPicPr>
+          <p:nvPr/>
+        </p:nvPicPr>
+        <p:blipFill rotWithShape="1">
+          <a:blip r:embed="rId9"/>
+          <a:stretch/>
+        </p:blipFill>
+        <p:spPr bwMode="auto">
+          <a:xfrm flipH="0" flipV="0">
+            <a:off x="3507923" y="14840038"/>
+            <a:ext cx="1105416" cy="1105416"/>
+          </a:xfrm>
+          <a:prstGeom prst="rect">
+            <a:avLst/>
+          </a:prstGeom>
+        </p:spPr>
+      </p:pic>
+      <p:sp>
+        <p:nvSpPr>
+          <p:cNvPr id="400731706" name=""/>
+          <p:cNvSpPr txBox="1"/>
+          <p:nvPr/>
+        </p:nvSpPr>
+        <p:spPr bwMode="auto">
+          <a:xfrm rot="0" flipH="0" flipV="0">
+            <a:off x="4945599" y="21730257"/>
+            <a:ext cx="6908070" cy="1128119"/>
+          </a:xfrm>
+          <a:prstGeom prst="rect">
+            <a:avLst/>
+          </a:prstGeom>
+          <a:noFill/>
+        </p:spPr>
+        <p:txBody>
+          <a:bodyPr vertOverflow="overflow" horzOverflow="overflow" vert="horz" wrap="square" lIns="91440" tIns="45720" rIns="91440" bIns="45720" numCol="1" spcCol="0" rtlCol="0" fromWordArt="0" anchor="t" anchorCtr="0" forceAA="0" upright="0" compatLnSpc="0">
+            <a:spAutoFit/>
+          </a:bodyPr>
+          <a:p>
+            <a:pPr algn="just">
+              <a:defRPr/>
+            </a:pPr>
+            <a:r>
+              <a:rPr sz="2400" b="1">
+                <a:solidFill>
+                  <a:schemeClr val="bg1"/>
+                </a:solidFill>
+                <a:latin typeface="Comfortaa"/>
+                <a:ea typeface="Comfortaa"/>
+                <a:cs typeface="Comfortaa"/>
+              </a:rPr>
+              <a:t>HTTP Cookie :</a:t>
+            </a:r>
+            <a:endParaRPr sz="2200" b="1">
+              <a:solidFill>
+                <a:schemeClr val="bg1"/>
+              </a:solidFill>
+              <a:latin typeface="Comfortaa"/>
+              <a:cs typeface="Comfortaa"/>
+            </a:endParaRPr>
+          </a:p>
+          <a:p>
+            <a:pPr algn="just">
+              <a:defRPr/>
+            </a:pPr>
+            <a:r>
+              <a:rPr sz="2200" b="1">
+                <a:solidFill>
+                  <a:schemeClr val="bg1"/>
+                </a:solidFill>
+                <a:latin typeface="Comfortaa"/>
+                <a:ea typeface="Comfortaa"/>
+                <a:cs typeface="Comfortaa"/>
+              </a:rPr>
+              <a:t>Pengunaan HTTP Cookie Untuk Mencegah Javascript Mengakses Token Session</a:t>
+            </a:r>
+            <a:endParaRPr sz="2200" b="1">
+              <a:solidFill>
+                <a:schemeClr val="bg1"/>
+              </a:solidFill>
+              <a:latin typeface="Comfortaa"/>
+              <a:cs typeface="Comfortaa"/>
+            </a:endParaRPr>
+          </a:p>
+        </p:txBody>
+      </p:sp>
+      <p:pic>
+        <p:nvPicPr>
+          <p:cNvPr id="2146538051" name=""/>
+          <p:cNvPicPr>
+            <a:picLocks noChangeAspect="1"/>
+          </p:cNvPicPr>
+          <p:nvPr/>
+        </p:nvPicPr>
+        <p:blipFill rotWithShape="1">
+          <a:blip r:embed="rId10"/>
+          <a:stretch/>
+        </p:blipFill>
+        <p:spPr bwMode="auto">
+          <a:xfrm flipH="0" flipV="0">
+            <a:off x="3354621" y="21669105"/>
+            <a:ext cx="1365315" cy="1107549"/>
           </a:xfrm>
           <a:prstGeom prst="rect">
             <a:avLst/>

--- a/John/PPT_Keamanan_Data.pptx
+++ b/John/PPT_Keamanan_Data.pptx
@@ -5,7 +5,7 @@
     <p:sldMasterId id="2147483648" r:id="rId1"/>
   </p:sldMasterIdLst>
   <p:notesMasterIdLst>
-    <p:notesMasterId r:id="rId18"/>
+    <p:notesMasterId r:id="rId19"/>
   </p:notesMasterIdLst>
   <p:sldIdLst>
     <p:sldId id="256" r:id="rId4"/>
@@ -22,6 +22,7 @@
     <p:sldId id="267" r:id="rId15"/>
     <p:sldId id="268" r:id="rId16"/>
     <p:sldId id="269" r:id="rId17"/>
+    <p:sldId id="270" r:id="rId18"/>
   </p:sldIdLst>
   <p:sldSz cx="12192000" cy="6858000"/>
   <p:notesSz cx="6858000" cy="9144000"/>
@@ -147,7 +148,7 @@
       </p:grpSpPr>
       <p:sp>
         <p:nvSpPr>
-          <p:cNvPr id="270576299" name="Header Placeholder 1"/>
+          <p:cNvPr id="782171842" name="Header Placeholder 1"/>
           <p:cNvSpPr>
             <a:spLocks noGrp="1"/>
           </p:cNvSpPr>
@@ -181,7 +182,7 @@
       </p:sp>
       <p:sp>
         <p:nvSpPr>
-          <p:cNvPr id="212964095" name="Date Placeholder 2"/>
+          <p:cNvPr id="683527232" name="Date Placeholder 2"/>
           <p:cNvSpPr>
             <a:spLocks noGrp="1"/>
           </p:cNvSpPr>
@@ -219,7 +220,7 @@
       </p:sp>
       <p:sp>
         <p:nvSpPr>
-          <p:cNvPr id="1092486385" name="Slide Image Placeholder 3"/>
+          <p:cNvPr id="772822950" name="Slide Image Placeholder 3"/>
           <p:cNvSpPr>
             <a:spLocks noChangeAspect="1" noGrp="1" noRot="1"/>
           </p:cNvSpPr>
@@ -255,7 +256,7 @@
       </p:sp>
       <p:sp>
         <p:nvSpPr>
-          <p:cNvPr id="1308959953" name="Notes Placeholder 4"/>
+          <p:cNvPr id="675259604" name="Notes Placeholder 4"/>
           <p:cNvSpPr>
             <a:spLocks noGrp="1"/>
           </p:cNvSpPr>
@@ -329,7 +330,7 @@
       </p:sp>
       <p:sp>
         <p:nvSpPr>
-          <p:cNvPr id="1271328559" name="Footer Placeholder 5"/>
+          <p:cNvPr id="718703574" name="Footer Placeholder 5"/>
           <p:cNvSpPr>
             <a:spLocks noGrp="1"/>
           </p:cNvSpPr>
@@ -363,7 +364,7 @@
       </p:sp>
       <p:sp>
         <p:nvSpPr>
-          <p:cNvPr id="803390854" name="Slide Number Placeholder 6"/>
+          <p:cNvPr id="1917038196" name="Slide Number Placeholder 6"/>
           <p:cNvSpPr>
             <a:spLocks noGrp="1"/>
           </p:cNvSpPr>
@@ -516,7 +517,7 @@
       </p:grpSpPr>
       <p:sp>
         <p:nvSpPr>
-          <p:cNvPr id="862886746" name="Slide Image Placeholder 1"/>
+          <p:cNvPr id="399105835" name="Slide Image Placeholder 1"/>
           <p:cNvSpPr>
             <a:spLocks noChangeAspect="1" noGrp="1" noRot="1"/>
           </p:cNvSpPr>
@@ -533,7 +534,7 @@
       </p:sp>
       <p:sp>
         <p:nvSpPr>
-          <p:cNvPr id="1284540526" name="Notes Placeholder 2"/>
+          <p:cNvPr id="480855521" name="Notes Placeholder 2"/>
           <p:cNvSpPr>
             <a:spLocks noGrp="1"/>
           </p:cNvSpPr>
@@ -558,7 +559,7 @@
       </p:sp>
       <p:sp>
         <p:nvSpPr>
-          <p:cNvPr id="1495978612" name="Slide Number Placeholder 3"/>
+          <p:cNvPr id="1837263874" name="Slide Number Placeholder 3"/>
           <p:cNvSpPr>
             <a:spLocks noGrp="1"/>
           </p:cNvSpPr>
@@ -609,7 +610,7 @@
       </p:grpSpPr>
       <p:sp>
         <p:nvSpPr>
-          <p:cNvPr id="267153101" name="Slide Image Placeholder 1"/>
+          <p:cNvPr id="846551847" name="Slide Image Placeholder 1"/>
           <p:cNvSpPr>
             <a:spLocks noChangeAspect="1" noGrp="1" noRot="1"/>
           </p:cNvSpPr>
@@ -626,7 +627,7 @@
       </p:sp>
       <p:sp>
         <p:nvSpPr>
-          <p:cNvPr id="209725320" name="Notes Placeholder 2"/>
+          <p:cNvPr id="1863550616" name="Notes Placeholder 2"/>
           <p:cNvSpPr>
             <a:spLocks noGrp="1"/>
           </p:cNvSpPr>
@@ -651,7 +652,7 @@
       </p:sp>
       <p:sp>
         <p:nvSpPr>
-          <p:cNvPr id="1281023859" name="Slide Number Placeholder 3"/>
+          <p:cNvPr id="935415563" name="Slide Number Placeholder 3"/>
           <p:cNvSpPr>
             <a:spLocks noGrp="1"/>
           </p:cNvSpPr>
@@ -702,7 +703,7 @@
       </p:grpSpPr>
       <p:sp>
         <p:nvSpPr>
-          <p:cNvPr id="1353763381" name="Slide Image Placeholder 1"/>
+          <p:cNvPr id="1887611092" name="Slide Image Placeholder 1"/>
           <p:cNvSpPr>
             <a:spLocks noChangeAspect="1" noGrp="1" noRot="1"/>
           </p:cNvSpPr>
@@ -719,7 +720,7 @@
       </p:sp>
       <p:sp>
         <p:nvSpPr>
-          <p:cNvPr id="1621524384" name="Notes Placeholder 2"/>
+          <p:cNvPr id="742459495" name="Notes Placeholder 2"/>
           <p:cNvSpPr>
             <a:spLocks noGrp="1"/>
           </p:cNvSpPr>
@@ -744,7 +745,7 @@
       </p:sp>
       <p:sp>
         <p:nvSpPr>
-          <p:cNvPr id="1321781989" name="Slide Number Placeholder 3"/>
+          <p:cNvPr id="1429285095" name="Slide Number Placeholder 3"/>
           <p:cNvSpPr>
             <a:spLocks noGrp="1"/>
           </p:cNvSpPr>
@@ -795,7 +796,7 @@
       </p:grpSpPr>
       <p:sp>
         <p:nvSpPr>
-          <p:cNvPr id="121263915" name="Slide Image Placeholder 1"/>
+          <p:cNvPr id="2142477618" name="Slide Image Placeholder 1"/>
           <p:cNvSpPr>
             <a:spLocks noChangeAspect="1" noGrp="1" noRot="1"/>
           </p:cNvSpPr>
@@ -812,7 +813,7 @@
       </p:sp>
       <p:sp>
         <p:nvSpPr>
-          <p:cNvPr id="761036683" name="Notes Placeholder 2"/>
+          <p:cNvPr id="32407501" name="Notes Placeholder 2"/>
           <p:cNvSpPr>
             <a:spLocks noGrp="1"/>
           </p:cNvSpPr>
@@ -837,7 +838,7 @@
       </p:sp>
       <p:sp>
         <p:nvSpPr>
-          <p:cNvPr id="740962012" name="Slide Number Placeholder 3"/>
+          <p:cNvPr id="128944634" name="Slide Number Placeholder 3"/>
           <p:cNvSpPr>
             <a:spLocks noGrp="1"/>
           </p:cNvSpPr>
@@ -888,7 +889,7 @@
       </p:grpSpPr>
       <p:sp>
         <p:nvSpPr>
-          <p:cNvPr id="661404274" name="Slide Image Placeholder 1"/>
+          <p:cNvPr id="1973885634" name="Slide Image Placeholder 1"/>
           <p:cNvSpPr>
             <a:spLocks noChangeAspect="1" noGrp="1" noRot="1"/>
           </p:cNvSpPr>
@@ -905,7 +906,7 @@
       </p:sp>
       <p:sp>
         <p:nvSpPr>
-          <p:cNvPr id="505190080" name="Notes Placeholder 2"/>
+          <p:cNvPr id="959461326" name="Notes Placeholder 2"/>
           <p:cNvSpPr>
             <a:spLocks noGrp="1"/>
           </p:cNvSpPr>
@@ -930,7 +931,7 @@
       </p:sp>
       <p:sp>
         <p:nvSpPr>
-          <p:cNvPr id="842133939" name="Slide Number Placeholder 3"/>
+          <p:cNvPr id="1149784225" name="Slide Number Placeholder 3"/>
           <p:cNvSpPr>
             <a:spLocks noGrp="1"/>
           </p:cNvSpPr>
@@ -981,7 +982,7 @@
       </p:grpSpPr>
       <p:sp>
         <p:nvSpPr>
-          <p:cNvPr id="1073761005" name="Slide Image Placeholder 1"/>
+          <p:cNvPr id="1147356992" name="Slide Image Placeholder 1"/>
           <p:cNvSpPr>
             <a:spLocks noChangeAspect="1" noGrp="1" noRot="1"/>
           </p:cNvSpPr>
@@ -998,7 +999,7 @@
       </p:sp>
       <p:sp>
         <p:nvSpPr>
-          <p:cNvPr id="1695309847" name="Notes Placeholder 2"/>
+          <p:cNvPr id="839341835" name="Notes Placeholder 2"/>
           <p:cNvSpPr>
             <a:spLocks noGrp="1"/>
           </p:cNvSpPr>
@@ -1023,7 +1024,7 @@
       </p:sp>
       <p:sp>
         <p:nvSpPr>
-          <p:cNvPr id="1644041406" name="Slide Number Placeholder 3"/>
+          <p:cNvPr id="1355587851" name="Slide Number Placeholder 3"/>
           <p:cNvSpPr>
             <a:spLocks noGrp="1"/>
           </p:cNvSpPr>
@@ -1040,6 +1041,99 @@
               <a:defRPr/>
             </a:pPr>
             <a:fld id="{8038265B-3B52-744A-5E9D-CB883805AAD2}" type="slidenum">
+              <a:rPr lang="en-US"/>
+              <a:t/>
+            </a:fld>
+            <a:endParaRPr lang="en-US"/>
+          </a:p>
+        </p:txBody>
+      </p:sp>
+    </p:spTree>
+  </p:cSld>
+  <p:clrMapOvr>
+    <a:masterClrMapping/>
+  </p:clrMapOvr>
+</p:notes>
+</file>
+
+<file path=ppt/notesSlides/notesSlide15.xml><?xml version="1.0" encoding="utf-8"?>
+<p:notes xmlns:a="http://schemas.openxmlformats.org/drawingml/2006/main" xmlns:r="http://schemas.openxmlformats.org/officeDocument/2006/relationships" xmlns:p="http://schemas.openxmlformats.org/presentationml/2006/main" xmlns:m="http://schemas.openxmlformats.org/officeDocument/2006/math" xmlns:w="http://schemas.openxmlformats.org/wordprocessingml/2006/main">
+  <p:cSld name="">
+    <p:spTree>
+      <p:nvGrpSpPr>
+        <p:cNvPr id="1" name=""/>
+        <p:cNvGrpSpPr/>
+        <p:nvPr/>
+      </p:nvGrpSpPr>
+      <p:grpSpPr bwMode="auto">
+        <a:xfrm>
+          <a:off x="0" y="0"/>
+          <a:ext cx="0" cy="0"/>
+          <a:chOff x="0" y="0"/>
+          <a:chExt cx="0" cy="0"/>
+        </a:xfrm>
+      </p:grpSpPr>
+      <p:sp>
+        <p:nvSpPr>
+          <p:cNvPr id="1922083682" name="Slide Image Placeholder 1"/>
+          <p:cNvSpPr>
+            <a:spLocks noChangeAspect="1" noGrp="1" noRot="1"/>
+          </p:cNvSpPr>
+          <p:nvPr>
+            <p:ph type="sldImg"/>
+          </p:nvPr>
+        </p:nvSpPr>
+        <p:spPr bwMode="auto">
+          <a:xfrm>
+            <a:off x="685800" y="1143000"/>
+            <a:ext cx="5486400" cy="3086100"/>
+          </a:xfrm>
+        </p:spPr>
+      </p:sp>
+      <p:sp>
+        <p:nvSpPr>
+          <p:cNvPr id="918587312" name="Notes Placeholder 2"/>
+          <p:cNvSpPr>
+            <a:spLocks noGrp="1"/>
+          </p:cNvSpPr>
+          <p:nvPr>
+            <p:ph type="body" idx="1"/>
+          </p:nvPr>
+        </p:nvSpPr>
+        <p:spPr bwMode="auto"/>
+        <p:txBody>
+          <a:bodyPr/>
+          <a:lstStyle/>
+          <a:p>
+            <a:pPr>
+              <a:defRPr/>
+            </a:pPr>
+            <a:endParaRPr lang="en-US">
+              <a:latin typeface="Arial"/>
+              <a:cs typeface="Arial"/>
+            </a:endParaRPr>
+          </a:p>
+        </p:txBody>
+      </p:sp>
+      <p:sp>
+        <p:nvSpPr>
+          <p:cNvPr id="163630991" name="Slide Number Placeholder 3"/>
+          <p:cNvSpPr>
+            <a:spLocks noGrp="1"/>
+          </p:cNvSpPr>
+          <p:nvPr>
+            <p:ph type="sldNum" sz="quarter" idx="10"/>
+          </p:nvPr>
+        </p:nvSpPr>
+        <p:spPr bwMode="auto"/>
+        <p:txBody>
+          <a:bodyPr/>
+          <a:lstStyle/>
+          <a:p>
+            <a:pPr>
+              <a:defRPr/>
+            </a:pPr>
+            <a:fld id="{4A8FD684-F1BA-E9EE-CF27-953CF4CDE9FE}" type="slidenum">
               <a:rPr lang="en-US"/>
               <a:t/>
             </a:fld>
@@ -1074,7 +1168,7 @@
       </p:grpSpPr>
       <p:sp>
         <p:nvSpPr>
-          <p:cNvPr id="759904108" name="Slide Image Placeholder 1"/>
+          <p:cNvPr id="1291957336" name="Slide Image Placeholder 1"/>
           <p:cNvSpPr>
             <a:spLocks noChangeAspect="1" noGrp="1" noRot="1"/>
           </p:cNvSpPr>
@@ -1091,7 +1185,7 @@
       </p:sp>
       <p:sp>
         <p:nvSpPr>
-          <p:cNvPr id="1933887981" name="Notes Placeholder 2"/>
+          <p:cNvPr id="394748900" name="Notes Placeholder 2"/>
           <p:cNvSpPr>
             <a:spLocks noGrp="1"/>
           </p:cNvSpPr>
@@ -1116,7 +1210,7 @@
       </p:sp>
       <p:sp>
         <p:nvSpPr>
-          <p:cNvPr id="1554392182" name="Slide Number Placeholder 3"/>
+          <p:cNvPr id="879582226" name="Slide Number Placeholder 3"/>
           <p:cNvSpPr>
             <a:spLocks noGrp="1"/>
           </p:cNvSpPr>
@@ -1167,7 +1261,7 @@
       </p:grpSpPr>
       <p:sp>
         <p:nvSpPr>
-          <p:cNvPr id="1903878964" name="Slide Image Placeholder 1"/>
+          <p:cNvPr id="1218971704" name="Slide Image Placeholder 1"/>
           <p:cNvSpPr>
             <a:spLocks noChangeAspect="1" noGrp="1" noRot="1"/>
           </p:cNvSpPr>
@@ -1184,7 +1278,7 @@
       </p:sp>
       <p:sp>
         <p:nvSpPr>
-          <p:cNvPr id="2024751382" name="Notes Placeholder 2"/>
+          <p:cNvPr id="1916029968" name="Notes Placeholder 2"/>
           <p:cNvSpPr>
             <a:spLocks noGrp="1"/>
           </p:cNvSpPr>
@@ -1209,7 +1303,7 @@
       </p:sp>
       <p:sp>
         <p:nvSpPr>
-          <p:cNvPr id="280853255" name="Slide Number Placeholder 3"/>
+          <p:cNvPr id="1605823591" name="Slide Number Placeholder 3"/>
           <p:cNvSpPr>
             <a:spLocks noGrp="1"/>
           </p:cNvSpPr>
@@ -1260,7 +1354,7 @@
       </p:grpSpPr>
       <p:sp>
         <p:nvSpPr>
-          <p:cNvPr id="1346494523" name="Slide Image Placeholder 1"/>
+          <p:cNvPr id="710473896" name="Slide Image Placeholder 1"/>
           <p:cNvSpPr>
             <a:spLocks noChangeAspect="1" noGrp="1" noRot="1"/>
           </p:cNvSpPr>
@@ -1277,7 +1371,7 @@
       </p:sp>
       <p:sp>
         <p:nvSpPr>
-          <p:cNvPr id="633146113" name="Notes Placeholder 2"/>
+          <p:cNvPr id="2063406764" name="Notes Placeholder 2"/>
           <p:cNvSpPr>
             <a:spLocks noGrp="1"/>
           </p:cNvSpPr>
@@ -1302,7 +1396,7 @@
       </p:sp>
       <p:sp>
         <p:nvSpPr>
-          <p:cNvPr id="1269658675" name="Slide Number Placeholder 3"/>
+          <p:cNvPr id="1404573537" name="Slide Number Placeholder 3"/>
           <p:cNvSpPr>
             <a:spLocks noGrp="1"/>
           </p:cNvSpPr>
@@ -1353,7 +1447,7 @@
       </p:grpSpPr>
       <p:sp>
         <p:nvSpPr>
-          <p:cNvPr id="203913298" name="Slide Image Placeholder 1"/>
+          <p:cNvPr id="1463271394" name="Slide Image Placeholder 1"/>
           <p:cNvSpPr>
             <a:spLocks noChangeAspect="1" noGrp="1" noRot="1"/>
           </p:cNvSpPr>
@@ -1370,7 +1464,7 @@
       </p:sp>
       <p:sp>
         <p:nvSpPr>
-          <p:cNvPr id="420776128" name="Notes Placeholder 2"/>
+          <p:cNvPr id="60970542" name="Notes Placeholder 2"/>
           <p:cNvSpPr>
             <a:spLocks noGrp="1"/>
           </p:cNvSpPr>
@@ -1395,7 +1489,7 @@
       </p:sp>
       <p:sp>
         <p:nvSpPr>
-          <p:cNvPr id="275020608" name="Slide Number Placeholder 3"/>
+          <p:cNvPr id="1688008993" name="Slide Number Placeholder 3"/>
           <p:cNvSpPr>
             <a:spLocks noGrp="1"/>
           </p:cNvSpPr>
@@ -1446,7 +1540,7 @@
       </p:grpSpPr>
       <p:sp>
         <p:nvSpPr>
-          <p:cNvPr id="1582043550" name="Slide Image Placeholder 1"/>
+          <p:cNvPr id="997305845" name="Slide Image Placeholder 1"/>
           <p:cNvSpPr>
             <a:spLocks noChangeAspect="1" noGrp="1" noRot="1"/>
           </p:cNvSpPr>
@@ -1463,7 +1557,7 @@
       </p:sp>
       <p:sp>
         <p:nvSpPr>
-          <p:cNvPr id="983638558" name="Notes Placeholder 2"/>
+          <p:cNvPr id="1430678487" name="Notes Placeholder 2"/>
           <p:cNvSpPr>
             <a:spLocks noGrp="1"/>
           </p:cNvSpPr>
@@ -1488,7 +1582,7 @@
       </p:sp>
       <p:sp>
         <p:nvSpPr>
-          <p:cNvPr id="1689934000" name="Slide Number Placeholder 3"/>
+          <p:cNvPr id="1122115887" name="Slide Number Placeholder 3"/>
           <p:cNvSpPr>
             <a:spLocks noGrp="1"/>
           </p:cNvSpPr>
@@ -1539,7 +1633,7 @@
       </p:grpSpPr>
       <p:sp>
         <p:nvSpPr>
-          <p:cNvPr id="670766770" name="Slide Image Placeholder 1"/>
+          <p:cNvPr id="297872536" name="Slide Image Placeholder 1"/>
           <p:cNvSpPr>
             <a:spLocks noChangeAspect="1" noGrp="1" noRot="1"/>
           </p:cNvSpPr>
@@ -1556,7 +1650,7 @@
       </p:sp>
       <p:sp>
         <p:nvSpPr>
-          <p:cNvPr id="1775365840" name="Notes Placeholder 2"/>
+          <p:cNvPr id="1702053125" name="Notes Placeholder 2"/>
           <p:cNvSpPr>
             <a:spLocks noGrp="1"/>
           </p:cNvSpPr>
@@ -1581,7 +1675,7 @@
       </p:sp>
       <p:sp>
         <p:nvSpPr>
-          <p:cNvPr id="2015036546" name="Slide Number Placeholder 3"/>
+          <p:cNvPr id="1863639610" name="Slide Number Placeholder 3"/>
           <p:cNvSpPr>
             <a:spLocks noGrp="1"/>
           </p:cNvSpPr>
@@ -1632,7 +1726,7 @@
       </p:grpSpPr>
       <p:sp>
         <p:nvSpPr>
-          <p:cNvPr id="757583691" name="Slide Image Placeholder 1"/>
+          <p:cNvPr id="471591530" name="Slide Image Placeholder 1"/>
           <p:cNvSpPr>
             <a:spLocks noChangeAspect="1" noGrp="1" noRot="1"/>
           </p:cNvSpPr>
@@ -1649,7 +1743,7 @@
       </p:sp>
       <p:sp>
         <p:nvSpPr>
-          <p:cNvPr id="1246102444" name="Notes Placeholder 2"/>
+          <p:cNvPr id="1543880572" name="Notes Placeholder 2"/>
           <p:cNvSpPr>
             <a:spLocks noGrp="1"/>
           </p:cNvSpPr>
@@ -1674,7 +1768,7 @@
       </p:sp>
       <p:sp>
         <p:nvSpPr>
-          <p:cNvPr id="475805075" name="Slide Number Placeholder 3"/>
+          <p:cNvPr id="1086842624" name="Slide Number Placeholder 3"/>
           <p:cNvSpPr>
             <a:spLocks noGrp="1"/>
           </p:cNvSpPr>
@@ -1725,7 +1819,7 @@
       </p:grpSpPr>
       <p:sp>
         <p:nvSpPr>
-          <p:cNvPr id="1451209158" name="Slide Image Placeholder 1"/>
+          <p:cNvPr id="744685774" name="Slide Image Placeholder 1"/>
           <p:cNvSpPr>
             <a:spLocks noChangeAspect="1" noGrp="1" noRot="1"/>
           </p:cNvSpPr>
@@ -1742,7 +1836,7 @@
       </p:sp>
       <p:sp>
         <p:nvSpPr>
-          <p:cNvPr id="22563128" name="Notes Placeholder 2"/>
+          <p:cNvPr id="1183935248" name="Notes Placeholder 2"/>
           <p:cNvSpPr>
             <a:spLocks noGrp="1"/>
           </p:cNvSpPr>
@@ -1767,7 +1861,7 @@
       </p:sp>
       <p:sp>
         <p:nvSpPr>
-          <p:cNvPr id="971556014" name="Slide Number Placeholder 3"/>
+          <p:cNvPr id="54215673" name="Slide Number Placeholder 3"/>
           <p:cNvSpPr>
             <a:spLocks noGrp="1"/>
           </p:cNvSpPr>
@@ -1818,7 +1912,7 @@
       </p:grpSpPr>
       <p:sp>
         <p:nvSpPr>
-          <p:cNvPr id="1100237187" name="Title 1"/>
+          <p:cNvPr id="1239921306" name="Title 1"/>
           <p:cNvSpPr>
             <a:spLocks noGrp="1"/>
           </p:cNvSpPr>
@@ -1853,7 +1947,7 @@
       </p:sp>
       <p:sp>
         <p:nvSpPr>
-          <p:cNvPr id="1978255539" name="Subtitle 2"/>
+          <p:cNvPr id="557126354" name="Subtitle 2"/>
           <p:cNvSpPr>
             <a:spLocks noGrp="1"/>
           </p:cNvSpPr>
@@ -1921,7 +2015,7 @@
       </p:sp>
       <p:sp>
         <p:nvSpPr>
-          <p:cNvPr id="713497464" name="Date Placeholder 3"/>
+          <p:cNvPr id="1310524006" name="Date Placeholder 3"/>
           <p:cNvSpPr>
             <a:spLocks noGrp="1"/>
           </p:cNvSpPr>
@@ -1947,7 +2041,7 @@
       </p:sp>
       <p:sp>
         <p:nvSpPr>
-          <p:cNvPr id="623287298" name="Footer Placeholder 4"/>
+          <p:cNvPr id="421218469" name="Footer Placeholder 4"/>
           <p:cNvSpPr>
             <a:spLocks noGrp="1"/>
           </p:cNvSpPr>
@@ -1969,7 +2063,7 @@
       </p:sp>
       <p:sp>
         <p:nvSpPr>
-          <p:cNvPr id="1255516734" name="Slide Number Placeholder 5"/>
+          <p:cNvPr id="256722386" name="Slide Number Placeholder 5"/>
           <p:cNvSpPr>
             <a:spLocks noGrp="1"/>
           </p:cNvSpPr>
@@ -2020,7 +2114,7 @@
       </p:grpSpPr>
       <p:sp>
         <p:nvSpPr>
-          <p:cNvPr id="1551252675" name="Title 1"/>
+          <p:cNvPr id="1883194929" name="Title 1"/>
           <p:cNvSpPr>
             <a:spLocks noGrp="1"/>
           </p:cNvSpPr>
@@ -2046,7 +2140,7 @@
       </p:sp>
       <p:sp>
         <p:nvSpPr>
-          <p:cNvPr id="1605589033" name="Vertical Text Placeholder 2"/>
+          <p:cNvPr id="347317864" name="Vertical Text Placeholder 2"/>
           <p:cNvSpPr>
             <a:spLocks noGrp="1"/>
           </p:cNvSpPr>
@@ -2112,7 +2206,7 @@
       </p:sp>
       <p:sp>
         <p:nvSpPr>
-          <p:cNvPr id="1239423436" name="Date Placeholder 3"/>
+          <p:cNvPr id="1627519339" name="Date Placeholder 3"/>
           <p:cNvSpPr>
             <a:spLocks noGrp="1"/>
           </p:cNvSpPr>
@@ -2138,7 +2232,7 @@
       </p:sp>
       <p:sp>
         <p:nvSpPr>
-          <p:cNvPr id="1552079849" name="Footer Placeholder 4"/>
+          <p:cNvPr id="1767255300" name="Footer Placeholder 4"/>
           <p:cNvSpPr>
             <a:spLocks noGrp="1"/>
           </p:cNvSpPr>
@@ -2160,7 +2254,7 @@
       </p:sp>
       <p:sp>
         <p:nvSpPr>
-          <p:cNvPr id="1945154980" name="Slide Number Placeholder 5"/>
+          <p:cNvPr id="1809966806" name="Slide Number Placeholder 5"/>
           <p:cNvSpPr>
             <a:spLocks noGrp="1"/>
           </p:cNvSpPr>
@@ -2211,7 +2305,7 @@
       </p:grpSpPr>
       <p:sp>
         <p:nvSpPr>
-          <p:cNvPr id="687300210" name="Vertical Title 1"/>
+          <p:cNvPr id="447534146" name="Vertical Title 1"/>
           <p:cNvSpPr>
             <a:spLocks noGrp="1"/>
           </p:cNvSpPr>
@@ -2242,7 +2336,7 @@
       </p:sp>
       <p:sp>
         <p:nvSpPr>
-          <p:cNvPr id="766921574" name="Vertical Text Placeholder 2"/>
+          <p:cNvPr id="767360145" name="Vertical Text Placeholder 2"/>
           <p:cNvSpPr>
             <a:spLocks noGrp="1"/>
           </p:cNvSpPr>
@@ -2313,7 +2407,7 @@
       </p:sp>
       <p:sp>
         <p:nvSpPr>
-          <p:cNvPr id="429279643" name="Date Placeholder 3"/>
+          <p:cNvPr id="746143874" name="Date Placeholder 3"/>
           <p:cNvSpPr>
             <a:spLocks noGrp="1"/>
           </p:cNvSpPr>
@@ -2339,7 +2433,7 @@
       </p:sp>
       <p:sp>
         <p:nvSpPr>
-          <p:cNvPr id="58768910" name="Footer Placeholder 4"/>
+          <p:cNvPr id="366122698" name="Footer Placeholder 4"/>
           <p:cNvSpPr>
             <a:spLocks noGrp="1"/>
           </p:cNvSpPr>
@@ -2361,7 +2455,7 @@
       </p:sp>
       <p:sp>
         <p:nvSpPr>
-          <p:cNvPr id="267695635" name="Slide Number Placeholder 5"/>
+          <p:cNvPr id="572305408" name="Slide Number Placeholder 5"/>
           <p:cNvSpPr>
             <a:spLocks noGrp="1"/>
           </p:cNvSpPr>
@@ -2412,7 +2506,7 @@
       </p:grpSpPr>
       <p:sp>
         <p:nvSpPr>
-          <p:cNvPr id="1587780769" name="Title 1"/>
+          <p:cNvPr id="781171162" name="Title 1"/>
           <p:cNvSpPr>
             <a:spLocks noGrp="1"/>
           </p:cNvSpPr>
@@ -2438,7 +2532,7 @@
       </p:sp>
       <p:sp>
         <p:nvSpPr>
-          <p:cNvPr id="1239564901" name="Content Placeholder 2"/>
+          <p:cNvPr id="907279956" name="Content Placeholder 2"/>
           <p:cNvSpPr>
             <a:spLocks noGrp="1"/>
           </p:cNvSpPr>
@@ -2504,7 +2598,7 @@
       </p:sp>
       <p:sp>
         <p:nvSpPr>
-          <p:cNvPr id="1782496080" name="Date Placeholder 3"/>
+          <p:cNvPr id="1701393762" name="Date Placeholder 3"/>
           <p:cNvSpPr>
             <a:spLocks noGrp="1"/>
           </p:cNvSpPr>
@@ -2530,7 +2624,7 @@
       </p:sp>
       <p:sp>
         <p:nvSpPr>
-          <p:cNvPr id="1801695139" name="Footer Placeholder 4"/>
+          <p:cNvPr id="791372223" name="Footer Placeholder 4"/>
           <p:cNvSpPr>
             <a:spLocks noGrp="1"/>
           </p:cNvSpPr>
@@ -2552,7 +2646,7 @@
       </p:sp>
       <p:sp>
         <p:nvSpPr>
-          <p:cNvPr id="1830231254" name="Slide Number Placeholder 5"/>
+          <p:cNvPr id="1220215101" name="Slide Number Placeholder 5"/>
           <p:cNvSpPr>
             <a:spLocks noGrp="1"/>
           </p:cNvSpPr>
@@ -2603,7 +2697,7 @@
       </p:grpSpPr>
       <p:sp>
         <p:nvSpPr>
-          <p:cNvPr id="1943758913" name="Title 1"/>
+          <p:cNvPr id="95093359" name="Title 1"/>
           <p:cNvSpPr>
             <a:spLocks noGrp="1"/>
           </p:cNvSpPr>
@@ -2638,7 +2732,7 @@
       </p:sp>
       <p:sp>
         <p:nvSpPr>
-          <p:cNvPr id="909294048" name="Text Placeholder 2"/>
+          <p:cNvPr id="423463246" name="Text Placeholder 2"/>
           <p:cNvSpPr>
             <a:spLocks noGrp="1"/>
           </p:cNvSpPr>
@@ -2760,7 +2854,7 @@
       </p:sp>
       <p:sp>
         <p:nvSpPr>
-          <p:cNvPr id="196422283" name="Date Placeholder 3"/>
+          <p:cNvPr id="1049732276" name="Date Placeholder 3"/>
           <p:cNvSpPr>
             <a:spLocks noGrp="1"/>
           </p:cNvSpPr>
@@ -2786,7 +2880,7 @@
       </p:sp>
       <p:sp>
         <p:nvSpPr>
-          <p:cNvPr id="41363229" name="Footer Placeholder 4"/>
+          <p:cNvPr id="1382539776" name="Footer Placeholder 4"/>
           <p:cNvSpPr>
             <a:spLocks noGrp="1"/>
           </p:cNvSpPr>
@@ -2808,7 +2902,7 @@
       </p:sp>
       <p:sp>
         <p:nvSpPr>
-          <p:cNvPr id="1301738667" name="Slide Number Placeholder 5"/>
+          <p:cNvPr id="648410159" name="Slide Number Placeholder 5"/>
           <p:cNvSpPr>
             <a:spLocks noGrp="1"/>
           </p:cNvSpPr>
@@ -2859,7 +2953,7 @@
       </p:grpSpPr>
       <p:sp>
         <p:nvSpPr>
-          <p:cNvPr id="1615552348" name="Title 1"/>
+          <p:cNvPr id="1505838358" name="Title 1"/>
           <p:cNvSpPr>
             <a:spLocks noGrp="1"/>
           </p:cNvSpPr>
@@ -2885,7 +2979,7 @@
       </p:sp>
       <p:sp>
         <p:nvSpPr>
-          <p:cNvPr id="300195673" name="Content Placeholder 2"/>
+          <p:cNvPr id="1402167781" name="Content Placeholder 2"/>
           <p:cNvSpPr>
             <a:spLocks noGrp="1"/>
           </p:cNvSpPr>
@@ -2956,7 +3050,7 @@
       </p:sp>
       <p:sp>
         <p:nvSpPr>
-          <p:cNvPr id="1261803628" name="Content Placeholder 3"/>
+          <p:cNvPr id="982187371" name="Content Placeholder 3"/>
           <p:cNvSpPr>
             <a:spLocks noGrp="1"/>
           </p:cNvSpPr>
@@ -3027,7 +3121,7 @@
       </p:sp>
       <p:sp>
         <p:nvSpPr>
-          <p:cNvPr id="1615394009" name="Date Placeholder 4"/>
+          <p:cNvPr id="1568910603" name="Date Placeholder 4"/>
           <p:cNvSpPr>
             <a:spLocks noGrp="1"/>
           </p:cNvSpPr>
@@ -3053,7 +3147,7 @@
       </p:sp>
       <p:sp>
         <p:nvSpPr>
-          <p:cNvPr id="901835102" name="Footer Placeholder 5"/>
+          <p:cNvPr id="1376727702" name="Footer Placeholder 5"/>
           <p:cNvSpPr>
             <a:spLocks noGrp="1"/>
           </p:cNvSpPr>
@@ -3075,7 +3169,7 @@
       </p:sp>
       <p:sp>
         <p:nvSpPr>
-          <p:cNvPr id="1878111044" name="Slide Number Placeholder 6"/>
+          <p:cNvPr id="847941532" name="Slide Number Placeholder 6"/>
           <p:cNvSpPr>
             <a:spLocks noGrp="1"/>
           </p:cNvSpPr>
@@ -3126,7 +3220,7 @@
       </p:grpSpPr>
       <p:sp>
         <p:nvSpPr>
-          <p:cNvPr id="910056604" name="Title 1"/>
+          <p:cNvPr id="173936887" name="Title 1"/>
           <p:cNvSpPr>
             <a:spLocks noGrp="1"/>
           </p:cNvSpPr>
@@ -3157,7 +3251,7 @@
       </p:sp>
       <p:sp>
         <p:nvSpPr>
-          <p:cNvPr id="955535767" name="Text Placeholder 2"/>
+          <p:cNvPr id="930074775" name="Text Placeholder 2"/>
           <p:cNvSpPr>
             <a:spLocks noGrp="1"/>
           </p:cNvSpPr>
@@ -3225,7 +3319,7 @@
       </p:sp>
       <p:sp>
         <p:nvSpPr>
-          <p:cNvPr id="856813809" name="Content Placeholder 3"/>
+          <p:cNvPr id="2074477196" name="Content Placeholder 3"/>
           <p:cNvSpPr>
             <a:spLocks noGrp="1"/>
           </p:cNvSpPr>
@@ -3296,7 +3390,7 @@
       </p:sp>
       <p:sp>
         <p:nvSpPr>
-          <p:cNvPr id="1922280272" name="Text Placeholder 4"/>
+          <p:cNvPr id="1430246431" name="Text Placeholder 4"/>
           <p:cNvSpPr>
             <a:spLocks noGrp="1"/>
           </p:cNvSpPr>
@@ -3364,7 +3458,7 @@
       </p:sp>
       <p:sp>
         <p:nvSpPr>
-          <p:cNvPr id="936034163" name="Content Placeholder 5"/>
+          <p:cNvPr id="1250843473" name="Content Placeholder 5"/>
           <p:cNvSpPr>
             <a:spLocks noGrp="1"/>
           </p:cNvSpPr>
@@ -3435,7 +3529,7 @@
       </p:sp>
       <p:sp>
         <p:nvSpPr>
-          <p:cNvPr id="743333936" name="Date Placeholder 6"/>
+          <p:cNvPr id="89902434" name="Date Placeholder 6"/>
           <p:cNvSpPr>
             <a:spLocks noGrp="1"/>
           </p:cNvSpPr>
@@ -3461,7 +3555,7 @@
       </p:sp>
       <p:sp>
         <p:nvSpPr>
-          <p:cNvPr id="180499121" name="Footer Placeholder 7"/>
+          <p:cNvPr id="654666720" name="Footer Placeholder 7"/>
           <p:cNvSpPr>
             <a:spLocks noGrp="1"/>
           </p:cNvSpPr>
@@ -3483,7 +3577,7 @@
       </p:sp>
       <p:sp>
         <p:nvSpPr>
-          <p:cNvPr id="1852511647" name="Slide Number Placeholder 8"/>
+          <p:cNvPr id="1257072031" name="Slide Number Placeholder 8"/>
           <p:cNvSpPr>
             <a:spLocks noGrp="1"/>
           </p:cNvSpPr>
@@ -3534,7 +3628,7 @@
       </p:grpSpPr>
       <p:sp>
         <p:nvSpPr>
-          <p:cNvPr id="465184950" name="Title 1"/>
+          <p:cNvPr id="1473406565" name="Title 1"/>
           <p:cNvSpPr>
             <a:spLocks noGrp="1"/>
           </p:cNvSpPr>
@@ -3560,7 +3654,7 @@
       </p:sp>
       <p:sp>
         <p:nvSpPr>
-          <p:cNvPr id="724637469" name="Date Placeholder 2"/>
+          <p:cNvPr id="808443763" name="Date Placeholder 2"/>
           <p:cNvSpPr>
             <a:spLocks noGrp="1"/>
           </p:cNvSpPr>
@@ -3586,7 +3680,7 @@
       </p:sp>
       <p:sp>
         <p:nvSpPr>
-          <p:cNvPr id="24560823" name="Footer Placeholder 3"/>
+          <p:cNvPr id="1097556332" name="Footer Placeholder 3"/>
           <p:cNvSpPr>
             <a:spLocks noGrp="1"/>
           </p:cNvSpPr>
@@ -3608,7 +3702,7 @@
       </p:sp>
       <p:sp>
         <p:nvSpPr>
-          <p:cNvPr id="1404766015" name="Slide Number Placeholder 4"/>
+          <p:cNvPr id="1476962598" name="Slide Number Placeholder 4"/>
           <p:cNvSpPr>
             <a:spLocks noGrp="1"/>
           </p:cNvSpPr>
@@ -3659,7 +3753,7 @@
       </p:grpSpPr>
       <p:sp>
         <p:nvSpPr>
-          <p:cNvPr id="2022184671" name="Date Placeholder 1"/>
+          <p:cNvPr id="1788174828" name="Date Placeholder 1"/>
           <p:cNvSpPr>
             <a:spLocks noGrp="1"/>
           </p:cNvSpPr>
@@ -3685,7 +3779,7 @@
       </p:sp>
       <p:sp>
         <p:nvSpPr>
-          <p:cNvPr id="44046772" name="Footer Placeholder 2"/>
+          <p:cNvPr id="1922796966" name="Footer Placeholder 2"/>
           <p:cNvSpPr>
             <a:spLocks noGrp="1"/>
           </p:cNvSpPr>
@@ -3707,7 +3801,7 @@
       </p:sp>
       <p:sp>
         <p:nvSpPr>
-          <p:cNvPr id="1643846719" name="Slide Number Placeholder 3"/>
+          <p:cNvPr id="1443005692" name="Slide Number Placeholder 3"/>
           <p:cNvSpPr>
             <a:spLocks noGrp="1"/>
           </p:cNvSpPr>
@@ -3758,7 +3852,7 @@
       </p:grpSpPr>
       <p:sp>
         <p:nvSpPr>
-          <p:cNvPr id="686406414" name="Title 1"/>
+          <p:cNvPr id="1437308361" name="Title 1"/>
           <p:cNvSpPr>
             <a:spLocks noGrp="1"/>
           </p:cNvSpPr>
@@ -3793,7 +3887,7 @@
       </p:sp>
       <p:sp>
         <p:nvSpPr>
-          <p:cNvPr id="1284586860" name="Content Placeholder 2"/>
+          <p:cNvPr id="1889128612" name="Content Placeholder 2"/>
           <p:cNvSpPr>
             <a:spLocks noGrp="1"/>
           </p:cNvSpPr>
@@ -3892,7 +3986,7 @@
       </p:sp>
       <p:sp>
         <p:nvSpPr>
-          <p:cNvPr id="1456917806" name="Text Placeholder 3"/>
+          <p:cNvPr id="715541955" name="Text Placeholder 3"/>
           <p:cNvSpPr>
             <a:spLocks noGrp="1"/>
           </p:cNvSpPr>
@@ -3960,7 +4054,7 @@
       </p:sp>
       <p:sp>
         <p:nvSpPr>
-          <p:cNvPr id="555736922" name="Date Placeholder 4"/>
+          <p:cNvPr id="587304783" name="Date Placeholder 4"/>
           <p:cNvSpPr>
             <a:spLocks noGrp="1"/>
           </p:cNvSpPr>
@@ -3986,7 +4080,7 @@
       </p:sp>
       <p:sp>
         <p:nvSpPr>
-          <p:cNvPr id="889315321" name="Footer Placeholder 5"/>
+          <p:cNvPr id="2098869932" name="Footer Placeholder 5"/>
           <p:cNvSpPr>
             <a:spLocks noGrp="1"/>
           </p:cNvSpPr>
@@ -4008,7 +4102,7 @@
       </p:sp>
       <p:sp>
         <p:nvSpPr>
-          <p:cNvPr id="1274704959" name="Slide Number Placeholder 6"/>
+          <p:cNvPr id="1077465573" name="Slide Number Placeholder 6"/>
           <p:cNvSpPr>
             <a:spLocks noGrp="1"/>
           </p:cNvSpPr>
@@ -4059,7 +4153,7 @@
       </p:grpSpPr>
       <p:sp>
         <p:nvSpPr>
-          <p:cNvPr id="1947848635" name="Title 1"/>
+          <p:cNvPr id="1814884697" name="Title 1"/>
           <p:cNvSpPr>
             <a:spLocks noGrp="1"/>
           </p:cNvSpPr>
@@ -4094,7 +4188,7 @@
       </p:sp>
       <p:sp>
         <p:nvSpPr>
-          <p:cNvPr id="1959535649" name="Picture Placeholder 2"/>
+          <p:cNvPr id="677235628" name="Picture Placeholder 2"/>
           <p:cNvSpPr>
             <a:spLocks noChangeAspect="1" noGrp="1"/>
           </p:cNvSpPr>
@@ -4162,7 +4256,7 @@
       </p:sp>
       <p:sp>
         <p:nvSpPr>
-          <p:cNvPr id="713139697" name="Text Placeholder 3"/>
+          <p:cNvPr id="887726717" name="Text Placeholder 3"/>
           <p:cNvSpPr>
             <a:spLocks noGrp="1"/>
           </p:cNvSpPr>
@@ -4230,7 +4324,7 @@
       </p:sp>
       <p:sp>
         <p:nvSpPr>
-          <p:cNvPr id="1659240468" name="Date Placeholder 4"/>
+          <p:cNvPr id="1851318008" name="Date Placeholder 4"/>
           <p:cNvSpPr>
             <a:spLocks noGrp="1"/>
           </p:cNvSpPr>
@@ -4256,7 +4350,7 @@
       </p:sp>
       <p:sp>
         <p:nvSpPr>
-          <p:cNvPr id="1405248015" name="Footer Placeholder 5"/>
+          <p:cNvPr id="616157465" name="Footer Placeholder 5"/>
           <p:cNvSpPr>
             <a:spLocks noGrp="1"/>
           </p:cNvSpPr>
@@ -4278,7 +4372,7 @@
       </p:sp>
       <p:sp>
         <p:nvSpPr>
-          <p:cNvPr id="2053783829" name="Slide Number Placeholder 6"/>
+          <p:cNvPr id="402162121" name="Slide Number Placeholder 6"/>
           <p:cNvSpPr>
             <a:spLocks noGrp="1"/>
           </p:cNvSpPr>
@@ -4334,7 +4428,7 @@
       </p:grpSpPr>
       <p:sp>
         <p:nvSpPr>
-          <p:cNvPr id="1747917717" name="Title Placeholder 1"/>
+          <p:cNvPr id="1501435091" name="Title Placeholder 1"/>
           <p:cNvSpPr>
             <a:spLocks noGrp="1"/>
           </p:cNvSpPr>
@@ -4370,7 +4464,7 @@
       </p:sp>
       <p:sp>
         <p:nvSpPr>
-          <p:cNvPr id="1839061316" name="Text Placeholder 2"/>
+          <p:cNvPr id="1256300528" name="Text Placeholder 2"/>
           <p:cNvSpPr>
             <a:spLocks noGrp="1"/>
           </p:cNvSpPr>
@@ -4446,7 +4540,7 @@
       </p:sp>
       <p:sp>
         <p:nvSpPr>
-          <p:cNvPr id="2016955163" name="Date Placeholder 3"/>
+          <p:cNvPr id="2111850505" name="Date Placeholder 3"/>
           <p:cNvSpPr>
             <a:spLocks noGrp="1"/>
           </p:cNvSpPr>
@@ -4490,7 +4584,7 @@
       </p:sp>
       <p:sp>
         <p:nvSpPr>
-          <p:cNvPr id="1348422592" name="Footer Placeholder 4"/>
+          <p:cNvPr id="1526347768" name="Footer Placeholder 4"/>
           <p:cNvSpPr>
             <a:spLocks noGrp="1"/>
           </p:cNvSpPr>
@@ -4530,7 +4624,7 @@
       </p:sp>
       <p:sp>
         <p:nvSpPr>
-          <p:cNvPr id="1344347001" name="Slide Number Placeholder 5"/>
+          <p:cNvPr id="1695755942" name="Slide Number Placeholder 5"/>
           <p:cNvSpPr>
             <a:spLocks noGrp="1"/>
           </p:cNvSpPr>
@@ -4890,7 +4984,7 @@
       </p:grpSpPr>
       <p:sp>
         <p:nvSpPr>
-          <p:cNvPr id="139658808" name=""/>
+          <p:cNvPr id="1609472921" name=""/>
           <p:cNvSpPr/>
           <p:nvPr/>
         </p:nvSpPr>
@@ -4929,7 +5023,7 @@
       </p:sp>
       <p:pic>
         <p:nvPicPr>
-          <p:cNvPr id="30566192" name=""/>
+          <p:cNvPr id="551503363" name=""/>
           <p:cNvPicPr>
             <a:picLocks noChangeAspect="1"/>
           </p:cNvPicPr>
@@ -4951,7 +5045,7 @@
       </p:pic>
       <p:sp>
         <p:nvSpPr>
-          <p:cNvPr id="1971394027" name=""/>
+          <p:cNvPr id="1627679884" name=""/>
           <p:cNvSpPr/>
           <p:nvPr/>
         </p:nvSpPr>
@@ -5007,7 +5101,7 @@
       </p:sp>
       <p:sp>
         <p:nvSpPr>
-          <p:cNvPr id="1135237242" name=""/>
+          <p:cNvPr id="1345603383" name=""/>
           <p:cNvSpPr txBox="1"/>
           <p:nvPr/>
         </p:nvSpPr>
@@ -5084,7 +5178,7 @@
       </p:sp>
       <p:sp>
         <p:nvSpPr>
-          <p:cNvPr id="117858894" name=""/>
+          <p:cNvPr id="2104715550" name=""/>
           <p:cNvSpPr txBox="1"/>
           <p:nvPr/>
         </p:nvSpPr>
@@ -5247,7 +5341,7 @@
       </p:sp>
       <p:sp>
         <p:nvSpPr>
-          <p:cNvPr id="363764502" name=""/>
+          <p:cNvPr id="5457363" name=""/>
           <p:cNvSpPr/>
           <p:nvPr/>
         </p:nvSpPr>
@@ -5312,7 +5406,7 @@
       </p:sp>
       <p:sp>
         <p:nvSpPr>
-          <p:cNvPr id="949426773" name=""/>
+          <p:cNvPr id="1574066757" name=""/>
           <p:cNvSpPr txBox="1"/>
           <p:nvPr/>
         </p:nvSpPr>
@@ -5379,7 +5473,7 @@
       </p:sp>
       <p:sp>
         <p:nvSpPr>
-          <p:cNvPr id="1211497331" name=""/>
+          <p:cNvPr id="2060502788" name=""/>
           <p:cNvSpPr txBox="1"/>
           <p:nvPr/>
         </p:nvSpPr>
@@ -5462,7 +5556,7 @@
       </p:sp>
       <p:sp>
         <p:nvSpPr>
-          <p:cNvPr id="818352447" name=""/>
+          <p:cNvPr id="861993672" name=""/>
           <p:cNvSpPr txBox="1"/>
           <p:nvPr/>
         </p:nvSpPr>
@@ -5526,7 +5620,7 @@
       </p:sp>
       <p:sp>
         <p:nvSpPr>
-          <p:cNvPr id="516576552" name=""/>
+          <p:cNvPr id="981992103" name=""/>
           <p:cNvSpPr/>
           <p:nvPr/>
         </p:nvSpPr>
@@ -5574,7 +5668,7 @@
       </p:sp>
       <p:pic>
         <p:nvPicPr>
-          <p:cNvPr id="1046520787" name=""/>
+          <p:cNvPr id="337178305" name=""/>
           <p:cNvPicPr>
             <a:picLocks noChangeAspect="1"/>
           </p:cNvPicPr>
@@ -5629,7 +5723,7 @@
       </p:grpSpPr>
       <p:sp>
         <p:nvSpPr>
-          <p:cNvPr id="13536456" name=""/>
+          <p:cNvPr id="614252219" name=""/>
           <p:cNvSpPr/>
           <p:nvPr/>
         </p:nvSpPr>
@@ -5668,7 +5762,7 @@
       </p:sp>
       <p:sp>
         <p:nvSpPr>
-          <p:cNvPr id="1685630268" name=""/>
+          <p:cNvPr id="926558462" name=""/>
           <p:cNvSpPr/>
           <p:nvPr/>
         </p:nvSpPr>
@@ -5733,7 +5827,7 @@
       </p:sp>
       <p:sp>
         <p:nvSpPr>
-          <p:cNvPr id="1289092921" name=""/>
+          <p:cNvPr id="950315088" name=""/>
           <p:cNvSpPr/>
           <p:nvPr/>
         </p:nvSpPr>
@@ -5781,7 +5875,7 @@
       </p:sp>
       <p:pic>
         <p:nvPicPr>
-          <p:cNvPr id="27353603" name=""/>
+          <p:cNvPr id="731183936" name=""/>
           <p:cNvPicPr>
             <a:picLocks noChangeAspect="1"/>
           </p:cNvPicPr>
@@ -5803,7 +5897,7 @@
       </p:pic>
       <p:pic>
         <p:nvPicPr>
-          <p:cNvPr id="466481949" name=""/>
+          <p:cNvPr id="259478270" name=""/>
           <p:cNvPicPr>
             <a:picLocks noChangeAspect="1"/>
           </p:cNvPicPr>
@@ -5825,7 +5919,7 @@
       </p:pic>
       <p:sp>
         <p:nvSpPr>
-          <p:cNvPr id="1764039976" name=""/>
+          <p:cNvPr id="1924586010" name=""/>
           <p:cNvSpPr txBox="1"/>
           <p:nvPr/>
         </p:nvSpPr>
@@ -5873,7 +5967,7 @@
       </p:sp>
       <p:sp>
         <p:nvSpPr>
-          <p:cNvPr id="642930940" name=""/>
+          <p:cNvPr id="2129394602" name=""/>
           <p:cNvSpPr txBox="1"/>
           <p:nvPr/>
         </p:nvSpPr>
@@ -5937,7 +6031,7 @@
       </p:sp>
       <p:sp>
         <p:nvSpPr>
-          <p:cNvPr id="1085023479" name=""/>
+          <p:cNvPr id="1700128984" name=""/>
           <p:cNvSpPr/>
           <p:nvPr/>
         </p:nvSpPr>
@@ -6057,7 +6151,7 @@
       </p:sp>
       <p:pic>
         <p:nvPicPr>
-          <p:cNvPr id="920583437" name=""/>
+          <p:cNvPr id="794151970" name=""/>
           <p:cNvPicPr>
             <a:picLocks noChangeAspect="1"/>
           </p:cNvPicPr>
@@ -6079,7 +6173,7 @@
       </p:pic>
       <p:sp>
         <p:nvSpPr>
-          <p:cNvPr id="1923676603" name=""/>
+          <p:cNvPr id="258273092" name=""/>
           <p:cNvSpPr/>
           <p:nvPr/>
         </p:nvSpPr>
@@ -6216,7 +6310,7 @@
       </p:sp>
       <p:sp>
         <p:nvSpPr>
-          <p:cNvPr id="1960939862" name=""/>
+          <p:cNvPr id="1887953367" name=""/>
           <p:cNvSpPr/>
           <p:nvPr/>
         </p:nvSpPr>
@@ -6368,7 +6462,7 @@
       </p:sp>
       <p:pic>
         <p:nvPicPr>
-          <p:cNvPr id="1536544130" name=""/>
+          <p:cNvPr id="700813947" name=""/>
           <p:cNvPicPr>
             <a:picLocks noChangeAspect="1"/>
           </p:cNvPicPr>
@@ -6390,7 +6484,7 @@
       </p:pic>
       <p:pic>
         <p:nvPicPr>
-          <p:cNvPr id="937472161" name=""/>
+          <p:cNvPr id="1886848166" name=""/>
           <p:cNvPicPr>
             <a:picLocks noChangeAspect="1"/>
           </p:cNvPicPr>
@@ -6412,7 +6506,7 @@
       </p:pic>
       <p:sp>
         <p:nvSpPr>
-          <p:cNvPr id="1256169854" name=""/>
+          <p:cNvPr id="537964259" name=""/>
           <p:cNvSpPr txBox="1"/>
           <p:nvPr/>
         </p:nvSpPr>
@@ -6476,7 +6570,7 @@
       </p:sp>
       <p:sp>
         <p:nvSpPr>
-          <p:cNvPr id="2030338252" name=""/>
+          <p:cNvPr id="534784088" name=""/>
           <p:cNvSpPr txBox="1"/>
           <p:nvPr/>
         </p:nvSpPr>
@@ -6524,7 +6618,7 @@
       </p:sp>
       <p:sp>
         <p:nvSpPr>
-          <p:cNvPr id="1912587219" name=""/>
+          <p:cNvPr id="870365268" name=""/>
           <p:cNvSpPr txBox="1"/>
           <p:nvPr/>
         </p:nvSpPr>
@@ -6594,7 +6688,7 @@
       </p:sp>
       <p:sp>
         <p:nvSpPr>
-          <p:cNvPr id="1501229852" name=""/>
+          <p:cNvPr id="604034066" name=""/>
           <p:cNvSpPr txBox="1"/>
           <p:nvPr/>
         </p:nvSpPr>
@@ -6658,7 +6752,7 @@
       </p:sp>
       <p:pic>
         <p:nvPicPr>
-          <p:cNvPr id="1279205627" name=""/>
+          <p:cNvPr id="501493048" name=""/>
           <p:cNvPicPr>
             <a:picLocks noChangeAspect="1"/>
           </p:cNvPicPr>
@@ -6680,7 +6774,7 @@
       </p:pic>
       <p:sp>
         <p:nvSpPr>
-          <p:cNvPr id="635256852" name=""/>
+          <p:cNvPr id="1238838865" name=""/>
           <p:cNvSpPr txBox="1"/>
           <p:nvPr/>
         </p:nvSpPr>
@@ -6754,7 +6848,7 @@
       </p:sp>
       <p:sp>
         <p:nvSpPr>
-          <p:cNvPr id="369425306" name=""/>
+          <p:cNvPr id="512342524" name=""/>
           <p:cNvSpPr txBox="1"/>
           <p:nvPr/>
         </p:nvSpPr>
@@ -6828,7 +6922,7 @@
       </p:sp>
       <p:pic>
         <p:nvPicPr>
-          <p:cNvPr id="385545195" name=""/>
+          <p:cNvPr id="603311837" name=""/>
           <p:cNvPicPr>
             <a:picLocks noChangeAspect="1"/>
           </p:cNvPicPr>
@@ -6850,7 +6944,7 @@
       </p:pic>
       <p:sp>
         <p:nvSpPr>
-          <p:cNvPr id="1294997800" name=""/>
+          <p:cNvPr id="1660188898" name=""/>
           <p:cNvSpPr txBox="1"/>
           <p:nvPr/>
         </p:nvSpPr>
@@ -6918,7 +7012,7 @@
       </p:sp>
       <p:pic>
         <p:nvPicPr>
-          <p:cNvPr id="1447550397" name=""/>
+          <p:cNvPr id="1155023743" name=""/>
           <p:cNvPicPr>
             <a:picLocks noChangeAspect="1"/>
           </p:cNvPicPr>
@@ -6940,7 +7034,7 @@
       </p:pic>
       <p:sp>
         <p:nvSpPr>
-          <p:cNvPr id="1106979254" name=""/>
+          <p:cNvPr id="562098359" name=""/>
           <p:cNvSpPr txBox="1"/>
           <p:nvPr/>
         </p:nvSpPr>
@@ -7042,7 +7136,7 @@
       </p:grpSpPr>
       <p:sp>
         <p:nvSpPr>
-          <p:cNvPr id="577762285" name=""/>
+          <p:cNvPr id="1017284509" name=""/>
           <p:cNvSpPr/>
           <p:nvPr/>
         </p:nvSpPr>
@@ -7107,7 +7201,7 @@
       </p:sp>
       <p:sp>
         <p:nvSpPr>
-          <p:cNvPr id="181426568" name=""/>
+          <p:cNvPr id="1337212362" name=""/>
           <p:cNvSpPr/>
           <p:nvPr/>
         </p:nvSpPr>
@@ -7155,7 +7249,7 @@
       </p:sp>
       <p:pic>
         <p:nvPicPr>
-          <p:cNvPr id="551020962" name=""/>
+          <p:cNvPr id="1633359795" name=""/>
           <p:cNvPicPr>
             <a:picLocks noChangeAspect="1"/>
           </p:cNvPicPr>
@@ -7177,7 +7271,7 @@
       </p:pic>
       <p:pic>
         <p:nvPicPr>
-          <p:cNvPr id="681433058" name=""/>
+          <p:cNvPr id="68814097" name=""/>
           <p:cNvPicPr>
             <a:picLocks noChangeAspect="1"/>
           </p:cNvPicPr>
@@ -7199,7 +7293,7 @@
       </p:pic>
       <p:sp>
         <p:nvSpPr>
-          <p:cNvPr id="1995105284" name=""/>
+          <p:cNvPr id="594770733" name=""/>
           <p:cNvSpPr txBox="1"/>
           <p:nvPr/>
         </p:nvSpPr>
@@ -7247,7 +7341,7 @@
       </p:sp>
       <p:sp>
         <p:nvSpPr>
-          <p:cNvPr id="269283089" name=""/>
+          <p:cNvPr id="1523886169" name=""/>
           <p:cNvSpPr txBox="1"/>
           <p:nvPr/>
         </p:nvSpPr>
@@ -7311,7 +7405,7 @@
       </p:sp>
       <p:sp>
         <p:nvSpPr>
-          <p:cNvPr id="472724866" name=""/>
+          <p:cNvPr id="209353839" name=""/>
           <p:cNvSpPr txBox="1"/>
           <p:nvPr/>
         </p:nvSpPr>
@@ -7375,7 +7469,7 @@
       </p:sp>
       <p:pic>
         <p:nvPicPr>
-          <p:cNvPr id="1746681559" name=""/>
+          <p:cNvPr id="860691823" name=""/>
           <p:cNvPicPr>
             <a:picLocks noChangeAspect="1"/>
           </p:cNvPicPr>
@@ -7397,7 +7491,7 @@
       </p:pic>
       <p:sp>
         <p:nvSpPr>
-          <p:cNvPr id="1199821910" name=""/>
+          <p:cNvPr id="536474813" name=""/>
           <p:cNvSpPr txBox="1"/>
           <p:nvPr/>
         </p:nvSpPr>
@@ -7471,7 +7565,7 @@
       </p:sp>
       <p:sp>
         <p:nvSpPr>
-          <p:cNvPr id="1359320022" name=""/>
+          <p:cNvPr id="1550688190" name=""/>
           <p:cNvSpPr txBox="1"/>
           <p:nvPr/>
         </p:nvSpPr>
@@ -7545,7 +7639,7 @@
       </p:sp>
       <p:pic>
         <p:nvPicPr>
-          <p:cNvPr id="920153051" name=""/>
+          <p:cNvPr id="546292260" name=""/>
           <p:cNvPicPr>
             <a:picLocks noChangeAspect="1"/>
           </p:cNvPicPr>
@@ -7567,7 +7661,7 @@
       </p:pic>
       <p:sp>
         <p:nvSpPr>
-          <p:cNvPr id="1666561482" name=""/>
+          <p:cNvPr id="2076755548" name=""/>
           <p:cNvSpPr txBox="1"/>
           <p:nvPr/>
         </p:nvSpPr>
@@ -7635,7 +7729,7 @@
       </p:sp>
       <p:pic>
         <p:nvPicPr>
-          <p:cNvPr id="263822882" name=""/>
+          <p:cNvPr id="671047941" name=""/>
           <p:cNvPicPr>
             <a:picLocks noChangeAspect="1"/>
           </p:cNvPicPr>
@@ -7657,7 +7751,7 @@
       </p:pic>
       <p:pic>
         <p:nvPicPr>
-          <p:cNvPr id="1621984436" name=""/>
+          <p:cNvPr id="183283808" name=""/>
           <p:cNvPicPr>
             <a:picLocks noChangeAspect="1"/>
           </p:cNvPicPr>
@@ -7679,7 +7773,7 @@
       </p:pic>
       <p:sp>
         <p:nvSpPr>
-          <p:cNvPr id="1074259333" name=""/>
+          <p:cNvPr id="481924254" name=""/>
           <p:cNvSpPr txBox="1"/>
           <p:nvPr/>
         </p:nvSpPr>
@@ -7727,7 +7821,7 @@
       </p:sp>
       <p:sp>
         <p:nvSpPr>
-          <p:cNvPr id="1008339009" name=""/>
+          <p:cNvPr id="316602180" name=""/>
           <p:cNvSpPr txBox="1"/>
           <p:nvPr/>
         </p:nvSpPr>
@@ -7775,7 +7869,7 @@
       </p:sp>
       <p:sp>
         <p:nvSpPr>
-          <p:cNvPr id="1322675441" name=""/>
+          <p:cNvPr id="1127936871" name=""/>
           <p:cNvSpPr txBox="1"/>
           <p:nvPr/>
         </p:nvSpPr>
@@ -7845,7 +7939,7 @@
       </p:sp>
       <p:sp>
         <p:nvSpPr>
-          <p:cNvPr id="711202120" name=""/>
+          <p:cNvPr id="968560054" name=""/>
           <p:cNvSpPr txBox="1"/>
           <p:nvPr/>
         </p:nvSpPr>
@@ -7909,7 +8003,7 @@
       </p:sp>
       <p:sp>
         <p:nvSpPr>
-          <p:cNvPr id="1957287451" name=""/>
+          <p:cNvPr id="199307082" name=""/>
           <p:cNvSpPr txBox="1"/>
           <p:nvPr/>
         </p:nvSpPr>
@@ -7973,7 +8067,7 @@
       </p:sp>
       <p:sp>
         <p:nvSpPr>
-          <p:cNvPr id="1477342082" name=""/>
+          <p:cNvPr id="1895800463" name=""/>
           <p:cNvSpPr txBox="1"/>
           <p:nvPr/>
         </p:nvSpPr>
@@ -8032,7 +8126,7 @@
       </p:sp>
       <p:sp>
         <p:nvSpPr>
-          <p:cNvPr id="1013120715" name=""/>
+          <p:cNvPr id="1103825347" name=""/>
           <p:cNvSpPr txBox="1"/>
           <p:nvPr/>
         </p:nvSpPr>
@@ -8121,14 +8215,14 @@
       </p:sp>
       <p:sp>
         <p:nvSpPr>
-          <p:cNvPr id="959813473" name=""/>
+          <p:cNvPr id="408456936" name=""/>
           <p:cNvSpPr txBox="1"/>
           <p:nvPr/>
         </p:nvSpPr>
         <p:spPr bwMode="auto">
           <a:xfrm rot="0" flipH="0" flipV="0">
             <a:off x="3460737" y="14556686"/>
-            <a:ext cx="2404950" cy="457560"/>
+            <a:ext cx="2404949" cy="457560"/>
           </a:xfrm>
           <a:prstGeom prst="rect">
             <a:avLst/>
@@ -8166,7 +8260,7 @@
       </p:sp>
       <p:sp>
         <p:nvSpPr>
-          <p:cNvPr id="1002320462" name=""/>
+          <p:cNvPr id="1421133046" name=""/>
           <p:cNvSpPr/>
           <p:nvPr/>
         </p:nvSpPr>
@@ -8231,14 +8325,14 @@
       </p:sp>
       <p:sp>
         <p:nvSpPr>
-          <p:cNvPr id="1610534305" name=""/>
+          <p:cNvPr id="1511488641" name=""/>
           <p:cNvSpPr txBox="1"/>
           <p:nvPr/>
         </p:nvSpPr>
         <p:spPr bwMode="auto">
           <a:xfrm rot="0" flipH="0" flipV="0">
             <a:off x="3507923" y="20348291"/>
-            <a:ext cx="8189572" cy="1248505"/>
+            <a:ext cx="8189572" cy="1248504"/>
           </a:xfrm>
           <a:prstGeom prst="rect">
             <a:avLst/>
@@ -8317,7 +8411,7 @@
       </p:grpSpPr>
       <p:sp>
         <p:nvSpPr>
-          <p:cNvPr id="1168259533" name=""/>
+          <p:cNvPr id="1740085413" name=""/>
           <p:cNvSpPr/>
           <p:nvPr/>
         </p:nvSpPr>
@@ -8382,7 +8476,7 @@
       </p:sp>
       <p:sp>
         <p:nvSpPr>
-          <p:cNvPr id="467049688" name=""/>
+          <p:cNvPr id="638043006" name=""/>
           <p:cNvSpPr/>
           <p:nvPr/>
         </p:nvSpPr>
@@ -8430,7 +8524,7 @@
       </p:sp>
       <p:pic>
         <p:nvPicPr>
-          <p:cNvPr id="2129042697" name=""/>
+          <p:cNvPr id="1075932600" name=""/>
           <p:cNvPicPr>
             <a:picLocks noChangeAspect="1"/>
           </p:cNvPicPr>
@@ -8452,7 +8546,7 @@
       </p:pic>
       <p:sp>
         <p:nvSpPr>
-          <p:cNvPr id="1514909893" name=""/>
+          <p:cNvPr id="402901618" name=""/>
           <p:cNvSpPr txBox="1"/>
           <p:nvPr/>
         </p:nvSpPr>
@@ -8500,7 +8594,7 @@
       </p:sp>
       <p:sp>
         <p:nvSpPr>
-          <p:cNvPr id="852175884" name=""/>
+          <p:cNvPr id="525739065" name=""/>
           <p:cNvSpPr txBox="1"/>
           <p:nvPr/>
         </p:nvSpPr>
@@ -8564,7 +8658,7 @@
       </p:sp>
       <p:pic>
         <p:nvPicPr>
-          <p:cNvPr id="410162496" name=""/>
+          <p:cNvPr id="505897780" name=""/>
           <p:cNvPicPr>
             <a:picLocks noChangeAspect="1"/>
           </p:cNvPicPr>
@@ -8586,7 +8680,7 @@
       </p:pic>
       <p:sp>
         <p:nvSpPr>
-          <p:cNvPr id="190979090" name=""/>
+          <p:cNvPr id="1056343992" name=""/>
           <p:cNvSpPr txBox="1"/>
           <p:nvPr/>
         </p:nvSpPr>
@@ -8660,7 +8754,7 @@
       </p:sp>
       <p:sp>
         <p:nvSpPr>
-          <p:cNvPr id="795365515" name=""/>
+          <p:cNvPr id="520260459" name=""/>
           <p:cNvSpPr txBox="1"/>
           <p:nvPr/>
         </p:nvSpPr>
@@ -8734,7 +8828,7 @@
       </p:sp>
       <p:pic>
         <p:nvPicPr>
-          <p:cNvPr id="1003104381" name=""/>
+          <p:cNvPr id="875902536" name=""/>
           <p:cNvPicPr>
             <a:picLocks noChangeAspect="1"/>
           </p:cNvPicPr>
@@ -8756,7 +8850,7 @@
       </p:pic>
       <p:sp>
         <p:nvSpPr>
-          <p:cNvPr id="1706518789" name=""/>
+          <p:cNvPr id="225856437" name=""/>
           <p:cNvSpPr txBox="1"/>
           <p:nvPr/>
         </p:nvSpPr>
@@ -8824,7 +8918,7 @@
       </p:sp>
       <p:pic>
         <p:nvPicPr>
-          <p:cNvPr id="1366386177" name=""/>
+          <p:cNvPr id="931666149" name=""/>
           <p:cNvPicPr>
             <a:picLocks noChangeAspect="1"/>
           </p:cNvPicPr>
@@ -8846,7 +8940,7 @@
       </p:pic>
       <p:pic>
         <p:nvPicPr>
-          <p:cNvPr id="722719132" name=""/>
+          <p:cNvPr id="1007515097" name=""/>
           <p:cNvPicPr>
             <a:picLocks noChangeAspect="1"/>
           </p:cNvPicPr>
@@ -8868,7 +8962,7 @@
       </p:pic>
       <p:sp>
         <p:nvSpPr>
-          <p:cNvPr id="284583937" name=""/>
+          <p:cNvPr id="796503774" name=""/>
           <p:cNvSpPr txBox="1"/>
           <p:nvPr/>
         </p:nvSpPr>
@@ -8916,7 +9010,7 @@
       </p:sp>
       <p:sp>
         <p:nvSpPr>
-          <p:cNvPr id="796040672" name=""/>
+          <p:cNvPr id="708595366" name=""/>
           <p:cNvSpPr txBox="1"/>
           <p:nvPr/>
         </p:nvSpPr>
@@ -8980,7 +9074,7 @@
       </p:sp>
       <p:sp>
         <p:nvSpPr>
-          <p:cNvPr id="1532523514" name=""/>
+          <p:cNvPr id="483115276" name=""/>
           <p:cNvSpPr txBox="1"/>
           <p:nvPr/>
         </p:nvSpPr>
@@ -9039,7 +9133,7 @@
       </p:sp>
       <p:sp>
         <p:nvSpPr>
-          <p:cNvPr id="1403417480" name=""/>
+          <p:cNvPr id="1512675659" name=""/>
           <p:cNvSpPr txBox="1"/>
           <p:nvPr/>
         </p:nvSpPr>
@@ -9128,7 +9222,7 @@
       </p:sp>
       <p:sp>
         <p:nvSpPr>
-          <p:cNvPr id="502206864" name=""/>
+          <p:cNvPr id="727326945" name=""/>
           <p:cNvSpPr txBox="1"/>
           <p:nvPr/>
         </p:nvSpPr>
@@ -9173,7 +9267,7 @@
       </p:sp>
       <p:sp>
         <p:nvSpPr>
-          <p:cNvPr id="587388836" name=""/>
+          <p:cNvPr id="595549461" name=""/>
           <p:cNvSpPr/>
           <p:nvPr/>
         </p:nvSpPr>
@@ -9238,14 +9332,14 @@
       </p:sp>
       <p:sp>
         <p:nvSpPr>
-          <p:cNvPr id="756199137" name=""/>
+          <p:cNvPr id="2013186638" name=""/>
           <p:cNvSpPr txBox="1"/>
           <p:nvPr/>
         </p:nvSpPr>
         <p:spPr bwMode="auto">
           <a:xfrm rot="0" flipH="0" flipV="0">
             <a:off x="3507923" y="4917792"/>
-            <a:ext cx="8189213" cy="1248505"/>
+            <a:ext cx="8189213" cy="1248504"/>
           </a:xfrm>
           <a:prstGeom prst="rect">
             <a:avLst/>
@@ -9286,7 +9380,7 @@
       </p:sp>
       <p:sp>
         <p:nvSpPr>
-          <p:cNvPr id="374133672" name=""/>
+          <p:cNvPr id="1110458012" name=""/>
           <p:cNvSpPr txBox="1"/>
           <p:nvPr/>
         </p:nvSpPr>
@@ -9350,7 +9444,7 @@
       </p:sp>
       <p:sp>
         <p:nvSpPr>
-          <p:cNvPr id="1945219299" name=""/>
+          <p:cNvPr id="1420952454" name=""/>
           <p:cNvSpPr txBox="1"/>
           <p:nvPr/>
         </p:nvSpPr>
@@ -9414,7 +9508,7 @@
       </p:sp>
       <p:sp>
         <p:nvSpPr>
-          <p:cNvPr id="1344223365" name=""/>
+          <p:cNvPr id="1799027542" name=""/>
           <p:cNvSpPr txBox="1"/>
           <p:nvPr/>
         </p:nvSpPr>
@@ -9462,14 +9556,14 @@
       </p:sp>
       <p:sp>
         <p:nvSpPr>
-          <p:cNvPr id="857260244" name=""/>
+          <p:cNvPr id="1657545075" name=""/>
           <p:cNvSpPr txBox="1"/>
           <p:nvPr/>
         </p:nvSpPr>
         <p:spPr bwMode="auto">
           <a:xfrm rot="0" flipH="0" flipV="0">
             <a:off x="3310561" y="16226658"/>
-            <a:ext cx="8522165" cy="1248505"/>
+            <a:ext cx="8522165" cy="1248504"/>
           </a:xfrm>
           <a:prstGeom prst="rect">
             <a:avLst/>
@@ -9510,7 +9604,7 @@
       </p:sp>
       <p:sp>
         <p:nvSpPr>
-          <p:cNvPr id="1399402878" name=""/>
+          <p:cNvPr id="1062177842" name=""/>
           <p:cNvSpPr txBox="1"/>
           <p:nvPr/>
         </p:nvSpPr>
@@ -9606,7 +9700,7 @@
       </p:grpSpPr>
       <p:sp>
         <p:nvSpPr>
-          <p:cNvPr id="1216558913" name=""/>
+          <p:cNvPr id="1254168573" name=""/>
           <p:cNvSpPr/>
           <p:nvPr/>
         </p:nvSpPr>
@@ -9671,7 +9765,7 @@
       </p:sp>
       <p:sp>
         <p:nvSpPr>
-          <p:cNvPr id="904158174" name=""/>
+          <p:cNvPr id="1302776887" name=""/>
           <p:cNvSpPr/>
           <p:nvPr/>
         </p:nvSpPr>
@@ -9719,7 +9813,7 @@
       </p:sp>
       <p:pic>
         <p:nvPicPr>
-          <p:cNvPr id="411237962" name=""/>
+          <p:cNvPr id="856072533" name=""/>
           <p:cNvPicPr>
             <a:picLocks noChangeAspect="1"/>
           </p:cNvPicPr>
@@ -9741,14 +9835,14 @@
       </p:pic>
       <p:sp>
         <p:nvSpPr>
-          <p:cNvPr id="999336832" name=""/>
+          <p:cNvPr id="1537947201" name=""/>
           <p:cNvSpPr txBox="1"/>
           <p:nvPr/>
         </p:nvSpPr>
         <p:spPr bwMode="auto">
           <a:xfrm rot="0" flipH="0" flipV="0">
             <a:off x="444821" y="1271871"/>
-            <a:ext cx="1822594" cy="2019642"/>
+            <a:ext cx="1822593" cy="2019642"/>
           </a:xfrm>
           <a:prstGeom prst="rect">
             <a:avLst/>
@@ -9789,13 +9883,13 @@
       </p:sp>
       <p:sp>
         <p:nvSpPr>
-          <p:cNvPr id="1245143868" name=""/>
+          <p:cNvPr id="1439561167" name=""/>
           <p:cNvSpPr txBox="1"/>
           <p:nvPr/>
         </p:nvSpPr>
         <p:spPr bwMode="auto">
           <a:xfrm rot="0" flipH="0" flipV="0">
-            <a:off x="4652731" y="-14340531"/>
+            <a:off x="4652731" y="-14340530"/>
             <a:ext cx="6241091" cy="722730"/>
           </a:xfrm>
           <a:prstGeom prst="rect">
@@ -9853,14 +9947,14 @@
       </p:sp>
       <p:sp>
         <p:nvSpPr>
-          <p:cNvPr id="673549486" name=""/>
+          <p:cNvPr id="636432696" name=""/>
           <p:cNvSpPr txBox="1"/>
           <p:nvPr/>
         </p:nvSpPr>
         <p:spPr bwMode="auto">
           <a:xfrm rot="0" flipH="0" flipV="0">
             <a:off x="3450540" y="-9489458"/>
-            <a:ext cx="8145294" cy="2405211"/>
+            <a:ext cx="8145293" cy="2405211"/>
           </a:xfrm>
           <a:prstGeom prst="rect">
             <a:avLst/>
@@ -9912,7 +10006,7 @@
       </p:sp>
       <p:sp>
         <p:nvSpPr>
-          <p:cNvPr id="1912453186" name=""/>
+          <p:cNvPr id="1626810040" name=""/>
           <p:cNvSpPr txBox="1"/>
           <p:nvPr/>
         </p:nvSpPr>
@@ -9957,7 +10051,7 @@
       </p:sp>
       <p:sp>
         <p:nvSpPr>
-          <p:cNvPr id="1161379053" name=""/>
+          <p:cNvPr id="873441542" name=""/>
           <p:cNvSpPr/>
           <p:nvPr/>
         </p:nvSpPr>
@@ -10022,14 +10116,14 @@
       </p:sp>
       <p:sp>
         <p:nvSpPr>
-          <p:cNvPr id="1708734239" name=""/>
+          <p:cNvPr id="1345486035" name=""/>
           <p:cNvSpPr txBox="1"/>
           <p:nvPr/>
         </p:nvSpPr>
         <p:spPr bwMode="auto">
           <a:xfrm rot="0" flipH="0" flipV="0">
             <a:off x="3507923" y="-1951197"/>
-            <a:ext cx="8189213" cy="1248505"/>
+            <a:ext cx="8189213" cy="1248504"/>
           </a:xfrm>
           <a:prstGeom prst="rect">
             <a:avLst/>
@@ -10070,7 +10164,7 @@
       </p:sp>
       <p:sp>
         <p:nvSpPr>
-          <p:cNvPr id="784112469" name=""/>
+          <p:cNvPr id="1352901232" name=""/>
           <p:cNvSpPr txBox="1"/>
           <p:nvPr/>
         </p:nvSpPr>
@@ -10159,7 +10253,7 @@
       </p:sp>
       <p:sp>
         <p:nvSpPr>
-          <p:cNvPr id="1797164066" name=""/>
+          <p:cNvPr id="1957203736" name=""/>
           <p:cNvSpPr txBox="1"/>
           <p:nvPr/>
         </p:nvSpPr>
@@ -10223,7 +10317,7 @@
       </p:sp>
       <p:sp>
         <p:nvSpPr>
-          <p:cNvPr id="1101467797" name=""/>
+          <p:cNvPr id="159388117" name=""/>
           <p:cNvSpPr txBox="1"/>
           <p:nvPr/>
         </p:nvSpPr>
@@ -10287,7 +10381,7 @@
       </p:sp>
       <p:sp>
         <p:nvSpPr>
-          <p:cNvPr id="376419297" name=""/>
+          <p:cNvPr id="214170479" name=""/>
           <p:cNvSpPr txBox="1"/>
           <p:nvPr/>
         </p:nvSpPr>
@@ -10335,14 +10429,14 @@
       </p:sp>
       <p:sp>
         <p:nvSpPr>
-          <p:cNvPr id="841200936" name=""/>
+          <p:cNvPr id="2037922031" name=""/>
           <p:cNvSpPr txBox="1"/>
           <p:nvPr/>
         </p:nvSpPr>
         <p:spPr bwMode="auto">
           <a:xfrm rot="0" flipH="0" flipV="0">
-            <a:off x="3310562" y="3939409"/>
-            <a:ext cx="8521806" cy="1248505"/>
+            <a:off x="3310562" y="3939408"/>
+            <a:ext cx="8521806" cy="1248504"/>
           </a:xfrm>
           <a:prstGeom prst="rect">
             <a:avLst/>
@@ -10383,7 +10477,7 @@
       </p:sp>
       <p:sp>
         <p:nvSpPr>
-          <p:cNvPr id="956701801" name=""/>
+          <p:cNvPr id="1532598785" name=""/>
           <p:cNvSpPr txBox="1"/>
           <p:nvPr/>
         </p:nvSpPr>
@@ -10439,6 +10533,363 @@
           </a:p>
         </p:txBody>
       </p:sp>
+      <p:sp>
+        <p:nvSpPr>
+          <p:cNvPr id="1607020938" name=""/>
+          <p:cNvSpPr txBox="1"/>
+          <p:nvPr/>
+        </p:nvSpPr>
+        <p:spPr bwMode="auto">
+          <a:xfrm rot="0" flipH="0" flipV="0">
+            <a:off x="4062103" y="7537622"/>
+            <a:ext cx="7435298" cy="722730"/>
+          </a:xfrm>
+          <a:prstGeom prst="rect">
+            <a:avLst/>
+          </a:prstGeom>
+          <a:noFill/>
+        </p:spPr>
+        <p:txBody>
+          <a:bodyPr vertOverflow="overflow" horzOverflow="overflow" vert="horz" wrap="square" lIns="91440" tIns="45720" rIns="91440" bIns="45720" numCol="1" spcCol="0" rtlCol="0" fromWordArt="0" anchor="ctr" anchorCtr="0" forceAA="0" upright="0" compatLnSpc="0">
+            <a:spAutoFit/>
+          </a:bodyPr>
+          <a:p>
+            <a:pPr algn="ctr">
+              <a:lnSpc>
+                <a:spcPct val="114999"/>
+              </a:lnSpc>
+              <a:defRPr/>
+            </a:pPr>
+            <a:r>
+              <a:rPr sz="3600" b="1">
+                <a:gradFill>
+                  <a:gsLst>
+                    <a:gs pos="0">
+                      <a:srgbClr val="00B0F0"/>
+                    </a:gs>
+                    <a:gs pos="100000">
+                      <a:srgbClr val="00F0E0"/>
+                    </a:gs>
+                  </a:gsLst>
+                  <a:lin ang="13500000" scaled="1"/>
+                </a:gradFill>
+                <a:latin typeface="Comfortaa"/>
+                <a:ea typeface="Comfortaa"/>
+                <a:cs typeface="Comfortaa"/>
+              </a:rPr>
+              <a:t>Defend Against SQL Injection</a:t>
+            </a:r>
+            <a:endParaRPr sz="3600" b="1">
+              <a:gradFill>
+                <a:gsLst>
+                  <a:gs pos="0">
+                    <a:srgbClr val="00B0F0"/>
+                  </a:gs>
+                  <a:gs pos="100000">
+                    <a:srgbClr val="00F0E0"/>
+                  </a:gs>
+                </a:gsLst>
+                <a:lin ang="13500000" scaled="1"/>
+              </a:gradFill>
+              <a:latin typeface="Comfortaa"/>
+              <a:cs typeface="Comfortaa"/>
+            </a:endParaRPr>
+          </a:p>
+        </p:txBody>
+      </p:sp>
+      <p:pic>
+        <p:nvPicPr>
+          <p:cNvPr id="1947793003" name=""/>
+          <p:cNvPicPr>
+            <a:picLocks noChangeAspect="1"/>
+          </p:cNvPicPr>
+          <p:nvPr/>
+        </p:nvPicPr>
+        <p:blipFill rotWithShape="1">
+          <a:blip r:embed="rId4"/>
+          <a:stretch/>
+        </p:blipFill>
+        <p:spPr bwMode="auto">
+          <a:xfrm flipH="0" flipV="0">
+            <a:off x="3262936" y="9581344"/>
+            <a:ext cx="1424337" cy="1424337"/>
+          </a:xfrm>
+          <a:prstGeom prst="rect">
+            <a:avLst/>
+          </a:prstGeom>
+        </p:spPr>
+      </p:pic>
+      <p:sp>
+        <p:nvSpPr>
+          <p:cNvPr id="212916082" name=""/>
+          <p:cNvSpPr txBox="1"/>
+          <p:nvPr/>
+        </p:nvSpPr>
+        <p:spPr bwMode="auto">
+          <a:xfrm rot="0" flipH="0" flipV="0">
+            <a:off x="4887299" y="9644538"/>
+            <a:ext cx="7192453" cy="1213454"/>
+          </a:xfrm>
+          <a:prstGeom prst="rect">
+            <a:avLst/>
+          </a:prstGeom>
+          <a:noFill/>
+        </p:spPr>
+        <p:txBody>
+          <a:bodyPr vertOverflow="overflow" horzOverflow="overflow" vert="horz" wrap="square" lIns="91440" tIns="45720" rIns="91440" bIns="45720" numCol="1" spcCol="0" rtlCol="0" fromWordArt="0" anchor="t" anchorCtr="0" forceAA="0" upright="0" compatLnSpc="0">
+            <a:spAutoFit/>
+          </a:bodyPr>
+          <a:p>
+            <a:pPr algn="just">
+              <a:lnSpc>
+                <a:spcPct val="114999"/>
+              </a:lnSpc>
+              <a:defRPr/>
+            </a:pPr>
+            <a:r>
+              <a:rPr sz="2200" b="1">
+                <a:solidFill>
+                  <a:schemeClr val="bg1"/>
+                </a:solidFill>
+                <a:latin typeface="Comfortaa"/>
+                <a:ea typeface="Comfortaa"/>
+                <a:cs typeface="Comfortaa"/>
+              </a:rPr>
+              <a:t>Parameterized Queries (Prepared Statements)</a:t>
+            </a:r>
+            <a:r>
+              <a:rPr sz="2400" b="1">
+                <a:solidFill>
+                  <a:schemeClr val="bg1"/>
+                </a:solidFill>
+                <a:latin typeface="Comfortaa"/>
+                <a:ea typeface="Comfortaa"/>
+                <a:cs typeface="Comfortaa"/>
+              </a:rPr>
+              <a:t> :</a:t>
+            </a:r>
+            <a:endParaRPr sz="2200" b="1">
+              <a:solidFill>
+                <a:schemeClr val="bg1"/>
+              </a:solidFill>
+              <a:latin typeface="Comfortaa"/>
+              <a:cs typeface="Comfortaa"/>
+            </a:endParaRPr>
+          </a:p>
+          <a:p>
+            <a:pPr algn="just">
+              <a:lnSpc>
+                <a:spcPct val="114999"/>
+              </a:lnSpc>
+              <a:defRPr/>
+            </a:pPr>
+            <a:r>
+              <a:rPr sz="2000" b="1">
+                <a:solidFill>
+                  <a:schemeClr val="bg1"/>
+                </a:solidFill>
+                <a:latin typeface="Comfortaa"/>
+                <a:ea typeface="Comfortaa"/>
+                <a:cs typeface="Comfortaa"/>
+              </a:rPr>
+              <a:t>Pemisahan antara data input dengan kode yang dapat dijalankan database</a:t>
+            </a:r>
+            <a:endParaRPr sz="2200" b="1">
+              <a:solidFill>
+                <a:schemeClr val="bg1"/>
+              </a:solidFill>
+              <a:latin typeface="Comfortaa"/>
+              <a:cs typeface="Comfortaa"/>
+            </a:endParaRPr>
+          </a:p>
+        </p:txBody>
+      </p:sp>
+      <p:sp>
+        <p:nvSpPr>
+          <p:cNvPr id="389844842" name=""/>
+          <p:cNvSpPr txBox="1"/>
+          <p:nvPr/>
+        </p:nvSpPr>
+        <p:spPr bwMode="auto">
+          <a:xfrm rot="0" flipH="0" flipV="0">
+            <a:off x="4945599" y="14265924"/>
+            <a:ext cx="7135594" cy="1213454"/>
+          </a:xfrm>
+          <a:prstGeom prst="rect">
+            <a:avLst/>
+          </a:prstGeom>
+          <a:noFill/>
+        </p:spPr>
+        <p:txBody>
+          <a:bodyPr vertOverflow="overflow" horzOverflow="overflow" vert="horz" wrap="square" lIns="91440" tIns="45720" rIns="91440" bIns="45720" numCol="1" spcCol="0" rtlCol="0" fromWordArt="0" anchor="t" anchorCtr="0" forceAA="0" upright="0" compatLnSpc="0">
+            <a:spAutoFit/>
+          </a:bodyPr>
+          <a:p>
+            <a:pPr algn="just">
+              <a:lnSpc>
+                <a:spcPct val="114999"/>
+              </a:lnSpc>
+              <a:defRPr/>
+            </a:pPr>
+            <a:r>
+              <a:rPr sz="2400" b="1">
+                <a:solidFill>
+                  <a:schemeClr val="bg1"/>
+                </a:solidFill>
+                <a:latin typeface="Comfortaa"/>
+                <a:ea typeface="Comfortaa"/>
+                <a:cs typeface="Comfortaa"/>
+              </a:rPr>
+              <a:t>Least Privilege :</a:t>
+            </a:r>
+            <a:endParaRPr sz="2200" b="1">
+              <a:solidFill>
+                <a:schemeClr val="bg1"/>
+              </a:solidFill>
+              <a:latin typeface="Comfortaa"/>
+              <a:cs typeface="Comfortaa"/>
+            </a:endParaRPr>
+          </a:p>
+          <a:p>
+            <a:pPr algn="just">
+              <a:lnSpc>
+                <a:spcPct val="114999"/>
+              </a:lnSpc>
+              <a:defRPr/>
+            </a:pPr>
+            <a:r>
+              <a:rPr lang="en-US" sz="2000" b="1" i="0" u="none" strike="noStrike" cap="none" spc="0">
+                <a:solidFill>
+                  <a:schemeClr val="bg1"/>
+                </a:solidFill>
+                <a:latin typeface="Comfortaa"/>
+                <a:ea typeface="Comfortaa"/>
+                <a:cs typeface="Comfortaa"/>
+              </a:rPr>
+              <a:t>Pembatasan akses database berdasarkan akun database untuk mengurangi dampak serangan</a:t>
+            </a:r>
+            <a:endParaRPr sz="2200" b="1">
+              <a:solidFill>
+                <a:schemeClr val="bg1"/>
+              </a:solidFill>
+              <a:latin typeface="Comfortaa"/>
+              <a:cs typeface="Comfortaa"/>
+            </a:endParaRPr>
+          </a:p>
+        </p:txBody>
+      </p:sp>
+      <p:sp>
+        <p:nvSpPr>
+          <p:cNvPr id="10860005" name=""/>
+          <p:cNvSpPr txBox="1"/>
+          <p:nvPr/>
+        </p:nvSpPr>
+        <p:spPr bwMode="auto">
+          <a:xfrm rot="0" flipH="0" flipV="0">
+            <a:off x="4945599" y="21173309"/>
+            <a:ext cx="7135234" cy="1067159"/>
+          </a:xfrm>
+          <a:prstGeom prst="rect">
+            <a:avLst/>
+          </a:prstGeom>
+          <a:noFill/>
+        </p:spPr>
+        <p:txBody>
+          <a:bodyPr vertOverflow="overflow" horzOverflow="overflow" vert="horz" wrap="square" lIns="91440" tIns="45720" rIns="91440" bIns="45720" numCol="1" spcCol="0" rtlCol="0" fromWordArt="0" anchor="t" anchorCtr="0" forceAA="0" upright="0" compatLnSpc="0">
+            <a:spAutoFit/>
+          </a:bodyPr>
+          <a:p>
+            <a:pPr algn="just">
+              <a:defRPr/>
+            </a:pPr>
+            <a:r>
+              <a:rPr sz="2400" b="1">
+                <a:solidFill>
+                  <a:schemeClr val="bg1"/>
+                </a:solidFill>
+                <a:latin typeface="Comfortaa"/>
+                <a:ea typeface="Comfortaa"/>
+                <a:cs typeface="Comfortaa"/>
+              </a:rPr>
+              <a:t>Input Validation :</a:t>
+            </a:r>
+            <a:endParaRPr sz="2200" b="1">
+              <a:solidFill>
+                <a:schemeClr val="bg1"/>
+              </a:solidFill>
+              <a:latin typeface="Comfortaa"/>
+              <a:cs typeface="Comfortaa"/>
+            </a:endParaRPr>
+          </a:p>
+          <a:p>
+            <a:pPr algn="just">
+              <a:defRPr/>
+            </a:pPr>
+            <a:r>
+              <a:rPr sz="2000" b="1">
+                <a:solidFill>
+                  <a:schemeClr val="bg1"/>
+                </a:solidFill>
+                <a:latin typeface="Comfortaa"/>
+                <a:ea typeface="Comfortaa"/>
+                <a:cs typeface="Comfortaa"/>
+              </a:rPr>
+              <a:t>Validasi apakah input yang diterima sesuai dengan karakter yang sudah ditentukan </a:t>
+            </a:r>
+            <a:endParaRPr sz="2200" b="1">
+              <a:solidFill>
+                <a:schemeClr val="bg1"/>
+              </a:solidFill>
+              <a:latin typeface="Comfortaa"/>
+              <a:cs typeface="Comfortaa"/>
+            </a:endParaRPr>
+          </a:p>
+        </p:txBody>
+      </p:sp>
+      <p:pic>
+        <p:nvPicPr>
+          <p:cNvPr id="629407294" name=""/>
+          <p:cNvPicPr>
+            <a:picLocks noChangeAspect="1"/>
+          </p:cNvPicPr>
+          <p:nvPr/>
+        </p:nvPicPr>
+        <p:blipFill rotWithShape="1">
+          <a:blip r:embed="rId5"/>
+          <a:stretch/>
+        </p:blipFill>
+        <p:spPr bwMode="auto">
+          <a:xfrm flipH="0" flipV="0">
+            <a:off x="3445725" y="14279697"/>
+            <a:ext cx="1232754" cy="1150839"/>
+          </a:xfrm>
+          <a:prstGeom prst="rect">
+            <a:avLst/>
+          </a:prstGeom>
+        </p:spPr>
+      </p:pic>
+      <p:pic>
+        <p:nvPicPr>
+          <p:cNvPr id="1133365776" name=""/>
+          <p:cNvPicPr>
+            <a:picLocks noChangeAspect="1"/>
+          </p:cNvPicPr>
+          <p:nvPr/>
+        </p:nvPicPr>
+        <p:blipFill rotWithShape="1">
+          <a:blip r:embed="rId6"/>
+          <a:stretch/>
+        </p:blipFill>
+        <p:spPr bwMode="auto">
+          <a:xfrm flipH="0" flipV="0">
+            <a:off x="3349935" y="20990552"/>
+            <a:ext cx="1424337" cy="1343148"/>
+          </a:xfrm>
+          <a:prstGeom prst="rect">
+            <a:avLst/>
+          </a:prstGeom>
+        </p:spPr>
+      </p:pic>
     </p:spTree>
   </p:cSld>
   <p:clrMapOvr>
@@ -10479,7 +10930,7 @@
       </p:grpSpPr>
       <p:sp>
         <p:nvSpPr>
-          <p:cNvPr id="432938650" name=""/>
+          <p:cNvPr id="2094762456" name=""/>
           <p:cNvSpPr/>
           <p:nvPr/>
         </p:nvSpPr>
@@ -10544,7 +10995,7 @@
       </p:sp>
       <p:sp>
         <p:nvSpPr>
-          <p:cNvPr id="853866749" name=""/>
+          <p:cNvPr id="2132061874" name=""/>
           <p:cNvSpPr/>
           <p:nvPr/>
         </p:nvSpPr>
@@ -10592,7 +11043,7 @@
       </p:sp>
       <p:pic>
         <p:nvPicPr>
-          <p:cNvPr id="1500000200" name=""/>
+          <p:cNvPr id="1264472588" name=""/>
           <p:cNvPicPr>
             <a:picLocks noChangeAspect="1"/>
           </p:cNvPicPr>
@@ -10614,14 +11065,14 @@
       </p:pic>
       <p:sp>
         <p:nvSpPr>
-          <p:cNvPr id="1368111089" name=""/>
+          <p:cNvPr id="112715406" name=""/>
           <p:cNvSpPr txBox="1"/>
           <p:nvPr/>
         </p:nvSpPr>
         <p:spPr bwMode="auto">
           <a:xfrm rot="0" flipH="0" flipV="0">
             <a:off x="444821" y="1271871"/>
-            <a:ext cx="1822594" cy="2019642"/>
+            <a:ext cx="1822593" cy="2019642"/>
           </a:xfrm>
           <a:prstGeom prst="rect">
             <a:avLst/>
@@ -10662,7 +11113,7 @@
       </p:sp>
       <p:sp>
         <p:nvSpPr>
-          <p:cNvPr id="183840881" name=""/>
+          <p:cNvPr id="2135154762" name=""/>
           <p:cNvSpPr txBox="1"/>
           <p:nvPr/>
         </p:nvSpPr>
@@ -10726,7 +11177,7 @@
       </p:sp>
       <p:sp>
         <p:nvSpPr>
-          <p:cNvPr id="315756444" name=""/>
+          <p:cNvPr id="1780926275" name=""/>
           <p:cNvSpPr txBox="1"/>
           <p:nvPr/>
         </p:nvSpPr>
@@ -10790,7 +11241,7 @@
       </p:sp>
       <p:sp>
         <p:nvSpPr>
-          <p:cNvPr id="764713504" name=""/>
+          <p:cNvPr id="707894944" name=""/>
           <p:cNvSpPr txBox="1"/>
           <p:nvPr/>
         </p:nvSpPr>
@@ -10838,14 +11289,14 @@
       </p:sp>
       <p:sp>
         <p:nvSpPr>
-          <p:cNvPr id="722528893" name=""/>
+          <p:cNvPr id="1100992763" name=""/>
           <p:cNvSpPr txBox="1"/>
           <p:nvPr/>
         </p:nvSpPr>
         <p:spPr bwMode="auto">
           <a:xfrm rot="0" flipH="0" flipV="0">
             <a:off x="3310562" y="-4633090"/>
-            <a:ext cx="8521806" cy="1248505"/>
+            <a:ext cx="8521806" cy="1248504"/>
           </a:xfrm>
           <a:prstGeom prst="rect">
             <a:avLst/>
@@ -10886,7 +11337,7 @@
       </p:sp>
       <p:sp>
         <p:nvSpPr>
-          <p:cNvPr id="1744313163" name=""/>
+          <p:cNvPr id="302998254" name=""/>
           <p:cNvSpPr txBox="1"/>
           <p:nvPr/>
         </p:nvSpPr>
@@ -10944,14 +11395,14 @@
       </p:sp>
       <p:sp>
         <p:nvSpPr>
-          <p:cNvPr id="684766738" name=""/>
+          <p:cNvPr id="1496831055" name=""/>
           <p:cNvSpPr txBox="1"/>
           <p:nvPr/>
         </p:nvSpPr>
         <p:spPr bwMode="auto">
           <a:xfrm rot="0" flipH="0" flipV="0">
-            <a:off x="4284572" y="319251"/>
-            <a:ext cx="6989284" cy="722730"/>
+            <a:off x="4062104" y="319610"/>
+            <a:ext cx="7434938" cy="722730"/>
           </a:xfrm>
           <a:prstGeom prst="rect">
             <a:avLst/>
@@ -11006,6 +11457,877 @@
           </a:p>
         </p:txBody>
       </p:sp>
+      <p:pic>
+        <p:nvPicPr>
+          <p:cNvPr id="1396690165" name=""/>
+          <p:cNvPicPr>
+            <a:picLocks noChangeAspect="1"/>
+          </p:cNvPicPr>
+          <p:nvPr/>
+        </p:nvPicPr>
+        <p:blipFill rotWithShape="1">
+          <a:blip r:embed="rId4"/>
+          <a:stretch/>
+        </p:blipFill>
+        <p:spPr bwMode="auto">
+          <a:xfrm flipH="0" flipV="0">
+            <a:off x="3262936" y="1411011"/>
+            <a:ext cx="1424337" cy="1424337"/>
+          </a:xfrm>
+          <a:prstGeom prst="rect">
+            <a:avLst/>
+          </a:prstGeom>
+        </p:spPr>
+      </p:pic>
+      <p:sp>
+        <p:nvSpPr>
+          <p:cNvPr id="655546638" name=""/>
+          <p:cNvSpPr txBox="1"/>
+          <p:nvPr/>
+        </p:nvSpPr>
+        <p:spPr bwMode="auto">
+          <a:xfrm rot="0" flipH="0" flipV="0">
+            <a:off x="4887299" y="1474205"/>
+            <a:ext cx="7192094" cy="1213454"/>
+          </a:xfrm>
+          <a:prstGeom prst="rect">
+            <a:avLst/>
+          </a:prstGeom>
+          <a:noFill/>
+        </p:spPr>
+        <p:txBody>
+          <a:bodyPr vertOverflow="overflow" horzOverflow="overflow" vert="horz" wrap="square" lIns="91440" tIns="45720" rIns="91440" bIns="45720" numCol="1" spcCol="0" rtlCol="0" fromWordArt="0" anchor="t" anchorCtr="0" forceAA="0" upright="0" compatLnSpc="0">
+            <a:spAutoFit/>
+          </a:bodyPr>
+          <a:p>
+            <a:pPr algn="just">
+              <a:lnSpc>
+                <a:spcPct val="114999"/>
+              </a:lnSpc>
+              <a:defRPr/>
+            </a:pPr>
+            <a:r>
+              <a:rPr sz="2200" b="1">
+                <a:solidFill>
+                  <a:schemeClr val="bg1"/>
+                </a:solidFill>
+                <a:latin typeface="Comfortaa"/>
+                <a:ea typeface="Comfortaa"/>
+                <a:cs typeface="Comfortaa"/>
+              </a:rPr>
+              <a:t>Parameterized Queries (Prepared Statements)</a:t>
+            </a:r>
+            <a:r>
+              <a:rPr sz="2400" b="1">
+                <a:solidFill>
+                  <a:schemeClr val="bg1"/>
+                </a:solidFill>
+                <a:latin typeface="Comfortaa"/>
+                <a:ea typeface="Comfortaa"/>
+                <a:cs typeface="Comfortaa"/>
+              </a:rPr>
+              <a:t> :</a:t>
+            </a:r>
+            <a:endParaRPr sz="2200" b="1">
+              <a:solidFill>
+                <a:schemeClr val="bg1"/>
+              </a:solidFill>
+              <a:latin typeface="Comfortaa"/>
+              <a:cs typeface="Comfortaa"/>
+            </a:endParaRPr>
+          </a:p>
+          <a:p>
+            <a:pPr algn="just">
+              <a:lnSpc>
+                <a:spcPct val="114999"/>
+              </a:lnSpc>
+              <a:defRPr/>
+            </a:pPr>
+            <a:r>
+              <a:rPr sz="2000" b="1">
+                <a:solidFill>
+                  <a:schemeClr val="bg1"/>
+                </a:solidFill>
+                <a:latin typeface="Comfortaa"/>
+                <a:ea typeface="Comfortaa"/>
+                <a:cs typeface="Comfortaa"/>
+              </a:rPr>
+              <a:t>Pemisahan antara data input dengan kode yang dapat dijalankan database</a:t>
+            </a:r>
+            <a:endParaRPr sz="2200" b="1">
+              <a:solidFill>
+                <a:schemeClr val="bg1"/>
+              </a:solidFill>
+              <a:latin typeface="Comfortaa"/>
+              <a:cs typeface="Comfortaa"/>
+            </a:endParaRPr>
+          </a:p>
+        </p:txBody>
+      </p:sp>
+      <p:sp>
+        <p:nvSpPr>
+          <p:cNvPr id="1003500205" name=""/>
+          <p:cNvSpPr txBox="1"/>
+          <p:nvPr/>
+        </p:nvSpPr>
+        <p:spPr bwMode="auto">
+          <a:xfrm rot="0" flipH="0" flipV="0">
+            <a:off x="4945599" y="3238090"/>
+            <a:ext cx="7135235" cy="1213454"/>
+          </a:xfrm>
+          <a:prstGeom prst="rect">
+            <a:avLst/>
+          </a:prstGeom>
+          <a:noFill/>
+        </p:spPr>
+        <p:txBody>
+          <a:bodyPr vertOverflow="overflow" horzOverflow="overflow" vert="horz" wrap="square" lIns="91440" tIns="45720" rIns="91440" bIns="45720" numCol="1" spcCol="0" rtlCol="0" fromWordArt="0" anchor="t" anchorCtr="0" forceAA="0" upright="0" compatLnSpc="0">
+            <a:spAutoFit/>
+          </a:bodyPr>
+          <a:p>
+            <a:pPr algn="just">
+              <a:lnSpc>
+                <a:spcPct val="114999"/>
+              </a:lnSpc>
+              <a:defRPr/>
+            </a:pPr>
+            <a:r>
+              <a:rPr sz="2400" b="1">
+                <a:solidFill>
+                  <a:schemeClr val="bg1"/>
+                </a:solidFill>
+                <a:latin typeface="Comfortaa"/>
+                <a:ea typeface="Comfortaa"/>
+                <a:cs typeface="Comfortaa"/>
+              </a:rPr>
+              <a:t>Least Privilege :</a:t>
+            </a:r>
+            <a:endParaRPr sz="2200" b="1">
+              <a:solidFill>
+                <a:schemeClr val="bg1"/>
+              </a:solidFill>
+              <a:latin typeface="Comfortaa"/>
+              <a:cs typeface="Comfortaa"/>
+            </a:endParaRPr>
+          </a:p>
+          <a:p>
+            <a:pPr algn="just">
+              <a:lnSpc>
+                <a:spcPct val="114999"/>
+              </a:lnSpc>
+              <a:defRPr/>
+            </a:pPr>
+            <a:r>
+              <a:rPr lang="en-US" sz="2000" b="1" i="0" u="none" strike="noStrike" cap="none" spc="0">
+                <a:solidFill>
+                  <a:schemeClr val="bg1"/>
+                </a:solidFill>
+                <a:latin typeface="Comfortaa"/>
+                <a:ea typeface="Comfortaa"/>
+                <a:cs typeface="Comfortaa"/>
+              </a:rPr>
+              <a:t>Pembatasan akses database berdasarkan akun database untuk mengurangi dampak serangan</a:t>
+            </a:r>
+            <a:endParaRPr sz="2200" b="1">
+              <a:solidFill>
+                <a:schemeClr val="bg1"/>
+              </a:solidFill>
+              <a:latin typeface="Comfortaa"/>
+              <a:cs typeface="Comfortaa"/>
+            </a:endParaRPr>
+          </a:p>
+        </p:txBody>
+      </p:sp>
+      <p:sp>
+        <p:nvSpPr>
+          <p:cNvPr id="1248503960" name=""/>
+          <p:cNvSpPr txBox="1"/>
+          <p:nvPr/>
+        </p:nvSpPr>
+        <p:spPr bwMode="auto">
+          <a:xfrm rot="0" flipH="0" flipV="0">
+            <a:off x="4945599" y="5001975"/>
+            <a:ext cx="7134875" cy="1067159"/>
+          </a:xfrm>
+          <a:prstGeom prst="rect">
+            <a:avLst/>
+          </a:prstGeom>
+          <a:noFill/>
+        </p:spPr>
+        <p:txBody>
+          <a:bodyPr vertOverflow="overflow" horzOverflow="overflow" vert="horz" wrap="square" lIns="91440" tIns="45720" rIns="91440" bIns="45720" numCol="1" spcCol="0" rtlCol="0" fromWordArt="0" anchor="t" anchorCtr="0" forceAA="0" upright="0" compatLnSpc="0">
+            <a:spAutoFit/>
+          </a:bodyPr>
+          <a:p>
+            <a:pPr algn="just">
+              <a:defRPr/>
+            </a:pPr>
+            <a:r>
+              <a:rPr sz="2400" b="1">
+                <a:solidFill>
+                  <a:schemeClr val="bg1"/>
+                </a:solidFill>
+                <a:latin typeface="Comfortaa"/>
+                <a:ea typeface="Comfortaa"/>
+                <a:cs typeface="Comfortaa"/>
+              </a:rPr>
+              <a:t>Input Validation :</a:t>
+            </a:r>
+            <a:endParaRPr sz="2200" b="1">
+              <a:solidFill>
+                <a:schemeClr val="bg1"/>
+              </a:solidFill>
+              <a:latin typeface="Comfortaa"/>
+              <a:cs typeface="Comfortaa"/>
+            </a:endParaRPr>
+          </a:p>
+          <a:p>
+            <a:pPr algn="just">
+              <a:defRPr/>
+            </a:pPr>
+            <a:r>
+              <a:rPr sz="2000" b="1">
+                <a:solidFill>
+                  <a:schemeClr val="bg1"/>
+                </a:solidFill>
+                <a:latin typeface="Comfortaa"/>
+                <a:ea typeface="Comfortaa"/>
+                <a:cs typeface="Comfortaa"/>
+              </a:rPr>
+              <a:t>Validasi apakah input yang diterima sesuai dengan karakter yang sudah ditentukan </a:t>
+            </a:r>
+            <a:endParaRPr sz="2200" b="1">
+              <a:solidFill>
+                <a:schemeClr val="bg1"/>
+              </a:solidFill>
+              <a:latin typeface="Comfortaa"/>
+              <a:cs typeface="Comfortaa"/>
+            </a:endParaRPr>
+          </a:p>
+        </p:txBody>
+      </p:sp>
+      <p:pic>
+        <p:nvPicPr>
+          <p:cNvPr id="2021896052" name=""/>
+          <p:cNvPicPr>
+            <a:picLocks noChangeAspect="1"/>
+          </p:cNvPicPr>
+          <p:nvPr/>
+        </p:nvPicPr>
+        <p:blipFill rotWithShape="1">
+          <a:blip r:embed="rId5"/>
+          <a:stretch/>
+        </p:blipFill>
+        <p:spPr bwMode="auto">
+          <a:xfrm flipH="0" flipV="0">
+            <a:off x="3445726" y="3251863"/>
+            <a:ext cx="1232755" cy="1150840"/>
+          </a:xfrm>
+          <a:prstGeom prst="rect">
+            <a:avLst/>
+          </a:prstGeom>
+        </p:spPr>
+      </p:pic>
+      <p:pic>
+        <p:nvPicPr>
+          <p:cNvPr id="1436889985" name=""/>
+          <p:cNvPicPr>
+            <a:picLocks noChangeAspect="1"/>
+          </p:cNvPicPr>
+          <p:nvPr/>
+        </p:nvPicPr>
+        <p:blipFill rotWithShape="1">
+          <a:blip r:embed="rId6"/>
+          <a:stretch/>
+        </p:blipFill>
+        <p:spPr bwMode="auto">
+          <a:xfrm flipH="0" flipV="0">
+            <a:off x="3349935" y="4819219"/>
+            <a:ext cx="1424337" cy="1343149"/>
+          </a:xfrm>
+          <a:prstGeom prst="rect">
+            <a:avLst/>
+          </a:prstGeom>
+        </p:spPr>
+      </p:pic>
+    </p:spTree>
+  </p:cSld>
+  <p:clrMapOvr>
+    <a:masterClrMapping/>
+  </p:clrMapOvr>
+  <mc:AlternateContent xmlns:mc="http://schemas.openxmlformats.org/markup-compatibility/2006">
+    <mc:Choice xmlns:p159="http://schemas.microsoft.com/office/powerpoint/2015/09/main" xmlns:p14="http://schemas.microsoft.com/office/powerpoint/2010/main" Requires="p159">
+      <p:transition spd="slow" p14:dur="1500" advClick="1">
+        <p159:morph option="byObject"/>
+      </p:transition>
+    </mc:Choice>
+    <mc:Fallback>
+      <p:transition spd="slow" advClick="1">
+        <p:fade/>
+      </p:transition>
+    </mc:Fallback>
+  </mc:AlternateContent>
+  <p:timing/>
+</p:sld>
+</file>
+
+<file path=ppt/slides/slide15.xml><?xml version="1.0" encoding="utf-8"?>
+<p:sld xmlns:a="http://schemas.openxmlformats.org/drawingml/2006/main" xmlns:r="http://schemas.openxmlformats.org/officeDocument/2006/relationships" xmlns:p="http://schemas.openxmlformats.org/presentationml/2006/main" xmlns:m="http://schemas.openxmlformats.org/officeDocument/2006/math" xmlns:w="http://schemas.openxmlformats.org/wordprocessingml/2006/main" xmlns:mc="http://schemas.openxmlformats.org/markup-compatibility/2006" showMasterPhAnim="0" showMasterSp="1" show="1">
+  <p:cSld name="">
+    <p:spTree>
+      <p:nvGrpSpPr>
+        <p:cNvPr id="1" name=""/>
+        <p:cNvGrpSpPr/>
+        <p:nvPr/>
+      </p:nvGrpSpPr>
+      <p:grpSpPr bwMode="auto">
+        <a:xfrm>
+          <a:off x="0" y="0"/>
+          <a:ext cx="0" cy="0"/>
+          <a:chOff x="0" y="0"/>
+          <a:chExt cx="0" cy="0"/>
+        </a:xfrm>
+      </p:grpSpPr>
+      <p:sp>
+        <p:nvSpPr>
+          <p:cNvPr id="344322019" name=""/>
+          <p:cNvSpPr/>
+          <p:nvPr/>
+        </p:nvSpPr>
+        <p:spPr bwMode="auto">
+          <a:xfrm rot="0" flipH="0" flipV="0">
+            <a:off x="-283797" y="-35471"/>
+            <a:ext cx="15125697" cy="6928947"/>
+          </a:xfrm>
+          <a:prstGeom prst="homePlate">
+            <a:avLst>
+              <a:gd name="adj" fmla="val 37965"/>
+            </a:avLst>
+          </a:prstGeom>
+          <a:gradFill>
+            <a:gsLst>
+              <a:gs pos="0">
+                <a:schemeClr val="tx1"/>
+              </a:gs>
+              <a:gs pos="100000">
+                <a:schemeClr val="tx1">
+                  <a:lumMod val="90000"/>
+                  <a:lumOff val="5000"/>
+                </a:schemeClr>
+              </a:gs>
+            </a:gsLst>
+            <a:lin ang="5400000" scaled="1"/>
+          </a:gradFill>
+          <a:ln w="12700" cap="flat" cmpd="sng" algn="ctr">
+            <a:noFill/>
+            <a:prstDash val="solid"/>
+            <a:miter lim="800000"/>
+          </a:ln>
+        </p:spPr>
+        <p:style>
+          <a:lnRef idx="2">
+            <a:schemeClr val="accent1">
+              <a:shade val="50000"/>
+            </a:schemeClr>
+          </a:lnRef>
+          <a:fillRef idx="1">
+            <a:schemeClr val="accent1"/>
+          </a:fillRef>
+          <a:effectRef idx="0">
+            <a:schemeClr val="accent1"/>
+          </a:effectRef>
+          <a:fontRef idx="minor">
+            <a:schemeClr val="lt1"/>
+          </a:fontRef>
+        </p:style>
+        <p:txBody>
+          <a:bodyPr anchor="ctr"/>
+          <a:p>
+            <a:pPr algn="ctr">
+              <a:defRPr/>
+            </a:pPr>
+            <a:endParaRPr>
+              <a:latin typeface="Comfortaa"/>
+              <a:cs typeface="Comfortaa"/>
+            </a:endParaRPr>
+          </a:p>
+        </p:txBody>
+      </p:sp>
+      <p:sp>
+        <p:nvSpPr>
+          <p:cNvPr id="1796524515" name=""/>
+          <p:cNvSpPr/>
+          <p:nvPr/>
+        </p:nvSpPr>
+        <p:spPr bwMode="auto">
+          <a:xfrm rot="0" flipH="0" flipV="0">
+            <a:off x="-283797" y="-31746"/>
+            <a:ext cx="3278763" cy="6877595"/>
+          </a:xfrm>
+          <a:prstGeom prst="rect">
+            <a:avLst/>
+          </a:prstGeom>
+          <a:gradFill>
+            <a:gsLst>
+              <a:gs pos="0">
+                <a:srgbClr val="FF944C"/>
+              </a:gs>
+              <a:gs pos="100000">
+                <a:srgbClr val="FFFF00"/>
+              </a:gs>
+            </a:gsLst>
+            <a:lin ang="5400000" scaled="1"/>
+          </a:gradFill>
+          <a:ln w="12700" cap="flat" cmpd="sng" algn="ctr">
+            <a:noFill/>
+            <a:prstDash val="solid"/>
+            <a:miter lim="800000"/>
+          </a:ln>
+        </p:spPr>
+        <p:style>
+          <a:lnRef idx="2">
+            <a:schemeClr val="accent1">
+              <a:shade val="50000"/>
+            </a:schemeClr>
+          </a:lnRef>
+          <a:fillRef idx="1">
+            <a:schemeClr val="accent1"/>
+          </a:fillRef>
+          <a:effectRef idx="0">
+            <a:schemeClr val="accent1"/>
+          </a:effectRef>
+          <a:fontRef idx="minor">
+            <a:schemeClr val="lt1"/>
+          </a:fontRef>
+        </p:style>
+      </p:sp>
+      <p:pic>
+        <p:nvPicPr>
+          <p:cNvPr id="138298650" name=""/>
+          <p:cNvPicPr>
+            <a:picLocks noChangeAspect="1"/>
+          </p:cNvPicPr>
+          <p:nvPr/>
+        </p:nvPicPr>
+        <p:blipFill rotWithShape="1">
+          <a:blip r:embed="rId3"/>
+          <a:stretch/>
+        </p:blipFill>
+        <p:spPr bwMode="auto">
+          <a:xfrm flipH="0" flipV="0">
+            <a:off x="251284" y="2938707"/>
+            <a:ext cx="2164307" cy="2164307"/>
+          </a:xfrm>
+          <a:prstGeom prst="rect">
+            <a:avLst/>
+          </a:prstGeom>
+        </p:spPr>
+      </p:pic>
+      <p:sp>
+        <p:nvSpPr>
+          <p:cNvPr id="583110333" name=""/>
+          <p:cNvSpPr txBox="1"/>
+          <p:nvPr/>
+        </p:nvSpPr>
+        <p:spPr bwMode="auto">
+          <a:xfrm rot="0" flipH="0" flipV="0">
+            <a:off x="444820" y="1271870"/>
+            <a:ext cx="1822593" cy="2019641"/>
+          </a:xfrm>
+          <a:prstGeom prst="rect">
+            <a:avLst/>
+          </a:prstGeom>
+          <a:noFill/>
+        </p:spPr>
+        <p:txBody>
+          <a:bodyPr vertOverflow="overflow" horzOverflow="overflow" vert="horz" wrap="square" lIns="91440" tIns="45720" rIns="91440" bIns="45720" numCol="1" spcCol="0" rtlCol="0" fromWordArt="0" anchor="ctr" anchorCtr="0" forceAA="0" upright="0" compatLnSpc="0">
+            <a:spAutoFit/>
+          </a:bodyPr>
+          <a:p>
+            <a:pPr algn="ctr">
+              <a:lnSpc>
+                <a:spcPct val="114999"/>
+              </a:lnSpc>
+              <a:defRPr/>
+            </a:pPr>
+            <a:r>
+              <a:rPr sz="11000" b="1">
+                <a:solidFill>
+                  <a:schemeClr val="tx1"/>
+                </a:solidFill>
+                <a:latin typeface="Comfortaa"/>
+                <a:ea typeface="Comfortaa"/>
+                <a:cs typeface="Comfortaa"/>
+              </a:rPr>
+              <a:t>2.</a:t>
+            </a:r>
+            <a:endParaRPr sz="11000" b="1">
+              <a:solidFill>
+                <a:schemeClr val="tx1"/>
+              </a:solidFill>
+              <a:latin typeface="Comfortaa"/>
+              <a:cs typeface="Comfortaa"/>
+            </a:endParaRPr>
+          </a:p>
+        </p:txBody>
+      </p:sp>
+      <p:sp>
+        <p:nvSpPr>
+          <p:cNvPr id="1136821464" name=""/>
+          <p:cNvSpPr txBox="1"/>
+          <p:nvPr/>
+        </p:nvSpPr>
+        <p:spPr bwMode="auto">
+          <a:xfrm rot="0" flipH="0" flipV="0">
+            <a:off x="4062104" y="-14063139"/>
+            <a:ext cx="7434938" cy="722730"/>
+          </a:xfrm>
+          <a:prstGeom prst="rect">
+            <a:avLst/>
+          </a:prstGeom>
+          <a:noFill/>
+        </p:spPr>
+        <p:txBody>
+          <a:bodyPr vertOverflow="overflow" horzOverflow="overflow" vert="horz" wrap="square" lIns="91440" tIns="45720" rIns="91440" bIns="45720" numCol="1" spcCol="0" rtlCol="0" fromWordArt="0" anchor="ctr" anchorCtr="0" forceAA="0" upright="0" compatLnSpc="0">
+            <a:spAutoFit/>
+          </a:bodyPr>
+          <a:p>
+            <a:pPr algn="ctr">
+              <a:lnSpc>
+                <a:spcPct val="114999"/>
+              </a:lnSpc>
+              <a:defRPr/>
+            </a:pPr>
+            <a:r>
+              <a:rPr sz="3600" b="1">
+                <a:gradFill>
+                  <a:gsLst>
+                    <a:gs pos="0">
+                      <a:srgbClr val="00B0F0"/>
+                    </a:gs>
+                    <a:gs pos="100000">
+                      <a:srgbClr val="00F0E0"/>
+                    </a:gs>
+                  </a:gsLst>
+                  <a:lin ang="13500000" scaled="1"/>
+                </a:gradFill>
+                <a:latin typeface="Comfortaa"/>
+                <a:ea typeface="Comfortaa"/>
+                <a:cs typeface="Comfortaa"/>
+              </a:rPr>
+              <a:t>Defend Against SQL Injection</a:t>
+            </a:r>
+            <a:endParaRPr sz="3600" b="1">
+              <a:gradFill>
+                <a:gsLst>
+                  <a:gs pos="0">
+                    <a:srgbClr val="00B0F0"/>
+                  </a:gs>
+                  <a:gs pos="100000">
+                    <a:srgbClr val="00F0E0"/>
+                  </a:gs>
+                </a:gsLst>
+                <a:lin ang="13500000" scaled="1"/>
+              </a:gradFill>
+              <a:latin typeface="Comfortaa"/>
+              <a:cs typeface="Comfortaa"/>
+            </a:endParaRPr>
+          </a:p>
+        </p:txBody>
+      </p:sp>
+      <p:pic>
+        <p:nvPicPr>
+          <p:cNvPr id="566710713" name=""/>
+          <p:cNvPicPr>
+            <a:picLocks noChangeAspect="1"/>
+          </p:cNvPicPr>
+          <p:nvPr/>
+        </p:nvPicPr>
+        <p:blipFill rotWithShape="1">
+          <a:blip r:embed="rId4"/>
+          <a:stretch/>
+        </p:blipFill>
+        <p:spPr bwMode="auto">
+          <a:xfrm flipH="0" flipV="0">
+            <a:off x="3262936" y="-9733239"/>
+            <a:ext cx="1424337" cy="1424337"/>
+          </a:xfrm>
+          <a:prstGeom prst="rect">
+            <a:avLst/>
+          </a:prstGeom>
+        </p:spPr>
+      </p:pic>
+      <p:sp>
+        <p:nvSpPr>
+          <p:cNvPr id="1725937894" name=""/>
+          <p:cNvSpPr txBox="1"/>
+          <p:nvPr/>
+        </p:nvSpPr>
+        <p:spPr bwMode="auto">
+          <a:xfrm rot="0" flipH="0" flipV="0">
+            <a:off x="4887299" y="-9670043"/>
+            <a:ext cx="7192094" cy="1213454"/>
+          </a:xfrm>
+          <a:prstGeom prst="rect">
+            <a:avLst/>
+          </a:prstGeom>
+          <a:noFill/>
+        </p:spPr>
+        <p:txBody>
+          <a:bodyPr vertOverflow="overflow" horzOverflow="overflow" vert="horz" wrap="square" lIns="91440" tIns="45720" rIns="91440" bIns="45720" numCol="1" spcCol="0" rtlCol="0" fromWordArt="0" anchor="t" anchorCtr="0" forceAA="0" upright="0" compatLnSpc="0">
+            <a:spAutoFit/>
+          </a:bodyPr>
+          <a:p>
+            <a:pPr algn="just">
+              <a:lnSpc>
+                <a:spcPct val="114999"/>
+              </a:lnSpc>
+              <a:defRPr/>
+            </a:pPr>
+            <a:r>
+              <a:rPr sz="2200" b="1">
+                <a:solidFill>
+                  <a:schemeClr val="bg1"/>
+                </a:solidFill>
+                <a:latin typeface="Comfortaa"/>
+                <a:ea typeface="Comfortaa"/>
+                <a:cs typeface="Comfortaa"/>
+              </a:rPr>
+              <a:t>Parameterized Queries (Prepared Statements)</a:t>
+            </a:r>
+            <a:r>
+              <a:rPr sz="2400" b="1">
+                <a:solidFill>
+                  <a:schemeClr val="bg1"/>
+                </a:solidFill>
+                <a:latin typeface="Comfortaa"/>
+                <a:ea typeface="Comfortaa"/>
+                <a:cs typeface="Comfortaa"/>
+              </a:rPr>
+              <a:t> :</a:t>
+            </a:r>
+            <a:endParaRPr sz="2200" b="1">
+              <a:solidFill>
+                <a:schemeClr val="bg1"/>
+              </a:solidFill>
+              <a:latin typeface="Comfortaa"/>
+              <a:cs typeface="Comfortaa"/>
+            </a:endParaRPr>
+          </a:p>
+          <a:p>
+            <a:pPr algn="just">
+              <a:lnSpc>
+                <a:spcPct val="114999"/>
+              </a:lnSpc>
+              <a:defRPr/>
+            </a:pPr>
+            <a:r>
+              <a:rPr sz="2000" b="1">
+                <a:solidFill>
+                  <a:schemeClr val="bg1"/>
+                </a:solidFill>
+                <a:latin typeface="Comfortaa"/>
+                <a:ea typeface="Comfortaa"/>
+                <a:cs typeface="Comfortaa"/>
+              </a:rPr>
+              <a:t>Pemisahan antara data input dengan kode yang dapat dijalankan database</a:t>
+            </a:r>
+            <a:endParaRPr sz="2200" b="1">
+              <a:solidFill>
+                <a:schemeClr val="bg1"/>
+              </a:solidFill>
+              <a:latin typeface="Comfortaa"/>
+              <a:cs typeface="Comfortaa"/>
+            </a:endParaRPr>
+          </a:p>
+        </p:txBody>
+      </p:sp>
+      <p:sp>
+        <p:nvSpPr>
+          <p:cNvPr id="1797792708" name=""/>
+          <p:cNvSpPr txBox="1"/>
+          <p:nvPr/>
+        </p:nvSpPr>
+        <p:spPr bwMode="auto">
+          <a:xfrm rot="0" flipH="0" flipV="0">
+            <a:off x="4945599" y="-5334408"/>
+            <a:ext cx="7135235" cy="1213454"/>
+          </a:xfrm>
+          <a:prstGeom prst="rect">
+            <a:avLst/>
+          </a:prstGeom>
+          <a:noFill/>
+        </p:spPr>
+        <p:txBody>
+          <a:bodyPr vertOverflow="overflow" horzOverflow="overflow" vert="horz" wrap="square" lIns="91440" tIns="45720" rIns="91440" bIns="45720" numCol="1" spcCol="0" rtlCol="0" fromWordArt="0" anchor="t" anchorCtr="0" forceAA="0" upright="0" compatLnSpc="0">
+            <a:spAutoFit/>
+          </a:bodyPr>
+          <a:p>
+            <a:pPr algn="just">
+              <a:lnSpc>
+                <a:spcPct val="114999"/>
+              </a:lnSpc>
+              <a:defRPr/>
+            </a:pPr>
+            <a:r>
+              <a:rPr sz="2400" b="1">
+                <a:solidFill>
+                  <a:schemeClr val="bg1"/>
+                </a:solidFill>
+                <a:latin typeface="Comfortaa"/>
+                <a:ea typeface="Comfortaa"/>
+                <a:cs typeface="Comfortaa"/>
+              </a:rPr>
+              <a:t>Least Privilege :</a:t>
+            </a:r>
+            <a:endParaRPr sz="2200" b="1">
+              <a:solidFill>
+                <a:schemeClr val="bg1"/>
+              </a:solidFill>
+              <a:latin typeface="Comfortaa"/>
+              <a:cs typeface="Comfortaa"/>
+            </a:endParaRPr>
+          </a:p>
+          <a:p>
+            <a:pPr algn="just">
+              <a:lnSpc>
+                <a:spcPct val="114999"/>
+              </a:lnSpc>
+              <a:defRPr/>
+            </a:pPr>
+            <a:r>
+              <a:rPr lang="en-US" sz="2000" b="1" i="0" u="none" strike="noStrike" cap="none" spc="0">
+                <a:solidFill>
+                  <a:schemeClr val="bg1"/>
+                </a:solidFill>
+                <a:latin typeface="Comfortaa"/>
+                <a:ea typeface="Comfortaa"/>
+                <a:cs typeface="Comfortaa"/>
+              </a:rPr>
+              <a:t>Pembatasan akses database berdasarkan akun database untuk mengurangi dampak serangan</a:t>
+            </a:r>
+            <a:endParaRPr sz="2200" b="1">
+              <a:solidFill>
+                <a:schemeClr val="bg1"/>
+              </a:solidFill>
+              <a:latin typeface="Comfortaa"/>
+              <a:cs typeface="Comfortaa"/>
+            </a:endParaRPr>
+          </a:p>
+        </p:txBody>
+      </p:sp>
+      <p:sp>
+        <p:nvSpPr>
+          <p:cNvPr id="1905490418" name=""/>
+          <p:cNvSpPr txBox="1"/>
+          <p:nvPr/>
+        </p:nvSpPr>
+        <p:spPr bwMode="auto">
+          <a:xfrm rot="0" flipH="0" flipV="0">
+            <a:off x="4945599" y="-1760773"/>
+            <a:ext cx="7134875" cy="1067159"/>
+          </a:xfrm>
+          <a:prstGeom prst="rect">
+            <a:avLst/>
+          </a:prstGeom>
+          <a:noFill/>
+        </p:spPr>
+        <p:txBody>
+          <a:bodyPr vertOverflow="overflow" horzOverflow="overflow" vert="horz" wrap="square" lIns="91440" tIns="45720" rIns="91440" bIns="45720" numCol="1" spcCol="0" rtlCol="0" fromWordArt="0" anchor="t" anchorCtr="0" forceAA="0" upright="0" compatLnSpc="0">
+            <a:spAutoFit/>
+          </a:bodyPr>
+          <a:p>
+            <a:pPr algn="just">
+              <a:defRPr/>
+            </a:pPr>
+            <a:r>
+              <a:rPr sz="2400" b="1">
+                <a:solidFill>
+                  <a:schemeClr val="bg1"/>
+                </a:solidFill>
+                <a:latin typeface="Comfortaa"/>
+                <a:ea typeface="Comfortaa"/>
+                <a:cs typeface="Comfortaa"/>
+              </a:rPr>
+              <a:t>Input Validation :</a:t>
+            </a:r>
+            <a:endParaRPr sz="2200" b="1">
+              <a:solidFill>
+                <a:schemeClr val="bg1"/>
+              </a:solidFill>
+              <a:latin typeface="Comfortaa"/>
+              <a:cs typeface="Comfortaa"/>
+            </a:endParaRPr>
+          </a:p>
+          <a:p>
+            <a:pPr algn="just">
+              <a:defRPr/>
+            </a:pPr>
+            <a:r>
+              <a:rPr sz="2000" b="1">
+                <a:solidFill>
+                  <a:schemeClr val="bg1"/>
+                </a:solidFill>
+                <a:latin typeface="Comfortaa"/>
+                <a:ea typeface="Comfortaa"/>
+                <a:cs typeface="Comfortaa"/>
+              </a:rPr>
+              <a:t>Validasi apakah input yang diterima sesuai dengan karakter yang sudah ditentukan </a:t>
+            </a:r>
+            <a:endParaRPr sz="2200" b="1">
+              <a:solidFill>
+                <a:schemeClr val="bg1"/>
+              </a:solidFill>
+              <a:latin typeface="Comfortaa"/>
+              <a:cs typeface="Comfortaa"/>
+            </a:endParaRPr>
+          </a:p>
+        </p:txBody>
+      </p:sp>
+      <p:pic>
+        <p:nvPicPr>
+          <p:cNvPr id="1287227453" name=""/>
+          <p:cNvPicPr>
+            <a:picLocks noChangeAspect="1"/>
+          </p:cNvPicPr>
+          <p:nvPr/>
+        </p:nvPicPr>
+        <p:blipFill rotWithShape="1">
+          <a:blip r:embed="rId5"/>
+          <a:stretch/>
+        </p:blipFill>
+        <p:spPr bwMode="auto">
+          <a:xfrm flipH="0" flipV="0">
+            <a:off x="3445726" y="-5320635"/>
+            <a:ext cx="1232755" cy="1150840"/>
+          </a:xfrm>
+          <a:prstGeom prst="rect">
+            <a:avLst/>
+          </a:prstGeom>
+        </p:spPr>
+      </p:pic>
+      <p:pic>
+        <p:nvPicPr>
+          <p:cNvPr id="1497538475" name=""/>
+          <p:cNvPicPr>
+            <a:picLocks noChangeAspect="1"/>
+          </p:cNvPicPr>
+          <p:nvPr/>
+        </p:nvPicPr>
+        <p:blipFill rotWithShape="1">
+          <a:blip r:embed="rId6"/>
+          <a:stretch/>
+        </p:blipFill>
+        <p:spPr bwMode="auto">
+          <a:xfrm flipH="0" flipV="0">
+            <a:off x="3349935" y="-1943530"/>
+            <a:ext cx="1424337" cy="1343149"/>
+          </a:xfrm>
+          <a:prstGeom prst="rect">
+            <a:avLst/>
+          </a:prstGeom>
+        </p:spPr>
+      </p:pic>
     </p:spTree>
   </p:cSld>
   <p:clrMapOvr>
@@ -11053,7 +12375,7 @@
       </p:grpSpPr>
       <p:pic>
         <p:nvPicPr>
-          <p:cNvPr id="1917354000" name=""/>
+          <p:cNvPr id="1791477059" name=""/>
           <p:cNvPicPr>
             <a:picLocks noChangeAspect="1"/>
           </p:cNvPicPr>
@@ -11075,7 +12397,7 @@
       </p:pic>
       <p:sp>
         <p:nvSpPr>
-          <p:cNvPr id="1099984500" name=""/>
+          <p:cNvPr id="1415711004" name=""/>
           <p:cNvSpPr/>
           <p:nvPr/>
         </p:nvSpPr>
@@ -11131,7 +12453,7 @@
       </p:sp>
       <p:sp>
         <p:nvSpPr>
-          <p:cNvPr id="754022335" name=""/>
+          <p:cNvPr id="549400132" name=""/>
           <p:cNvSpPr txBox="1"/>
           <p:nvPr/>
         </p:nvSpPr>
@@ -11208,7 +12530,7 @@
       </p:sp>
       <p:sp>
         <p:nvSpPr>
-          <p:cNvPr id="1846856162" name=""/>
+          <p:cNvPr id="844046963" name=""/>
           <p:cNvSpPr txBox="1"/>
           <p:nvPr/>
         </p:nvSpPr>
@@ -11371,7 +12693,7 @@
       </p:sp>
       <p:sp>
         <p:nvSpPr>
-          <p:cNvPr id="122943938" name=""/>
+          <p:cNvPr id="834476062" name=""/>
           <p:cNvSpPr/>
           <p:nvPr/>
         </p:nvSpPr>
@@ -11410,7 +12732,7 @@
       </p:sp>
       <p:sp>
         <p:nvSpPr>
-          <p:cNvPr id="1152672175" name=""/>
+          <p:cNvPr id="1441058832" name=""/>
           <p:cNvSpPr/>
           <p:nvPr/>
         </p:nvSpPr>
@@ -11475,7 +12797,7 @@
       </p:sp>
       <p:sp>
         <p:nvSpPr>
-          <p:cNvPr id="1314465748" name=""/>
+          <p:cNvPr id="252208220" name=""/>
           <p:cNvSpPr txBox="1"/>
           <p:nvPr/>
         </p:nvSpPr>
@@ -11542,7 +12864,7 @@
       </p:sp>
       <p:sp>
         <p:nvSpPr>
-          <p:cNvPr id="715091313" name=""/>
+          <p:cNvPr id="598147756" name=""/>
           <p:cNvSpPr txBox="1"/>
           <p:nvPr/>
         </p:nvSpPr>
@@ -11625,7 +12947,7 @@
       </p:sp>
       <p:sp>
         <p:nvSpPr>
-          <p:cNvPr id="1618655319" name=""/>
+          <p:cNvPr id="1886951192" name=""/>
           <p:cNvSpPr txBox="1"/>
           <p:nvPr/>
         </p:nvSpPr>
@@ -11689,7 +13011,7 @@
       </p:sp>
       <p:sp>
         <p:nvSpPr>
-          <p:cNvPr id="1517159659" name=""/>
+          <p:cNvPr id="1485039660" name=""/>
           <p:cNvSpPr/>
           <p:nvPr/>
         </p:nvSpPr>
@@ -11737,7 +13059,7 @@
       </p:sp>
       <p:pic>
         <p:nvPicPr>
-          <p:cNvPr id="710146231" name=""/>
+          <p:cNvPr id="581766600" name=""/>
           <p:cNvPicPr>
             <a:picLocks noChangeAspect="1"/>
           </p:cNvPicPr>
@@ -11759,7 +13081,7 @@
       </p:pic>
       <p:sp>
         <p:nvSpPr>
-          <p:cNvPr id="1473544122" name=""/>
+          <p:cNvPr id="75979847" name=""/>
           <p:cNvSpPr txBox="1"/>
           <p:nvPr/>
         </p:nvSpPr>
@@ -11829,7 +13151,7 @@
       </p:sp>
       <p:sp>
         <p:nvSpPr>
-          <p:cNvPr id="1835057864" name=""/>
+          <p:cNvPr id="62036726" name=""/>
           <p:cNvSpPr txBox="1"/>
           <p:nvPr/>
         </p:nvSpPr>
@@ -11912,7 +13234,7 @@
       </p:sp>
       <p:sp>
         <p:nvSpPr>
-          <p:cNvPr id="756366422" name=""/>
+          <p:cNvPr id="2110952118" name=""/>
           <p:cNvSpPr txBox="1"/>
           <p:nvPr/>
         </p:nvSpPr>
@@ -11995,7 +13317,7 @@
       </p:sp>
       <p:pic>
         <p:nvPicPr>
-          <p:cNvPr id="567957708" name=""/>
+          <p:cNvPr id="1768094481" name=""/>
           <p:cNvPicPr>
             <a:picLocks noChangeAspect="1"/>
           </p:cNvPicPr>
@@ -12061,7 +13383,7 @@
       </p:grpSpPr>
       <p:sp>
         <p:nvSpPr>
-          <p:cNvPr id="1252936832" name=""/>
+          <p:cNvPr id="1049844281" name=""/>
           <p:cNvSpPr/>
           <p:nvPr/>
         </p:nvSpPr>
@@ -12126,7 +13448,7 @@
       </p:sp>
       <p:sp>
         <p:nvSpPr>
-          <p:cNvPr id="385857885" name=""/>
+          <p:cNvPr id="2135413612" name=""/>
           <p:cNvSpPr/>
           <p:nvPr/>
         </p:nvSpPr>
@@ -12165,7 +13487,7 @@
       </p:sp>
       <p:sp>
         <p:nvSpPr>
-          <p:cNvPr id="849153529" name=""/>
+          <p:cNvPr id="991738175" name=""/>
           <p:cNvSpPr txBox="1"/>
           <p:nvPr/>
         </p:nvSpPr>
@@ -12232,7 +13554,7 @@
       </p:sp>
       <p:sp>
         <p:nvSpPr>
-          <p:cNvPr id="1481532200" name=""/>
+          <p:cNvPr id="1316774217" name=""/>
           <p:cNvSpPr txBox="1"/>
           <p:nvPr/>
         </p:nvSpPr>
@@ -12315,7 +13637,7 @@
       </p:sp>
       <p:sp>
         <p:nvSpPr>
-          <p:cNvPr id="1573780179" name=""/>
+          <p:cNvPr id="851828153" name=""/>
           <p:cNvSpPr txBox="1"/>
           <p:nvPr/>
         </p:nvSpPr>
@@ -12379,7 +13701,7 @@
       </p:sp>
       <p:sp>
         <p:nvSpPr>
-          <p:cNvPr id="3127330" name=""/>
+          <p:cNvPr id="1032311742" name=""/>
           <p:cNvSpPr/>
           <p:nvPr/>
         </p:nvSpPr>
@@ -12427,7 +13749,7 @@
       </p:sp>
       <p:pic>
         <p:nvPicPr>
-          <p:cNvPr id="680106184" name=""/>
+          <p:cNvPr id="1859259480" name=""/>
           <p:cNvPicPr>
             <a:picLocks noChangeAspect="1"/>
           </p:cNvPicPr>
@@ -12449,7 +13771,7 @@
       </p:pic>
       <p:sp>
         <p:nvSpPr>
-          <p:cNvPr id="290969" name=""/>
+          <p:cNvPr id="1961563287" name=""/>
           <p:cNvSpPr txBox="1"/>
           <p:nvPr/>
         </p:nvSpPr>
@@ -12519,7 +13841,7 @@
       </p:sp>
       <p:sp>
         <p:nvSpPr>
-          <p:cNvPr id="1716926074" name=""/>
+          <p:cNvPr id="1652640631" name=""/>
           <p:cNvSpPr txBox="1"/>
           <p:nvPr/>
         </p:nvSpPr>
@@ -12602,7 +13924,7 @@
       </p:sp>
       <p:sp>
         <p:nvSpPr>
-          <p:cNvPr id="1149264214" name=""/>
+          <p:cNvPr id="855432344" name=""/>
           <p:cNvSpPr txBox="1"/>
           <p:nvPr/>
         </p:nvSpPr>
@@ -12685,7 +14007,7 @@
       </p:sp>
       <p:pic>
         <p:nvPicPr>
-          <p:cNvPr id="1817138259" name=""/>
+          <p:cNvPr id="734938831" name=""/>
           <p:cNvPicPr>
             <a:picLocks noChangeAspect="1"/>
           </p:cNvPicPr>
@@ -12747,7 +14069,7 @@
       </p:grpSpPr>
       <p:sp>
         <p:nvSpPr>
-          <p:cNvPr id="252889825" name=""/>
+          <p:cNvPr id="880529400" name=""/>
           <p:cNvSpPr/>
           <p:nvPr/>
         </p:nvSpPr>
@@ -12786,7 +14108,7 @@
       </p:sp>
       <p:sp>
         <p:nvSpPr>
-          <p:cNvPr id="242643683" name=""/>
+          <p:cNvPr id="135856885" name=""/>
           <p:cNvSpPr/>
           <p:nvPr/>
         </p:nvSpPr>
@@ -12851,7 +14173,7 @@
       </p:sp>
       <p:sp>
         <p:nvSpPr>
-          <p:cNvPr id="963422991" name=""/>
+          <p:cNvPr id="881245713" name=""/>
           <p:cNvSpPr txBox="1"/>
           <p:nvPr/>
         </p:nvSpPr>
@@ -12918,7 +14240,7 @@
       </p:sp>
       <p:sp>
         <p:nvSpPr>
-          <p:cNvPr id="1611155760" name=""/>
+          <p:cNvPr id="1713895192" name=""/>
           <p:cNvSpPr txBox="1"/>
           <p:nvPr/>
         </p:nvSpPr>
@@ -13001,7 +14323,7 @@
       </p:sp>
       <p:sp>
         <p:nvSpPr>
-          <p:cNvPr id="426212645" name=""/>
+          <p:cNvPr id="121288430" name=""/>
           <p:cNvSpPr txBox="1"/>
           <p:nvPr/>
         </p:nvSpPr>
@@ -13065,7 +14387,7 @@
       </p:sp>
       <p:sp>
         <p:nvSpPr>
-          <p:cNvPr id="572494155" name=""/>
+          <p:cNvPr id="1004837860" name=""/>
           <p:cNvSpPr/>
           <p:nvPr/>
         </p:nvSpPr>
@@ -13113,7 +14435,7 @@
       </p:sp>
       <p:sp>
         <p:nvSpPr>
-          <p:cNvPr id="1672097913" name=""/>
+          <p:cNvPr id="121556220" name=""/>
           <p:cNvSpPr txBox="1"/>
           <p:nvPr/>
         </p:nvSpPr>
@@ -13183,7 +14505,7 @@
       </p:sp>
       <p:sp>
         <p:nvSpPr>
-          <p:cNvPr id="512415596" name=""/>
+          <p:cNvPr id="494757322" name=""/>
           <p:cNvSpPr txBox="1"/>
           <p:nvPr/>
         </p:nvSpPr>
@@ -13266,7 +14588,7 @@
       </p:sp>
       <p:sp>
         <p:nvSpPr>
-          <p:cNvPr id="122209219" name=""/>
+          <p:cNvPr id="1788858421" name=""/>
           <p:cNvSpPr txBox="1"/>
           <p:nvPr/>
         </p:nvSpPr>
@@ -13349,7 +14671,7 @@
       </p:sp>
       <p:pic>
         <p:nvPicPr>
-          <p:cNvPr id="1813960000" name=""/>
+          <p:cNvPr id="1235181766" name=""/>
           <p:cNvPicPr>
             <a:picLocks noChangeAspect="1"/>
           </p:cNvPicPr>
@@ -13371,7 +14693,7 @@
       </p:pic>
       <p:sp>
         <p:nvSpPr>
-          <p:cNvPr id="254628943" name=""/>
+          <p:cNvPr id="491946065" name=""/>
           <p:cNvSpPr txBox="1"/>
           <p:nvPr/>
         </p:nvSpPr>
@@ -13485,7 +14807,7 @@
       </p:sp>
       <p:pic>
         <p:nvPicPr>
-          <p:cNvPr id="1063622367" name=""/>
+          <p:cNvPr id="1676991122" name=""/>
           <p:cNvPicPr>
             <a:picLocks noChangeAspect="1"/>
           </p:cNvPicPr>
@@ -13507,7 +14829,7 @@
       </p:pic>
       <p:pic>
         <p:nvPicPr>
-          <p:cNvPr id="1344573565" name=""/>
+          <p:cNvPr id="1693464482" name=""/>
           <p:cNvPicPr>
             <a:picLocks noChangeAspect="1"/>
           </p:cNvPicPr>
@@ -13529,7 +14851,7 @@
       </p:pic>
       <p:pic>
         <p:nvPicPr>
-          <p:cNvPr id="1881324497" name=""/>
+          <p:cNvPr id="1255373953" name=""/>
           <p:cNvPicPr>
             <a:picLocks noChangeAspect="1"/>
           </p:cNvPicPr>
@@ -13551,7 +14873,7 @@
       </p:pic>
       <p:pic>
         <p:nvPicPr>
-          <p:cNvPr id="648883665" name=""/>
+          <p:cNvPr id="1462342941" name=""/>
           <p:cNvPicPr>
             <a:picLocks noChangeAspect="1"/>
           </p:cNvPicPr>
@@ -13573,7 +14895,7 @@
       </p:pic>
       <p:pic>
         <p:nvPicPr>
-          <p:cNvPr id="356419204" name=""/>
+          <p:cNvPr id="374261756" name=""/>
           <p:cNvPicPr>
             <a:picLocks noChangeAspect="1"/>
           </p:cNvPicPr>
@@ -13595,7 +14917,7 @@
       </p:pic>
       <p:pic>
         <p:nvPicPr>
-          <p:cNvPr id="1203516040" name=""/>
+          <p:cNvPr id="612054640" name=""/>
           <p:cNvPicPr>
             <a:picLocks noChangeAspect="1"/>
           </p:cNvPicPr>
@@ -13617,7 +14939,7 @@
       </p:pic>
       <p:pic>
         <p:nvPicPr>
-          <p:cNvPr id="910746789" name=""/>
+          <p:cNvPr id="415459605" name=""/>
           <p:cNvPicPr>
             <a:picLocks noChangeAspect="1"/>
           </p:cNvPicPr>
@@ -13676,7 +14998,7 @@
       </p:grpSpPr>
       <p:sp>
         <p:nvSpPr>
-          <p:cNvPr id="1336561808" name=""/>
+          <p:cNvPr id="1910228357" name=""/>
           <p:cNvSpPr/>
           <p:nvPr/>
         </p:nvSpPr>
@@ -13715,7 +15037,7 @@
       </p:sp>
       <p:sp>
         <p:nvSpPr>
-          <p:cNvPr id="358599042" name=""/>
+          <p:cNvPr id="1412487518" name=""/>
           <p:cNvSpPr/>
           <p:nvPr/>
         </p:nvSpPr>
@@ -13780,7 +15102,7 @@
       </p:sp>
       <p:sp>
         <p:nvSpPr>
-          <p:cNvPr id="231551014" name=""/>
+          <p:cNvPr id="97348731" name=""/>
           <p:cNvSpPr/>
           <p:nvPr/>
         </p:nvSpPr>
@@ -13828,7 +15150,7 @@
       </p:sp>
       <p:sp>
         <p:nvSpPr>
-          <p:cNvPr id="2070476359" name=""/>
+          <p:cNvPr id="1297580233" name=""/>
           <p:cNvSpPr txBox="1"/>
           <p:nvPr/>
         </p:nvSpPr>
@@ -13898,7 +15220,7 @@
       </p:sp>
       <p:sp>
         <p:nvSpPr>
-          <p:cNvPr id="2134472836" name=""/>
+          <p:cNvPr id="521529707" name=""/>
           <p:cNvSpPr txBox="1"/>
           <p:nvPr/>
         </p:nvSpPr>
@@ -13981,7 +15303,7 @@
       </p:sp>
       <p:sp>
         <p:nvSpPr>
-          <p:cNvPr id="279348254" name=""/>
+          <p:cNvPr id="306409844" name=""/>
           <p:cNvSpPr txBox="1"/>
           <p:nvPr/>
         </p:nvSpPr>
@@ -14064,7 +15386,7 @@
       </p:sp>
       <p:pic>
         <p:nvPicPr>
-          <p:cNvPr id="831158944" name=""/>
+          <p:cNvPr id="21846112" name=""/>
           <p:cNvPicPr>
             <a:picLocks noChangeAspect="1"/>
           </p:cNvPicPr>
@@ -14086,7 +15408,7 @@
       </p:pic>
       <p:pic>
         <p:nvPicPr>
-          <p:cNvPr id="1527970050" name=""/>
+          <p:cNvPr id="1757325660" name=""/>
           <p:cNvPicPr>
             <a:picLocks noChangeAspect="1"/>
           </p:cNvPicPr>
@@ -14108,7 +15430,7 @@
       </p:pic>
       <p:sp>
         <p:nvSpPr>
-          <p:cNvPr id="1099800046" name=""/>
+          <p:cNvPr id="732249693" name=""/>
           <p:cNvSpPr txBox="1"/>
           <p:nvPr/>
         </p:nvSpPr>
@@ -14222,7 +15544,7 @@
       </p:sp>
       <p:pic>
         <p:nvPicPr>
-          <p:cNvPr id="1665512470" name=""/>
+          <p:cNvPr id="982581468" name=""/>
           <p:cNvPicPr>
             <a:picLocks noChangeAspect="1"/>
           </p:cNvPicPr>
@@ -14244,7 +15566,7 @@
       </p:pic>
       <p:pic>
         <p:nvPicPr>
-          <p:cNvPr id="2100974021" name=""/>
+          <p:cNvPr id="370681419" name=""/>
           <p:cNvPicPr>
             <a:picLocks noChangeAspect="1"/>
           </p:cNvPicPr>
@@ -14266,7 +15588,7 @@
       </p:pic>
       <p:pic>
         <p:nvPicPr>
-          <p:cNvPr id="1113354698" name=""/>
+          <p:cNvPr id="332176484" name=""/>
           <p:cNvPicPr>
             <a:picLocks noChangeAspect="1"/>
           </p:cNvPicPr>
@@ -14288,7 +15610,7 @@
       </p:pic>
       <p:pic>
         <p:nvPicPr>
-          <p:cNvPr id="949870016" name=""/>
+          <p:cNvPr id="427418550" name=""/>
           <p:cNvPicPr>
             <a:picLocks noChangeAspect="1"/>
           </p:cNvPicPr>
@@ -14310,7 +15632,7 @@
       </p:pic>
       <p:pic>
         <p:nvPicPr>
-          <p:cNvPr id="113097503" name=""/>
+          <p:cNvPr id="449916880" name=""/>
           <p:cNvPicPr>
             <a:picLocks noChangeAspect="1"/>
           </p:cNvPicPr>
@@ -14370,7 +15692,7 @@
       </p:grpSpPr>
       <p:sp>
         <p:nvSpPr>
-          <p:cNvPr id="522026006" name=""/>
+          <p:cNvPr id="2138083010" name=""/>
           <p:cNvSpPr/>
           <p:nvPr/>
         </p:nvSpPr>
@@ -14409,7 +15731,7 @@
       </p:sp>
       <p:sp>
         <p:nvSpPr>
-          <p:cNvPr id="908832290" name=""/>
+          <p:cNvPr id="1012537789" name=""/>
           <p:cNvSpPr/>
           <p:nvPr/>
         </p:nvSpPr>
@@ -14474,7 +15796,7 @@
       </p:sp>
       <p:sp>
         <p:nvSpPr>
-          <p:cNvPr id="480962674" name=""/>
+          <p:cNvPr id="1596905027" name=""/>
           <p:cNvSpPr/>
           <p:nvPr/>
         </p:nvSpPr>
@@ -14522,7 +15844,7 @@
       </p:sp>
       <p:sp>
         <p:nvSpPr>
-          <p:cNvPr id="379136070" name=""/>
+          <p:cNvPr id="103747248" name=""/>
           <p:cNvSpPr txBox="1"/>
           <p:nvPr/>
         </p:nvSpPr>
@@ -14592,7 +15914,7 @@
       </p:sp>
       <p:sp>
         <p:nvSpPr>
-          <p:cNvPr id="1204157693" name=""/>
+          <p:cNvPr id="909254424" name=""/>
           <p:cNvSpPr txBox="1"/>
           <p:nvPr/>
         </p:nvSpPr>
@@ -14675,7 +15997,7 @@
       </p:sp>
       <p:sp>
         <p:nvSpPr>
-          <p:cNvPr id="1157596262" name=""/>
+          <p:cNvPr id="1652347994" name=""/>
           <p:cNvSpPr txBox="1"/>
           <p:nvPr/>
         </p:nvSpPr>
@@ -14758,7 +16080,7 @@
       </p:sp>
       <p:pic>
         <p:nvPicPr>
-          <p:cNvPr id="1152007334" name=""/>
+          <p:cNvPr id="351551837" name=""/>
           <p:cNvPicPr>
             <a:picLocks noChangeAspect="1"/>
           </p:cNvPicPr>
@@ -14780,7 +16102,7 @@
       </p:pic>
       <p:pic>
         <p:nvPicPr>
-          <p:cNvPr id="1809385520" name=""/>
+          <p:cNvPr id="362439220" name=""/>
           <p:cNvPicPr>
             <a:picLocks noChangeAspect="1"/>
           </p:cNvPicPr>
@@ -14802,7 +16124,7 @@
       </p:pic>
       <p:sp>
         <p:nvSpPr>
-          <p:cNvPr id="207717576" name=""/>
+          <p:cNvPr id="1982708459" name=""/>
           <p:cNvSpPr txBox="1"/>
           <p:nvPr/>
         </p:nvSpPr>
@@ -14916,7 +16238,7 @@
       </p:sp>
       <p:pic>
         <p:nvPicPr>
-          <p:cNvPr id="80608651" name=""/>
+          <p:cNvPr id="2053425791" name=""/>
           <p:cNvPicPr>
             <a:picLocks noChangeAspect="1"/>
           </p:cNvPicPr>
@@ -14938,7 +16260,7 @@
       </p:pic>
       <p:pic>
         <p:nvPicPr>
-          <p:cNvPr id="1353926871" name=""/>
+          <p:cNvPr id="155207545" name=""/>
           <p:cNvPicPr>
             <a:picLocks noChangeAspect="1"/>
           </p:cNvPicPr>
@@ -14960,7 +16282,7 @@
       </p:pic>
       <p:pic>
         <p:nvPicPr>
-          <p:cNvPr id="1937601882" name=""/>
+          <p:cNvPr id="736445876" name=""/>
           <p:cNvPicPr>
             <a:picLocks noChangeAspect="1"/>
           </p:cNvPicPr>
@@ -14982,7 +16304,7 @@
       </p:pic>
       <p:pic>
         <p:nvPicPr>
-          <p:cNvPr id="502500625" name=""/>
+          <p:cNvPr id="808537990" name=""/>
           <p:cNvPicPr>
             <a:picLocks noChangeAspect="1"/>
           </p:cNvPicPr>
@@ -15004,7 +16326,7 @@
       </p:pic>
       <p:pic>
         <p:nvPicPr>
-          <p:cNvPr id="755901529" name=""/>
+          <p:cNvPr id="524160555" name=""/>
           <p:cNvPicPr>
             <a:picLocks noChangeAspect="1"/>
           </p:cNvPicPr>
@@ -15026,7 +16348,7 @@
       </p:pic>
       <p:sp>
         <p:nvSpPr>
-          <p:cNvPr id="1180345911" name=""/>
+          <p:cNvPr id="63762273" name=""/>
           <p:cNvSpPr txBox="1"/>
           <p:nvPr/>
         </p:nvSpPr>
@@ -15090,7 +16412,7 @@
       </p:sp>
       <p:sp>
         <p:nvSpPr>
-          <p:cNvPr id="1780877872" name=""/>
+          <p:cNvPr id="484257328" name=""/>
           <p:cNvSpPr txBox="1"/>
           <p:nvPr/>
         </p:nvSpPr>
@@ -15154,7 +16476,7 @@
       </p:sp>
       <p:sp>
         <p:nvSpPr>
-          <p:cNvPr id="1271975505" name=""/>
+          <p:cNvPr id="833213142" name=""/>
           <p:cNvSpPr txBox="1"/>
           <p:nvPr/>
         </p:nvSpPr>
@@ -15218,7 +16540,7 @@
       </p:sp>
       <p:sp>
         <p:nvSpPr>
-          <p:cNvPr id="1824257476" name=""/>
+          <p:cNvPr id="90927309" name=""/>
           <p:cNvSpPr txBox="1"/>
           <p:nvPr/>
         </p:nvSpPr>
@@ -15282,7 +16604,7 @@
       </p:sp>
       <p:sp>
         <p:nvSpPr>
-          <p:cNvPr id="323376336" name=""/>
+          <p:cNvPr id="1555538542" name=""/>
           <p:cNvSpPr txBox="1"/>
           <p:nvPr/>
         </p:nvSpPr>
@@ -15394,7 +16716,7 @@
                                           </p:stCondLst>
                                         </p:cTn>
                                         <p:tgtEl>
-                                          <p:spTgt spid="1180345911"/>
+                                          <p:spTgt spid="63762273"/>
                                         </p:tgtEl>
                                         <p:attrNameLst>
                                           <p:attrName>style.visibility</p:attrName>
@@ -15408,7 +16730,7 @@
                                       <p:cBhvr>
                                         <p:cTn id="18" dur="500"/>
                                         <p:tgtEl>
-                                          <p:spTgt spid="1180345911"/>
+                                          <p:spTgt spid="63762273"/>
                                         </p:tgtEl>
                                       </p:cBhvr>
                                     </p:animEffect>
@@ -15429,7 +16751,7 @@
                                           </p:stCondLst>
                                         </p:cTn>
                                         <p:tgtEl>
-                                          <p:spTgt spid="1780877872"/>
+                                          <p:spTgt spid="484257328"/>
                                         </p:tgtEl>
                                         <p:attrNameLst>
                                           <p:attrName>style.visibility</p:attrName>
@@ -15443,7 +16765,7 @@
                                       <p:cBhvr>
                                         <p:cTn id="15" dur="500"/>
                                         <p:tgtEl>
-                                          <p:spTgt spid="1780877872"/>
+                                          <p:spTgt spid="484257328"/>
                                         </p:tgtEl>
                                       </p:cBhvr>
                                     </p:animEffect>
@@ -15464,7 +16786,7 @@
                                           </p:stCondLst>
                                         </p:cTn>
                                         <p:tgtEl>
-                                          <p:spTgt spid="1271975505"/>
+                                          <p:spTgt spid="833213142"/>
                                         </p:tgtEl>
                                         <p:attrNameLst>
                                           <p:attrName>style.visibility</p:attrName>
@@ -15478,7 +16800,7 @@
                                       <p:cBhvr>
                                         <p:cTn id="12" dur="500"/>
                                         <p:tgtEl>
-                                          <p:spTgt spid="1271975505"/>
+                                          <p:spTgt spid="833213142"/>
                                         </p:tgtEl>
                                       </p:cBhvr>
                                     </p:animEffect>
@@ -15499,7 +16821,7 @@
                                           </p:stCondLst>
                                         </p:cTn>
                                         <p:tgtEl>
-                                          <p:spTgt spid="1824257476"/>
+                                          <p:spTgt spid="90927309"/>
                                         </p:tgtEl>
                                         <p:attrNameLst>
                                           <p:attrName>style.visibility</p:attrName>
@@ -15513,7 +16835,7 @@
                                       <p:cBhvr>
                                         <p:cTn id="9" dur="500"/>
                                         <p:tgtEl>
-                                          <p:spTgt spid="1824257476"/>
+                                          <p:spTgt spid="90927309"/>
                                         </p:tgtEl>
                                       </p:cBhvr>
                                     </p:animEffect>
@@ -15534,7 +16856,7 @@
                                           </p:stCondLst>
                                         </p:cTn>
                                         <p:tgtEl>
-                                          <p:spTgt spid="323376336"/>
+                                          <p:spTgt spid="1555538542"/>
                                         </p:tgtEl>
                                         <p:attrNameLst>
                                           <p:attrName>style.visibility</p:attrName>
@@ -15548,7 +16870,7 @@
                                       <p:cBhvr>
                                         <p:cTn id="6" dur="500"/>
                                         <p:tgtEl>
-                                          <p:spTgt spid="323376336"/>
+                                          <p:spTgt spid="1555538542"/>
                                         </p:tgtEl>
                                       </p:cBhvr>
                                     </p:animEffect>
@@ -15605,7 +16927,7 @@
       </p:grpSpPr>
       <p:sp>
         <p:nvSpPr>
-          <p:cNvPr id="1923447816" name=""/>
+          <p:cNvPr id="1643657122" name=""/>
           <p:cNvSpPr/>
           <p:nvPr/>
         </p:nvSpPr>
@@ -15644,7 +16966,7 @@
       </p:sp>
       <p:sp>
         <p:nvSpPr>
-          <p:cNvPr id="1956263967" name=""/>
+          <p:cNvPr id="902842525" name=""/>
           <p:cNvSpPr/>
           <p:nvPr/>
         </p:nvSpPr>
@@ -15709,7 +17031,7 @@
       </p:sp>
       <p:sp>
         <p:nvSpPr>
-          <p:cNvPr id="7954588" name=""/>
+          <p:cNvPr id="282869102" name=""/>
           <p:cNvSpPr/>
           <p:nvPr/>
         </p:nvSpPr>
@@ -15757,7 +17079,7 @@
       </p:sp>
       <p:pic>
         <p:nvPicPr>
-          <p:cNvPr id="816542893" name=""/>
+          <p:cNvPr id="1281461337" name=""/>
           <p:cNvPicPr>
             <a:picLocks noChangeAspect="1"/>
           </p:cNvPicPr>
@@ -15779,7 +17101,7 @@
       </p:pic>
       <p:sp>
         <p:nvSpPr>
-          <p:cNvPr id="696706924" name=""/>
+          <p:cNvPr id="688369727" name=""/>
           <p:cNvSpPr txBox="1"/>
           <p:nvPr/>
         </p:nvSpPr>
@@ -15893,7 +17215,7 @@
       </p:sp>
       <p:pic>
         <p:nvPicPr>
-          <p:cNvPr id="1306681283" name=""/>
+          <p:cNvPr id="1033571039" name=""/>
           <p:cNvPicPr>
             <a:picLocks noChangeAspect="1"/>
           </p:cNvPicPr>
@@ -15915,7 +17237,7 @@
       </p:pic>
       <p:pic>
         <p:nvPicPr>
-          <p:cNvPr id="377675782" name=""/>
+          <p:cNvPr id="639040870" name=""/>
           <p:cNvPicPr>
             <a:picLocks noChangeAspect="1"/>
           </p:cNvPicPr>
@@ -15937,7 +17259,7 @@
       </p:pic>
       <p:pic>
         <p:nvPicPr>
-          <p:cNvPr id="262156948" name=""/>
+          <p:cNvPr id="1120604486" name=""/>
           <p:cNvPicPr>
             <a:picLocks noChangeAspect="1"/>
           </p:cNvPicPr>
@@ -15959,7 +17281,7 @@
       </p:pic>
       <p:pic>
         <p:nvPicPr>
-          <p:cNvPr id="1274523362" name=""/>
+          <p:cNvPr id="1398183741" name=""/>
           <p:cNvPicPr>
             <a:picLocks noChangeAspect="1"/>
           </p:cNvPicPr>
@@ -15981,7 +17303,7 @@
       </p:pic>
       <p:pic>
         <p:nvPicPr>
-          <p:cNvPr id="677600056" name=""/>
+          <p:cNvPr id="561249958" name=""/>
           <p:cNvPicPr>
             <a:picLocks noChangeAspect="1"/>
           </p:cNvPicPr>
@@ -16003,7 +17325,7 @@
       </p:pic>
       <p:sp>
         <p:nvSpPr>
-          <p:cNvPr id="1336850963" name=""/>
+          <p:cNvPr id="1043276818" name=""/>
           <p:cNvSpPr txBox="1"/>
           <p:nvPr/>
         </p:nvSpPr>
@@ -16067,7 +17389,7 @@
       </p:sp>
       <p:sp>
         <p:nvSpPr>
-          <p:cNvPr id="340557229" name=""/>
+          <p:cNvPr id="206535246" name=""/>
           <p:cNvSpPr txBox="1"/>
           <p:nvPr/>
         </p:nvSpPr>
@@ -16131,7 +17453,7 @@
       </p:sp>
       <p:sp>
         <p:nvSpPr>
-          <p:cNvPr id="764638048" name=""/>
+          <p:cNvPr id="1973085187" name=""/>
           <p:cNvSpPr txBox="1"/>
           <p:nvPr/>
         </p:nvSpPr>
@@ -16195,7 +17517,7 @@
       </p:sp>
       <p:sp>
         <p:nvSpPr>
-          <p:cNvPr id="846885937" name=""/>
+          <p:cNvPr id="702305824" name=""/>
           <p:cNvSpPr txBox="1"/>
           <p:nvPr/>
         </p:nvSpPr>
@@ -16259,7 +17581,7 @@
       </p:sp>
       <p:sp>
         <p:nvSpPr>
-          <p:cNvPr id="649214697" name=""/>
+          <p:cNvPr id="1174267514" name=""/>
           <p:cNvSpPr txBox="1"/>
           <p:nvPr/>
         </p:nvSpPr>
@@ -16323,7 +17645,7 @@
       </p:sp>
       <p:pic>
         <p:nvPicPr>
-          <p:cNvPr id="854907280" name=""/>
+          <p:cNvPr id="39109039" name=""/>
           <p:cNvPicPr>
             <a:picLocks noChangeAspect="1"/>
           </p:cNvPicPr>
@@ -16345,7 +17667,7 @@
       </p:pic>
       <p:sp>
         <p:nvSpPr>
-          <p:cNvPr id="1924761340" name=""/>
+          <p:cNvPr id="1156621488" name=""/>
           <p:cNvSpPr txBox="1"/>
           <p:nvPr/>
         </p:nvSpPr>
@@ -16393,7 +17715,7 @@
       </p:sp>
       <p:sp>
         <p:nvSpPr>
-          <p:cNvPr id="1858625494" name=""/>
+          <p:cNvPr id="550448677" name=""/>
           <p:cNvSpPr txBox="1"/>
           <p:nvPr/>
         </p:nvSpPr>
@@ -16457,7 +17779,7 @@
       </p:sp>
       <p:sp>
         <p:nvSpPr>
-          <p:cNvPr id="470791122" name=""/>
+          <p:cNvPr id="1751151897" name=""/>
           <p:cNvSpPr txBox="1"/>
           <p:nvPr/>
         </p:nvSpPr>
@@ -16516,7 +17838,7 @@
       </p:sp>
       <p:sp>
         <p:nvSpPr>
-          <p:cNvPr id="2047979840" name=""/>
+          <p:cNvPr id="1131929178" name=""/>
           <p:cNvSpPr txBox="1"/>
           <p:nvPr/>
         </p:nvSpPr>
@@ -16605,7 +17927,7 @@
       </p:sp>
       <p:sp>
         <p:nvSpPr>
-          <p:cNvPr id="905976481" name=""/>
+          <p:cNvPr id="1084084598" name=""/>
           <p:cNvSpPr txBox="1"/>
           <p:nvPr/>
         </p:nvSpPr>
@@ -16650,7 +17972,7 @@
       </p:sp>
       <p:sp>
         <p:nvSpPr>
-          <p:cNvPr id="273307702" name=""/>
+          <p:cNvPr id="331940302" name=""/>
           <p:cNvSpPr/>
           <p:nvPr/>
         </p:nvSpPr>
@@ -16716,7 +18038,7 @@
       </p:sp>
       <p:sp>
         <p:nvSpPr>
-          <p:cNvPr id="265175933" name=""/>
+          <p:cNvPr id="380578415" name=""/>
           <p:cNvSpPr txBox="1"/>
           <p:nvPr/>
         </p:nvSpPr>
@@ -16805,7 +18127,7 @@
       </p:sp>
       <p:sp>
         <p:nvSpPr>
-          <p:cNvPr id="844358969" name=""/>
+          <p:cNvPr id="1751430812" name=""/>
           <p:cNvSpPr txBox="1"/>
           <p:nvPr/>
         </p:nvSpPr>
@@ -16884,7 +18206,7 @@
       </p:grpSpPr>
       <p:sp>
         <p:nvSpPr>
-          <p:cNvPr id="871307065" name=""/>
+          <p:cNvPr id="593946156" name=""/>
           <p:cNvSpPr/>
           <p:nvPr/>
         </p:nvSpPr>
@@ -16923,7 +18245,7 @@
       </p:sp>
       <p:sp>
         <p:nvSpPr>
-          <p:cNvPr id="1454399382" name=""/>
+          <p:cNvPr id="1847983411" name=""/>
           <p:cNvSpPr/>
           <p:nvPr/>
         </p:nvSpPr>
@@ -16988,7 +18310,7 @@
       </p:sp>
       <p:sp>
         <p:nvSpPr>
-          <p:cNvPr id="2003160912" name=""/>
+          <p:cNvPr id="1478763269" name=""/>
           <p:cNvSpPr/>
           <p:nvPr/>
         </p:nvSpPr>
@@ -17036,7 +18358,7 @@
       </p:sp>
       <p:pic>
         <p:nvPicPr>
-          <p:cNvPr id="1813038606" name=""/>
+          <p:cNvPr id="1825342619" name=""/>
           <p:cNvPicPr>
             <a:picLocks noChangeAspect="1"/>
           </p:cNvPicPr>
@@ -17058,7 +18380,7 @@
       </p:pic>
       <p:sp>
         <p:nvSpPr>
-          <p:cNvPr id="874982362" name=""/>
+          <p:cNvPr id="1243932785" name=""/>
           <p:cNvSpPr txBox="1"/>
           <p:nvPr/>
         </p:nvSpPr>
@@ -17172,7 +18494,7 @@
       </p:sp>
       <p:pic>
         <p:nvPicPr>
-          <p:cNvPr id="835666854" name=""/>
+          <p:cNvPr id="1157585121" name=""/>
           <p:cNvPicPr>
             <a:picLocks noChangeAspect="1"/>
           </p:cNvPicPr>
@@ -17194,7 +18516,7 @@
       </p:pic>
       <p:pic>
         <p:nvPicPr>
-          <p:cNvPr id="1301259349" name=""/>
+          <p:cNvPr id="1481208924" name=""/>
           <p:cNvPicPr>
             <a:picLocks noChangeAspect="1"/>
           </p:cNvPicPr>
@@ -17216,7 +18538,7 @@
       </p:pic>
       <p:pic>
         <p:nvPicPr>
-          <p:cNvPr id="1957978703" name=""/>
+          <p:cNvPr id="755588959" name=""/>
           <p:cNvPicPr>
             <a:picLocks noChangeAspect="1"/>
           </p:cNvPicPr>
@@ -17238,7 +18560,7 @@
       </p:pic>
       <p:pic>
         <p:nvPicPr>
-          <p:cNvPr id="581349556" name=""/>
+          <p:cNvPr id="381551478" name=""/>
           <p:cNvPicPr>
             <a:picLocks noChangeAspect="1"/>
           </p:cNvPicPr>
@@ -17260,7 +18582,7 @@
       </p:pic>
       <p:pic>
         <p:nvPicPr>
-          <p:cNvPr id="131619072" name=""/>
+          <p:cNvPr id="1740446906" name=""/>
           <p:cNvPicPr>
             <a:picLocks noChangeAspect="1"/>
           </p:cNvPicPr>
@@ -17282,7 +18604,7 @@
       </p:pic>
       <p:sp>
         <p:nvSpPr>
-          <p:cNvPr id="1707147220" name=""/>
+          <p:cNvPr id="568719878" name=""/>
           <p:cNvSpPr txBox="1"/>
           <p:nvPr/>
         </p:nvSpPr>
@@ -17346,7 +18668,7 @@
       </p:sp>
       <p:sp>
         <p:nvSpPr>
-          <p:cNvPr id="1912257882" name=""/>
+          <p:cNvPr id="687519981" name=""/>
           <p:cNvSpPr txBox="1"/>
           <p:nvPr/>
         </p:nvSpPr>
@@ -17410,7 +18732,7 @@
       </p:sp>
       <p:sp>
         <p:nvSpPr>
-          <p:cNvPr id="1829888976" name=""/>
+          <p:cNvPr id="1929251322" name=""/>
           <p:cNvSpPr txBox="1"/>
           <p:nvPr/>
         </p:nvSpPr>
@@ -17474,7 +18796,7 @@
       </p:sp>
       <p:sp>
         <p:nvSpPr>
-          <p:cNvPr id="1580097638" name=""/>
+          <p:cNvPr id="867358117" name=""/>
           <p:cNvSpPr txBox="1"/>
           <p:nvPr/>
         </p:nvSpPr>
@@ -17538,7 +18860,7 @@
       </p:sp>
       <p:sp>
         <p:nvSpPr>
-          <p:cNvPr id="686305894" name=""/>
+          <p:cNvPr id="433618323" name=""/>
           <p:cNvSpPr txBox="1"/>
           <p:nvPr/>
         </p:nvSpPr>
@@ -17602,7 +18924,7 @@
       </p:sp>
       <p:pic>
         <p:nvPicPr>
-          <p:cNvPr id="2009724583" name=""/>
+          <p:cNvPr id="752535906" name=""/>
           <p:cNvPicPr>
             <a:picLocks noChangeAspect="1"/>
           </p:cNvPicPr>
@@ -17624,7 +18946,7 @@
       </p:pic>
       <p:sp>
         <p:nvSpPr>
-          <p:cNvPr id="1101463105" name=""/>
+          <p:cNvPr id="1534795145" name=""/>
           <p:cNvSpPr txBox="1"/>
           <p:nvPr/>
         </p:nvSpPr>
@@ -17672,7 +18994,7 @@
       </p:sp>
       <p:sp>
         <p:nvSpPr>
-          <p:cNvPr id="1711353320" name=""/>
+          <p:cNvPr id="436046356" name=""/>
           <p:cNvSpPr txBox="1"/>
           <p:nvPr/>
         </p:nvSpPr>
@@ -17736,7 +19058,7 @@
       </p:sp>
       <p:sp>
         <p:nvSpPr>
-          <p:cNvPr id="931925168" name=""/>
+          <p:cNvPr id="749607421" name=""/>
           <p:cNvSpPr txBox="1"/>
           <p:nvPr/>
         </p:nvSpPr>
@@ -17795,7 +19117,7 @@
       </p:sp>
       <p:sp>
         <p:nvSpPr>
-          <p:cNvPr id="1063541192" name=""/>
+          <p:cNvPr id="634847586" name=""/>
           <p:cNvSpPr txBox="1"/>
           <p:nvPr/>
         </p:nvSpPr>
@@ -17884,7 +19206,7 @@
       </p:sp>
       <p:sp>
         <p:nvSpPr>
-          <p:cNvPr id="1643195557" name=""/>
+          <p:cNvPr id="661352485" name=""/>
           <p:cNvSpPr txBox="1"/>
           <p:nvPr/>
         </p:nvSpPr>
@@ -17929,7 +19251,7 @@
       </p:sp>
       <p:sp>
         <p:nvSpPr>
-          <p:cNvPr id="608067748" name=""/>
+          <p:cNvPr id="495570877" name=""/>
           <p:cNvSpPr/>
           <p:nvPr/>
         </p:nvSpPr>
@@ -17995,7 +19317,7 @@
       </p:sp>
       <p:sp>
         <p:nvSpPr>
-          <p:cNvPr id="945598027" name=""/>
+          <p:cNvPr id="1407676392" name=""/>
           <p:cNvSpPr txBox="1"/>
           <p:nvPr/>
         </p:nvSpPr>
@@ -18084,7 +19406,7 @@
       </p:sp>
       <p:sp>
         <p:nvSpPr>
-          <p:cNvPr id="424279278" name=""/>
+          <p:cNvPr id="1709941487" name=""/>
           <p:cNvSpPr txBox="1"/>
           <p:nvPr/>
         </p:nvSpPr>
@@ -18129,7 +19451,7 @@
       </p:sp>
       <p:sp>
         <p:nvSpPr>
-          <p:cNvPr id="1250479637" name=""/>
+          <p:cNvPr id="51496816" name=""/>
           <p:cNvSpPr txBox="1"/>
           <p:nvPr/>
         </p:nvSpPr>
@@ -18193,7 +19515,7 @@
       </p:sp>
       <p:sp>
         <p:nvSpPr>
-          <p:cNvPr id="1465951354" name=""/>
+          <p:cNvPr id="2075214986" name=""/>
           <p:cNvSpPr/>
           <p:nvPr/>
         </p:nvSpPr>
@@ -18313,7 +19635,7 @@
       </p:sp>
       <p:pic>
         <p:nvPicPr>
-          <p:cNvPr id="342680990" name=""/>
+          <p:cNvPr id="912104326" name=""/>
           <p:cNvPicPr>
             <a:picLocks noChangeAspect="1"/>
           </p:cNvPicPr>
@@ -18335,7 +19657,7 @@
       </p:pic>
       <p:sp>
         <p:nvSpPr>
-          <p:cNvPr id="2143753540" name=""/>
+          <p:cNvPr id="237528122" name=""/>
           <p:cNvSpPr/>
           <p:nvPr/>
         </p:nvSpPr>
@@ -18472,7 +19794,7 @@
       </p:sp>
       <p:sp>
         <p:nvSpPr>
-          <p:cNvPr id="1671089151" name=""/>
+          <p:cNvPr id="418627372" name=""/>
           <p:cNvSpPr/>
           <p:nvPr/>
         </p:nvSpPr>
@@ -18624,7 +19946,7 @@
       </p:sp>
       <p:pic>
         <p:nvPicPr>
-          <p:cNvPr id="1196496450" name=""/>
+          <p:cNvPr id="1639740740" name=""/>
           <p:cNvPicPr>
             <a:picLocks noChangeAspect="1"/>
           </p:cNvPicPr>
@@ -18646,7 +19968,7 @@
       </p:pic>
       <p:pic>
         <p:nvPicPr>
-          <p:cNvPr id="2002129781" name=""/>
+          <p:cNvPr id="642265184" name=""/>
           <p:cNvPicPr>
             <a:picLocks noChangeAspect="1"/>
           </p:cNvPicPr>
@@ -18706,7 +20028,7 @@
       </p:grpSpPr>
       <p:sp>
         <p:nvSpPr>
-          <p:cNvPr id="1428007263" name=""/>
+          <p:cNvPr id="1446463884" name=""/>
           <p:cNvSpPr/>
           <p:nvPr/>
         </p:nvSpPr>
@@ -18745,7 +20067,7 @@
       </p:sp>
       <p:sp>
         <p:nvSpPr>
-          <p:cNvPr id="1265184754" name=""/>
+          <p:cNvPr id="1886318930" name=""/>
           <p:cNvSpPr/>
           <p:nvPr/>
         </p:nvSpPr>
@@ -18810,7 +20132,7 @@
       </p:sp>
       <p:sp>
         <p:nvSpPr>
-          <p:cNvPr id="998719331" name=""/>
+          <p:cNvPr id="1153470" name=""/>
           <p:cNvSpPr/>
           <p:nvPr/>
         </p:nvSpPr>
@@ -18858,7 +20180,7 @@
       </p:sp>
       <p:pic>
         <p:nvPicPr>
-          <p:cNvPr id="60451213" name=""/>
+          <p:cNvPr id="1569250148" name=""/>
           <p:cNvPicPr>
             <a:picLocks noChangeAspect="1"/>
           </p:cNvPicPr>
@@ -18880,7 +20202,7 @@
       </p:pic>
       <p:pic>
         <p:nvPicPr>
-          <p:cNvPr id="1837726800" name=""/>
+          <p:cNvPr id="660001851" name=""/>
           <p:cNvPicPr>
             <a:picLocks noChangeAspect="1"/>
           </p:cNvPicPr>
@@ -18902,7 +20224,7 @@
       </p:pic>
       <p:sp>
         <p:nvSpPr>
-          <p:cNvPr id="2040923946" name=""/>
+          <p:cNvPr id="1130115662" name=""/>
           <p:cNvSpPr txBox="1"/>
           <p:nvPr/>
         </p:nvSpPr>
@@ -18950,7 +20272,7 @@
       </p:sp>
       <p:sp>
         <p:nvSpPr>
-          <p:cNvPr id="1832691436" name=""/>
+          <p:cNvPr id="392821064" name=""/>
           <p:cNvSpPr txBox="1"/>
           <p:nvPr/>
         </p:nvSpPr>
@@ -19014,7 +20336,7 @@
       </p:sp>
       <p:sp>
         <p:nvSpPr>
-          <p:cNvPr id="968715503" name=""/>
+          <p:cNvPr id="170716324" name=""/>
           <p:cNvSpPr txBox="1"/>
           <p:nvPr/>
         </p:nvSpPr>
@@ -19073,7 +20395,7 @@
       </p:sp>
       <p:sp>
         <p:nvSpPr>
-          <p:cNvPr id="2040751334" name=""/>
+          <p:cNvPr id="797666223" name=""/>
           <p:cNvSpPr txBox="1"/>
           <p:nvPr/>
         </p:nvSpPr>
@@ -19162,7 +20484,7 @@
       </p:sp>
       <p:sp>
         <p:nvSpPr>
-          <p:cNvPr id="846443467" name=""/>
+          <p:cNvPr id="1961594393" name=""/>
           <p:cNvSpPr txBox="1"/>
           <p:nvPr/>
         </p:nvSpPr>
@@ -19207,7 +20529,7 @@
       </p:sp>
       <p:sp>
         <p:nvSpPr>
-          <p:cNvPr id="839751612" name=""/>
+          <p:cNvPr id="842370632" name=""/>
           <p:cNvSpPr/>
           <p:nvPr/>
         </p:nvSpPr>
@@ -19273,7 +20595,7 @@
       </p:sp>
       <p:sp>
         <p:nvSpPr>
-          <p:cNvPr id="855800139" name=""/>
+          <p:cNvPr id="1970787331" name=""/>
           <p:cNvSpPr txBox="1"/>
           <p:nvPr/>
         </p:nvSpPr>
@@ -19362,7 +20684,7 @@
       </p:sp>
       <p:sp>
         <p:nvSpPr>
-          <p:cNvPr id="560855336" name=""/>
+          <p:cNvPr id="1653809924" name=""/>
           <p:cNvSpPr txBox="1"/>
           <p:nvPr/>
         </p:nvSpPr>
@@ -19407,7 +20729,7 @@
       </p:sp>
       <p:sp>
         <p:nvSpPr>
-          <p:cNvPr id="1069507805" name=""/>
+          <p:cNvPr id="1861964924" name=""/>
           <p:cNvSpPr txBox="1"/>
           <p:nvPr/>
         </p:nvSpPr>
@@ -19471,7 +20793,7 @@
       </p:sp>
       <p:sp>
         <p:nvSpPr>
-          <p:cNvPr id="1766405097" name=""/>
+          <p:cNvPr id="777734219" name=""/>
           <p:cNvSpPr/>
           <p:nvPr/>
         </p:nvSpPr>
@@ -19591,7 +20913,7 @@
       </p:sp>
       <p:pic>
         <p:nvPicPr>
-          <p:cNvPr id="532558560" name=""/>
+          <p:cNvPr id="452813957" name=""/>
           <p:cNvPicPr>
             <a:picLocks noChangeAspect="1"/>
           </p:cNvPicPr>
@@ -19613,7 +20935,7 @@
       </p:pic>
       <p:sp>
         <p:nvSpPr>
-          <p:cNvPr id="905348750" name=""/>
+          <p:cNvPr id="1062060457" name=""/>
           <p:cNvSpPr/>
           <p:nvPr/>
         </p:nvSpPr>
@@ -19750,7 +21072,7 @@
       </p:sp>
       <p:sp>
         <p:nvSpPr>
-          <p:cNvPr id="1765509152" name=""/>
+          <p:cNvPr id="1773452522" name=""/>
           <p:cNvSpPr/>
           <p:nvPr/>
         </p:nvSpPr>
@@ -19902,7 +21224,7 @@
       </p:sp>
       <p:pic>
         <p:nvPicPr>
-          <p:cNvPr id="272970061" name=""/>
+          <p:cNvPr id="1631308136" name=""/>
           <p:cNvPicPr>
             <a:picLocks noChangeAspect="1"/>
           </p:cNvPicPr>
@@ -19924,7 +21246,7 @@
       </p:pic>
       <p:pic>
         <p:nvPicPr>
-          <p:cNvPr id="1740772399" name=""/>
+          <p:cNvPr id="1059211695" name=""/>
           <p:cNvPicPr>
             <a:picLocks noChangeAspect="1"/>
           </p:cNvPicPr>
@@ -19946,7 +21268,7 @@
       </p:pic>
       <p:sp>
         <p:nvSpPr>
-          <p:cNvPr id="590270584" name=""/>
+          <p:cNvPr id="694084527" name=""/>
           <p:cNvSpPr txBox="1"/>
           <p:nvPr/>
         </p:nvSpPr>
@@ -20010,13 +21332,13 @@
       </p:sp>
       <p:sp>
         <p:nvSpPr>
-          <p:cNvPr id="133365376" name=""/>
+          <p:cNvPr id="644320434" name=""/>
           <p:cNvSpPr txBox="1"/>
           <p:nvPr/>
         </p:nvSpPr>
         <p:spPr bwMode="auto">
           <a:xfrm rot="0" flipH="0" flipV="0">
-            <a:off x="3648105" y="13218638"/>
+            <a:off x="3648105" y="13218637"/>
             <a:ext cx="7547154" cy="2019643"/>
           </a:xfrm>
           <a:prstGeom prst="rect">
@@ -20058,7 +21380,7 @@
       </p:sp>
       <p:sp>
         <p:nvSpPr>
-          <p:cNvPr id="1678812967" name=""/>
+          <p:cNvPr id="1616697769" name=""/>
           <p:cNvSpPr txBox="1"/>
           <p:nvPr/>
         </p:nvSpPr>
@@ -20122,7 +21444,7 @@
       </p:sp>
       <p:sp>
         <p:nvSpPr>
-          <p:cNvPr id="307683632" name=""/>
+          <p:cNvPr id="1575672146" name=""/>
           <p:cNvSpPr txBox="1"/>
           <p:nvPr/>
         </p:nvSpPr>

--- a/John/PPT_Keamanan_Data.pptx
+++ b/John/PPT_Keamanan_Data.pptx
@@ -5,7 +5,7 @@
     <p:sldMasterId id="2147483648" r:id="rId1"/>
   </p:sldMasterIdLst>
   <p:notesMasterIdLst>
-    <p:notesMasterId r:id="rId19"/>
+    <p:notesMasterId r:id="rId20"/>
   </p:notesMasterIdLst>
   <p:sldIdLst>
     <p:sldId id="256" r:id="rId4"/>
@@ -23,6 +23,7 @@
     <p:sldId id="268" r:id="rId16"/>
     <p:sldId id="269" r:id="rId17"/>
     <p:sldId id="270" r:id="rId18"/>
+    <p:sldId id="271" r:id="rId19"/>
   </p:sldIdLst>
   <p:sldSz cx="12192000" cy="6858000"/>
   <p:notesSz cx="6858000" cy="9144000"/>
@@ -148,7 +149,7 @@
       </p:grpSpPr>
       <p:sp>
         <p:nvSpPr>
-          <p:cNvPr id="782171842" name="Header Placeholder 1"/>
+          <p:cNvPr id="709756275" name="Header Placeholder 1"/>
           <p:cNvSpPr>
             <a:spLocks noGrp="1"/>
           </p:cNvSpPr>
@@ -182,7 +183,7 @@
       </p:sp>
       <p:sp>
         <p:nvSpPr>
-          <p:cNvPr id="683527232" name="Date Placeholder 2"/>
+          <p:cNvPr id="1241904318" name="Date Placeholder 2"/>
           <p:cNvSpPr>
             <a:spLocks noGrp="1"/>
           </p:cNvSpPr>
@@ -220,7 +221,7 @@
       </p:sp>
       <p:sp>
         <p:nvSpPr>
-          <p:cNvPr id="772822950" name="Slide Image Placeholder 3"/>
+          <p:cNvPr id="1699092494" name="Slide Image Placeholder 3"/>
           <p:cNvSpPr>
             <a:spLocks noChangeAspect="1" noGrp="1" noRot="1"/>
           </p:cNvSpPr>
@@ -256,7 +257,7 @@
       </p:sp>
       <p:sp>
         <p:nvSpPr>
-          <p:cNvPr id="675259604" name="Notes Placeholder 4"/>
+          <p:cNvPr id="62020531" name="Notes Placeholder 4"/>
           <p:cNvSpPr>
             <a:spLocks noGrp="1"/>
           </p:cNvSpPr>
@@ -330,7 +331,7 @@
       </p:sp>
       <p:sp>
         <p:nvSpPr>
-          <p:cNvPr id="718703574" name="Footer Placeholder 5"/>
+          <p:cNvPr id="365786310" name="Footer Placeholder 5"/>
           <p:cNvSpPr>
             <a:spLocks noGrp="1"/>
           </p:cNvSpPr>
@@ -364,7 +365,7 @@
       </p:sp>
       <p:sp>
         <p:nvSpPr>
-          <p:cNvPr id="1917038196" name="Slide Number Placeholder 6"/>
+          <p:cNvPr id="1397579567" name="Slide Number Placeholder 6"/>
           <p:cNvSpPr>
             <a:spLocks noGrp="1"/>
           </p:cNvSpPr>
@@ -517,7 +518,7 @@
       </p:grpSpPr>
       <p:sp>
         <p:nvSpPr>
-          <p:cNvPr id="399105835" name="Slide Image Placeholder 1"/>
+          <p:cNvPr id="1124313768" name="Slide Image Placeholder 1"/>
           <p:cNvSpPr>
             <a:spLocks noChangeAspect="1" noGrp="1" noRot="1"/>
           </p:cNvSpPr>
@@ -534,7 +535,7 @@
       </p:sp>
       <p:sp>
         <p:nvSpPr>
-          <p:cNvPr id="480855521" name="Notes Placeholder 2"/>
+          <p:cNvPr id="413607485" name="Notes Placeholder 2"/>
           <p:cNvSpPr>
             <a:spLocks noGrp="1"/>
           </p:cNvSpPr>
@@ -559,7 +560,7 @@
       </p:sp>
       <p:sp>
         <p:nvSpPr>
-          <p:cNvPr id="1837263874" name="Slide Number Placeholder 3"/>
+          <p:cNvPr id="1998142488" name="Slide Number Placeholder 3"/>
           <p:cNvSpPr>
             <a:spLocks noGrp="1"/>
           </p:cNvSpPr>
@@ -610,7 +611,7 @@
       </p:grpSpPr>
       <p:sp>
         <p:nvSpPr>
-          <p:cNvPr id="846551847" name="Slide Image Placeholder 1"/>
+          <p:cNvPr id="373811690" name="Slide Image Placeholder 1"/>
           <p:cNvSpPr>
             <a:spLocks noChangeAspect="1" noGrp="1" noRot="1"/>
           </p:cNvSpPr>
@@ -627,7 +628,7 @@
       </p:sp>
       <p:sp>
         <p:nvSpPr>
-          <p:cNvPr id="1863550616" name="Notes Placeholder 2"/>
+          <p:cNvPr id="1486985635" name="Notes Placeholder 2"/>
           <p:cNvSpPr>
             <a:spLocks noGrp="1"/>
           </p:cNvSpPr>
@@ -652,7 +653,7 @@
       </p:sp>
       <p:sp>
         <p:nvSpPr>
-          <p:cNvPr id="935415563" name="Slide Number Placeholder 3"/>
+          <p:cNvPr id="209926127" name="Slide Number Placeholder 3"/>
           <p:cNvSpPr>
             <a:spLocks noGrp="1"/>
           </p:cNvSpPr>
@@ -703,7 +704,7 @@
       </p:grpSpPr>
       <p:sp>
         <p:nvSpPr>
-          <p:cNvPr id="1887611092" name="Slide Image Placeholder 1"/>
+          <p:cNvPr id="1672237811" name="Slide Image Placeholder 1"/>
           <p:cNvSpPr>
             <a:spLocks noChangeAspect="1" noGrp="1" noRot="1"/>
           </p:cNvSpPr>
@@ -720,7 +721,7 @@
       </p:sp>
       <p:sp>
         <p:nvSpPr>
-          <p:cNvPr id="742459495" name="Notes Placeholder 2"/>
+          <p:cNvPr id="1136681501" name="Notes Placeholder 2"/>
           <p:cNvSpPr>
             <a:spLocks noGrp="1"/>
           </p:cNvSpPr>
@@ -745,7 +746,7 @@
       </p:sp>
       <p:sp>
         <p:nvSpPr>
-          <p:cNvPr id="1429285095" name="Slide Number Placeholder 3"/>
+          <p:cNvPr id="577966670" name="Slide Number Placeholder 3"/>
           <p:cNvSpPr>
             <a:spLocks noGrp="1"/>
           </p:cNvSpPr>
@@ -796,7 +797,7 @@
       </p:grpSpPr>
       <p:sp>
         <p:nvSpPr>
-          <p:cNvPr id="2142477618" name="Slide Image Placeholder 1"/>
+          <p:cNvPr id="425251542" name="Slide Image Placeholder 1"/>
           <p:cNvSpPr>
             <a:spLocks noChangeAspect="1" noGrp="1" noRot="1"/>
           </p:cNvSpPr>
@@ -813,7 +814,7 @@
       </p:sp>
       <p:sp>
         <p:nvSpPr>
-          <p:cNvPr id="32407501" name="Notes Placeholder 2"/>
+          <p:cNvPr id="541464949" name="Notes Placeholder 2"/>
           <p:cNvSpPr>
             <a:spLocks noGrp="1"/>
           </p:cNvSpPr>
@@ -838,7 +839,7 @@
       </p:sp>
       <p:sp>
         <p:nvSpPr>
-          <p:cNvPr id="128944634" name="Slide Number Placeholder 3"/>
+          <p:cNvPr id="1113979063" name="Slide Number Placeholder 3"/>
           <p:cNvSpPr>
             <a:spLocks noGrp="1"/>
           </p:cNvSpPr>
@@ -889,7 +890,7 @@
       </p:grpSpPr>
       <p:sp>
         <p:nvSpPr>
-          <p:cNvPr id="1973885634" name="Slide Image Placeholder 1"/>
+          <p:cNvPr id="1923783010" name="Slide Image Placeholder 1"/>
           <p:cNvSpPr>
             <a:spLocks noChangeAspect="1" noGrp="1" noRot="1"/>
           </p:cNvSpPr>
@@ -906,7 +907,7 @@
       </p:sp>
       <p:sp>
         <p:nvSpPr>
-          <p:cNvPr id="959461326" name="Notes Placeholder 2"/>
+          <p:cNvPr id="788007462" name="Notes Placeholder 2"/>
           <p:cNvSpPr>
             <a:spLocks noGrp="1"/>
           </p:cNvSpPr>
@@ -931,7 +932,7 @@
       </p:sp>
       <p:sp>
         <p:nvSpPr>
-          <p:cNvPr id="1149784225" name="Slide Number Placeholder 3"/>
+          <p:cNvPr id="2027371024" name="Slide Number Placeholder 3"/>
           <p:cNvSpPr>
             <a:spLocks noGrp="1"/>
           </p:cNvSpPr>
@@ -982,7 +983,7 @@
       </p:grpSpPr>
       <p:sp>
         <p:nvSpPr>
-          <p:cNvPr id="1147356992" name="Slide Image Placeholder 1"/>
+          <p:cNvPr id="1753514680" name="Slide Image Placeholder 1"/>
           <p:cNvSpPr>
             <a:spLocks noChangeAspect="1" noGrp="1" noRot="1"/>
           </p:cNvSpPr>
@@ -999,7 +1000,7 @@
       </p:sp>
       <p:sp>
         <p:nvSpPr>
-          <p:cNvPr id="839341835" name="Notes Placeholder 2"/>
+          <p:cNvPr id="1660374786" name="Notes Placeholder 2"/>
           <p:cNvSpPr>
             <a:spLocks noGrp="1"/>
           </p:cNvSpPr>
@@ -1024,7 +1025,7 @@
       </p:sp>
       <p:sp>
         <p:nvSpPr>
-          <p:cNvPr id="1355587851" name="Slide Number Placeholder 3"/>
+          <p:cNvPr id="10564056" name="Slide Number Placeholder 3"/>
           <p:cNvSpPr>
             <a:spLocks noGrp="1"/>
           </p:cNvSpPr>
@@ -1075,7 +1076,7 @@
       </p:grpSpPr>
       <p:sp>
         <p:nvSpPr>
-          <p:cNvPr id="1922083682" name="Slide Image Placeholder 1"/>
+          <p:cNvPr id="1263801814" name="Slide Image Placeholder 1"/>
           <p:cNvSpPr>
             <a:spLocks noChangeAspect="1" noGrp="1" noRot="1"/>
           </p:cNvSpPr>
@@ -1092,7 +1093,7 @@
       </p:sp>
       <p:sp>
         <p:nvSpPr>
-          <p:cNvPr id="918587312" name="Notes Placeholder 2"/>
+          <p:cNvPr id="1216057240" name="Notes Placeholder 2"/>
           <p:cNvSpPr>
             <a:spLocks noGrp="1"/>
           </p:cNvSpPr>
@@ -1117,7 +1118,7 @@
       </p:sp>
       <p:sp>
         <p:nvSpPr>
-          <p:cNvPr id="163630991" name="Slide Number Placeholder 3"/>
+          <p:cNvPr id="978049965" name="Slide Number Placeholder 3"/>
           <p:cNvSpPr>
             <a:spLocks noGrp="1"/>
           </p:cNvSpPr>
@@ -1134,6 +1135,99 @@
               <a:defRPr/>
             </a:pPr>
             <a:fld id="{4A8FD684-F1BA-E9EE-CF27-953CF4CDE9FE}" type="slidenum">
+              <a:rPr lang="en-US"/>
+              <a:t/>
+            </a:fld>
+            <a:endParaRPr lang="en-US"/>
+          </a:p>
+        </p:txBody>
+      </p:sp>
+    </p:spTree>
+  </p:cSld>
+  <p:clrMapOvr>
+    <a:masterClrMapping/>
+  </p:clrMapOvr>
+</p:notes>
+</file>
+
+<file path=ppt/notesSlides/notesSlide16.xml><?xml version="1.0" encoding="utf-8"?>
+<p:notes xmlns:a="http://schemas.openxmlformats.org/drawingml/2006/main" xmlns:r="http://schemas.openxmlformats.org/officeDocument/2006/relationships" xmlns:p="http://schemas.openxmlformats.org/presentationml/2006/main" xmlns:m="http://schemas.openxmlformats.org/officeDocument/2006/math" xmlns:w="http://schemas.openxmlformats.org/wordprocessingml/2006/main">
+  <p:cSld name="">
+    <p:spTree>
+      <p:nvGrpSpPr>
+        <p:cNvPr id="1" name=""/>
+        <p:cNvGrpSpPr/>
+        <p:nvPr/>
+      </p:nvGrpSpPr>
+      <p:grpSpPr bwMode="auto">
+        <a:xfrm>
+          <a:off x="0" y="0"/>
+          <a:ext cx="0" cy="0"/>
+          <a:chOff x="0" y="0"/>
+          <a:chExt cx="0" cy="0"/>
+        </a:xfrm>
+      </p:grpSpPr>
+      <p:sp>
+        <p:nvSpPr>
+          <p:cNvPr id="1149026369" name="Slide Image Placeholder 1"/>
+          <p:cNvSpPr>
+            <a:spLocks noChangeAspect="1" noGrp="1" noRot="1"/>
+          </p:cNvSpPr>
+          <p:nvPr>
+            <p:ph type="sldImg"/>
+          </p:nvPr>
+        </p:nvSpPr>
+        <p:spPr bwMode="auto">
+          <a:xfrm>
+            <a:off x="685800" y="1143000"/>
+            <a:ext cx="5486400" cy="3086100"/>
+          </a:xfrm>
+        </p:spPr>
+      </p:sp>
+      <p:sp>
+        <p:nvSpPr>
+          <p:cNvPr id="2116730714" name="Notes Placeholder 2"/>
+          <p:cNvSpPr>
+            <a:spLocks noGrp="1"/>
+          </p:cNvSpPr>
+          <p:nvPr>
+            <p:ph type="body" idx="1"/>
+          </p:nvPr>
+        </p:nvSpPr>
+        <p:spPr bwMode="auto"/>
+        <p:txBody>
+          <a:bodyPr/>
+          <a:lstStyle/>
+          <a:p>
+            <a:pPr>
+              <a:defRPr/>
+            </a:pPr>
+            <a:endParaRPr lang="en-US">
+              <a:latin typeface="Arial"/>
+              <a:cs typeface="Arial"/>
+            </a:endParaRPr>
+          </a:p>
+        </p:txBody>
+      </p:sp>
+      <p:sp>
+        <p:nvSpPr>
+          <p:cNvPr id="41812261" name="Slide Number Placeholder 3"/>
+          <p:cNvSpPr>
+            <a:spLocks noGrp="1"/>
+          </p:cNvSpPr>
+          <p:nvPr>
+            <p:ph type="sldNum" sz="quarter" idx="10"/>
+          </p:nvPr>
+        </p:nvSpPr>
+        <p:spPr bwMode="auto"/>
+        <p:txBody>
+          <a:bodyPr/>
+          <a:lstStyle/>
+          <a:p>
+            <a:pPr>
+              <a:defRPr/>
+            </a:pPr>
+            <a:fld id="{6C201DB9-F40D-4C6C-06E5-2AD012DF8FC5}" type="slidenum">
               <a:rPr lang="en-US"/>
               <a:t/>
             </a:fld>
@@ -1168,7 +1262,7 @@
       </p:grpSpPr>
       <p:sp>
         <p:nvSpPr>
-          <p:cNvPr id="1291957336" name="Slide Image Placeholder 1"/>
+          <p:cNvPr id="1630007280" name="Slide Image Placeholder 1"/>
           <p:cNvSpPr>
             <a:spLocks noChangeAspect="1" noGrp="1" noRot="1"/>
           </p:cNvSpPr>
@@ -1185,7 +1279,7 @@
       </p:sp>
       <p:sp>
         <p:nvSpPr>
-          <p:cNvPr id="394748900" name="Notes Placeholder 2"/>
+          <p:cNvPr id="188900094" name="Notes Placeholder 2"/>
           <p:cNvSpPr>
             <a:spLocks noGrp="1"/>
           </p:cNvSpPr>
@@ -1210,7 +1304,7 @@
       </p:sp>
       <p:sp>
         <p:nvSpPr>
-          <p:cNvPr id="879582226" name="Slide Number Placeholder 3"/>
+          <p:cNvPr id="826630667" name="Slide Number Placeholder 3"/>
           <p:cNvSpPr>
             <a:spLocks noGrp="1"/>
           </p:cNvSpPr>
@@ -1261,7 +1355,7 @@
       </p:grpSpPr>
       <p:sp>
         <p:nvSpPr>
-          <p:cNvPr id="1218971704" name="Slide Image Placeholder 1"/>
+          <p:cNvPr id="958266226" name="Slide Image Placeholder 1"/>
           <p:cNvSpPr>
             <a:spLocks noChangeAspect="1" noGrp="1" noRot="1"/>
           </p:cNvSpPr>
@@ -1278,7 +1372,7 @@
       </p:sp>
       <p:sp>
         <p:nvSpPr>
-          <p:cNvPr id="1916029968" name="Notes Placeholder 2"/>
+          <p:cNvPr id="2141438586" name="Notes Placeholder 2"/>
           <p:cNvSpPr>
             <a:spLocks noGrp="1"/>
           </p:cNvSpPr>
@@ -1303,7 +1397,7 @@
       </p:sp>
       <p:sp>
         <p:nvSpPr>
-          <p:cNvPr id="1605823591" name="Slide Number Placeholder 3"/>
+          <p:cNvPr id="260587576" name="Slide Number Placeholder 3"/>
           <p:cNvSpPr>
             <a:spLocks noGrp="1"/>
           </p:cNvSpPr>
@@ -1354,7 +1448,7 @@
       </p:grpSpPr>
       <p:sp>
         <p:nvSpPr>
-          <p:cNvPr id="710473896" name="Slide Image Placeholder 1"/>
+          <p:cNvPr id="1234756042" name="Slide Image Placeholder 1"/>
           <p:cNvSpPr>
             <a:spLocks noChangeAspect="1" noGrp="1" noRot="1"/>
           </p:cNvSpPr>
@@ -1371,7 +1465,7 @@
       </p:sp>
       <p:sp>
         <p:nvSpPr>
-          <p:cNvPr id="2063406764" name="Notes Placeholder 2"/>
+          <p:cNvPr id="2034862554" name="Notes Placeholder 2"/>
           <p:cNvSpPr>
             <a:spLocks noGrp="1"/>
           </p:cNvSpPr>
@@ -1396,7 +1490,7 @@
       </p:sp>
       <p:sp>
         <p:nvSpPr>
-          <p:cNvPr id="1404573537" name="Slide Number Placeholder 3"/>
+          <p:cNvPr id="273179967" name="Slide Number Placeholder 3"/>
           <p:cNvSpPr>
             <a:spLocks noGrp="1"/>
           </p:cNvSpPr>
@@ -1447,7 +1541,7 @@
       </p:grpSpPr>
       <p:sp>
         <p:nvSpPr>
-          <p:cNvPr id="1463271394" name="Slide Image Placeholder 1"/>
+          <p:cNvPr id="436339816" name="Slide Image Placeholder 1"/>
           <p:cNvSpPr>
             <a:spLocks noChangeAspect="1" noGrp="1" noRot="1"/>
           </p:cNvSpPr>
@@ -1464,7 +1558,7 @@
       </p:sp>
       <p:sp>
         <p:nvSpPr>
-          <p:cNvPr id="60970542" name="Notes Placeholder 2"/>
+          <p:cNvPr id="1455656965" name="Notes Placeholder 2"/>
           <p:cNvSpPr>
             <a:spLocks noGrp="1"/>
           </p:cNvSpPr>
@@ -1489,7 +1583,7 @@
       </p:sp>
       <p:sp>
         <p:nvSpPr>
-          <p:cNvPr id="1688008993" name="Slide Number Placeholder 3"/>
+          <p:cNvPr id="1689467281" name="Slide Number Placeholder 3"/>
           <p:cNvSpPr>
             <a:spLocks noGrp="1"/>
           </p:cNvSpPr>
@@ -1540,7 +1634,7 @@
       </p:grpSpPr>
       <p:sp>
         <p:nvSpPr>
-          <p:cNvPr id="997305845" name="Slide Image Placeholder 1"/>
+          <p:cNvPr id="1873146942" name="Slide Image Placeholder 1"/>
           <p:cNvSpPr>
             <a:spLocks noChangeAspect="1" noGrp="1" noRot="1"/>
           </p:cNvSpPr>
@@ -1557,7 +1651,7 @@
       </p:sp>
       <p:sp>
         <p:nvSpPr>
-          <p:cNvPr id="1430678487" name="Notes Placeholder 2"/>
+          <p:cNvPr id="1210671081" name="Notes Placeholder 2"/>
           <p:cNvSpPr>
             <a:spLocks noGrp="1"/>
           </p:cNvSpPr>
@@ -1582,7 +1676,7 @@
       </p:sp>
       <p:sp>
         <p:nvSpPr>
-          <p:cNvPr id="1122115887" name="Slide Number Placeholder 3"/>
+          <p:cNvPr id="863698022" name="Slide Number Placeholder 3"/>
           <p:cNvSpPr>
             <a:spLocks noGrp="1"/>
           </p:cNvSpPr>
@@ -1633,7 +1727,7 @@
       </p:grpSpPr>
       <p:sp>
         <p:nvSpPr>
-          <p:cNvPr id="297872536" name="Slide Image Placeholder 1"/>
+          <p:cNvPr id="488552811" name="Slide Image Placeholder 1"/>
           <p:cNvSpPr>
             <a:spLocks noChangeAspect="1" noGrp="1" noRot="1"/>
           </p:cNvSpPr>
@@ -1650,7 +1744,7 @@
       </p:sp>
       <p:sp>
         <p:nvSpPr>
-          <p:cNvPr id="1702053125" name="Notes Placeholder 2"/>
+          <p:cNvPr id="1728524437" name="Notes Placeholder 2"/>
           <p:cNvSpPr>
             <a:spLocks noGrp="1"/>
           </p:cNvSpPr>
@@ -1675,7 +1769,7 @@
       </p:sp>
       <p:sp>
         <p:nvSpPr>
-          <p:cNvPr id="1863639610" name="Slide Number Placeholder 3"/>
+          <p:cNvPr id="517978991" name="Slide Number Placeholder 3"/>
           <p:cNvSpPr>
             <a:spLocks noGrp="1"/>
           </p:cNvSpPr>
@@ -1726,7 +1820,7 @@
       </p:grpSpPr>
       <p:sp>
         <p:nvSpPr>
-          <p:cNvPr id="471591530" name="Slide Image Placeholder 1"/>
+          <p:cNvPr id="1383400675" name="Slide Image Placeholder 1"/>
           <p:cNvSpPr>
             <a:spLocks noChangeAspect="1" noGrp="1" noRot="1"/>
           </p:cNvSpPr>
@@ -1743,7 +1837,7 @@
       </p:sp>
       <p:sp>
         <p:nvSpPr>
-          <p:cNvPr id="1543880572" name="Notes Placeholder 2"/>
+          <p:cNvPr id="289238403" name="Notes Placeholder 2"/>
           <p:cNvSpPr>
             <a:spLocks noGrp="1"/>
           </p:cNvSpPr>
@@ -1768,7 +1862,7 @@
       </p:sp>
       <p:sp>
         <p:nvSpPr>
-          <p:cNvPr id="1086842624" name="Slide Number Placeholder 3"/>
+          <p:cNvPr id="189179692" name="Slide Number Placeholder 3"/>
           <p:cNvSpPr>
             <a:spLocks noGrp="1"/>
           </p:cNvSpPr>
@@ -1819,7 +1913,7 @@
       </p:grpSpPr>
       <p:sp>
         <p:nvSpPr>
-          <p:cNvPr id="744685774" name="Slide Image Placeholder 1"/>
+          <p:cNvPr id="353906710" name="Slide Image Placeholder 1"/>
           <p:cNvSpPr>
             <a:spLocks noChangeAspect="1" noGrp="1" noRot="1"/>
           </p:cNvSpPr>
@@ -1836,7 +1930,7 @@
       </p:sp>
       <p:sp>
         <p:nvSpPr>
-          <p:cNvPr id="1183935248" name="Notes Placeholder 2"/>
+          <p:cNvPr id="1885900784" name="Notes Placeholder 2"/>
           <p:cNvSpPr>
             <a:spLocks noGrp="1"/>
           </p:cNvSpPr>
@@ -1861,7 +1955,7 @@
       </p:sp>
       <p:sp>
         <p:nvSpPr>
-          <p:cNvPr id="54215673" name="Slide Number Placeholder 3"/>
+          <p:cNvPr id="1569943640" name="Slide Number Placeholder 3"/>
           <p:cNvSpPr>
             <a:spLocks noGrp="1"/>
           </p:cNvSpPr>
@@ -1912,7 +2006,7 @@
       </p:grpSpPr>
       <p:sp>
         <p:nvSpPr>
-          <p:cNvPr id="1239921306" name="Title 1"/>
+          <p:cNvPr id="1509995273" name="Title 1"/>
           <p:cNvSpPr>
             <a:spLocks noGrp="1"/>
           </p:cNvSpPr>
@@ -1947,7 +2041,7 @@
       </p:sp>
       <p:sp>
         <p:nvSpPr>
-          <p:cNvPr id="557126354" name="Subtitle 2"/>
+          <p:cNvPr id="49788504" name="Subtitle 2"/>
           <p:cNvSpPr>
             <a:spLocks noGrp="1"/>
           </p:cNvSpPr>
@@ -2015,7 +2109,7 @@
       </p:sp>
       <p:sp>
         <p:nvSpPr>
-          <p:cNvPr id="1310524006" name="Date Placeholder 3"/>
+          <p:cNvPr id="1189589703" name="Date Placeholder 3"/>
           <p:cNvSpPr>
             <a:spLocks noGrp="1"/>
           </p:cNvSpPr>
@@ -2041,7 +2135,7 @@
       </p:sp>
       <p:sp>
         <p:nvSpPr>
-          <p:cNvPr id="421218469" name="Footer Placeholder 4"/>
+          <p:cNvPr id="625689794" name="Footer Placeholder 4"/>
           <p:cNvSpPr>
             <a:spLocks noGrp="1"/>
           </p:cNvSpPr>
@@ -2063,7 +2157,7 @@
       </p:sp>
       <p:sp>
         <p:nvSpPr>
-          <p:cNvPr id="256722386" name="Slide Number Placeholder 5"/>
+          <p:cNvPr id="864398321" name="Slide Number Placeholder 5"/>
           <p:cNvSpPr>
             <a:spLocks noGrp="1"/>
           </p:cNvSpPr>
@@ -2114,7 +2208,7 @@
       </p:grpSpPr>
       <p:sp>
         <p:nvSpPr>
-          <p:cNvPr id="1883194929" name="Title 1"/>
+          <p:cNvPr id="824098060" name="Title 1"/>
           <p:cNvSpPr>
             <a:spLocks noGrp="1"/>
           </p:cNvSpPr>
@@ -2140,7 +2234,7 @@
       </p:sp>
       <p:sp>
         <p:nvSpPr>
-          <p:cNvPr id="347317864" name="Vertical Text Placeholder 2"/>
+          <p:cNvPr id="394683861" name="Vertical Text Placeholder 2"/>
           <p:cNvSpPr>
             <a:spLocks noGrp="1"/>
           </p:cNvSpPr>
@@ -2206,7 +2300,7 @@
       </p:sp>
       <p:sp>
         <p:nvSpPr>
-          <p:cNvPr id="1627519339" name="Date Placeholder 3"/>
+          <p:cNvPr id="1100200761" name="Date Placeholder 3"/>
           <p:cNvSpPr>
             <a:spLocks noGrp="1"/>
           </p:cNvSpPr>
@@ -2232,7 +2326,7 @@
       </p:sp>
       <p:sp>
         <p:nvSpPr>
-          <p:cNvPr id="1767255300" name="Footer Placeholder 4"/>
+          <p:cNvPr id="1705981406" name="Footer Placeholder 4"/>
           <p:cNvSpPr>
             <a:spLocks noGrp="1"/>
           </p:cNvSpPr>
@@ -2254,7 +2348,7 @@
       </p:sp>
       <p:sp>
         <p:nvSpPr>
-          <p:cNvPr id="1809966806" name="Slide Number Placeholder 5"/>
+          <p:cNvPr id="372753436" name="Slide Number Placeholder 5"/>
           <p:cNvSpPr>
             <a:spLocks noGrp="1"/>
           </p:cNvSpPr>
@@ -2305,7 +2399,7 @@
       </p:grpSpPr>
       <p:sp>
         <p:nvSpPr>
-          <p:cNvPr id="447534146" name="Vertical Title 1"/>
+          <p:cNvPr id="740587287" name="Vertical Title 1"/>
           <p:cNvSpPr>
             <a:spLocks noGrp="1"/>
           </p:cNvSpPr>
@@ -2336,7 +2430,7 @@
       </p:sp>
       <p:sp>
         <p:nvSpPr>
-          <p:cNvPr id="767360145" name="Vertical Text Placeholder 2"/>
+          <p:cNvPr id="283319393" name="Vertical Text Placeholder 2"/>
           <p:cNvSpPr>
             <a:spLocks noGrp="1"/>
           </p:cNvSpPr>
@@ -2407,7 +2501,7 @@
       </p:sp>
       <p:sp>
         <p:nvSpPr>
-          <p:cNvPr id="746143874" name="Date Placeholder 3"/>
+          <p:cNvPr id="81454663" name="Date Placeholder 3"/>
           <p:cNvSpPr>
             <a:spLocks noGrp="1"/>
           </p:cNvSpPr>
@@ -2433,7 +2527,7 @@
       </p:sp>
       <p:sp>
         <p:nvSpPr>
-          <p:cNvPr id="366122698" name="Footer Placeholder 4"/>
+          <p:cNvPr id="1266609648" name="Footer Placeholder 4"/>
           <p:cNvSpPr>
             <a:spLocks noGrp="1"/>
           </p:cNvSpPr>
@@ -2455,7 +2549,7 @@
       </p:sp>
       <p:sp>
         <p:nvSpPr>
-          <p:cNvPr id="572305408" name="Slide Number Placeholder 5"/>
+          <p:cNvPr id="220003835" name="Slide Number Placeholder 5"/>
           <p:cNvSpPr>
             <a:spLocks noGrp="1"/>
           </p:cNvSpPr>
@@ -2506,7 +2600,7 @@
       </p:grpSpPr>
       <p:sp>
         <p:nvSpPr>
-          <p:cNvPr id="781171162" name="Title 1"/>
+          <p:cNvPr id="301457370" name="Title 1"/>
           <p:cNvSpPr>
             <a:spLocks noGrp="1"/>
           </p:cNvSpPr>
@@ -2532,7 +2626,7 @@
       </p:sp>
       <p:sp>
         <p:nvSpPr>
-          <p:cNvPr id="907279956" name="Content Placeholder 2"/>
+          <p:cNvPr id="133140527" name="Content Placeholder 2"/>
           <p:cNvSpPr>
             <a:spLocks noGrp="1"/>
           </p:cNvSpPr>
@@ -2598,7 +2692,7 @@
       </p:sp>
       <p:sp>
         <p:nvSpPr>
-          <p:cNvPr id="1701393762" name="Date Placeholder 3"/>
+          <p:cNvPr id="459219087" name="Date Placeholder 3"/>
           <p:cNvSpPr>
             <a:spLocks noGrp="1"/>
           </p:cNvSpPr>
@@ -2624,7 +2718,7 @@
       </p:sp>
       <p:sp>
         <p:nvSpPr>
-          <p:cNvPr id="791372223" name="Footer Placeholder 4"/>
+          <p:cNvPr id="974032480" name="Footer Placeholder 4"/>
           <p:cNvSpPr>
             <a:spLocks noGrp="1"/>
           </p:cNvSpPr>
@@ -2646,7 +2740,7 @@
       </p:sp>
       <p:sp>
         <p:nvSpPr>
-          <p:cNvPr id="1220215101" name="Slide Number Placeholder 5"/>
+          <p:cNvPr id="688137248" name="Slide Number Placeholder 5"/>
           <p:cNvSpPr>
             <a:spLocks noGrp="1"/>
           </p:cNvSpPr>
@@ -2697,7 +2791,7 @@
       </p:grpSpPr>
       <p:sp>
         <p:nvSpPr>
-          <p:cNvPr id="95093359" name="Title 1"/>
+          <p:cNvPr id="1931845675" name="Title 1"/>
           <p:cNvSpPr>
             <a:spLocks noGrp="1"/>
           </p:cNvSpPr>
@@ -2732,7 +2826,7 @@
       </p:sp>
       <p:sp>
         <p:nvSpPr>
-          <p:cNvPr id="423463246" name="Text Placeholder 2"/>
+          <p:cNvPr id="2024200036" name="Text Placeholder 2"/>
           <p:cNvSpPr>
             <a:spLocks noGrp="1"/>
           </p:cNvSpPr>
@@ -2854,7 +2948,7 @@
       </p:sp>
       <p:sp>
         <p:nvSpPr>
-          <p:cNvPr id="1049732276" name="Date Placeholder 3"/>
+          <p:cNvPr id="986150173" name="Date Placeholder 3"/>
           <p:cNvSpPr>
             <a:spLocks noGrp="1"/>
           </p:cNvSpPr>
@@ -2880,7 +2974,7 @@
       </p:sp>
       <p:sp>
         <p:nvSpPr>
-          <p:cNvPr id="1382539776" name="Footer Placeholder 4"/>
+          <p:cNvPr id="846160421" name="Footer Placeholder 4"/>
           <p:cNvSpPr>
             <a:spLocks noGrp="1"/>
           </p:cNvSpPr>
@@ -2902,7 +2996,7 @@
       </p:sp>
       <p:sp>
         <p:nvSpPr>
-          <p:cNvPr id="648410159" name="Slide Number Placeholder 5"/>
+          <p:cNvPr id="1554054609" name="Slide Number Placeholder 5"/>
           <p:cNvSpPr>
             <a:spLocks noGrp="1"/>
           </p:cNvSpPr>
@@ -2953,7 +3047,7 @@
       </p:grpSpPr>
       <p:sp>
         <p:nvSpPr>
-          <p:cNvPr id="1505838358" name="Title 1"/>
+          <p:cNvPr id="1540466377" name="Title 1"/>
           <p:cNvSpPr>
             <a:spLocks noGrp="1"/>
           </p:cNvSpPr>
@@ -2979,7 +3073,7 @@
       </p:sp>
       <p:sp>
         <p:nvSpPr>
-          <p:cNvPr id="1402167781" name="Content Placeholder 2"/>
+          <p:cNvPr id="1528358917" name="Content Placeholder 2"/>
           <p:cNvSpPr>
             <a:spLocks noGrp="1"/>
           </p:cNvSpPr>
@@ -3050,7 +3144,7 @@
       </p:sp>
       <p:sp>
         <p:nvSpPr>
-          <p:cNvPr id="982187371" name="Content Placeholder 3"/>
+          <p:cNvPr id="799864116" name="Content Placeholder 3"/>
           <p:cNvSpPr>
             <a:spLocks noGrp="1"/>
           </p:cNvSpPr>
@@ -3121,7 +3215,7 @@
       </p:sp>
       <p:sp>
         <p:nvSpPr>
-          <p:cNvPr id="1568910603" name="Date Placeholder 4"/>
+          <p:cNvPr id="286213762" name="Date Placeholder 4"/>
           <p:cNvSpPr>
             <a:spLocks noGrp="1"/>
           </p:cNvSpPr>
@@ -3147,7 +3241,7 @@
       </p:sp>
       <p:sp>
         <p:nvSpPr>
-          <p:cNvPr id="1376727702" name="Footer Placeholder 5"/>
+          <p:cNvPr id="1585047295" name="Footer Placeholder 5"/>
           <p:cNvSpPr>
             <a:spLocks noGrp="1"/>
           </p:cNvSpPr>
@@ -3169,7 +3263,7 @@
       </p:sp>
       <p:sp>
         <p:nvSpPr>
-          <p:cNvPr id="847941532" name="Slide Number Placeholder 6"/>
+          <p:cNvPr id="1961118780" name="Slide Number Placeholder 6"/>
           <p:cNvSpPr>
             <a:spLocks noGrp="1"/>
           </p:cNvSpPr>
@@ -3220,7 +3314,7 @@
       </p:grpSpPr>
       <p:sp>
         <p:nvSpPr>
-          <p:cNvPr id="173936887" name="Title 1"/>
+          <p:cNvPr id="600111056" name="Title 1"/>
           <p:cNvSpPr>
             <a:spLocks noGrp="1"/>
           </p:cNvSpPr>
@@ -3251,7 +3345,7 @@
       </p:sp>
       <p:sp>
         <p:nvSpPr>
-          <p:cNvPr id="930074775" name="Text Placeholder 2"/>
+          <p:cNvPr id="782607599" name="Text Placeholder 2"/>
           <p:cNvSpPr>
             <a:spLocks noGrp="1"/>
           </p:cNvSpPr>
@@ -3319,7 +3413,7 @@
       </p:sp>
       <p:sp>
         <p:nvSpPr>
-          <p:cNvPr id="2074477196" name="Content Placeholder 3"/>
+          <p:cNvPr id="1068680987" name="Content Placeholder 3"/>
           <p:cNvSpPr>
             <a:spLocks noGrp="1"/>
           </p:cNvSpPr>
@@ -3390,7 +3484,7 @@
       </p:sp>
       <p:sp>
         <p:nvSpPr>
-          <p:cNvPr id="1430246431" name="Text Placeholder 4"/>
+          <p:cNvPr id="1725394458" name="Text Placeholder 4"/>
           <p:cNvSpPr>
             <a:spLocks noGrp="1"/>
           </p:cNvSpPr>
@@ -3458,7 +3552,7 @@
       </p:sp>
       <p:sp>
         <p:nvSpPr>
-          <p:cNvPr id="1250843473" name="Content Placeholder 5"/>
+          <p:cNvPr id="1467921863" name="Content Placeholder 5"/>
           <p:cNvSpPr>
             <a:spLocks noGrp="1"/>
           </p:cNvSpPr>
@@ -3529,7 +3623,7 @@
       </p:sp>
       <p:sp>
         <p:nvSpPr>
-          <p:cNvPr id="89902434" name="Date Placeholder 6"/>
+          <p:cNvPr id="185513845" name="Date Placeholder 6"/>
           <p:cNvSpPr>
             <a:spLocks noGrp="1"/>
           </p:cNvSpPr>
@@ -3555,7 +3649,7 @@
       </p:sp>
       <p:sp>
         <p:nvSpPr>
-          <p:cNvPr id="654666720" name="Footer Placeholder 7"/>
+          <p:cNvPr id="1025418706" name="Footer Placeholder 7"/>
           <p:cNvSpPr>
             <a:spLocks noGrp="1"/>
           </p:cNvSpPr>
@@ -3577,7 +3671,7 @@
       </p:sp>
       <p:sp>
         <p:nvSpPr>
-          <p:cNvPr id="1257072031" name="Slide Number Placeholder 8"/>
+          <p:cNvPr id="68497138" name="Slide Number Placeholder 8"/>
           <p:cNvSpPr>
             <a:spLocks noGrp="1"/>
           </p:cNvSpPr>
@@ -3628,7 +3722,7 @@
       </p:grpSpPr>
       <p:sp>
         <p:nvSpPr>
-          <p:cNvPr id="1473406565" name="Title 1"/>
+          <p:cNvPr id="1956889296" name="Title 1"/>
           <p:cNvSpPr>
             <a:spLocks noGrp="1"/>
           </p:cNvSpPr>
@@ -3654,7 +3748,7 @@
       </p:sp>
       <p:sp>
         <p:nvSpPr>
-          <p:cNvPr id="808443763" name="Date Placeholder 2"/>
+          <p:cNvPr id="1707837372" name="Date Placeholder 2"/>
           <p:cNvSpPr>
             <a:spLocks noGrp="1"/>
           </p:cNvSpPr>
@@ -3680,7 +3774,7 @@
       </p:sp>
       <p:sp>
         <p:nvSpPr>
-          <p:cNvPr id="1097556332" name="Footer Placeholder 3"/>
+          <p:cNvPr id="1114510611" name="Footer Placeholder 3"/>
           <p:cNvSpPr>
             <a:spLocks noGrp="1"/>
           </p:cNvSpPr>
@@ -3702,7 +3796,7 @@
       </p:sp>
       <p:sp>
         <p:nvSpPr>
-          <p:cNvPr id="1476962598" name="Slide Number Placeholder 4"/>
+          <p:cNvPr id="71924309" name="Slide Number Placeholder 4"/>
           <p:cNvSpPr>
             <a:spLocks noGrp="1"/>
           </p:cNvSpPr>
@@ -3753,7 +3847,7 @@
       </p:grpSpPr>
       <p:sp>
         <p:nvSpPr>
-          <p:cNvPr id="1788174828" name="Date Placeholder 1"/>
+          <p:cNvPr id="1402696934" name="Date Placeholder 1"/>
           <p:cNvSpPr>
             <a:spLocks noGrp="1"/>
           </p:cNvSpPr>
@@ -3779,7 +3873,7 @@
       </p:sp>
       <p:sp>
         <p:nvSpPr>
-          <p:cNvPr id="1922796966" name="Footer Placeholder 2"/>
+          <p:cNvPr id="809017126" name="Footer Placeholder 2"/>
           <p:cNvSpPr>
             <a:spLocks noGrp="1"/>
           </p:cNvSpPr>
@@ -3801,7 +3895,7 @@
       </p:sp>
       <p:sp>
         <p:nvSpPr>
-          <p:cNvPr id="1443005692" name="Slide Number Placeholder 3"/>
+          <p:cNvPr id="462560879" name="Slide Number Placeholder 3"/>
           <p:cNvSpPr>
             <a:spLocks noGrp="1"/>
           </p:cNvSpPr>
@@ -3852,7 +3946,7 @@
       </p:grpSpPr>
       <p:sp>
         <p:nvSpPr>
-          <p:cNvPr id="1437308361" name="Title 1"/>
+          <p:cNvPr id="1627236488" name="Title 1"/>
           <p:cNvSpPr>
             <a:spLocks noGrp="1"/>
           </p:cNvSpPr>
@@ -3887,7 +3981,7 @@
       </p:sp>
       <p:sp>
         <p:nvSpPr>
-          <p:cNvPr id="1889128612" name="Content Placeholder 2"/>
+          <p:cNvPr id="762812515" name="Content Placeholder 2"/>
           <p:cNvSpPr>
             <a:spLocks noGrp="1"/>
           </p:cNvSpPr>
@@ -3986,7 +4080,7 @@
       </p:sp>
       <p:sp>
         <p:nvSpPr>
-          <p:cNvPr id="715541955" name="Text Placeholder 3"/>
+          <p:cNvPr id="1860849039" name="Text Placeholder 3"/>
           <p:cNvSpPr>
             <a:spLocks noGrp="1"/>
           </p:cNvSpPr>
@@ -4054,7 +4148,7 @@
       </p:sp>
       <p:sp>
         <p:nvSpPr>
-          <p:cNvPr id="587304783" name="Date Placeholder 4"/>
+          <p:cNvPr id="369462455" name="Date Placeholder 4"/>
           <p:cNvSpPr>
             <a:spLocks noGrp="1"/>
           </p:cNvSpPr>
@@ -4080,7 +4174,7 @@
       </p:sp>
       <p:sp>
         <p:nvSpPr>
-          <p:cNvPr id="2098869932" name="Footer Placeholder 5"/>
+          <p:cNvPr id="751998037" name="Footer Placeholder 5"/>
           <p:cNvSpPr>
             <a:spLocks noGrp="1"/>
           </p:cNvSpPr>
@@ -4102,7 +4196,7 @@
       </p:sp>
       <p:sp>
         <p:nvSpPr>
-          <p:cNvPr id="1077465573" name="Slide Number Placeholder 6"/>
+          <p:cNvPr id="1945528222" name="Slide Number Placeholder 6"/>
           <p:cNvSpPr>
             <a:spLocks noGrp="1"/>
           </p:cNvSpPr>
@@ -4153,7 +4247,7 @@
       </p:grpSpPr>
       <p:sp>
         <p:nvSpPr>
-          <p:cNvPr id="1814884697" name="Title 1"/>
+          <p:cNvPr id="898721088" name="Title 1"/>
           <p:cNvSpPr>
             <a:spLocks noGrp="1"/>
           </p:cNvSpPr>
@@ -4188,7 +4282,7 @@
       </p:sp>
       <p:sp>
         <p:nvSpPr>
-          <p:cNvPr id="677235628" name="Picture Placeholder 2"/>
+          <p:cNvPr id="1003085823" name="Picture Placeholder 2"/>
           <p:cNvSpPr>
             <a:spLocks noChangeAspect="1" noGrp="1"/>
           </p:cNvSpPr>
@@ -4256,7 +4350,7 @@
       </p:sp>
       <p:sp>
         <p:nvSpPr>
-          <p:cNvPr id="887726717" name="Text Placeholder 3"/>
+          <p:cNvPr id="1278474542" name="Text Placeholder 3"/>
           <p:cNvSpPr>
             <a:spLocks noGrp="1"/>
           </p:cNvSpPr>
@@ -4324,7 +4418,7 @@
       </p:sp>
       <p:sp>
         <p:nvSpPr>
-          <p:cNvPr id="1851318008" name="Date Placeholder 4"/>
+          <p:cNvPr id="768940564" name="Date Placeholder 4"/>
           <p:cNvSpPr>
             <a:spLocks noGrp="1"/>
           </p:cNvSpPr>
@@ -4350,7 +4444,7 @@
       </p:sp>
       <p:sp>
         <p:nvSpPr>
-          <p:cNvPr id="616157465" name="Footer Placeholder 5"/>
+          <p:cNvPr id="1435256921" name="Footer Placeholder 5"/>
           <p:cNvSpPr>
             <a:spLocks noGrp="1"/>
           </p:cNvSpPr>
@@ -4372,7 +4466,7 @@
       </p:sp>
       <p:sp>
         <p:nvSpPr>
-          <p:cNvPr id="402162121" name="Slide Number Placeholder 6"/>
+          <p:cNvPr id="765522697" name="Slide Number Placeholder 6"/>
           <p:cNvSpPr>
             <a:spLocks noGrp="1"/>
           </p:cNvSpPr>
@@ -4428,7 +4522,7 @@
       </p:grpSpPr>
       <p:sp>
         <p:nvSpPr>
-          <p:cNvPr id="1501435091" name="Title Placeholder 1"/>
+          <p:cNvPr id="1344003316" name="Title Placeholder 1"/>
           <p:cNvSpPr>
             <a:spLocks noGrp="1"/>
           </p:cNvSpPr>
@@ -4464,7 +4558,7 @@
       </p:sp>
       <p:sp>
         <p:nvSpPr>
-          <p:cNvPr id="1256300528" name="Text Placeholder 2"/>
+          <p:cNvPr id="1267521826" name="Text Placeholder 2"/>
           <p:cNvSpPr>
             <a:spLocks noGrp="1"/>
           </p:cNvSpPr>
@@ -4540,7 +4634,7 @@
       </p:sp>
       <p:sp>
         <p:nvSpPr>
-          <p:cNvPr id="2111850505" name="Date Placeholder 3"/>
+          <p:cNvPr id="764161093" name="Date Placeholder 3"/>
           <p:cNvSpPr>
             <a:spLocks noGrp="1"/>
           </p:cNvSpPr>
@@ -4584,7 +4678,7 @@
       </p:sp>
       <p:sp>
         <p:nvSpPr>
-          <p:cNvPr id="1526347768" name="Footer Placeholder 4"/>
+          <p:cNvPr id="371747481" name="Footer Placeholder 4"/>
           <p:cNvSpPr>
             <a:spLocks noGrp="1"/>
           </p:cNvSpPr>
@@ -4624,7 +4718,7 @@
       </p:sp>
       <p:sp>
         <p:nvSpPr>
-          <p:cNvPr id="1695755942" name="Slide Number Placeholder 5"/>
+          <p:cNvPr id="1076830268" name="Slide Number Placeholder 5"/>
           <p:cNvSpPr>
             <a:spLocks noGrp="1"/>
           </p:cNvSpPr>
@@ -4984,7 +5078,7 @@
       </p:grpSpPr>
       <p:sp>
         <p:nvSpPr>
-          <p:cNvPr id="1609472921" name=""/>
+          <p:cNvPr id="617909662" name=""/>
           <p:cNvSpPr/>
           <p:nvPr/>
         </p:nvSpPr>
@@ -5023,7 +5117,7 @@
       </p:sp>
       <p:pic>
         <p:nvPicPr>
-          <p:cNvPr id="551503363" name=""/>
+          <p:cNvPr id="1211757186" name=""/>
           <p:cNvPicPr>
             <a:picLocks noChangeAspect="1"/>
           </p:cNvPicPr>
@@ -5045,7 +5139,7 @@
       </p:pic>
       <p:sp>
         <p:nvSpPr>
-          <p:cNvPr id="1627679884" name=""/>
+          <p:cNvPr id="1861542450" name=""/>
           <p:cNvSpPr/>
           <p:nvPr/>
         </p:nvSpPr>
@@ -5101,7 +5195,7 @@
       </p:sp>
       <p:sp>
         <p:nvSpPr>
-          <p:cNvPr id="1345603383" name=""/>
+          <p:cNvPr id="1262601822" name=""/>
           <p:cNvSpPr txBox="1"/>
           <p:nvPr/>
         </p:nvSpPr>
@@ -5178,7 +5272,7 @@
       </p:sp>
       <p:sp>
         <p:nvSpPr>
-          <p:cNvPr id="2104715550" name=""/>
+          <p:cNvPr id="485804970" name=""/>
           <p:cNvSpPr txBox="1"/>
           <p:nvPr/>
         </p:nvSpPr>
@@ -5341,7 +5435,7 @@
       </p:sp>
       <p:sp>
         <p:nvSpPr>
-          <p:cNvPr id="5457363" name=""/>
+          <p:cNvPr id="1319566823" name=""/>
           <p:cNvSpPr/>
           <p:nvPr/>
         </p:nvSpPr>
@@ -5406,7 +5500,7 @@
       </p:sp>
       <p:sp>
         <p:nvSpPr>
-          <p:cNvPr id="1574066757" name=""/>
+          <p:cNvPr id="167895567" name=""/>
           <p:cNvSpPr txBox="1"/>
           <p:nvPr/>
         </p:nvSpPr>
@@ -5473,7 +5567,7 @@
       </p:sp>
       <p:sp>
         <p:nvSpPr>
-          <p:cNvPr id="2060502788" name=""/>
+          <p:cNvPr id="23828438" name=""/>
           <p:cNvSpPr txBox="1"/>
           <p:nvPr/>
         </p:nvSpPr>
@@ -5556,7 +5650,7 @@
       </p:sp>
       <p:sp>
         <p:nvSpPr>
-          <p:cNvPr id="861993672" name=""/>
+          <p:cNvPr id="1294109183" name=""/>
           <p:cNvSpPr txBox="1"/>
           <p:nvPr/>
         </p:nvSpPr>
@@ -5620,7 +5714,7 @@
       </p:sp>
       <p:sp>
         <p:nvSpPr>
-          <p:cNvPr id="981992103" name=""/>
+          <p:cNvPr id="1215502703" name=""/>
           <p:cNvSpPr/>
           <p:nvPr/>
         </p:nvSpPr>
@@ -5668,7 +5762,7 @@
       </p:sp>
       <p:pic>
         <p:nvPicPr>
-          <p:cNvPr id="337178305" name=""/>
+          <p:cNvPr id="939205995" name=""/>
           <p:cNvPicPr>
             <a:picLocks noChangeAspect="1"/>
           </p:cNvPicPr>
@@ -5723,7 +5817,7 @@
       </p:grpSpPr>
       <p:sp>
         <p:nvSpPr>
-          <p:cNvPr id="614252219" name=""/>
+          <p:cNvPr id="1671072398" name=""/>
           <p:cNvSpPr/>
           <p:nvPr/>
         </p:nvSpPr>
@@ -5762,7 +5856,7 @@
       </p:sp>
       <p:sp>
         <p:nvSpPr>
-          <p:cNvPr id="926558462" name=""/>
+          <p:cNvPr id="631625104" name=""/>
           <p:cNvSpPr/>
           <p:nvPr/>
         </p:nvSpPr>
@@ -5827,7 +5921,7 @@
       </p:sp>
       <p:sp>
         <p:nvSpPr>
-          <p:cNvPr id="950315088" name=""/>
+          <p:cNvPr id="1607346319" name=""/>
           <p:cNvSpPr/>
           <p:nvPr/>
         </p:nvSpPr>
@@ -5875,7 +5969,7 @@
       </p:sp>
       <p:pic>
         <p:nvPicPr>
-          <p:cNvPr id="731183936" name=""/>
+          <p:cNvPr id="428283972" name=""/>
           <p:cNvPicPr>
             <a:picLocks noChangeAspect="1"/>
           </p:cNvPicPr>
@@ -5897,7 +5991,7 @@
       </p:pic>
       <p:pic>
         <p:nvPicPr>
-          <p:cNvPr id="259478270" name=""/>
+          <p:cNvPr id="981389623" name=""/>
           <p:cNvPicPr>
             <a:picLocks noChangeAspect="1"/>
           </p:cNvPicPr>
@@ -5919,7 +6013,7 @@
       </p:pic>
       <p:sp>
         <p:nvSpPr>
-          <p:cNvPr id="1924586010" name=""/>
+          <p:cNvPr id="1777676422" name=""/>
           <p:cNvSpPr txBox="1"/>
           <p:nvPr/>
         </p:nvSpPr>
@@ -5967,7 +6061,7 @@
       </p:sp>
       <p:sp>
         <p:nvSpPr>
-          <p:cNvPr id="2129394602" name=""/>
+          <p:cNvPr id="482572707" name=""/>
           <p:cNvSpPr txBox="1"/>
           <p:nvPr/>
         </p:nvSpPr>
@@ -6031,7 +6125,7 @@
       </p:sp>
       <p:sp>
         <p:nvSpPr>
-          <p:cNvPr id="1700128984" name=""/>
+          <p:cNvPr id="2121914743" name=""/>
           <p:cNvSpPr/>
           <p:nvPr/>
         </p:nvSpPr>
@@ -6151,7 +6245,7 @@
       </p:sp>
       <p:pic>
         <p:nvPicPr>
-          <p:cNvPr id="794151970" name=""/>
+          <p:cNvPr id="578769459" name=""/>
           <p:cNvPicPr>
             <a:picLocks noChangeAspect="1"/>
           </p:cNvPicPr>
@@ -6173,7 +6267,7 @@
       </p:pic>
       <p:sp>
         <p:nvSpPr>
-          <p:cNvPr id="258273092" name=""/>
+          <p:cNvPr id="1029784760" name=""/>
           <p:cNvSpPr/>
           <p:nvPr/>
         </p:nvSpPr>
@@ -6310,7 +6404,7 @@
       </p:sp>
       <p:sp>
         <p:nvSpPr>
-          <p:cNvPr id="1887953367" name=""/>
+          <p:cNvPr id="1452216378" name=""/>
           <p:cNvSpPr/>
           <p:nvPr/>
         </p:nvSpPr>
@@ -6462,7 +6556,7 @@
       </p:sp>
       <p:pic>
         <p:nvPicPr>
-          <p:cNvPr id="700813947" name=""/>
+          <p:cNvPr id="1661654350" name=""/>
           <p:cNvPicPr>
             <a:picLocks noChangeAspect="1"/>
           </p:cNvPicPr>
@@ -6484,7 +6578,7 @@
       </p:pic>
       <p:pic>
         <p:nvPicPr>
-          <p:cNvPr id="1886848166" name=""/>
+          <p:cNvPr id="1183064437" name=""/>
           <p:cNvPicPr>
             <a:picLocks noChangeAspect="1"/>
           </p:cNvPicPr>
@@ -6506,7 +6600,7 @@
       </p:pic>
       <p:sp>
         <p:nvSpPr>
-          <p:cNvPr id="537964259" name=""/>
+          <p:cNvPr id="436026608" name=""/>
           <p:cNvSpPr txBox="1"/>
           <p:nvPr/>
         </p:nvSpPr>
@@ -6570,7 +6664,7 @@
       </p:sp>
       <p:sp>
         <p:nvSpPr>
-          <p:cNvPr id="534784088" name=""/>
+          <p:cNvPr id="1529530132" name=""/>
           <p:cNvSpPr txBox="1"/>
           <p:nvPr/>
         </p:nvSpPr>
@@ -6618,7 +6712,7 @@
       </p:sp>
       <p:sp>
         <p:nvSpPr>
-          <p:cNvPr id="870365268" name=""/>
+          <p:cNvPr id="297570805" name=""/>
           <p:cNvSpPr txBox="1"/>
           <p:nvPr/>
         </p:nvSpPr>
@@ -6688,7 +6782,7 @@
       </p:sp>
       <p:sp>
         <p:nvSpPr>
-          <p:cNvPr id="604034066" name=""/>
+          <p:cNvPr id="1851289818" name=""/>
           <p:cNvSpPr txBox="1"/>
           <p:nvPr/>
         </p:nvSpPr>
@@ -6752,7 +6846,7 @@
       </p:sp>
       <p:pic>
         <p:nvPicPr>
-          <p:cNvPr id="501493048" name=""/>
+          <p:cNvPr id="1733465248" name=""/>
           <p:cNvPicPr>
             <a:picLocks noChangeAspect="1"/>
           </p:cNvPicPr>
@@ -6774,7 +6868,7 @@
       </p:pic>
       <p:sp>
         <p:nvSpPr>
-          <p:cNvPr id="1238838865" name=""/>
+          <p:cNvPr id="1997417031" name=""/>
           <p:cNvSpPr txBox="1"/>
           <p:nvPr/>
         </p:nvSpPr>
@@ -6848,7 +6942,7 @@
       </p:sp>
       <p:sp>
         <p:nvSpPr>
-          <p:cNvPr id="512342524" name=""/>
+          <p:cNvPr id="1348310384" name=""/>
           <p:cNvSpPr txBox="1"/>
           <p:nvPr/>
         </p:nvSpPr>
@@ -6922,7 +7016,7 @@
       </p:sp>
       <p:pic>
         <p:nvPicPr>
-          <p:cNvPr id="603311837" name=""/>
+          <p:cNvPr id="979748595" name=""/>
           <p:cNvPicPr>
             <a:picLocks noChangeAspect="1"/>
           </p:cNvPicPr>
@@ -6944,7 +7038,7 @@
       </p:pic>
       <p:sp>
         <p:nvSpPr>
-          <p:cNvPr id="1660188898" name=""/>
+          <p:cNvPr id="85111669" name=""/>
           <p:cNvSpPr txBox="1"/>
           <p:nvPr/>
         </p:nvSpPr>
@@ -7012,7 +7106,7 @@
       </p:sp>
       <p:pic>
         <p:nvPicPr>
-          <p:cNvPr id="1155023743" name=""/>
+          <p:cNvPr id="2089350337" name=""/>
           <p:cNvPicPr>
             <a:picLocks noChangeAspect="1"/>
           </p:cNvPicPr>
@@ -7034,7 +7128,7 @@
       </p:pic>
       <p:sp>
         <p:nvSpPr>
-          <p:cNvPr id="562098359" name=""/>
+          <p:cNvPr id="2111329212" name=""/>
           <p:cNvSpPr txBox="1"/>
           <p:nvPr/>
         </p:nvSpPr>
@@ -7136,7 +7230,7 @@
       </p:grpSpPr>
       <p:sp>
         <p:nvSpPr>
-          <p:cNvPr id="1017284509" name=""/>
+          <p:cNvPr id="2024850355" name=""/>
           <p:cNvSpPr/>
           <p:nvPr/>
         </p:nvSpPr>
@@ -7201,7 +7295,7 @@
       </p:sp>
       <p:sp>
         <p:nvSpPr>
-          <p:cNvPr id="1337212362" name=""/>
+          <p:cNvPr id="840655239" name=""/>
           <p:cNvSpPr/>
           <p:nvPr/>
         </p:nvSpPr>
@@ -7249,7 +7343,7 @@
       </p:sp>
       <p:pic>
         <p:nvPicPr>
-          <p:cNvPr id="1633359795" name=""/>
+          <p:cNvPr id="1159153762" name=""/>
           <p:cNvPicPr>
             <a:picLocks noChangeAspect="1"/>
           </p:cNvPicPr>
@@ -7271,7 +7365,7 @@
       </p:pic>
       <p:pic>
         <p:nvPicPr>
-          <p:cNvPr id="68814097" name=""/>
+          <p:cNvPr id="1598953669" name=""/>
           <p:cNvPicPr>
             <a:picLocks noChangeAspect="1"/>
           </p:cNvPicPr>
@@ -7293,7 +7387,7 @@
       </p:pic>
       <p:sp>
         <p:nvSpPr>
-          <p:cNvPr id="594770733" name=""/>
+          <p:cNvPr id="7126441" name=""/>
           <p:cNvSpPr txBox="1"/>
           <p:nvPr/>
         </p:nvSpPr>
@@ -7341,7 +7435,7 @@
       </p:sp>
       <p:sp>
         <p:nvSpPr>
-          <p:cNvPr id="1523886169" name=""/>
+          <p:cNvPr id="34528459" name=""/>
           <p:cNvSpPr txBox="1"/>
           <p:nvPr/>
         </p:nvSpPr>
@@ -7405,7 +7499,7 @@
       </p:sp>
       <p:sp>
         <p:nvSpPr>
-          <p:cNvPr id="209353839" name=""/>
+          <p:cNvPr id="524204105" name=""/>
           <p:cNvSpPr txBox="1"/>
           <p:nvPr/>
         </p:nvSpPr>
@@ -7469,7 +7563,7 @@
       </p:sp>
       <p:pic>
         <p:nvPicPr>
-          <p:cNvPr id="860691823" name=""/>
+          <p:cNvPr id="1249023306" name=""/>
           <p:cNvPicPr>
             <a:picLocks noChangeAspect="1"/>
           </p:cNvPicPr>
@@ -7491,7 +7585,7 @@
       </p:pic>
       <p:sp>
         <p:nvSpPr>
-          <p:cNvPr id="536474813" name=""/>
+          <p:cNvPr id="547305300" name=""/>
           <p:cNvSpPr txBox="1"/>
           <p:nvPr/>
         </p:nvSpPr>
@@ -7565,7 +7659,7 @@
       </p:sp>
       <p:sp>
         <p:nvSpPr>
-          <p:cNvPr id="1550688190" name=""/>
+          <p:cNvPr id="951681103" name=""/>
           <p:cNvSpPr txBox="1"/>
           <p:nvPr/>
         </p:nvSpPr>
@@ -7639,7 +7733,7 @@
       </p:sp>
       <p:pic>
         <p:nvPicPr>
-          <p:cNvPr id="546292260" name=""/>
+          <p:cNvPr id="1632630857" name=""/>
           <p:cNvPicPr>
             <a:picLocks noChangeAspect="1"/>
           </p:cNvPicPr>
@@ -7661,7 +7755,7 @@
       </p:pic>
       <p:sp>
         <p:nvSpPr>
-          <p:cNvPr id="2076755548" name=""/>
+          <p:cNvPr id="1696139752" name=""/>
           <p:cNvSpPr txBox="1"/>
           <p:nvPr/>
         </p:nvSpPr>
@@ -7729,7 +7823,7 @@
       </p:sp>
       <p:pic>
         <p:nvPicPr>
-          <p:cNvPr id="671047941" name=""/>
+          <p:cNvPr id="766268340" name=""/>
           <p:cNvPicPr>
             <a:picLocks noChangeAspect="1"/>
           </p:cNvPicPr>
@@ -7751,7 +7845,7 @@
       </p:pic>
       <p:pic>
         <p:nvPicPr>
-          <p:cNvPr id="183283808" name=""/>
+          <p:cNvPr id="513769038" name=""/>
           <p:cNvPicPr>
             <a:picLocks noChangeAspect="1"/>
           </p:cNvPicPr>
@@ -7773,7 +7867,7 @@
       </p:pic>
       <p:sp>
         <p:nvSpPr>
-          <p:cNvPr id="481924254" name=""/>
+          <p:cNvPr id="1690389667" name=""/>
           <p:cNvSpPr txBox="1"/>
           <p:nvPr/>
         </p:nvSpPr>
@@ -7821,7 +7915,7 @@
       </p:sp>
       <p:sp>
         <p:nvSpPr>
-          <p:cNvPr id="316602180" name=""/>
+          <p:cNvPr id="1967725249" name=""/>
           <p:cNvSpPr txBox="1"/>
           <p:nvPr/>
         </p:nvSpPr>
@@ -7869,7 +7963,7 @@
       </p:sp>
       <p:sp>
         <p:nvSpPr>
-          <p:cNvPr id="1127936871" name=""/>
+          <p:cNvPr id="1028186052" name=""/>
           <p:cNvSpPr txBox="1"/>
           <p:nvPr/>
         </p:nvSpPr>
@@ -7939,7 +8033,7 @@
       </p:sp>
       <p:sp>
         <p:nvSpPr>
-          <p:cNvPr id="968560054" name=""/>
+          <p:cNvPr id="312235646" name=""/>
           <p:cNvSpPr txBox="1"/>
           <p:nvPr/>
         </p:nvSpPr>
@@ -8003,7 +8097,7 @@
       </p:sp>
       <p:sp>
         <p:nvSpPr>
-          <p:cNvPr id="199307082" name=""/>
+          <p:cNvPr id="2097691521" name=""/>
           <p:cNvSpPr txBox="1"/>
           <p:nvPr/>
         </p:nvSpPr>
@@ -8067,7 +8161,7 @@
       </p:sp>
       <p:sp>
         <p:nvSpPr>
-          <p:cNvPr id="1895800463" name=""/>
+          <p:cNvPr id="867766716" name=""/>
           <p:cNvSpPr txBox="1"/>
           <p:nvPr/>
         </p:nvSpPr>
@@ -8126,7 +8220,7 @@
       </p:sp>
       <p:sp>
         <p:nvSpPr>
-          <p:cNvPr id="1103825347" name=""/>
+          <p:cNvPr id="1162993447" name=""/>
           <p:cNvSpPr txBox="1"/>
           <p:nvPr/>
         </p:nvSpPr>
@@ -8215,7 +8309,7 @@
       </p:sp>
       <p:sp>
         <p:nvSpPr>
-          <p:cNvPr id="408456936" name=""/>
+          <p:cNvPr id="1617725837" name=""/>
           <p:cNvSpPr txBox="1"/>
           <p:nvPr/>
         </p:nvSpPr>
@@ -8260,7 +8354,7 @@
       </p:sp>
       <p:sp>
         <p:nvSpPr>
-          <p:cNvPr id="1421133046" name=""/>
+          <p:cNvPr id="471424119" name=""/>
           <p:cNvSpPr/>
           <p:nvPr/>
         </p:nvSpPr>
@@ -8311,7 +8405,7 @@
                 <a:latin typeface="Comfortaa"/>
                 <a:cs typeface="Comfortaa"/>
               </a:rPr>
-              <a:t>‘ or 1=1 —</a:t>
+              <a:t>‘ or 1=1 - -</a:t>
             </a:r>
             <a:endParaRPr sz="2800">
               <a:solidFill>
@@ -8325,7 +8419,7 @@
       </p:sp>
       <p:sp>
         <p:nvSpPr>
-          <p:cNvPr id="1511488641" name=""/>
+          <p:cNvPr id="1865743555" name=""/>
           <p:cNvSpPr txBox="1"/>
           <p:nvPr/>
         </p:nvSpPr>
@@ -8411,7 +8505,7 @@
       </p:grpSpPr>
       <p:sp>
         <p:nvSpPr>
-          <p:cNvPr id="1740085413" name=""/>
+          <p:cNvPr id="1281301433" name=""/>
           <p:cNvSpPr/>
           <p:nvPr/>
         </p:nvSpPr>
@@ -8476,7 +8570,7 @@
       </p:sp>
       <p:sp>
         <p:nvSpPr>
-          <p:cNvPr id="638043006" name=""/>
+          <p:cNvPr id="1535468504" name=""/>
           <p:cNvSpPr/>
           <p:nvPr/>
         </p:nvSpPr>
@@ -8524,7 +8618,7 @@
       </p:sp>
       <p:pic>
         <p:nvPicPr>
-          <p:cNvPr id="1075932600" name=""/>
+          <p:cNvPr id="336314273" name=""/>
           <p:cNvPicPr>
             <a:picLocks noChangeAspect="1"/>
           </p:cNvPicPr>
@@ -8546,7 +8640,7 @@
       </p:pic>
       <p:sp>
         <p:nvSpPr>
-          <p:cNvPr id="402901618" name=""/>
+          <p:cNvPr id="67296125" name=""/>
           <p:cNvSpPr txBox="1"/>
           <p:nvPr/>
         </p:nvSpPr>
@@ -8594,7 +8688,7 @@
       </p:sp>
       <p:sp>
         <p:nvSpPr>
-          <p:cNvPr id="525739065" name=""/>
+          <p:cNvPr id="810999309" name=""/>
           <p:cNvSpPr txBox="1"/>
           <p:nvPr/>
         </p:nvSpPr>
@@ -8658,7 +8752,7 @@
       </p:sp>
       <p:pic>
         <p:nvPicPr>
-          <p:cNvPr id="505897780" name=""/>
+          <p:cNvPr id="1687738919" name=""/>
           <p:cNvPicPr>
             <a:picLocks noChangeAspect="1"/>
           </p:cNvPicPr>
@@ -8680,7 +8774,7 @@
       </p:pic>
       <p:sp>
         <p:nvSpPr>
-          <p:cNvPr id="1056343992" name=""/>
+          <p:cNvPr id="1400031865" name=""/>
           <p:cNvSpPr txBox="1"/>
           <p:nvPr/>
         </p:nvSpPr>
@@ -8754,7 +8848,7 @@
       </p:sp>
       <p:sp>
         <p:nvSpPr>
-          <p:cNvPr id="520260459" name=""/>
+          <p:cNvPr id="1977112116" name=""/>
           <p:cNvSpPr txBox="1"/>
           <p:nvPr/>
         </p:nvSpPr>
@@ -8828,7 +8922,7 @@
       </p:sp>
       <p:pic>
         <p:nvPicPr>
-          <p:cNvPr id="875902536" name=""/>
+          <p:cNvPr id="1621209923" name=""/>
           <p:cNvPicPr>
             <a:picLocks noChangeAspect="1"/>
           </p:cNvPicPr>
@@ -8850,7 +8944,7 @@
       </p:pic>
       <p:sp>
         <p:nvSpPr>
-          <p:cNvPr id="225856437" name=""/>
+          <p:cNvPr id="210623798" name=""/>
           <p:cNvSpPr txBox="1"/>
           <p:nvPr/>
         </p:nvSpPr>
@@ -8918,7 +9012,7 @@
       </p:sp>
       <p:pic>
         <p:nvPicPr>
-          <p:cNvPr id="931666149" name=""/>
+          <p:cNvPr id="1715462982" name=""/>
           <p:cNvPicPr>
             <a:picLocks noChangeAspect="1"/>
           </p:cNvPicPr>
@@ -8940,7 +9034,7 @@
       </p:pic>
       <p:pic>
         <p:nvPicPr>
-          <p:cNvPr id="1007515097" name=""/>
+          <p:cNvPr id="1378926003" name=""/>
           <p:cNvPicPr>
             <a:picLocks noChangeAspect="1"/>
           </p:cNvPicPr>
@@ -8962,7 +9056,7 @@
       </p:pic>
       <p:sp>
         <p:nvSpPr>
-          <p:cNvPr id="796503774" name=""/>
+          <p:cNvPr id="494230441" name=""/>
           <p:cNvSpPr txBox="1"/>
           <p:nvPr/>
         </p:nvSpPr>
@@ -9010,14 +9104,14 @@
       </p:sp>
       <p:sp>
         <p:nvSpPr>
-          <p:cNvPr id="708595366" name=""/>
+          <p:cNvPr id="1348175065" name=""/>
           <p:cNvSpPr txBox="1"/>
           <p:nvPr/>
         </p:nvSpPr>
         <p:spPr bwMode="auto">
           <a:xfrm rot="0" flipH="0" flipV="0">
-            <a:off x="4652731" y="313313"/>
-            <a:ext cx="6241091" cy="722730"/>
+            <a:off x="4652730" y="313852"/>
+            <a:ext cx="6242170" cy="722730"/>
           </a:xfrm>
           <a:prstGeom prst="rect">
             <a:avLst/>
@@ -9040,10 +9134,10 @@
                 <a:gradFill>
                   <a:gsLst>
                     <a:gs pos="0">
-                      <a:srgbClr val="00B0F0"/>
+                      <a:srgbClr val="2F5EFD"/>
                     </a:gs>
                     <a:gs pos="100000">
-                      <a:srgbClr val="00F0E0"/>
+                      <a:srgbClr val="00B0F0"/>
                     </a:gs>
                   </a:gsLst>
                   <a:lin ang="13500000" scaled="1"/>
@@ -9058,10 +9152,10 @@
               <a:gradFill>
                 <a:gsLst>
                   <a:gs pos="0">
-                    <a:srgbClr val="00B0F0"/>
+                    <a:srgbClr val="2F5EFD"/>
                   </a:gs>
                   <a:gs pos="100000">
-                    <a:srgbClr val="00F0E0"/>
+                    <a:srgbClr val="00B0F0"/>
                   </a:gs>
                 </a:gsLst>
                 <a:lin ang="13500000" scaled="1"/>
@@ -9074,7 +9168,7 @@
       </p:sp>
       <p:sp>
         <p:nvSpPr>
-          <p:cNvPr id="483115276" name=""/>
+          <p:cNvPr id="1584096827" name=""/>
           <p:cNvSpPr txBox="1"/>
           <p:nvPr/>
         </p:nvSpPr>
@@ -9133,14 +9227,14 @@
       </p:sp>
       <p:sp>
         <p:nvSpPr>
-          <p:cNvPr id="1512675659" name=""/>
+          <p:cNvPr id="849609421" name=""/>
           <p:cNvSpPr txBox="1"/>
           <p:nvPr/>
         </p:nvSpPr>
         <p:spPr bwMode="auto">
           <a:xfrm rot="0" flipH="0" flipV="0">
-            <a:off x="3450540" y="3849513"/>
-            <a:ext cx="8026854" cy="477368"/>
+            <a:off x="3450539" y="3849512"/>
+            <a:ext cx="8028293" cy="477368"/>
           </a:xfrm>
           <a:prstGeom prst="rect">
             <a:avLst/>
@@ -9174,7 +9268,7 @@
                 <a:gradFill>
                   <a:gsLst>
                     <a:gs pos="0">
-                      <a:srgbClr val="00FFFF"/>
+                      <a:srgbClr val="2F5EFD"/>
                     </a:gs>
                     <a:gs pos="100000">
                       <a:srgbClr val="00B0F0"/>
@@ -9222,7 +9316,7 @@
       </p:sp>
       <p:sp>
         <p:nvSpPr>
-          <p:cNvPr id="727326945" name=""/>
+          <p:cNvPr id="1455476851" name=""/>
           <p:cNvSpPr txBox="1"/>
           <p:nvPr/>
         </p:nvSpPr>
@@ -9267,7 +9361,7 @@
       </p:sp>
       <p:sp>
         <p:nvSpPr>
-          <p:cNvPr id="595549461" name=""/>
+          <p:cNvPr id="1959720504" name=""/>
           <p:cNvSpPr/>
           <p:nvPr/>
         </p:nvSpPr>
@@ -9318,7 +9412,7 @@
                 <a:latin typeface="Comfortaa"/>
                 <a:cs typeface="Comfortaa"/>
               </a:rPr>
-              <a:t>‘ or 1=1 —</a:t>
+              <a:t>‘ or 1=1 - -</a:t>
             </a:r>
             <a:endParaRPr sz="2800">
               <a:solidFill>
@@ -9332,7 +9426,7 @@
       </p:sp>
       <p:sp>
         <p:nvSpPr>
-          <p:cNvPr id="2013186638" name=""/>
+          <p:cNvPr id="1356615445" name=""/>
           <p:cNvSpPr txBox="1"/>
           <p:nvPr/>
         </p:nvSpPr>
@@ -9380,7 +9474,7 @@
       </p:sp>
       <p:sp>
         <p:nvSpPr>
-          <p:cNvPr id="1110458012" name=""/>
+          <p:cNvPr id="1948027387" name=""/>
           <p:cNvSpPr txBox="1"/>
           <p:nvPr/>
         </p:nvSpPr>
@@ -9444,7 +9538,7 @@
       </p:sp>
       <p:sp>
         <p:nvSpPr>
-          <p:cNvPr id="1420952454" name=""/>
+          <p:cNvPr id="713382075" name=""/>
           <p:cNvSpPr txBox="1"/>
           <p:nvPr/>
         </p:nvSpPr>
@@ -9508,7 +9602,7 @@
       </p:sp>
       <p:sp>
         <p:nvSpPr>
-          <p:cNvPr id="1799027542" name=""/>
+          <p:cNvPr id="152193974" name=""/>
           <p:cNvSpPr txBox="1"/>
           <p:nvPr/>
         </p:nvSpPr>
@@ -9556,7 +9650,7 @@
       </p:sp>
       <p:sp>
         <p:nvSpPr>
-          <p:cNvPr id="1657545075" name=""/>
+          <p:cNvPr id="1045664831" name=""/>
           <p:cNvSpPr txBox="1"/>
           <p:nvPr/>
         </p:nvSpPr>
@@ -9604,7 +9698,7 @@
       </p:sp>
       <p:sp>
         <p:nvSpPr>
-          <p:cNvPr id="1062177842" name=""/>
+          <p:cNvPr id="1124631277" name=""/>
           <p:cNvSpPr txBox="1"/>
           <p:nvPr/>
         </p:nvSpPr>
@@ -9700,7 +9794,7 @@
       </p:grpSpPr>
       <p:sp>
         <p:nvSpPr>
-          <p:cNvPr id="1254168573" name=""/>
+          <p:cNvPr id="1830841418" name=""/>
           <p:cNvSpPr/>
           <p:nvPr/>
         </p:nvSpPr>
@@ -9765,7 +9859,7 @@
       </p:sp>
       <p:sp>
         <p:nvSpPr>
-          <p:cNvPr id="1302776887" name=""/>
+          <p:cNvPr id="684517269" name=""/>
           <p:cNvSpPr/>
           <p:nvPr/>
         </p:nvSpPr>
@@ -9813,7 +9907,7 @@
       </p:sp>
       <p:pic>
         <p:nvPicPr>
-          <p:cNvPr id="856072533" name=""/>
+          <p:cNvPr id="415632877" name=""/>
           <p:cNvPicPr>
             <a:picLocks noChangeAspect="1"/>
           </p:cNvPicPr>
@@ -9835,7 +9929,7 @@
       </p:pic>
       <p:sp>
         <p:nvSpPr>
-          <p:cNvPr id="1537947201" name=""/>
+          <p:cNvPr id="779580039" name=""/>
           <p:cNvSpPr txBox="1"/>
           <p:nvPr/>
         </p:nvSpPr>
@@ -9883,7 +9977,7 @@
       </p:sp>
       <p:sp>
         <p:nvSpPr>
-          <p:cNvPr id="1439561167" name=""/>
+          <p:cNvPr id="505935140" name=""/>
           <p:cNvSpPr txBox="1"/>
           <p:nvPr/>
         </p:nvSpPr>
@@ -9947,7 +10041,7 @@
       </p:sp>
       <p:sp>
         <p:nvSpPr>
-          <p:cNvPr id="636432696" name=""/>
+          <p:cNvPr id="263512101" name=""/>
           <p:cNvSpPr txBox="1"/>
           <p:nvPr/>
         </p:nvSpPr>
@@ -10006,7 +10100,7 @@
       </p:sp>
       <p:sp>
         <p:nvSpPr>
-          <p:cNvPr id="1626810040" name=""/>
+          <p:cNvPr id="78047012" name=""/>
           <p:cNvSpPr txBox="1"/>
           <p:nvPr/>
         </p:nvSpPr>
@@ -10051,7 +10145,7 @@
       </p:sp>
       <p:sp>
         <p:nvSpPr>
-          <p:cNvPr id="873441542" name=""/>
+          <p:cNvPr id="1045503776" name=""/>
           <p:cNvSpPr/>
           <p:nvPr/>
         </p:nvSpPr>
@@ -10102,7 +10196,7 @@
                 <a:latin typeface="Comfortaa"/>
                 <a:cs typeface="Comfortaa"/>
               </a:rPr>
-              <a:t>‘ or 1=1 —</a:t>
+              <a:t>‘ or 1=1 - -</a:t>
             </a:r>
             <a:endParaRPr sz="2800">
               <a:solidFill>
@@ -10116,7 +10210,7 @@
       </p:sp>
       <p:sp>
         <p:nvSpPr>
-          <p:cNvPr id="1345486035" name=""/>
+          <p:cNvPr id="1555433790" name=""/>
           <p:cNvSpPr txBox="1"/>
           <p:nvPr/>
         </p:nvSpPr>
@@ -10164,14 +10258,14 @@
       </p:sp>
       <p:sp>
         <p:nvSpPr>
-          <p:cNvPr id="1352901232" name=""/>
+          <p:cNvPr id="1767825759" name=""/>
           <p:cNvSpPr txBox="1"/>
           <p:nvPr/>
         </p:nvSpPr>
         <p:spPr bwMode="auto">
           <a:xfrm rot="0" flipH="0" flipV="0">
-            <a:off x="3450540" y="-4668033"/>
-            <a:ext cx="8027213" cy="477368"/>
+            <a:off x="3450539" y="-4668032"/>
+            <a:ext cx="8028292" cy="477368"/>
           </a:xfrm>
           <a:prstGeom prst="rect">
             <a:avLst/>
@@ -10205,7 +10299,7 @@
                 <a:gradFill>
                   <a:gsLst>
                     <a:gs pos="0">
-                      <a:srgbClr val="00FFFF"/>
+                      <a:srgbClr val="2F5EFD"/>
                     </a:gs>
                     <a:gs pos="100000">
                       <a:srgbClr val="00B0F0"/>
@@ -10253,14 +10347,296 @@
       </p:sp>
       <p:sp>
         <p:nvSpPr>
-          <p:cNvPr id="1957203736" name=""/>
+          <p:cNvPr id="693271275" name=""/>
           <p:cNvSpPr txBox="1"/>
           <p:nvPr/>
         </p:nvSpPr>
         <p:spPr bwMode="auto">
           <a:xfrm rot="0" flipH="0" flipV="0">
-            <a:off x="4284573" y="316192"/>
-            <a:ext cx="6983165" cy="722730"/>
+            <a:off x="4288169" y="316731"/>
+            <a:ext cx="6984244" cy="722730"/>
+          </a:xfrm>
+          <a:prstGeom prst="rect">
+            <a:avLst/>
+          </a:prstGeom>
+          <a:noFill/>
+        </p:spPr>
+        <p:txBody>
+          <a:bodyPr vertOverflow="overflow" horzOverflow="overflow" vert="horz" wrap="square" lIns="91440" tIns="45720" rIns="91440" bIns="45720" numCol="1" spcCol="0" rtlCol="0" fromWordArt="0" anchor="ctr" anchorCtr="0" forceAA="0" upright="0" compatLnSpc="0">
+            <a:spAutoFit/>
+          </a:bodyPr>
+          <a:p>
+            <a:pPr algn="ctr">
+              <a:lnSpc>
+                <a:spcPct val="114999"/>
+              </a:lnSpc>
+              <a:defRPr/>
+            </a:pPr>
+            <a:r>
+              <a:rPr sz="3600" b="1">
+                <a:gradFill>
+                  <a:gsLst>
+                    <a:gs pos="0">
+                      <a:srgbClr val="2F5EFD"/>
+                    </a:gs>
+                    <a:gs pos="100000">
+                      <a:srgbClr val="00B0F0"/>
+                    </a:gs>
+                  </a:gsLst>
+                  <a:lin ang="13500000" scaled="1"/>
+                </a:gradFill>
+                <a:latin typeface="Comfortaa"/>
+                <a:ea typeface="Comfortaa"/>
+                <a:cs typeface="Comfortaa"/>
+              </a:rPr>
+              <a:t>Contoh Kasus SQL Injection</a:t>
+            </a:r>
+            <a:endParaRPr sz="3600" b="1">
+              <a:gradFill>
+                <a:gsLst>
+                  <a:gs pos="0">
+                    <a:srgbClr val="2F5EFD"/>
+                  </a:gs>
+                  <a:gs pos="100000">
+                    <a:srgbClr val="00B0F0"/>
+                  </a:gs>
+                </a:gsLst>
+                <a:lin ang="13500000" scaled="1"/>
+              </a:gradFill>
+              <a:latin typeface="Comfortaa"/>
+              <a:cs typeface="Comfortaa"/>
+            </a:endParaRPr>
+          </a:p>
+        </p:txBody>
+      </p:sp>
+      <p:sp>
+        <p:nvSpPr>
+          <p:cNvPr id="1051954165" name=""/>
+          <p:cNvSpPr txBox="1"/>
+          <p:nvPr/>
+        </p:nvSpPr>
+        <p:spPr bwMode="auto">
+          <a:xfrm rot="0" flipH="0" flipV="0">
+            <a:off x="3310561" y="1348803"/>
+            <a:ext cx="7004764" cy="547471"/>
+          </a:xfrm>
+          <a:prstGeom prst="rect">
+            <a:avLst/>
+          </a:prstGeom>
+          <a:noFill/>
+        </p:spPr>
+        <p:txBody>
+          <a:bodyPr vertOverflow="overflow" horzOverflow="overflow" vert="horz" wrap="square" lIns="91440" tIns="45720" rIns="91440" bIns="45720" numCol="1" spcCol="0" rtlCol="0" fromWordArt="0" anchor="ctr" anchorCtr="0" forceAA="0" upright="0" compatLnSpc="0">
+            <a:spAutoFit/>
+          </a:bodyPr>
+          <a:p>
+            <a:pPr algn="l">
+              <a:lnSpc>
+                <a:spcPct val="114999"/>
+              </a:lnSpc>
+              <a:defRPr/>
+            </a:pPr>
+            <a:r>
+              <a:rPr sz="2600" b="1">
+                <a:gradFill>
+                  <a:gsLst>
+                    <a:gs pos="0">
+                      <a:srgbClr val="2F5EFD"/>
+                    </a:gs>
+                    <a:gs pos="100000">
+                      <a:srgbClr val="00B0F0"/>
+                    </a:gs>
+                  </a:gsLst>
+                  <a:lin ang="13500000" scaled="1"/>
+                </a:gradFill>
+                <a:latin typeface="Comfortaa"/>
+                <a:ea typeface="Comfortaa"/>
+                <a:cs typeface="Comfortaa"/>
+              </a:rPr>
+              <a:t>Ghostsell Hacker Attack (2012)</a:t>
+            </a:r>
+            <a:endParaRPr sz="2600" b="1">
+              <a:gradFill>
+                <a:gsLst>
+                  <a:gs pos="0">
+                    <a:srgbClr val="2F5EFD"/>
+                  </a:gs>
+                  <a:gs pos="100000">
+                    <a:srgbClr val="00B0F0"/>
+                  </a:gs>
+                </a:gsLst>
+                <a:lin ang="13500000" scaled="1"/>
+              </a:gradFill>
+              <a:latin typeface="Comfortaa"/>
+              <a:cs typeface="Comfortaa"/>
+            </a:endParaRPr>
+          </a:p>
+        </p:txBody>
+      </p:sp>
+      <p:sp>
+        <p:nvSpPr>
+          <p:cNvPr id="70689716" name=""/>
+          <p:cNvSpPr txBox="1"/>
+          <p:nvPr/>
+        </p:nvSpPr>
+        <p:spPr bwMode="auto">
+          <a:xfrm rot="0" flipH="0" flipV="0">
+            <a:off x="3310562" y="2180495"/>
+            <a:ext cx="8445126" cy="1634074"/>
+          </a:xfrm>
+          <a:prstGeom prst="rect">
+            <a:avLst/>
+          </a:prstGeom>
+          <a:noFill/>
+        </p:spPr>
+        <p:txBody>
+          <a:bodyPr vertOverflow="overflow" horzOverflow="overflow" vert="horz" wrap="square" lIns="91440" tIns="45720" rIns="91440" bIns="45720" numCol="1" spcCol="0" rtlCol="0" fromWordArt="0" anchor="t" anchorCtr="0" forceAA="0" upright="0" compatLnSpc="0">
+            <a:spAutoFit/>
+          </a:bodyPr>
+          <a:p>
+            <a:pPr algn="just">
+              <a:lnSpc>
+                <a:spcPct val="114999"/>
+              </a:lnSpc>
+              <a:defRPr/>
+            </a:pPr>
+            <a:r>
+              <a:rPr sz="2200" b="1">
+                <a:solidFill>
+                  <a:schemeClr val="bg1"/>
+                </a:solidFill>
+                <a:latin typeface="Comfortaa"/>
+                <a:ea typeface="Comfortaa"/>
+                <a:cs typeface="Comfortaa"/>
+              </a:rPr>
+              <a:t>Sebuah group hackers bernama Ghostsell meluncurkan serangan SQL Injection ke berbagai website agensi pemerintahan seperti NASA, European Space Agency, Federal Reserve, dll.</a:t>
+            </a:r>
+            <a:endParaRPr sz="4800" b="1">
+              <a:solidFill>
+                <a:schemeClr val="bg1"/>
+              </a:solidFill>
+              <a:latin typeface="Comfortaa"/>
+              <a:cs typeface="Comfortaa"/>
+            </a:endParaRPr>
+          </a:p>
+        </p:txBody>
+      </p:sp>
+      <p:sp>
+        <p:nvSpPr>
+          <p:cNvPr id="829626210" name=""/>
+          <p:cNvSpPr txBox="1"/>
+          <p:nvPr/>
+        </p:nvSpPr>
+        <p:spPr bwMode="auto">
+          <a:xfrm rot="0" flipH="0" flipV="0">
+            <a:off x="3310562" y="3939408"/>
+            <a:ext cx="8521806" cy="1248504"/>
+          </a:xfrm>
+          <a:prstGeom prst="rect">
+            <a:avLst/>
+          </a:prstGeom>
+          <a:noFill/>
+        </p:spPr>
+        <p:txBody>
+          <a:bodyPr vertOverflow="overflow" horzOverflow="overflow" vert="horz" wrap="square" lIns="91440" tIns="45720" rIns="91440" bIns="45720" numCol="1" spcCol="0" rtlCol="0" fromWordArt="0" anchor="t" anchorCtr="0" forceAA="0" upright="0" compatLnSpc="0">
+            <a:spAutoFit/>
+          </a:bodyPr>
+          <a:p>
+            <a:pPr algn="just">
+              <a:lnSpc>
+                <a:spcPct val="114999"/>
+              </a:lnSpc>
+              <a:defRPr/>
+            </a:pPr>
+            <a:r>
+              <a:rPr sz="2200" b="1">
+                <a:solidFill>
+                  <a:schemeClr val="bg1"/>
+                </a:solidFill>
+                <a:latin typeface="Comfortaa"/>
+                <a:ea typeface="Comfortaa"/>
+                <a:cs typeface="Comfortaa"/>
+              </a:rPr>
+              <a:t>Ghostsell menggunakan tools bernama Havij yang melakukan scan pada website dan kemudian melakukan SQL Injection pada website tersebut secara otomatis</a:t>
+            </a:r>
+            <a:endParaRPr sz="4800" b="1">
+              <a:solidFill>
+                <a:schemeClr val="bg1"/>
+              </a:solidFill>
+              <a:latin typeface="Comfortaa"/>
+              <a:cs typeface="Comfortaa"/>
+            </a:endParaRPr>
+          </a:p>
+        </p:txBody>
+      </p:sp>
+      <p:sp>
+        <p:nvSpPr>
+          <p:cNvPr id="421654361" name=""/>
+          <p:cNvSpPr txBox="1"/>
+          <p:nvPr/>
+        </p:nvSpPr>
+        <p:spPr bwMode="auto">
+          <a:xfrm rot="0" flipH="0" flipV="0">
+            <a:off x="3310562" y="5312755"/>
+            <a:ext cx="8562486" cy="862937"/>
+          </a:xfrm>
+          <a:prstGeom prst="rect">
+            <a:avLst/>
+          </a:prstGeom>
+          <a:noFill/>
+        </p:spPr>
+        <p:txBody>
+          <a:bodyPr vertOverflow="overflow" horzOverflow="overflow" vert="horz" wrap="square" lIns="91440" tIns="45720" rIns="91440" bIns="45720" numCol="1" spcCol="0" rtlCol="0" fromWordArt="0" anchor="t" anchorCtr="0" forceAA="0" upright="0" compatLnSpc="0">
+            <a:spAutoFit/>
+          </a:bodyPr>
+          <a:p>
+            <a:pPr algn="just">
+              <a:lnSpc>
+                <a:spcPct val="114999"/>
+              </a:lnSpc>
+              <a:defRPr/>
+            </a:pPr>
+            <a:r>
+              <a:rPr sz="2200" b="1">
+                <a:solidFill>
+                  <a:schemeClr val="bg1"/>
+                </a:solidFill>
+                <a:latin typeface="Comfortaa"/>
+                <a:ea typeface="Comfortaa"/>
+                <a:cs typeface="Comfortaa"/>
+              </a:rPr>
+              <a:t>Dampak dari serangan ini menyebabkan </a:t>
+            </a:r>
+            <a:r>
+              <a:rPr sz="2200" b="1">
+                <a:solidFill>
+                  <a:schemeClr val="bg1"/>
+                </a:solidFill>
+                <a:latin typeface="Comfortaa"/>
+                <a:cs typeface="Comfortaa"/>
+              </a:rPr>
+              <a:t>kebocoran data berupa username, password, dan  email addres.</a:t>
+            </a:r>
+            <a:endParaRPr sz="2200" b="1">
+              <a:solidFill>
+                <a:schemeClr val="bg1"/>
+              </a:solidFill>
+              <a:latin typeface="Comfortaa"/>
+              <a:cs typeface="Comfortaa"/>
+            </a:endParaRPr>
+          </a:p>
+        </p:txBody>
+      </p:sp>
+      <p:sp>
+        <p:nvSpPr>
+          <p:cNvPr id="393058884" name=""/>
+          <p:cNvSpPr txBox="1"/>
+          <p:nvPr/>
+        </p:nvSpPr>
+        <p:spPr bwMode="auto">
+          <a:xfrm rot="0" flipH="0" flipV="0">
+            <a:off x="4062102" y="7537981"/>
+            <a:ext cx="7436017" cy="722730"/>
           </a:xfrm>
           <a:prstGeom prst="rect">
             <a:avLst/>
@@ -10286,7 +10662,7 @@
                       <a:srgbClr val="00B0F0"/>
                     </a:gs>
                     <a:gs pos="100000">
-                      <a:srgbClr val="00F0E0"/>
+                      <a:srgbClr val="2F5EFD"/>
                     </a:gs>
                   </a:gsLst>
                   <a:lin ang="13500000" scaled="1"/>
@@ -10295,7 +10671,7 @@
                 <a:ea typeface="Comfortaa"/>
                 <a:cs typeface="Comfortaa"/>
               </a:rPr>
-              <a:t>Contoh Kasus SQL Injection</a:t>
+              <a:t>Defend Against SQL Injection</a:t>
             </a:r>
             <a:endParaRPr sz="3600" b="1">
               <a:gradFill>
@@ -10304,7 +10680,7 @@
                     <a:srgbClr val="00B0F0"/>
                   </a:gs>
                   <a:gs pos="100000">
-                    <a:srgbClr val="00F0E0"/>
+                    <a:srgbClr val="2F5EFD"/>
                   </a:gs>
                 </a:gsLst>
                 <a:lin ang="13500000" scaled="1"/>
@@ -10315,291 +10691,9 @@
           </a:p>
         </p:txBody>
       </p:sp>
-      <p:sp>
-        <p:nvSpPr>
-          <p:cNvPr id="159388117" name=""/>
-          <p:cNvSpPr txBox="1"/>
-          <p:nvPr/>
-        </p:nvSpPr>
-        <p:spPr bwMode="auto">
-          <a:xfrm rot="0" flipH="0" flipV="0">
-            <a:off x="3310562" y="1348264"/>
-            <a:ext cx="7003685" cy="547471"/>
-          </a:xfrm>
-          <a:prstGeom prst="rect">
-            <a:avLst/>
-          </a:prstGeom>
-          <a:noFill/>
-        </p:spPr>
-        <p:txBody>
-          <a:bodyPr vertOverflow="overflow" horzOverflow="overflow" vert="horz" wrap="square" lIns="91440" tIns="45720" rIns="91440" bIns="45720" numCol="1" spcCol="0" rtlCol="0" fromWordArt="0" anchor="ctr" anchorCtr="0" forceAA="0" upright="0" compatLnSpc="0">
-            <a:spAutoFit/>
-          </a:bodyPr>
-          <a:p>
-            <a:pPr algn="l">
-              <a:lnSpc>
-                <a:spcPct val="114999"/>
-              </a:lnSpc>
-              <a:defRPr/>
-            </a:pPr>
-            <a:r>
-              <a:rPr sz="2600" b="1">
-                <a:gradFill>
-                  <a:gsLst>
-                    <a:gs pos="0">
-                      <a:srgbClr val="00F0E0"/>
-                    </a:gs>
-                    <a:gs pos="100000">
-                      <a:srgbClr val="00B0F0"/>
-                    </a:gs>
-                  </a:gsLst>
-                  <a:lin ang="13500000" scaled="1"/>
-                </a:gradFill>
-                <a:latin typeface="Comfortaa"/>
-                <a:ea typeface="Comfortaa"/>
-                <a:cs typeface="Comfortaa"/>
-              </a:rPr>
-              <a:t>Ghostsell Hacker Attack (2012)</a:t>
-            </a:r>
-            <a:endParaRPr sz="2600" b="1">
-              <a:gradFill>
-                <a:gsLst>
-                  <a:gs pos="0">
-                    <a:srgbClr val="00F0E0"/>
-                  </a:gs>
-                  <a:gs pos="100000">
-                    <a:srgbClr val="00B0F0"/>
-                  </a:gs>
-                </a:gsLst>
-                <a:lin ang="13500000" scaled="1"/>
-              </a:gradFill>
-              <a:latin typeface="Comfortaa"/>
-              <a:cs typeface="Comfortaa"/>
-            </a:endParaRPr>
-          </a:p>
-        </p:txBody>
-      </p:sp>
-      <p:sp>
-        <p:nvSpPr>
-          <p:cNvPr id="214170479" name=""/>
-          <p:cNvSpPr txBox="1"/>
-          <p:nvPr/>
-        </p:nvSpPr>
-        <p:spPr bwMode="auto">
-          <a:xfrm rot="0" flipH="0" flipV="0">
-            <a:off x="3310562" y="2180495"/>
-            <a:ext cx="8445126" cy="1634074"/>
-          </a:xfrm>
-          <a:prstGeom prst="rect">
-            <a:avLst/>
-          </a:prstGeom>
-          <a:noFill/>
-        </p:spPr>
-        <p:txBody>
-          <a:bodyPr vertOverflow="overflow" horzOverflow="overflow" vert="horz" wrap="square" lIns="91440" tIns="45720" rIns="91440" bIns="45720" numCol="1" spcCol="0" rtlCol="0" fromWordArt="0" anchor="t" anchorCtr="0" forceAA="0" upright="0" compatLnSpc="0">
-            <a:spAutoFit/>
-          </a:bodyPr>
-          <a:p>
-            <a:pPr algn="just">
-              <a:lnSpc>
-                <a:spcPct val="114999"/>
-              </a:lnSpc>
-              <a:defRPr/>
-            </a:pPr>
-            <a:r>
-              <a:rPr sz="2200" b="1">
-                <a:solidFill>
-                  <a:schemeClr val="bg1"/>
-                </a:solidFill>
-                <a:latin typeface="Comfortaa"/>
-                <a:ea typeface="Comfortaa"/>
-                <a:cs typeface="Comfortaa"/>
-              </a:rPr>
-              <a:t>Sebuah group hackers bernama Ghostsell meluncurkan serangan SQL Injection ke berbagai website agensi pemerintahan seperti NASA, European Space Agency, Federal Reserve, dll.</a:t>
-            </a:r>
-            <a:endParaRPr sz="4800" b="1">
-              <a:solidFill>
-                <a:schemeClr val="bg1"/>
-              </a:solidFill>
-              <a:latin typeface="Comfortaa"/>
-              <a:cs typeface="Comfortaa"/>
-            </a:endParaRPr>
-          </a:p>
-        </p:txBody>
-      </p:sp>
-      <p:sp>
-        <p:nvSpPr>
-          <p:cNvPr id="2037922031" name=""/>
-          <p:cNvSpPr txBox="1"/>
-          <p:nvPr/>
-        </p:nvSpPr>
-        <p:spPr bwMode="auto">
-          <a:xfrm rot="0" flipH="0" flipV="0">
-            <a:off x="3310562" y="3939408"/>
-            <a:ext cx="8521806" cy="1248504"/>
-          </a:xfrm>
-          <a:prstGeom prst="rect">
-            <a:avLst/>
-          </a:prstGeom>
-          <a:noFill/>
-        </p:spPr>
-        <p:txBody>
-          <a:bodyPr vertOverflow="overflow" horzOverflow="overflow" vert="horz" wrap="square" lIns="91440" tIns="45720" rIns="91440" bIns="45720" numCol="1" spcCol="0" rtlCol="0" fromWordArt="0" anchor="t" anchorCtr="0" forceAA="0" upright="0" compatLnSpc="0">
-            <a:spAutoFit/>
-          </a:bodyPr>
-          <a:p>
-            <a:pPr algn="just">
-              <a:lnSpc>
-                <a:spcPct val="114999"/>
-              </a:lnSpc>
-              <a:defRPr/>
-            </a:pPr>
-            <a:r>
-              <a:rPr sz="2200" b="1">
-                <a:solidFill>
-                  <a:schemeClr val="bg1"/>
-                </a:solidFill>
-                <a:latin typeface="Comfortaa"/>
-                <a:ea typeface="Comfortaa"/>
-                <a:cs typeface="Comfortaa"/>
-              </a:rPr>
-              <a:t>Ghostsell menggunakan tools bernama Havij yang melakukan scan pada website dan kemudian melakukan SQL Injection pada website tersebut secara otomatis</a:t>
-            </a:r>
-            <a:endParaRPr sz="4800" b="1">
-              <a:solidFill>
-                <a:schemeClr val="bg1"/>
-              </a:solidFill>
-              <a:latin typeface="Comfortaa"/>
-              <a:cs typeface="Comfortaa"/>
-            </a:endParaRPr>
-          </a:p>
-        </p:txBody>
-      </p:sp>
-      <p:sp>
-        <p:nvSpPr>
-          <p:cNvPr id="1532598785" name=""/>
-          <p:cNvSpPr txBox="1"/>
-          <p:nvPr/>
-        </p:nvSpPr>
-        <p:spPr bwMode="auto">
-          <a:xfrm rot="0" flipH="0" flipV="0">
-            <a:off x="3310562" y="5312755"/>
-            <a:ext cx="8562486" cy="862937"/>
-          </a:xfrm>
-          <a:prstGeom prst="rect">
-            <a:avLst/>
-          </a:prstGeom>
-          <a:noFill/>
-        </p:spPr>
-        <p:txBody>
-          <a:bodyPr vertOverflow="overflow" horzOverflow="overflow" vert="horz" wrap="square" lIns="91440" tIns="45720" rIns="91440" bIns="45720" numCol="1" spcCol="0" rtlCol="0" fromWordArt="0" anchor="t" anchorCtr="0" forceAA="0" upright="0" compatLnSpc="0">
-            <a:spAutoFit/>
-          </a:bodyPr>
-          <a:p>
-            <a:pPr algn="just">
-              <a:lnSpc>
-                <a:spcPct val="114999"/>
-              </a:lnSpc>
-              <a:defRPr/>
-            </a:pPr>
-            <a:r>
-              <a:rPr sz="2200" b="1">
-                <a:solidFill>
-                  <a:schemeClr val="bg1"/>
-                </a:solidFill>
-                <a:latin typeface="Comfortaa"/>
-                <a:ea typeface="Comfortaa"/>
-                <a:cs typeface="Comfortaa"/>
-              </a:rPr>
-              <a:t>Dampak dari serangan ini menyebabkan </a:t>
-            </a:r>
-            <a:r>
-              <a:rPr sz="2200" b="1">
-                <a:solidFill>
-                  <a:schemeClr val="bg1"/>
-                </a:solidFill>
-                <a:latin typeface="Comfortaa"/>
-                <a:cs typeface="Comfortaa"/>
-              </a:rPr>
-              <a:t>kebocoran data berupa username, password, dan  email addres.</a:t>
-            </a:r>
-            <a:endParaRPr sz="2200" b="1">
-              <a:solidFill>
-                <a:schemeClr val="bg1"/>
-              </a:solidFill>
-              <a:latin typeface="Comfortaa"/>
-              <a:cs typeface="Comfortaa"/>
-            </a:endParaRPr>
-          </a:p>
-        </p:txBody>
-      </p:sp>
-      <p:sp>
-        <p:nvSpPr>
-          <p:cNvPr id="1607020938" name=""/>
-          <p:cNvSpPr txBox="1"/>
-          <p:nvPr/>
-        </p:nvSpPr>
-        <p:spPr bwMode="auto">
-          <a:xfrm rot="0" flipH="0" flipV="0">
-            <a:off x="4062103" y="7537622"/>
-            <a:ext cx="7435298" cy="722730"/>
-          </a:xfrm>
-          <a:prstGeom prst="rect">
-            <a:avLst/>
-          </a:prstGeom>
-          <a:noFill/>
-        </p:spPr>
-        <p:txBody>
-          <a:bodyPr vertOverflow="overflow" horzOverflow="overflow" vert="horz" wrap="square" lIns="91440" tIns="45720" rIns="91440" bIns="45720" numCol="1" spcCol="0" rtlCol="0" fromWordArt="0" anchor="ctr" anchorCtr="0" forceAA="0" upright="0" compatLnSpc="0">
-            <a:spAutoFit/>
-          </a:bodyPr>
-          <a:p>
-            <a:pPr algn="ctr">
-              <a:lnSpc>
-                <a:spcPct val="114999"/>
-              </a:lnSpc>
-              <a:defRPr/>
-            </a:pPr>
-            <a:r>
-              <a:rPr sz="3600" b="1">
-                <a:gradFill>
-                  <a:gsLst>
-                    <a:gs pos="0">
-                      <a:srgbClr val="00B0F0"/>
-                    </a:gs>
-                    <a:gs pos="100000">
-                      <a:srgbClr val="00F0E0"/>
-                    </a:gs>
-                  </a:gsLst>
-                  <a:lin ang="13500000" scaled="1"/>
-                </a:gradFill>
-                <a:latin typeface="Comfortaa"/>
-                <a:ea typeface="Comfortaa"/>
-                <a:cs typeface="Comfortaa"/>
-              </a:rPr>
-              <a:t>Defend Against SQL Injection</a:t>
-            </a:r>
-            <a:endParaRPr sz="3600" b="1">
-              <a:gradFill>
-                <a:gsLst>
-                  <a:gs pos="0">
-                    <a:srgbClr val="00B0F0"/>
-                  </a:gs>
-                  <a:gs pos="100000">
-                    <a:srgbClr val="00F0E0"/>
-                  </a:gs>
-                </a:gsLst>
-                <a:lin ang="13500000" scaled="1"/>
-              </a:gradFill>
-              <a:latin typeface="Comfortaa"/>
-              <a:cs typeface="Comfortaa"/>
-            </a:endParaRPr>
-          </a:p>
-        </p:txBody>
-      </p:sp>
       <p:pic>
         <p:nvPicPr>
-          <p:cNvPr id="1947793003" name=""/>
+          <p:cNvPr id="684116106" name=""/>
           <p:cNvPicPr>
             <a:picLocks noChangeAspect="1"/>
           </p:cNvPicPr>
@@ -10621,7 +10715,7 @@
       </p:pic>
       <p:sp>
         <p:nvSpPr>
-          <p:cNvPr id="212916082" name=""/>
+          <p:cNvPr id="1023040253" name=""/>
           <p:cNvSpPr txBox="1"/>
           <p:nvPr/>
         </p:nvSpPr>
@@ -10706,7 +10800,7 @@
       </p:sp>
       <p:sp>
         <p:nvSpPr>
-          <p:cNvPr id="389844842" name=""/>
+          <p:cNvPr id="565960743" name=""/>
           <p:cNvSpPr txBox="1"/>
           <p:nvPr/>
         </p:nvSpPr>
@@ -10780,7 +10874,7 @@
       </p:sp>
       <p:sp>
         <p:nvSpPr>
-          <p:cNvPr id="10860005" name=""/>
+          <p:cNvPr id="1920924155" name=""/>
           <p:cNvSpPr txBox="1"/>
           <p:nvPr/>
         </p:nvSpPr>
@@ -10848,7 +10942,7 @@
       </p:sp>
       <p:pic>
         <p:nvPicPr>
-          <p:cNvPr id="629407294" name=""/>
+          <p:cNvPr id="821653555" name=""/>
           <p:cNvPicPr>
             <a:picLocks noChangeAspect="1"/>
           </p:cNvPicPr>
@@ -10870,7 +10964,7 @@
       </p:pic>
       <p:pic>
         <p:nvPicPr>
-          <p:cNvPr id="1133365776" name=""/>
+          <p:cNvPr id="106906201" name=""/>
           <p:cNvPicPr>
             <a:picLocks noChangeAspect="1"/>
           </p:cNvPicPr>
@@ -10898,7 +10992,7 @@
   <mc:AlternateContent xmlns:mc="http://schemas.openxmlformats.org/markup-compatibility/2006">
     <mc:Choice xmlns:p159="http://schemas.microsoft.com/office/powerpoint/2015/09/main" xmlns:p14="http://schemas.microsoft.com/office/powerpoint/2010/main" Requires="p159">
       <p:transition spd="slow" p14:dur="1500" advClick="1">
-        <p159:morph option="byObject"/>
+        <p159:morph option="byChar"/>
       </p:transition>
     </mc:Choice>
     <mc:Fallback>
@@ -10930,7 +11024,7 @@
       </p:grpSpPr>
       <p:sp>
         <p:nvSpPr>
-          <p:cNvPr id="2094762456" name=""/>
+          <p:cNvPr id="1037593595" name=""/>
           <p:cNvSpPr/>
           <p:nvPr/>
         </p:nvSpPr>
@@ -10995,7 +11089,7 @@
       </p:sp>
       <p:sp>
         <p:nvSpPr>
-          <p:cNvPr id="2132061874" name=""/>
+          <p:cNvPr id="868362104" name=""/>
           <p:cNvSpPr/>
           <p:nvPr/>
         </p:nvSpPr>
@@ -11043,7 +11137,7 @@
       </p:sp>
       <p:pic>
         <p:nvPicPr>
-          <p:cNvPr id="1264472588" name=""/>
+          <p:cNvPr id="1627446537" name=""/>
           <p:cNvPicPr>
             <a:picLocks noChangeAspect="1"/>
           </p:cNvPicPr>
@@ -11065,7 +11159,7 @@
       </p:pic>
       <p:sp>
         <p:nvSpPr>
-          <p:cNvPr id="112715406" name=""/>
+          <p:cNvPr id="679249260" name=""/>
           <p:cNvSpPr txBox="1"/>
           <p:nvPr/>
         </p:nvSpPr>
@@ -11113,7 +11207,7 @@
       </p:sp>
       <p:sp>
         <p:nvSpPr>
-          <p:cNvPr id="2135154762" name=""/>
+          <p:cNvPr id="1052926492" name=""/>
           <p:cNvSpPr txBox="1"/>
           <p:nvPr/>
         </p:nvSpPr>
@@ -11177,7 +11271,7 @@
       </p:sp>
       <p:sp>
         <p:nvSpPr>
-          <p:cNvPr id="1780926275" name=""/>
+          <p:cNvPr id="816595029" name=""/>
           <p:cNvSpPr txBox="1"/>
           <p:nvPr/>
         </p:nvSpPr>
@@ -11241,7 +11335,7 @@
       </p:sp>
       <p:sp>
         <p:nvSpPr>
-          <p:cNvPr id="707894944" name=""/>
+          <p:cNvPr id="500598344" name=""/>
           <p:cNvSpPr txBox="1"/>
           <p:nvPr/>
         </p:nvSpPr>
@@ -11289,7 +11383,7 @@
       </p:sp>
       <p:sp>
         <p:nvSpPr>
-          <p:cNvPr id="1100992763" name=""/>
+          <p:cNvPr id="996255748" name=""/>
           <p:cNvSpPr txBox="1"/>
           <p:nvPr/>
         </p:nvSpPr>
@@ -11337,7 +11431,7 @@
       </p:sp>
       <p:sp>
         <p:nvSpPr>
-          <p:cNvPr id="302998254" name=""/>
+          <p:cNvPr id="1668087638" name=""/>
           <p:cNvSpPr txBox="1"/>
           <p:nvPr/>
         </p:nvSpPr>
@@ -11395,14 +11489,441 @@
       </p:sp>
       <p:sp>
         <p:nvSpPr>
-          <p:cNvPr id="1496831055" name=""/>
+          <p:cNvPr id="1457389577" name=""/>
           <p:cNvSpPr txBox="1"/>
           <p:nvPr/>
         </p:nvSpPr>
         <p:spPr bwMode="auto">
           <a:xfrm rot="0" flipH="0" flipV="0">
-            <a:off x="4062104" y="319610"/>
-            <a:ext cx="7434938" cy="722730"/>
+            <a:off x="4062103" y="319969"/>
+            <a:ext cx="7435657" cy="722730"/>
+          </a:xfrm>
+          <a:prstGeom prst="rect">
+            <a:avLst/>
+          </a:prstGeom>
+          <a:noFill/>
+        </p:spPr>
+        <p:txBody>
+          <a:bodyPr vertOverflow="overflow" horzOverflow="overflow" vert="horz" wrap="square" lIns="91440" tIns="45720" rIns="91440" bIns="45720" numCol="1" spcCol="0" rtlCol="0" fromWordArt="0" anchor="ctr" anchorCtr="0" forceAA="0" upright="0" compatLnSpc="0">
+            <a:spAutoFit/>
+          </a:bodyPr>
+          <a:p>
+            <a:pPr algn="ctr">
+              <a:lnSpc>
+                <a:spcPct val="114999"/>
+              </a:lnSpc>
+              <a:defRPr/>
+            </a:pPr>
+            <a:r>
+              <a:rPr sz="3600" b="1">
+                <a:gradFill>
+                  <a:gsLst>
+                    <a:gs pos="0">
+                      <a:srgbClr val="2F5EFD"/>
+                    </a:gs>
+                    <a:gs pos="100000">
+                      <a:srgbClr val="00B0F0"/>
+                    </a:gs>
+                  </a:gsLst>
+                  <a:lin ang="13500000" scaled="1"/>
+                </a:gradFill>
+                <a:latin typeface="Comfortaa"/>
+                <a:ea typeface="Comfortaa"/>
+                <a:cs typeface="Comfortaa"/>
+              </a:rPr>
+              <a:t>Defend Against SQL Injection</a:t>
+            </a:r>
+            <a:endParaRPr sz="3600" b="1">
+              <a:gradFill>
+                <a:gsLst>
+                  <a:gs pos="0">
+                    <a:srgbClr val="2F5EFD"/>
+                  </a:gs>
+                  <a:gs pos="100000">
+                    <a:srgbClr val="00B0F0"/>
+                  </a:gs>
+                </a:gsLst>
+                <a:lin ang="13500000" scaled="1"/>
+              </a:gradFill>
+              <a:latin typeface="Comfortaa"/>
+              <a:cs typeface="Comfortaa"/>
+            </a:endParaRPr>
+          </a:p>
+        </p:txBody>
+      </p:sp>
+      <p:pic>
+        <p:nvPicPr>
+          <p:cNvPr id="2133758965" name=""/>
+          <p:cNvPicPr>
+            <a:picLocks noChangeAspect="1"/>
+          </p:cNvPicPr>
+          <p:nvPr/>
+        </p:nvPicPr>
+        <p:blipFill rotWithShape="1">
+          <a:blip r:embed="rId4"/>
+          <a:stretch/>
+        </p:blipFill>
+        <p:spPr bwMode="auto">
+          <a:xfrm flipH="0" flipV="0">
+            <a:off x="3262936" y="1411011"/>
+            <a:ext cx="1424337" cy="1424337"/>
+          </a:xfrm>
+          <a:prstGeom prst="rect">
+            <a:avLst/>
+          </a:prstGeom>
+        </p:spPr>
+      </p:pic>
+      <p:sp>
+        <p:nvSpPr>
+          <p:cNvPr id="1781339302" name=""/>
+          <p:cNvSpPr txBox="1"/>
+          <p:nvPr/>
+        </p:nvSpPr>
+        <p:spPr bwMode="auto">
+          <a:xfrm rot="0" flipH="0" flipV="0">
+            <a:off x="4887299" y="1474205"/>
+            <a:ext cx="7192094" cy="1213454"/>
+          </a:xfrm>
+          <a:prstGeom prst="rect">
+            <a:avLst/>
+          </a:prstGeom>
+          <a:noFill/>
+        </p:spPr>
+        <p:txBody>
+          <a:bodyPr vertOverflow="overflow" horzOverflow="overflow" vert="horz" wrap="square" lIns="91440" tIns="45720" rIns="91440" bIns="45720" numCol="1" spcCol="0" rtlCol="0" fromWordArt="0" anchor="t" anchorCtr="0" forceAA="0" upright="0" compatLnSpc="0">
+            <a:spAutoFit/>
+          </a:bodyPr>
+          <a:p>
+            <a:pPr algn="just">
+              <a:lnSpc>
+                <a:spcPct val="114999"/>
+              </a:lnSpc>
+              <a:defRPr/>
+            </a:pPr>
+            <a:r>
+              <a:rPr sz="2200" b="1">
+                <a:solidFill>
+                  <a:schemeClr val="bg1"/>
+                </a:solidFill>
+                <a:latin typeface="Comfortaa"/>
+                <a:ea typeface="Comfortaa"/>
+                <a:cs typeface="Comfortaa"/>
+              </a:rPr>
+              <a:t>Parameterized Queries (Prepared Statements)</a:t>
+            </a:r>
+            <a:r>
+              <a:rPr sz="2400" b="1">
+                <a:solidFill>
+                  <a:schemeClr val="bg1"/>
+                </a:solidFill>
+                <a:latin typeface="Comfortaa"/>
+                <a:ea typeface="Comfortaa"/>
+                <a:cs typeface="Comfortaa"/>
+              </a:rPr>
+              <a:t> :</a:t>
+            </a:r>
+            <a:endParaRPr sz="2200" b="1">
+              <a:solidFill>
+                <a:schemeClr val="bg1"/>
+              </a:solidFill>
+              <a:latin typeface="Comfortaa"/>
+              <a:cs typeface="Comfortaa"/>
+            </a:endParaRPr>
+          </a:p>
+          <a:p>
+            <a:pPr algn="just">
+              <a:lnSpc>
+                <a:spcPct val="114999"/>
+              </a:lnSpc>
+              <a:defRPr/>
+            </a:pPr>
+            <a:r>
+              <a:rPr sz="2000" b="1">
+                <a:solidFill>
+                  <a:schemeClr val="bg1"/>
+                </a:solidFill>
+                <a:latin typeface="Comfortaa"/>
+                <a:ea typeface="Comfortaa"/>
+                <a:cs typeface="Comfortaa"/>
+              </a:rPr>
+              <a:t>Pemisahan antara data input dengan kode yang dapat dijalankan database</a:t>
+            </a:r>
+            <a:endParaRPr sz="2200" b="1">
+              <a:solidFill>
+                <a:schemeClr val="bg1"/>
+              </a:solidFill>
+              <a:latin typeface="Comfortaa"/>
+              <a:cs typeface="Comfortaa"/>
+            </a:endParaRPr>
+          </a:p>
+        </p:txBody>
+      </p:sp>
+      <p:sp>
+        <p:nvSpPr>
+          <p:cNvPr id="1744860428" name=""/>
+          <p:cNvSpPr txBox="1"/>
+          <p:nvPr/>
+        </p:nvSpPr>
+        <p:spPr bwMode="auto">
+          <a:xfrm rot="0" flipH="0" flipV="0">
+            <a:off x="4945599" y="3238090"/>
+            <a:ext cx="7135235" cy="1213454"/>
+          </a:xfrm>
+          <a:prstGeom prst="rect">
+            <a:avLst/>
+          </a:prstGeom>
+          <a:noFill/>
+        </p:spPr>
+        <p:txBody>
+          <a:bodyPr vertOverflow="overflow" horzOverflow="overflow" vert="horz" wrap="square" lIns="91440" tIns="45720" rIns="91440" bIns="45720" numCol="1" spcCol="0" rtlCol="0" fromWordArt="0" anchor="t" anchorCtr="0" forceAA="0" upright="0" compatLnSpc="0">
+            <a:spAutoFit/>
+          </a:bodyPr>
+          <a:p>
+            <a:pPr algn="just">
+              <a:lnSpc>
+                <a:spcPct val="114999"/>
+              </a:lnSpc>
+              <a:defRPr/>
+            </a:pPr>
+            <a:r>
+              <a:rPr sz="2400" b="1">
+                <a:solidFill>
+                  <a:schemeClr val="bg1"/>
+                </a:solidFill>
+                <a:latin typeface="Comfortaa"/>
+                <a:ea typeface="Comfortaa"/>
+                <a:cs typeface="Comfortaa"/>
+              </a:rPr>
+              <a:t>Least Privilege :</a:t>
+            </a:r>
+            <a:endParaRPr sz="2200" b="1">
+              <a:solidFill>
+                <a:schemeClr val="bg1"/>
+              </a:solidFill>
+              <a:latin typeface="Comfortaa"/>
+              <a:cs typeface="Comfortaa"/>
+            </a:endParaRPr>
+          </a:p>
+          <a:p>
+            <a:pPr algn="just">
+              <a:lnSpc>
+                <a:spcPct val="114999"/>
+              </a:lnSpc>
+              <a:defRPr/>
+            </a:pPr>
+            <a:r>
+              <a:rPr lang="en-US" sz="2000" b="1" i="0" u="none" strike="noStrike" cap="none" spc="0">
+                <a:solidFill>
+                  <a:schemeClr val="bg1"/>
+                </a:solidFill>
+                <a:latin typeface="Comfortaa"/>
+                <a:ea typeface="Comfortaa"/>
+                <a:cs typeface="Comfortaa"/>
+              </a:rPr>
+              <a:t>Pembatasan akses database berdasarkan akun database untuk mengurangi dampak serangan</a:t>
+            </a:r>
+            <a:endParaRPr sz="2200" b="1">
+              <a:solidFill>
+                <a:schemeClr val="bg1"/>
+              </a:solidFill>
+              <a:latin typeface="Comfortaa"/>
+              <a:cs typeface="Comfortaa"/>
+            </a:endParaRPr>
+          </a:p>
+        </p:txBody>
+      </p:sp>
+      <p:sp>
+        <p:nvSpPr>
+          <p:cNvPr id="1429303505" name=""/>
+          <p:cNvSpPr txBox="1"/>
+          <p:nvPr/>
+        </p:nvSpPr>
+        <p:spPr bwMode="auto">
+          <a:xfrm rot="0" flipH="0" flipV="0">
+            <a:off x="4945599" y="5001975"/>
+            <a:ext cx="7134875" cy="1067159"/>
+          </a:xfrm>
+          <a:prstGeom prst="rect">
+            <a:avLst/>
+          </a:prstGeom>
+          <a:noFill/>
+        </p:spPr>
+        <p:txBody>
+          <a:bodyPr vertOverflow="overflow" horzOverflow="overflow" vert="horz" wrap="square" lIns="91440" tIns="45720" rIns="91440" bIns="45720" numCol="1" spcCol="0" rtlCol="0" fromWordArt="0" anchor="t" anchorCtr="0" forceAA="0" upright="0" compatLnSpc="0">
+            <a:spAutoFit/>
+          </a:bodyPr>
+          <a:p>
+            <a:pPr algn="just">
+              <a:defRPr/>
+            </a:pPr>
+            <a:r>
+              <a:rPr sz="2400" b="1">
+                <a:solidFill>
+                  <a:schemeClr val="bg1"/>
+                </a:solidFill>
+                <a:latin typeface="Comfortaa"/>
+                <a:ea typeface="Comfortaa"/>
+                <a:cs typeface="Comfortaa"/>
+              </a:rPr>
+              <a:t>Input Validation :</a:t>
+            </a:r>
+            <a:endParaRPr sz="2200" b="1">
+              <a:solidFill>
+                <a:schemeClr val="bg1"/>
+              </a:solidFill>
+              <a:latin typeface="Comfortaa"/>
+              <a:cs typeface="Comfortaa"/>
+            </a:endParaRPr>
+          </a:p>
+          <a:p>
+            <a:pPr algn="just">
+              <a:defRPr/>
+            </a:pPr>
+            <a:r>
+              <a:rPr sz="2000" b="1">
+                <a:solidFill>
+                  <a:schemeClr val="bg1"/>
+                </a:solidFill>
+                <a:latin typeface="Comfortaa"/>
+                <a:ea typeface="Comfortaa"/>
+                <a:cs typeface="Comfortaa"/>
+              </a:rPr>
+              <a:t>Validasi apakah input yang diterima sesuai dengan karakter yang sudah ditentukan </a:t>
+            </a:r>
+            <a:endParaRPr sz="2200" b="1">
+              <a:solidFill>
+                <a:schemeClr val="bg1"/>
+              </a:solidFill>
+              <a:latin typeface="Comfortaa"/>
+              <a:cs typeface="Comfortaa"/>
+            </a:endParaRPr>
+          </a:p>
+        </p:txBody>
+      </p:sp>
+      <p:pic>
+        <p:nvPicPr>
+          <p:cNvPr id="2124839144" name=""/>
+          <p:cNvPicPr>
+            <a:picLocks noChangeAspect="1"/>
+          </p:cNvPicPr>
+          <p:nvPr/>
+        </p:nvPicPr>
+        <p:blipFill rotWithShape="1">
+          <a:blip r:embed="rId5"/>
+          <a:stretch/>
+        </p:blipFill>
+        <p:spPr bwMode="auto">
+          <a:xfrm flipH="0" flipV="0">
+            <a:off x="3445726" y="3251863"/>
+            <a:ext cx="1232754" cy="1150840"/>
+          </a:xfrm>
+          <a:prstGeom prst="rect">
+            <a:avLst/>
+          </a:prstGeom>
+        </p:spPr>
+      </p:pic>
+      <p:pic>
+        <p:nvPicPr>
+          <p:cNvPr id="1391866256" name=""/>
+          <p:cNvPicPr>
+            <a:picLocks noChangeAspect="1"/>
+          </p:cNvPicPr>
+          <p:nvPr/>
+        </p:nvPicPr>
+        <p:blipFill rotWithShape="1">
+          <a:blip r:embed="rId6"/>
+          <a:stretch/>
+        </p:blipFill>
+        <p:spPr bwMode="auto">
+          <a:xfrm flipH="0" flipV="0">
+            <a:off x="3349935" y="4819219"/>
+            <a:ext cx="1424337" cy="1343149"/>
+          </a:xfrm>
+          <a:prstGeom prst="rect">
+            <a:avLst/>
+          </a:prstGeom>
+        </p:spPr>
+      </p:pic>
+      <p:sp>
+        <p:nvSpPr>
+          <p:cNvPr id="671556389" name=""/>
+          <p:cNvSpPr txBox="1"/>
+          <p:nvPr/>
+        </p:nvSpPr>
+        <p:spPr bwMode="auto">
+          <a:xfrm rot="0" flipH="0" flipV="0">
+            <a:off x="512856" y="-7049880"/>
+            <a:ext cx="1824031" cy="2019643"/>
+          </a:xfrm>
+          <a:prstGeom prst="rect">
+            <a:avLst/>
+          </a:prstGeom>
+          <a:noFill/>
+        </p:spPr>
+        <p:txBody>
+          <a:bodyPr vertOverflow="overflow" horzOverflow="overflow" vert="horz" wrap="square" lIns="91440" tIns="45720" rIns="91440" bIns="45720" numCol="1" spcCol="0" rtlCol="0" fromWordArt="0" anchor="ctr" anchorCtr="0" forceAA="0" upright="0" compatLnSpc="0">
+            <a:spAutoFit/>
+          </a:bodyPr>
+          <a:p>
+            <a:pPr algn="ctr">
+              <a:lnSpc>
+                <a:spcPct val="114999"/>
+              </a:lnSpc>
+              <a:defRPr/>
+            </a:pPr>
+            <a:r>
+              <a:rPr sz="11000" b="1">
+                <a:solidFill>
+                  <a:schemeClr val="tx1"/>
+                </a:solidFill>
+                <a:latin typeface="Comfortaa"/>
+                <a:ea typeface="Comfortaa"/>
+                <a:cs typeface="Comfortaa"/>
+              </a:rPr>
+              <a:t>3.</a:t>
+            </a:r>
+            <a:endParaRPr sz="11000" b="1">
+              <a:solidFill>
+                <a:schemeClr val="tx1"/>
+              </a:solidFill>
+              <a:latin typeface="Comfortaa"/>
+              <a:cs typeface="Comfortaa"/>
+            </a:endParaRPr>
+          </a:p>
+        </p:txBody>
+      </p:sp>
+      <p:pic>
+        <p:nvPicPr>
+          <p:cNvPr id="465225738" name=""/>
+          <p:cNvPicPr>
+            <a:picLocks noChangeAspect="1"/>
+          </p:cNvPicPr>
+          <p:nvPr/>
+        </p:nvPicPr>
+        <p:blipFill rotWithShape="1">
+          <a:blip r:embed="rId7"/>
+          <a:stretch/>
+        </p:blipFill>
+        <p:spPr bwMode="auto">
+          <a:xfrm flipH="0" flipV="0">
+            <a:off x="448104" y="-5338456"/>
+            <a:ext cx="1928163" cy="1928163"/>
+          </a:xfrm>
+          <a:prstGeom prst="rect">
+            <a:avLst/>
+          </a:prstGeom>
+        </p:spPr>
+      </p:pic>
+      <p:sp>
+        <p:nvSpPr>
+          <p:cNvPr id="51531527" name=""/>
+          <p:cNvSpPr txBox="1"/>
+          <p:nvPr/>
+        </p:nvSpPr>
+        <p:spPr bwMode="auto">
+          <a:xfrm rot="0" flipH="0" flipV="0">
+            <a:off x="3262935" y="7060534"/>
+            <a:ext cx="8388073" cy="722730"/>
           </a:xfrm>
           <a:prstGeom prst="rect">
             <a:avLst/>
@@ -11437,7 +11958,7 @@
                 <a:ea typeface="Comfortaa"/>
                 <a:cs typeface="Comfortaa"/>
               </a:rPr>
-              <a:t>Defend Against SQL Injection</a:t>
+              <a:t>Cross-Site Forgery Request (CSRF)</a:t>
             </a:r>
             <a:endParaRPr sz="3600" b="1">
               <a:gradFill>
@@ -11457,38 +11978,16 @@
           </a:p>
         </p:txBody>
       </p:sp>
-      <p:pic>
-        <p:nvPicPr>
-          <p:cNvPr id="1396690165" name=""/>
-          <p:cNvPicPr>
-            <a:picLocks noChangeAspect="1"/>
-          </p:cNvPicPr>
-          <p:nvPr/>
-        </p:nvPicPr>
-        <p:blipFill rotWithShape="1">
-          <a:blip r:embed="rId4"/>
-          <a:stretch/>
-        </p:blipFill>
-        <p:spPr bwMode="auto">
-          <a:xfrm flipH="0" flipV="0">
-            <a:off x="3262936" y="1411011"/>
-            <a:ext cx="1424337" cy="1424337"/>
-          </a:xfrm>
-          <a:prstGeom prst="rect">
-            <a:avLst/>
-          </a:prstGeom>
-        </p:spPr>
-      </p:pic>
-      <p:sp>
-        <p:nvSpPr>
-          <p:cNvPr id="655546638" name=""/>
+      <p:sp>
+        <p:nvSpPr>
+          <p:cNvPr id="1341950248" name=""/>
           <p:cNvSpPr txBox="1"/>
           <p:nvPr/>
         </p:nvSpPr>
         <p:spPr bwMode="auto">
           <a:xfrm rot="0" flipH="0" flipV="0">
-            <a:off x="4887299" y="1474205"/>
-            <a:ext cx="7192094" cy="1213454"/>
+            <a:off x="3262935" y="8597978"/>
+            <a:ext cx="8182372" cy="1493867"/>
           </a:xfrm>
           <a:prstGeom prst="rect">
             <a:avLst/>
@@ -11496,7 +11995,7 @@
           <a:noFill/>
         </p:spPr>
         <p:txBody>
-          <a:bodyPr vertOverflow="overflow" horzOverflow="overflow" vert="horz" wrap="square" lIns="91440" tIns="45720" rIns="91440" bIns="45720" numCol="1" spcCol="0" rtlCol="0" fromWordArt="0" anchor="t" anchorCtr="0" forceAA="0" upright="0" compatLnSpc="0">
+          <a:bodyPr vertOverflow="overflow" horzOverflow="overflow" vert="horz" wrap="square" lIns="91440" tIns="45720" rIns="91440" bIns="45720" numCol="1" spcCol="0" rtlCol="0" fromWordArt="0" anchor="ctr" anchorCtr="0" forceAA="0" upright="0" compatLnSpc="0">
             <a:spAutoFit/>
           </a:bodyPr>
           <a:p>
@@ -11507,6 +12006,122 @@
               <a:defRPr/>
             </a:pPr>
             <a:r>
+              <a:rPr sz="2000" b="1">
+                <a:solidFill>
+                  <a:schemeClr val="bg1"/>
+                </a:solidFill>
+                <a:latin typeface="Comfortaa"/>
+                <a:ea typeface="Comfortaa"/>
+                <a:cs typeface="Comfortaa"/>
+              </a:rPr>
+              <a:t>CSRF adalah </a:t>
+            </a:r>
+            <a:r>
+              <a:rPr sz="2000" b="1">
+                <a:solidFill>
+                  <a:schemeClr val="bg1"/>
+                </a:solidFill>
+                <a:latin typeface="Comfortaa"/>
+                <a:cs typeface="Comfortaa"/>
+              </a:rPr>
+              <a:t>serangan dimana penyerang memanipulasi pengguna yang telah login</a:t>
+            </a:r>
+            <a:r>
+              <a:rPr sz="2000" b="1">
+                <a:solidFill>
+                  <a:schemeClr val="bg1"/>
+                </a:solidFill>
+                <a:latin typeface="Comfortaa"/>
+                <a:cs typeface="Comfortaa"/>
+              </a:rPr>
+              <a:t> untuk melakukan aksi yang tidak diinginkan pengguna seperti mengganti email atau password, transfer data, manipulasi akun, dan lainya.</a:t>
+            </a:r>
+            <a:endParaRPr sz="2000" b="1">
+              <a:solidFill>
+                <a:schemeClr val="bg1"/>
+              </a:solidFill>
+              <a:latin typeface="Comfortaa"/>
+              <a:cs typeface="Comfortaa"/>
+            </a:endParaRPr>
+          </a:p>
+        </p:txBody>
+      </p:sp>
+      <p:sp>
+        <p:nvSpPr>
+          <p:cNvPr id="1076321177" name=""/>
+          <p:cNvSpPr txBox="1"/>
+          <p:nvPr/>
+        </p:nvSpPr>
+        <p:spPr bwMode="auto">
+          <a:xfrm rot="0" flipH="0" flipV="0">
+            <a:off x="3262935" y="11344333"/>
+            <a:ext cx="8235904" cy="1143350"/>
+          </a:xfrm>
+          <a:prstGeom prst="rect">
+            <a:avLst/>
+          </a:prstGeom>
+          <a:noFill/>
+        </p:spPr>
+        <p:txBody>
+          <a:bodyPr vertOverflow="overflow" horzOverflow="overflow" vert="horz" wrap="square" lIns="91440" tIns="45720" rIns="91440" bIns="45720" numCol="1" spcCol="0" rtlCol="0" fromWordArt="0" anchor="ctr" anchorCtr="0" forceAA="0" upright="0" compatLnSpc="0">
+            <a:spAutoFit/>
+          </a:bodyPr>
+          <a:p>
+            <a:pPr algn="just">
+              <a:lnSpc>
+                <a:spcPct val="114999"/>
+              </a:lnSpc>
+              <a:defRPr/>
+            </a:pPr>
+            <a:r>
+              <a:rPr sz="2000" b="1">
+                <a:solidFill>
+                  <a:schemeClr val="bg1"/>
+                </a:solidFill>
+                <a:latin typeface="Comfortaa"/>
+                <a:ea typeface="Comfortaa"/>
+                <a:cs typeface="Comfortaa"/>
+              </a:rPr>
+              <a:t>Karena permintaan tersebut berasal dari pengguna sah yang sudah login, server akan mempercayai permintaan tersebut tanpa mengecek validitasnya </a:t>
+            </a:r>
+            <a:endParaRPr sz="2000" b="1">
+              <a:solidFill>
+                <a:schemeClr val="bg1"/>
+              </a:solidFill>
+              <a:latin typeface="Comfortaa"/>
+              <a:cs typeface="Comfortaa"/>
+            </a:endParaRPr>
+          </a:p>
+        </p:txBody>
+      </p:sp>
+      <p:sp>
+        <p:nvSpPr>
+          <p:cNvPr id="476322350" name=""/>
+          <p:cNvSpPr txBox="1"/>
+          <p:nvPr/>
+        </p:nvSpPr>
+        <p:spPr bwMode="auto">
+          <a:xfrm rot="0" flipH="0" flipV="0">
+            <a:off x="3302308" y="14543518"/>
+            <a:ext cx="8762859" cy="477368"/>
+          </a:xfrm>
+          <a:prstGeom prst="rect">
+            <a:avLst/>
+          </a:prstGeom>
+          <a:noFill/>
+        </p:spPr>
+        <p:txBody>
+          <a:bodyPr vertOverflow="overflow" horzOverflow="overflow" vert="horz" wrap="square" lIns="91440" tIns="45720" rIns="91440" bIns="45720" numCol="1" spcCol="0" rtlCol="0" fromWordArt="0" anchor="ctr" anchorCtr="0" forceAA="0" upright="0" compatLnSpc="0">
+            <a:spAutoFit/>
+          </a:bodyPr>
+          <a:p>
+            <a:pPr algn="just">
+              <a:lnSpc>
+                <a:spcPct val="114999"/>
+              </a:lnSpc>
+              <a:defRPr/>
+            </a:pPr>
+            <a:r>
               <a:rPr sz="2200" b="1">
                 <a:solidFill>
                   <a:schemeClr val="bg1"/>
@@ -11515,15 +12130,33 @@
                 <a:ea typeface="Comfortaa"/>
                 <a:cs typeface="Comfortaa"/>
               </a:rPr>
-              <a:t>Parameterized Queries (Prepared Statements)</a:t>
-            </a:r>
-            <a:r>
-              <a:rPr sz="2400" b="1">
+              <a:t>Contoh </a:t>
+            </a:r>
+            <a:r>
+              <a:rPr sz="2200" b="1">
+                <a:gradFill>
+                  <a:gsLst>
+                    <a:gs pos="0">
+                      <a:srgbClr val="00E3C5"/>
+                    </a:gs>
+                    <a:gs pos="100000">
+                      <a:srgbClr val="00B3EF"/>
+                    </a:gs>
+                  </a:gsLst>
+                  <a:lin ang="5400000" scaled="1"/>
+                </a:gradFill>
+                <a:latin typeface="Comfortaa"/>
+                <a:ea typeface="Comfortaa"/>
+                <a:cs typeface="Comfortaa"/>
+              </a:rPr>
+              <a:t>CSRF</a:t>
+            </a:r>
+            <a:r>
+              <a:rPr sz="2200" b="1">
                 <a:solidFill>
                   <a:schemeClr val="bg1"/>
                 </a:solidFill>
                 <a:latin typeface="Comfortaa"/>
-                <a:ea typeface="Comfortaa"/>
                 <a:cs typeface="Comfortaa"/>
               </a:rPr>
               <a:t> :</a:t>
@@ -11536,6 +12169,28 @@
               <a:cs typeface="Comfortaa"/>
             </a:endParaRPr>
           </a:p>
+        </p:txBody>
+      </p:sp>
+      <p:sp>
+        <p:nvSpPr>
+          <p:cNvPr id="1334976714" name=""/>
+          <p:cNvSpPr txBox="1"/>
+          <p:nvPr/>
+        </p:nvSpPr>
+        <p:spPr bwMode="auto">
+          <a:xfrm rot="0" flipH="0" flipV="0">
+            <a:off x="3302308" y="15115309"/>
+            <a:ext cx="8785539" cy="442316"/>
+          </a:xfrm>
+          <a:prstGeom prst="rect">
+            <a:avLst/>
+          </a:prstGeom>
+          <a:noFill/>
+        </p:spPr>
+        <p:txBody>
+          <a:bodyPr vertOverflow="overflow" horzOverflow="overflow" vert="horz" wrap="square" lIns="91440" tIns="45720" rIns="91440" bIns="45720" numCol="1" spcCol="0" rtlCol="0" fromWordArt="0" anchor="ctr" anchorCtr="0" forceAA="0" upright="0" compatLnSpc="0">
+            <a:spAutoFit/>
+          </a:bodyPr>
           <a:p>
             <a:pPr algn="just">
               <a:lnSpc>
@@ -11544,6 +12199,87 @@
               <a:defRPr/>
             </a:pPr>
             <a:r>
+              <a:rPr sz="2000" b="0">
+                <a:solidFill>
+                  <a:schemeClr val="bg1"/>
+                </a:solidFill>
+                <a:latin typeface="Inter"/>
+                <a:ea typeface="Inter"/>
+                <a:cs typeface="Inter"/>
+              </a:rPr>
+              <a:t>examp</a:t>
+            </a:r>
+            <a:r>
+              <a:rPr sz="2000" b="0">
+                <a:solidFill>
+                  <a:schemeClr val="bg1"/>
+                </a:solidFill>
+                <a:latin typeface="Inter"/>
+                <a:ea typeface="Inter"/>
+                <a:cs typeface="Inter"/>
+              </a:rPr>
+              <a:t>le.com/fundtransfer?acct=</a:t>
+            </a:r>
+            <a:r>
+              <a:rPr sz="2000" b="0">
+                <a:solidFill>
+                  <a:srgbClr val="FF0000"/>
+                </a:solidFill>
+                <a:latin typeface="Inter"/>
+                <a:ea typeface="Inter"/>
+                <a:cs typeface="Inter"/>
+              </a:rPr>
+              <a:t>223344</a:t>
+            </a:r>
+            <a:r>
+              <a:rPr sz="2000" b="0">
+                <a:solidFill>
+                  <a:schemeClr val="bg1"/>
+                </a:solidFill>
+                <a:latin typeface="Inter"/>
+                <a:ea typeface="Inter"/>
+                <a:cs typeface="Inter"/>
+              </a:rPr>
+              <a:t>&amp;amount=1000000</a:t>
+            </a:r>
+            <a:endParaRPr sz="2000" b="0">
+              <a:solidFill>
+                <a:schemeClr val="bg1"/>
+              </a:solidFill>
+              <a:latin typeface="Inter"/>
+              <a:cs typeface="Inter"/>
+            </a:endParaRPr>
+          </a:p>
+        </p:txBody>
+      </p:sp>
+      <p:sp>
+        <p:nvSpPr>
+          <p:cNvPr id="180434584" name=""/>
+          <p:cNvSpPr txBox="1"/>
+          <p:nvPr/>
+        </p:nvSpPr>
+        <p:spPr bwMode="auto">
+          <a:xfrm rot="0" flipH="0" flipV="0">
+            <a:off x="3302308" y="18072892"/>
+            <a:ext cx="8848539" cy="1143350"/>
+          </a:xfrm>
+          <a:prstGeom prst="rect">
+            <a:avLst/>
+          </a:prstGeom>
+          <a:noFill/>
+        </p:spPr>
+        <p:txBody>
+          <a:bodyPr vertOverflow="overflow" horzOverflow="overflow" vert="horz" wrap="square" lIns="91440" tIns="45720" rIns="91440" bIns="45720" numCol="1" spcCol="0" rtlCol="0" fromWordArt="0" anchor="ctr" anchorCtr="0" forceAA="0" upright="0" compatLnSpc="0">
+            <a:spAutoFit/>
+          </a:bodyPr>
+          <a:p>
+            <a:pPr algn="just">
+              <a:lnSpc>
+                <a:spcPct val="114999"/>
+              </a:lnSpc>
+              <a:defRPr/>
+            </a:pPr>
+            <a:r>
               <a:rPr sz="2000" b="1">
                 <a:solidFill>
                   <a:schemeClr val="bg1"/>
@@ -11552,151 +12288,40 @@
                 <a:ea typeface="Comfortaa"/>
                 <a:cs typeface="Comfortaa"/>
               </a:rPr>
-              <a:t>Pemisahan antara data input dengan kode yang dapat dijalankan database</a:t>
-            </a:r>
-            <a:endParaRPr sz="2200" b="1">
-              <a:solidFill>
-                <a:schemeClr val="bg1"/>
-              </a:solidFill>
-              <a:latin typeface="Comfortaa"/>
-              <a:cs typeface="Comfortaa"/>
-            </a:endParaRPr>
-          </a:p>
-        </p:txBody>
-      </p:sp>
-      <p:sp>
-        <p:nvSpPr>
-          <p:cNvPr id="1003500205" name=""/>
-          <p:cNvSpPr txBox="1"/>
-          <p:nvPr/>
-        </p:nvSpPr>
-        <p:spPr bwMode="auto">
-          <a:xfrm rot="0" flipH="0" flipV="0">
-            <a:off x="4945599" y="3238090"/>
-            <a:ext cx="7135235" cy="1213454"/>
-          </a:xfrm>
-          <a:prstGeom prst="rect">
-            <a:avLst/>
-          </a:prstGeom>
-          <a:noFill/>
-        </p:spPr>
-        <p:txBody>
-          <a:bodyPr vertOverflow="overflow" horzOverflow="overflow" vert="horz" wrap="square" lIns="91440" tIns="45720" rIns="91440" bIns="45720" numCol="1" spcCol="0" rtlCol="0" fromWordArt="0" anchor="t" anchorCtr="0" forceAA="0" upright="0" compatLnSpc="0">
-            <a:spAutoFit/>
-          </a:bodyPr>
-          <a:p>
-            <a:pPr algn="just">
-              <a:lnSpc>
-                <a:spcPct val="114999"/>
-              </a:lnSpc>
-              <a:defRPr/>
-            </a:pPr>
-            <a:r>
-              <a:rPr sz="2400" b="1">
+              <a:t>pada link diatas, akun dengan nomor </a:t>
+            </a:r>
+            <a:r>
+              <a:rPr sz="2000" b="1">
                 <a:solidFill>
-                  <a:schemeClr val="bg1"/>
+                  <a:srgbClr val="FF0000"/>
                 </a:solidFill>
                 <a:latin typeface="Comfortaa"/>
                 <a:ea typeface="Comfortaa"/>
                 <a:cs typeface="Comfortaa"/>
               </a:rPr>
-              <a:t>Least Privilege :</a:t>
-            </a:r>
-            <a:endParaRPr sz="2200" b="1">
-              <a:solidFill>
-                <a:schemeClr val="bg1"/>
-              </a:solidFill>
-              <a:latin typeface="Comfortaa"/>
-              <a:cs typeface="Comfortaa"/>
-            </a:endParaRPr>
-          </a:p>
-          <a:p>
-            <a:pPr algn="just">
-              <a:lnSpc>
-                <a:spcPct val="114999"/>
-              </a:lnSpc>
-              <a:defRPr/>
-            </a:pPr>
-            <a:r>
-              <a:rPr lang="en-US" sz="2000" b="1" i="0" u="none" strike="noStrike" cap="none" spc="0">
-                <a:solidFill>
-                  <a:schemeClr val="bg1"/>
-                </a:solidFill>
-                <a:latin typeface="Comfortaa"/>
-                <a:ea typeface="Comfortaa"/>
-                <a:cs typeface="Comfortaa"/>
-              </a:rPr>
-              <a:t>Pembatasan akses database berdasarkan akun database untuk mengurangi dampak serangan</a:t>
-            </a:r>
-            <a:endParaRPr sz="2200" b="1">
-              <a:solidFill>
-                <a:schemeClr val="bg1"/>
-              </a:solidFill>
-              <a:latin typeface="Comfortaa"/>
-              <a:cs typeface="Comfortaa"/>
-            </a:endParaRPr>
-          </a:p>
-        </p:txBody>
-      </p:sp>
-      <p:sp>
-        <p:nvSpPr>
-          <p:cNvPr id="1248503960" name=""/>
-          <p:cNvSpPr txBox="1"/>
-          <p:nvPr/>
-        </p:nvSpPr>
-        <p:spPr bwMode="auto">
-          <a:xfrm rot="0" flipH="0" flipV="0">
-            <a:off x="4945599" y="5001975"/>
-            <a:ext cx="7134875" cy="1067159"/>
-          </a:xfrm>
-          <a:prstGeom prst="rect">
-            <a:avLst/>
-          </a:prstGeom>
-          <a:noFill/>
-        </p:spPr>
-        <p:txBody>
-          <a:bodyPr vertOverflow="overflow" horzOverflow="overflow" vert="horz" wrap="square" lIns="91440" tIns="45720" rIns="91440" bIns="45720" numCol="1" spcCol="0" rtlCol="0" fromWordArt="0" anchor="t" anchorCtr="0" forceAA="0" upright="0" compatLnSpc="0">
-            <a:spAutoFit/>
-          </a:bodyPr>
-          <a:p>
-            <a:pPr algn="just">
-              <a:defRPr/>
-            </a:pPr>
-            <a:r>
-              <a:rPr sz="2400" b="1">
-                <a:solidFill>
-                  <a:schemeClr val="bg1"/>
-                </a:solidFill>
-                <a:latin typeface="Comfortaa"/>
-                <a:ea typeface="Comfortaa"/>
-                <a:cs typeface="Comfortaa"/>
-              </a:rPr>
-              <a:t>Input Validation :</a:t>
-            </a:r>
-            <a:endParaRPr sz="2200" b="1">
-              <a:solidFill>
-                <a:schemeClr val="bg1"/>
-              </a:solidFill>
-              <a:latin typeface="Comfortaa"/>
-              <a:cs typeface="Comfortaa"/>
-            </a:endParaRPr>
-          </a:p>
-          <a:p>
-            <a:pPr algn="just">
-              <a:defRPr/>
-            </a:pPr>
+              <a:t>223344</a:t>
+            </a:r>
             <a:r>
               <a:rPr sz="2000" b="1">
                 <a:solidFill>
                   <a:schemeClr val="bg1"/>
                 </a:solidFill>
                 <a:latin typeface="Comfortaa"/>
-                <a:ea typeface="Comfortaa"/>
-                <a:cs typeface="Comfortaa"/>
-              </a:rPr>
-              <a:t>Validasi apakah input yang diterima sesuai dengan karakter yang sudah ditentukan </a:t>
-            </a:r>
-            <a:endParaRPr sz="2200" b="1">
+                <a:cs typeface="Comfortaa"/>
+              </a:rPr>
+              <a:t> </a:t>
+            </a:r>
+            <a:r>
+              <a:rPr sz="2000" b="1">
+                <a:solidFill>
+                  <a:schemeClr val="bg1"/>
+                </a:solidFill>
+                <a:latin typeface="Comfortaa"/>
+                <a:cs typeface="Comfortaa"/>
+              </a:rPr>
+              <a:t>adalah akun milik penyerang, link ini kemudian dikirim ke korban melalui email/website phishing</a:t>
+            </a:r>
+            <a:endParaRPr sz="2000" b="1">
               <a:solidFill>
                 <a:schemeClr val="bg1"/>
               </a:solidFill>
@@ -11706,50 +12331,6 @@
           </a:p>
         </p:txBody>
       </p:sp>
-      <p:pic>
-        <p:nvPicPr>
-          <p:cNvPr id="2021896052" name=""/>
-          <p:cNvPicPr>
-            <a:picLocks noChangeAspect="1"/>
-          </p:cNvPicPr>
-          <p:nvPr/>
-        </p:nvPicPr>
-        <p:blipFill rotWithShape="1">
-          <a:blip r:embed="rId5"/>
-          <a:stretch/>
-        </p:blipFill>
-        <p:spPr bwMode="auto">
-          <a:xfrm flipH="0" flipV="0">
-            <a:off x="3445726" y="3251863"/>
-            <a:ext cx="1232755" cy="1150840"/>
-          </a:xfrm>
-          <a:prstGeom prst="rect">
-            <a:avLst/>
-          </a:prstGeom>
-        </p:spPr>
-      </p:pic>
-      <p:pic>
-        <p:nvPicPr>
-          <p:cNvPr id="1436889985" name=""/>
-          <p:cNvPicPr>
-            <a:picLocks noChangeAspect="1"/>
-          </p:cNvPicPr>
-          <p:nvPr/>
-        </p:nvPicPr>
-        <p:blipFill rotWithShape="1">
-          <a:blip r:embed="rId6"/>
-          <a:stretch/>
-        </p:blipFill>
-        <p:spPr bwMode="auto">
-          <a:xfrm flipH="0" flipV="0">
-            <a:off x="3349935" y="4819219"/>
-            <a:ext cx="1424337" cy="1343149"/>
-          </a:xfrm>
-          <a:prstGeom prst="rect">
-            <a:avLst/>
-          </a:prstGeom>
-        </p:spPr>
-      </p:pic>
     </p:spTree>
   </p:cSld>
   <p:clrMapOvr>
@@ -11757,12 +12338,12 @@
   </p:clrMapOvr>
   <mc:AlternateContent xmlns:mc="http://schemas.openxmlformats.org/markup-compatibility/2006">
     <mc:Choice xmlns:p159="http://schemas.microsoft.com/office/powerpoint/2015/09/main" xmlns:p14="http://schemas.microsoft.com/office/powerpoint/2010/main" Requires="p159">
-      <p:transition spd="slow" p14:dur="1500" advClick="1">
+      <p:transition spd="med" p14:dur="1000" advClick="1">
         <p159:morph option="byObject"/>
       </p:transition>
     </mc:Choice>
     <mc:Fallback>
-      <p:transition spd="slow" advClick="1">
+      <p:transition spd="med" advClick="1">
         <p:fade/>
       </p:transition>
     </mc:Fallback>
@@ -11790,7 +12371,7 @@
       </p:grpSpPr>
       <p:sp>
         <p:nvSpPr>
-          <p:cNvPr id="344322019" name=""/>
+          <p:cNvPr id="623679352" name=""/>
           <p:cNvSpPr/>
           <p:nvPr/>
         </p:nvSpPr>
@@ -11855,7 +12436,7 @@
       </p:sp>
       <p:sp>
         <p:nvSpPr>
-          <p:cNvPr id="1796524515" name=""/>
+          <p:cNvPr id="1488742630" name=""/>
           <p:cNvSpPr/>
           <p:nvPr/>
         </p:nvSpPr>
@@ -11903,7 +12484,7 @@
       </p:sp>
       <p:pic>
         <p:nvPicPr>
-          <p:cNvPr id="138298650" name=""/>
+          <p:cNvPr id="1442760949" name=""/>
           <p:cNvPicPr>
             <a:picLocks noChangeAspect="1"/>
           </p:cNvPicPr>
@@ -11915,7 +12496,7 @@
         </p:blipFill>
         <p:spPr bwMode="auto">
           <a:xfrm flipH="0" flipV="0">
-            <a:off x="251284" y="2938707"/>
+            <a:off x="251283" y="9568107"/>
             <a:ext cx="2164307" cy="2164307"/>
           </a:xfrm>
           <a:prstGeom prst="rect">
@@ -11925,13 +12506,13 @@
       </p:pic>
       <p:sp>
         <p:nvSpPr>
-          <p:cNvPr id="583110333" name=""/>
+          <p:cNvPr id="134311533" name=""/>
           <p:cNvSpPr txBox="1"/>
           <p:nvPr/>
         </p:nvSpPr>
         <p:spPr bwMode="auto">
           <a:xfrm rot="0" flipH="0" flipV="0">
-            <a:off x="444820" y="1271870"/>
+            <a:off x="444819" y="7901269"/>
             <a:ext cx="1822593" cy="2019641"/>
           </a:xfrm>
           <a:prstGeom prst="rect">
@@ -11973,7 +12554,7 @@
       </p:sp>
       <p:sp>
         <p:nvSpPr>
-          <p:cNvPr id="1136821464" name=""/>
+          <p:cNvPr id="612249905" name=""/>
           <p:cNvSpPr txBox="1"/>
           <p:nvPr/>
         </p:nvSpPr>
@@ -12037,7 +12618,7 @@
       </p:sp>
       <p:pic>
         <p:nvPicPr>
-          <p:cNvPr id="566710713" name=""/>
+          <p:cNvPr id="1127573851" name=""/>
           <p:cNvPicPr>
             <a:picLocks noChangeAspect="1"/>
           </p:cNvPicPr>
@@ -12059,7 +12640,7 @@
       </p:pic>
       <p:sp>
         <p:nvSpPr>
-          <p:cNvPr id="1725937894" name=""/>
+          <p:cNvPr id="981873419" name=""/>
           <p:cNvSpPr txBox="1"/>
           <p:nvPr/>
         </p:nvSpPr>
@@ -12144,7 +12725,7 @@
       </p:sp>
       <p:sp>
         <p:nvSpPr>
-          <p:cNvPr id="1797792708" name=""/>
+          <p:cNvPr id="231973074" name=""/>
           <p:cNvSpPr txBox="1"/>
           <p:nvPr/>
         </p:nvSpPr>
@@ -12218,13 +12799,13 @@
       </p:sp>
       <p:sp>
         <p:nvSpPr>
-          <p:cNvPr id="1905490418" name=""/>
+          <p:cNvPr id="2072714132" name=""/>
           <p:cNvSpPr txBox="1"/>
           <p:nvPr/>
         </p:nvSpPr>
         <p:spPr bwMode="auto">
           <a:xfrm rot="0" flipH="0" flipV="0">
-            <a:off x="4945599" y="-1760773"/>
+            <a:off x="4945599" y="-1760772"/>
             <a:ext cx="7134875" cy="1067159"/>
           </a:xfrm>
           <a:prstGeom prst="rect">
@@ -12286,7 +12867,7 @@
       </p:sp>
       <p:pic>
         <p:nvPicPr>
-          <p:cNvPr id="1287227453" name=""/>
+          <p:cNvPr id="226964902" name=""/>
           <p:cNvPicPr>
             <a:picLocks noChangeAspect="1"/>
           </p:cNvPicPr>
@@ -12299,7 +12880,7 @@
         <p:spPr bwMode="auto">
           <a:xfrm flipH="0" flipV="0">
             <a:off x="3445726" y="-5320635"/>
-            <a:ext cx="1232755" cy="1150840"/>
+            <a:ext cx="1232754" cy="1150840"/>
           </a:xfrm>
           <a:prstGeom prst="rect">
             <a:avLst/>
@@ -12308,7 +12889,7 @@
       </p:pic>
       <p:pic>
         <p:nvPicPr>
-          <p:cNvPr id="1497538475" name=""/>
+          <p:cNvPr id="2066384517" name=""/>
           <p:cNvPicPr>
             <a:picLocks noChangeAspect="1"/>
           </p:cNvPicPr>
@@ -12328,6 +12909,1131 @@
           </a:prstGeom>
         </p:spPr>
       </p:pic>
+      <p:sp>
+        <p:nvSpPr>
+          <p:cNvPr id="1874383222" name=""/>
+          <p:cNvSpPr txBox="1"/>
+          <p:nvPr/>
+        </p:nvSpPr>
+        <p:spPr bwMode="auto">
+          <a:xfrm rot="0" flipH="0" flipV="0">
+            <a:off x="3262935" y="307601"/>
+            <a:ext cx="8387713" cy="722730"/>
+          </a:xfrm>
+          <a:prstGeom prst="rect">
+            <a:avLst/>
+          </a:prstGeom>
+          <a:noFill/>
+        </p:spPr>
+        <p:txBody>
+          <a:bodyPr vertOverflow="overflow" horzOverflow="overflow" vert="horz" wrap="square" lIns="91440" tIns="45720" rIns="91440" bIns="45720" numCol="1" spcCol="0" rtlCol="0" fromWordArt="0" anchor="ctr" anchorCtr="0" forceAA="0" upright="0" compatLnSpc="0">
+            <a:spAutoFit/>
+          </a:bodyPr>
+          <a:p>
+            <a:pPr algn="ctr">
+              <a:lnSpc>
+                <a:spcPct val="114999"/>
+              </a:lnSpc>
+              <a:defRPr/>
+            </a:pPr>
+            <a:r>
+              <a:rPr sz="3600" b="1">
+                <a:gradFill>
+                  <a:gsLst>
+                    <a:gs pos="0">
+                      <a:srgbClr val="00B0F0"/>
+                    </a:gs>
+                    <a:gs pos="100000">
+                      <a:srgbClr val="00F0E0"/>
+                    </a:gs>
+                  </a:gsLst>
+                  <a:lin ang="13500000" scaled="1"/>
+                </a:gradFill>
+                <a:latin typeface="Comfortaa"/>
+                <a:ea typeface="Comfortaa"/>
+                <a:cs typeface="Comfortaa"/>
+              </a:rPr>
+              <a:t>Cross-Site Forgery Request (CSRF)</a:t>
+            </a:r>
+            <a:endParaRPr sz="3600" b="1">
+              <a:gradFill>
+                <a:gsLst>
+                  <a:gs pos="0">
+                    <a:srgbClr val="00B0F0"/>
+                  </a:gs>
+                  <a:gs pos="100000">
+                    <a:srgbClr val="00F0E0"/>
+                  </a:gs>
+                </a:gsLst>
+                <a:lin ang="13500000" scaled="1"/>
+              </a:gradFill>
+              <a:latin typeface="Comfortaa"/>
+              <a:cs typeface="Comfortaa"/>
+            </a:endParaRPr>
+          </a:p>
+        </p:txBody>
+      </p:sp>
+      <p:sp>
+        <p:nvSpPr>
+          <p:cNvPr id="1376873023" name=""/>
+          <p:cNvSpPr txBox="1"/>
+          <p:nvPr/>
+        </p:nvSpPr>
+        <p:spPr bwMode="auto">
+          <a:xfrm rot="0" flipH="0" flipV="0">
+            <a:off x="512856" y="1408481"/>
+            <a:ext cx="1823672" cy="2019643"/>
+          </a:xfrm>
+          <a:prstGeom prst="rect">
+            <a:avLst/>
+          </a:prstGeom>
+          <a:noFill/>
+        </p:spPr>
+        <p:txBody>
+          <a:bodyPr vertOverflow="overflow" horzOverflow="overflow" vert="horz" wrap="square" lIns="91440" tIns="45720" rIns="91440" bIns="45720" numCol="1" spcCol="0" rtlCol="0" fromWordArt="0" anchor="ctr" anchorCtr="0" forceAA="0" upright="0" compatLnSpc="0">
+            <a:spAutoFit/>
+          </a:bodyPr>
+          <a:p>
+            <a:pPr algn="ctr">
+              <a:lnSpc>
+                <a:spcPct val="114999"/>
+              </a:lnSpc>
+              <a:defRPr/>
+            </a:pPr>
+            <a:r>
+              <a:rPr sz="11000" b="1">
+                <a:solidFill>
+                  <a:schemeClr val="tx1"/>
+                </a:solidFill>
+                <a:latin typeface="Comfortaa"/>
+                <a:ea typeface="Comfortaa"/>
+                <a:cs typeface="Comfortaa"/>
+              </a:rPr>
+              <a:t>3.</a:t>
+            </a:r>
+            <a:endParaRPr sz="11000" b="1">
+              <a:solidFill>
+                <a:schemeClr val="tx1"/>
+              </a:solidFill>
+              <a:latin typeface="Comfortaa"/>
+              <a:cs typeface="Comfortaa"/>
+            </a:endParaRPr>
+          </a:p>
+        </p:txBody>
+      </p:sp>
+      <p:pic>
+        <p:nvPicPr>
+          <p:cNvPr id="1193661394" name=""/>
+          <p:cNvPicPr>
+            <a:picLocks noChangeAspect="1"/>
+          </p:cNvPicPr>
+          <p:nvPr/>
+        </p:nvPicPr>
+        <p:blipFill rotWithShape="1">
+          <a:blip r:embed="rId7"/>
+          <a:stretch/>
+        </p:blipFill>
+        <p:spPr bwMode="auto">
+          <a:xfrm flipH="0" flipV="0">
+            <a:off x="448105" y="3120085"/>
+            <a:ext cx="1928163" cy="1928163"/>
+          </a:xfrm>
+          <a:prstGeom prst="rect">
+            <a:avLst/>
+          </a:prstGeom>
+        </p:spPr>
+      </p:pic>
+      <p:sp>
+        <p:nvSpPr>
+          <p:cNvPr id="166945216" name=""/>
+          <p:cNvSpPr txBox="1"/>
+          <p:nvPr/>
+        </p:nvSpPr>
+        <p:spPr bwMode="auto">
+          <a:xfrm rot="0" flipH="0" flipV="0">
+            <a:off x="3262935" y="1196994"/>
+            <a:ext cx="8182013" cy="1493867"/>
+          </a:xfrm>
+          <a:prstGeom prst="rect">
+            <a:avLst/>
+          </a:prstGeom>
+          <a:noFill/>
+        </p:spPr>
+        <p:txBody>
+          <a:bodyPr vertOverflow="overflow" horzOverflow="overflow" vert="horz" wrap="square" lIns="91440" tIns="45720" rIns="91440" bIns="45720" numCol="1" spcCol="0" rtlCol="0" fromWordArt="0" anchor="ctr" anchorCtr="0" forceAA="0" upright="0" compatLnSpc="0">
+            <a:spAutoFit/>
+          </a:bodyPr>
+          <a:p>
+            <a:pPr algn="just">
+              <a:lnSpc>
+                <a:spcPct val="114999"/>
+              </a:lnSpc>
+              <a:defRPr/>
+            </a:pPr>
+            <a:r>
+              <a:rPr sz="2000" b="1">
+                <a:solidFill>
+                  <a:schemeClr val="bg1"/>
+                </a:solidFill>
+                <a:latin typeface="Comfortaa"/>
+                <a:ea typeface="Comfortaa"/>
+                <a:cs typeface="Comfortaa"/>
+              </a:rPr>
+              <a:t>CSRF adalah </a:t>
+            </a:r>
+            <a:r>
+              <a:rPr sz="2000" b="1">
+                <a:solidFill>
+                  <a:schemeClr val="bg1"/>
+                </a:solidFill>
+                <a:latin typeface="Comfortaa"/>
+                <a:cs typeface="Comfortaa"/>
+              </a:rPr>
+              <a:t>serangan dimana penyerang memanipulasi pengguna yang telah login</a:t>
+            </a:r>
+            <a:r>
+              <a:rPr sz="2000" b="1">
+                <a:solidFill>
+                  <a:schemeClr val="bg1"/>
+                </a:solidFill>
+                <a:latin typeface="Comfortaa"/>
+                <a:cs typeface="Comfortaa"/>
+              </a:rPr>
+              <a:t> untuk melakukan aksi yang tidak diinginkan pengguna seperti mengganti email atau password, transfer data, manipulasi akun, dan lainya.</a:t>
+            </a:r>
+            <a:endParaRPr sz="2000" b="1">
+              <a:solidFill>
+                <a:schemeClr val="bg1"/>
+              </a:solidFill>
+              <a:latin typeface="Comfortaa"/>
+              <a:cs typeface="Comfortaa"/>
+            </a:endParaRPr>
+          </a:p>
+        </p:txBody>
+      </p:sp>
+      <p:sp>
+        <p:nvSpPr>
+          <p:cNvPr id="1427363202" name=""/>
+          <p:cNvSpPr txBox="1"/>
+          <p:nvPr/>
+        </p:nvSpPr>
+        <p:spPr bwMode="auto">
+          <a:xfrm rot="0" flipH="0" flipV="0">
+            <a:off x="3262935" y="2761407"/>
+            <a:ext cx="8235545" cy="1143350"/>
+          </a:xfrm>
+          <a:prstGeom prst="rect">
+            <a:avLst/>
+          </a:prstGeom>
+          <a:noFill/>
+        </p:spPr>
+        <p:txBody>
+          <a:bodyPr vertOverflow="overflow" horzOverflow="overflow" vert="horz" wrap="square" lIns="91440" tIns="45720" rIns="91440" bIns="45720" numCol="1" spcCol="0" rtlCol="0" fromWordArt="0" anchor="ctr" anchorCtr="0" forceAA="0" upright="0" compatLnSpc="0">
+            <a:spAutoFit/>
+          </a:bodyPr>
+          <a:p>
+            <a:pPr algn="just">
+              <a:lnSpc>
+                <a:spcPct val="114999"/>
+              </a:lnSpc>
+              <a:defRPr/>
+            </a:pPr>
+            <a:r>
+              <a:rPr sz="2000" b="1">
+                <a:solidFill>
+                  <a:schemeClr val="bg1"/>
+                </a:solidFill>
+                <a:latin typeface="Comfortaa"/>
+                <a:ea typeface="Comfortaa"/>
+                <a:cs typeface="Comfortaa"/>
+              </a:rPr>
+              <a:t>Karena permintaan tersebut berasal dari pengguna sah yang sudah login, server akan mempercayai permintaan tersebut tanpa mengecek validitasnya </a:t>
+            </a:r>
+            <a:endParaRPr sz="2000" b="1">
+              <a:solidFill>
+                <a:schemeClr val="bg1"/>
+              </a:solidFill>
+              <a:latin typeface="Comfortaa"/>
+              <a:cs typeface="Comfortaa"/>
+            </a:endParaRPr>
+          </a:p>
+        </p:txBody>
+      </p:sp>
+      <p:sp>
+        <p:nvSpPr>
+          <p:cNvPr id="365955583" name=""/>
+          <p:cNvSpPr txBox="1"/>
+          <p:nvPr/>
+        </p:nvSpPr>
+        <p:spPr bwMode="auto">
+          <a:xfrm rot="0" flipH="0" flipV="0">
+            <a:off x="3302309" y="4093692"/>
+            <a:ext cx="8762499" cy="477368"/>
+          </a:xfrm>
+          <a:prstGeom prst="rect">
+            <a:avLst/>
+          </a:prstGeom>
+          <a:noFill/>
+        </p:spPr>
+        <p:txBody>
+          <a:bodyPr vertOverflow="overflow" horzOverflow="overflow" vert="horz" wrap="square" lIns="91440" tIns="45720" rIns="91440" bIns="45720" numCol="1" spcCol="0" rtlCol="0" fromWordArt="0" anchor="ctr" anchorCtr="0" forceAA="0" upright="0" compatLnSpc="0">
+            <a:spAutoFit/>
+          </a:bodyPr>
+          <a:p>
+            <a:pPr algn="just">
+              <a:lnSpc>
+                <a:spcPct val="114999"/>
+              </a:lnSpc>
+              <a:defRPr/>
+            </a:pPr>
+            <a:r>
+              <a:rPr sz="2200" b="1">
+                <a:solidFill>
+                  <a:schemeClr val="bg1"/>
+                </a:solidFill>
+                <a:latin typeface="Comfortaa"/>
+                <a:ea typeface="Comfortaa"/>
+                <a:cs typeface="Comfortaa"/>
+              </a:rPr>
+              <a:t>Contoh </a:t>
+            </a:r>
+            <a:r>
+              <a:rPr sz="2200" b="1">
+                <a:gradFill>
+                  <a:gsLst>
+                    <a:gs pos="0">
+                      <a:srgbClr val="00E3C5"/>
+                    </a:gs>
+                    <a:gs pos="100000">
+                      <a:srgbClr val="00B3EF"/>
+                    </a:gs>
+                  </a:gsLst>
+                  <a:lin ang="5400000" scaled="1"/>
+                </a:gradFill>
+                <a:latin typeface="Comfortaa"/>
+                <a:ea typeface="Comfortaa"/>
+                <a:cs typeface="Comfortaa"/>
+              </a:rPr>
+              <a:t>CSRF</a:t>
+            </a:r>
+            <a:r>
+              <a:rPr sz="2200" b="1">
+                <a:solidFill>
+                  <a:schemeClr val="bg1"/>
+                </a:solidFill>
+                <a:latin typeface="Comfortaa"/>
+                <a:cs typeface="Comfortaa"/>
+              </a:rPr>
+              <a:t> :</a:t>
+            </a:r>
+            <a:endParaRPr sz="2200" b="1">
+              <a:solidFill>
+                <a:schemeClr val="bg1"/>
+              </a:solidFill>
+              <a:latin typeface="Comfortaa"/>
+              <a:cs typeface="Comfortaa"/>
+            </a:endParaRPr>
+          </a:p>
+        </p:txBody>
+      </p:sp>
+      <p:sp>
+        <p:nvSpPr>
+          <p:cNvPr id="1463533690" name=""/>
+          <p:cNvSpPr txBox="1"/>
+          <p:nvPr/>
+        </p:nvSpPr>
+        <p:spPr bwMode="auto">
+          <a:xfrm rot="0" flipH="0" flipV="0">
+            <a:off x="3302309" y="4665482"/>
+            <a:ext cx="8785179" cy="442316"/>
+          </a:xfrm>
+          <a:prstGeom prst="rect">
+            <a:avLst/>
+          </a:prstGeom>
+          <a:noFill/>
+        </p:spPr>
+        <p:txBody>
+          <a:bodyPr vertOverflow="overflow" horzOverflow="overflow" vert="horz" wrap="square" lIns="91440" tIns="45720" rIns="91440" bIns="45720" numCol="1" spcCol="0" rtlCol="0" fromWordArt="0" anchor="ctr" anchorCtr="0" forceAA="0" upright="0" compatLnSpc="0">
+            <a:spAutoFit/>
+          </a:bodyPr>
+          <a:p>
+            <a:pPr algn="just">
+              <a:lnSpc>
+                <a:spcPct val="114999"/>
+              </a:lnSpc>
+              <a:defRPr/>
+            </a:pPr>
+            <a:r>
+              <a:rPr sz="2000" b="0">
+                <a:solidFill>
+                  <a:schemeClr val="bg1"/>
+                </a:solidFill>
+                <a:latin typeface="Inter"/>
+                <a:ea typeface="Inter"/>
+                <a:cs typeface="Inter"/>
+              </a:rPr>
+              <a:t>examp</a:t>
+            </a:r>
+            <a:r>
+              <a:rPr sz="2000" b="0">
+                <a:solidFill>
+                  <a:schemeClr val="bg1"/>
+                </a:solidFill>
+                <a:latin typeface="Inter"/>
+                <a:ea typeface="Inter"/>
+                <a:cs typeface="Inter"/>
+              </a:rPr>
+              <a:t>le.com/fundtransfer?acct=</a:t>
+            </a:r>
+            <a:r>
+              <a:rPr sz="2000" b="0">
+                <a:solidFill>
+                  <a:srgbClr val="FF0000"/>
+                </a:solidFill>
+                <a:latin typeface="Inter"/>
+                <a:ea typeface="Inter"/>
+                <a:cs typeface="Inter"/>
+              </a:rPr>
+              <a:t>223344</a:t>
+            </a:r>
+            <a:r>
+              <a:rPr sz="2000" b="0">
+                <a:solidFill>
+                  <a:schemeClr val="bg1"/>
+                </a:solidFill>
+                <a:latin typeface="Inter"/>
+                <a:ea typeface="Inter"/>
+                <a:cs typeface="Inter"/>
+              </a:rPr>
+              <a:t>&amp;amount=1000000</a:t>
+            </a:r>
+            <a:endParaRPr sz="2000" b="0">
+              <a:solidFill>
+                <a:schemeClr val="bg1"/>
+              </a:solidFill>
+              <a:latin typeface="Inter"/>
+              <a:cs typeface="Inter"/>
+            </a:endParaRPr>
+          </a:p>
+        </p:txBody>
+      </p:sp>
+      <p:sp>
+        <p:nvSpPr>
+          <p:cNvPr id="927656383" name=""/>
+          <p:cNvSpPr txBox="1"/>
+          <p:nvPr/>
+        </p:nvSpPr>
+        <p:spPr bwMode="auto">
+          <a:xfrm rot="0" flipH="0" flipV="0">
+            <a:off x="3302309" y="5222766"/>
+            <a:ext cx="8848179" cy="1143350"/>
+          </a:xfrm>
+          <a:prstGeom prst="rect">
+            <a:avLst/>
+          </a:prstGeom>
+          <a:noFill/>
+        </p:spPr>
+        <p:txBody>
+          <a:bodyPr vertOverflow="overflow" horzOverflow="overflow" vert="horz" wrap="square" lIns="91440" tIns="45720" rIns="91440" bIns="45720" numCol="1" spcCol="0" rtlCol="0" fromWordArt="0" anchor="ctr" anchorCtr="0" forceAA="0" upright="0" compatLnSpc="0">
+            <a:spAutoFit/>
+          </a:bodyPr>
+          <a:p>
+            <a:pPr algn="just">
+              <a:lnSpc>
+                <a:spcPct val="114999"/>
+              </a:lnSpc>
+              <a:defRPr/>
+            </a:pPr>
+            <a:r>
+              <a:rPr sz="2000" b="1">
+                <a:solidFill>
+                  <a:schemeClr val="bg1"/>
+                </a:solidFill>
+                <a:latin typeface="Comfortaa"/>
+                <a:ea typeface="Comfortaa"/>
+                <a:cs typeface="Comfortaa"/>
+              </a:rPr>
+              <a:t>pada link diatas, akun dengan nomor </a:t>
+            </a:r>
+            <a:r>
+              <a:rPr sz="2000" b="1">
+                <a:solidFill>
+                  <a:srgbClr val="FF0000"/>
+                </a:solidFill>
+                <a:latin typeface="Comfortaa"/>
+                <a:ea typeface="Comfortaa"/>
+                <a:cs typeface="Comfortaa"/>
+              </a:rPr>
+              <a:t>223344</a:t>
+            </a:r>
+            <a:r>
+              <a:rPr sz="2000" b="1">
+                <a:solidFill>
+                  <a:schemeClr val="bg1"/>
+                </a:solidFill>
+                <a:latin typeface="Comfortaa"/>
+                <a:cs typeface="Comfortaa"/>
+              </a:rPr>
+              <a:t> </a:t>
+            </a:r>
+            <a:r>
+              <a:rPr sz="2000" b="1">
+                <a:solidFill>
+                  <a:schemeClr val="bg1"/>
+                </a:solidFill>
+                <a:latin typeface="Comfortaa"/>
+                <a:cs typeface="Comfortaa"/>
+              </a:rPr>
+              <a:t>adalah akun milik penyerang, link ini kemudian dikirim ke korban melalui email/website phishing</a:t>
+            </a:r>
+            <a:endParaRPr sz="2000" b="1">
+              <a:solidFill>
+                <a:schemeClr val="bg1"/>
+              </a:solidFill>
+              <a:latin typeface="Comfortaa"/>
+              <a:cs typeface="Comfortaa"/>
+            </a:endParaRPr>
+          </a:p>
+        </p:txBody>
+      </p:sp>
+    </p:spTree>
+  </p:cSld>
+  <p:clrMapOvr>
+    <a:masterClrMapping/>
+  </p:clrMapOvr>
+  <mc:AlternateContent xmlns:mc="http://schemas.openxmlformats.org/markup-compatibility/2006">
+    <mc:Choice xmlns:p159="http://schemas.microsoft.com/office/powerpoint/2015/09/main" xmlns:p14="http://schemas.microsoft.com/office/powerpoint/2010/main" Requires="p159">
+      <p:transition spd="slow" p14:dur="1500" advClick="1">
+        <p159:morph option="byObject"/>
+      </p:transition>
+    </mc:Choice>
+    <mc:Fallback>
+      <p:transition spd="slow" advClick="1">
+        <p:fade/>
+      </p:transition>
+    </mc:Fallback>
+  </mc:AlternateContent>
+  <p:timing/>
+</p:sld>
+</file>
+
+<file path=ppt/slides/slide16.xml><?xml version="1.0" encoding="utf-8"?>
+<p:sld xmlns:a="http://schemas.openxmlformats.org/drawingml/2006/main" xmlns:r="http://schemas.openxmlformats.org/officeDocument/2006/relationships" xmlns:p="http://schemas.openxmlformats.org/presentationml/2006/main" xmlns:m="http://schemas.openxmlformats.org/officeDocument/2006/math" xmlns:w="http://schemas.openxmlformats.org/wordprocessingml/2006/main" xmlns:mc="http://schemas.openxmlformats.org/markup-compatibility/2006" showMasterPhAnim="0" showMasterSp="1" show="1">
+  <p:cSld name="">
+    <p:spTree>
+      <p:nvGrpSpPr>
+        <p:cNvPr id="1" name=""/>
+        <p:cNvGrpSpPr/>
+        <p:nvPr/>
+      </p:nvGrpSpPr>
+      <p:grpSpPr bwMode="auto">
+        <a:xfrm>
+          <a:off x="0" y="0"/>
+          <a:ext cx="0" cy="0"/>
+          <a:chOff x="0" y="0"/>
+          <a:chExt cx="0" cy="0"/>
+        </a:xfrm>
+      </p:grpSpPr>
+      <p:sp>
+        <p:nvSpPr>
+          <p:cNvPr id="420486326" name=""/>
+          <p:cNvSpPr/>
+          <p:nvPr/>
+        </p:nvSpPr>
+        <p:spPr bwMode="auto">
+          <a:xfrm rot="0" flipH="0" flipV="0">
+            <a:off x="-283797" y="-35470"/>
+            <a:ext cx="15125697" cy="6928947"/>
+          </a:xfrm>
+          <a:prstGeom prst="homePlate">
+            <a:avLst>
+              <a:gd name="adj" fmla="val 37965"/>
+            </a:avLst>
+          </a:prstGeom>
+          <a:gradFill>
+            <a:gsLst>
+              <a:gs pos="0">
+                <a:schemeClr val="tx1"/>
+              </a:gs>
+              <a:gs pos="100000">
+                <a:schemeClr val="tx1">
+                  <a:lumMod val="90000"/>
+                  <a:lumOff val="5000"/>
+                </a:schemeClr>
+              </a:gs>
+            </a:gsLst>
+            <a:lin ang="5400000" scaled="1"/>
+          </a:gradFill>
+          <a:ln w="12700" cap="flat" cmpd="sng" algn="ctr">
+            <a:noFill/>
+            <a:prstDash val="solid"/>
+            <a:miter lim="800000"/>
+          </a:ln>
+        </p:spPr>
+        <p:style>
+          <a:lnRef idx="2">
+            <a:schemeClr val="accent1">
+              <a:shade val="50000"/>
+            </a:schemeClr>
+          </a:lnRef>
+          <a:fillRef idx="1">
+            <a:schemeClr val="accent1"/>
+          </a:fillRef>
+          <a:effectRef idx="0">
+            <a:schemeClr val="accent1"/>
+          </a:effectRef>
+          <a:fontRef idx="minor">
+            <a:schemeClr val="lt1"/>
+          </a:fontRef>
+        </p:style>
+        <p:txBody>
+          <a:bodyPr anchor="ctr"/>
+          <a:p>
+            <a:pPr algn="ctr">
+              <a:defRPr/>
+            </a:pPr>
+            <a:endParaRPr>
+              <a:latin typeface="Comfortaa"/>
+              <a:cs typeface="Comfortaa"/>
+            </a:endParaRPr>
+          </a:p>
+        </p:txBody>
+      </p:sp>
+      <p:sp>
+        <p:nvSpPr>
+          <p:cNvPr id="800003396" name=""/>
+          <p:cNvSpPr/>
+          <p:nvPr/>
+        </p:nvSpPr>
+        <p:spPr bwMode="auto">
+          <a:xfrm rot="0" flipH="0" flipV="0">
+            <a:off x="-283797" y="-31745"/>
+            <a:ext cx="3278763" cy="6877594"/>
+          </a:xfrm>
+          <a:prstGeom prst="rect">
+            <a:avLst/>
+          </a:prstGeom>
+          <a:gradFill>
+            <a:gsLst>
+              <a:gs pos="0">
+                <a:srgbClr val="FF944C"/>
+              </a:gs>
+              <a:gs pos="100000">
+                <a:srgbClr val="FFFF00"/>
+              </a:gs>
+            </a:gsLst>
+            <a:lin ang="5400000" scaled="1"/>
+          </a:gradFill>
+          <a:ln w="12700" cap="flat" cmpd="sng" algn="ctr">
+            <a:noFill/>
+            <a:prstDash val="solid"/>
+            <a:miter lim="800000"/>
+          </a:ln>
+        </p:spPr>
+        <p:style>
+          <a:lnRef idx="2">
+            <a:schemeClr val="accent1">
+              <a:shade val="50000"/>
+            </a:schemeClr>
+          </a:lnRef>
+          <a:fillRef idx="1">
+            <a:schemeClr val="accent1"/>
+          </a:fillRef>
+          <a:effectRef idx="0">
+            <a:schemeClr val="accent1"/>
+          </a:effectRef>
+          <a:fontRef idx="minor">
+            <a:schemeClr val="lt1"/>
+          </a:fontRef>
+        </p:style>
+      </p:sp>
+      <p:sp>
+        <p:nvSpPr>
+          <p:cNvPr id="817556976" name=""/>
+          <p:cNvSpPr txBox="1"/>
+          <p:nvPr/>
+        </p:nvSpPr>
+        <p:spPr bwMode="auto">
+          <a:xfrm rot="0" flipH="0" flipV="0">
+            <a:off x="3262935" y="-17885148"/>
+            <a:ext cx="8387713" cy="722730"/>
+          </a:xfrm>
+          <a:prstGeom prst="rect">
+            <a:avLst/>
+          </a:prstGeom>
+          <a:noFill/>
+        </p:spPr>
+        <p:txBody>
+          <a:bodyPr vertOverflow="overflow" horzOverflow="overflow" vert="horz" wrap="square" lIns="91440" tIns="45720" rIns="91440" bIns="45720" numCol="1" spcCol="0" rtlCol="0" fromWordArt="0" anchor="ctr" anchorCtr="0" forceAA="0" upright="0" compatLnSpc="0">
+            <a:spAutoFit/>
+          </a:bodyPr>
+          <a:p>
+            <a:pPr algn="ctr">
+              <a:lnSpc>
+                <a:spcPct val="114999"/>
+              </a:lnSpc>
+              <a:defRPr/>
+            </a:pPr>
+            <a:r>
+              <a:rPr sz="3600" b="1">
+                <a:gradFill>
+                  <a:gsLst>
+                    <a:gs pos="0">
+                      <a:srgbClr val="00B0F0"/>
+                    </a:gs>
+                    <a:gs pos="100000">
+                      <a:srgbClr val="00F0E0"/>
+                    </a:gs>
+                  </a:gsLst>
+                  <a:lin ang="13500000" scaled="1"/>
+                </a:gradFill>
+                <a:latin typeface="Comfortaa"/>
+                <a:ea typeface="Comfortaa"/>
+                <a:cs typeface="Comfortaa"/>
+              </a:rPr>
+              <a:t>Cross-Site Forgery Request (CSRF)</a:t>
+            </a:r>
+            <a:endParaRPr sz="3600" b="1">
+              <a:gradFill>
+                <a:gsLst>
+                  <a:gs pos="0">
+                    <a:srgbClr val="00B0F0"/>
+                  </a:gs>
+                  <a:gs pos="100000">
+                    <a:srgbClr val="00F0E0"/>
+                  </a:gs>
+                </a:gsLst>
+                <a:lin ang="13500000" scaled="1"/>
+              </a:gradFill>
+              <a:latin typeface="Comfortaa"/>
+              <a:cs typeface="Comfortaa"/>
+            </a:endParaRPr>
+          </a:p>
+        </p:txBody>
+      </p:sp>
+      <p:sp>
+        <p:nvSpPr>
+          <p:cNvPr id="1163526261" name=""/>
+          <p:cNvSpPr txBox="1"/>
+          <p:nvPr/>
+        </p:nvSpPr>
+        <p:spPr bwMode="auto">
+          <a:xfrm rot="0" flipH="0" flipV="0">
+            <a:off x="512856" y="1408481"/>
+            <a:ext cx="1823672" cy="2019643"/>
+          </a:xfrm>
+          <a:prstGeom prst="rect">
+            <a:avLst/>
+          </a:prstGeom>
+          <a:noFill/>
+        </p:spPr>
+        <p:txBody>
+          <a:bodyPr vertOverflow="overflow" horzOverflow="overflow" vert="horz" wrap="square" lIns="91440" tIns="45720" rIns="91440" bIns="45720" numCol="1" spcCol="0" rtlCol="0" fromWordArt="0" anchor="ctr" anchorCtr="0" forceAA="0" upright="0" compatLnSpc="0">
+            <a:spAutoFit/>
+          </a:bodyPr>
+          <a:p>
+            <a:pPr algn="ctr">
+              <a:lnSpc>
+                <a:spcPct val="114999"/>
+              </a:lnSpc>
+              <a:defRPr/>
+            </a:pPr>
+            <a:r>
+              <a:rPr sz="11000" b="1">
+                <a:solidFill>
+                  <a:schemeClr val="tx1"/>
+                </a:solidFill>
+                <a:latin typeface="Comfortaa"/>
+                <a:ea typeface="Comfortaa"/>
+                <a:cs typeface="Comfortaa"/>
+              </a:rPr>
+              <a:t>3.</a:t>
+            </a:r>
+            <a:endParaRPr sz="11000" b="1">
+              <a:solidFill>
+                <a:schemeClr val="tx1"/>
+              </a:solidFill>
+              <a:latin typeface="Comfortaa"/>
+              <a:cs typeface="Comfortaa"/>
+            </a:endParaRPr>
+          </a:p>
+        </p:txBody>
+      </p:sp>
+      <p:pic>
+        <p:nvPicPr>
+          <p:cNvPr id="803940398" name=""/>
+          <p:cNvPicPr>
+            <a:picLocks noChangeAspect="1"/>
+          </p:cNvPicPr>
+          <p:nvPr/>
+        </p:nvPicPr>
+        <p:blipFill rotWithShape="1">
+          <a:blip r:embed="rId3"/>
+          <a:stretch/>
+        </p:blipFill>
+        <p:spPr bwMode="auto">
+          <a:xfrm flipH="0" flipV="0">
+            <a:off x="448105" y="3120085"/>
+            <a:ext cx="1928163" cy="1928163"/>
+          </a:xfrm>
+          <a:prstGeom prst="rect">
+            <a:avLst/>
+          </a:prstGeom>
+        </p:spPr>
+      </p:pic>
+      <p:sp>
+        <p:nvSpPr>
+          <p:cNvPr id="113069424" name=""/>
+          <p:cNvSpPr txBox="1"/>
+          <p:nvPr/>
+        </p:nvSpPr>
+        <p:spPr bwMode="auto">
+          <a:xfrm rot="0" flipH="0" flipV="0">
+            <a:off x="3262935" y="-13471504"/>
+            <a:ext cx="8182013" cy="1493867"/>
+          </a:xfrm>
+          <a:prstGeom prst="rect">
+            <a:avLst/>
+          </a:prstGeom>
+          <a:noFill/>
+        </p:spPr>
+        <p:txBody>
+          <a:bodyPr vertOverflow="overflow" horzOverflow="overflow" vert="horz" wrap="square" lIns="91440" tIns="45720" rIns="91440" bIns="45720" numCol="1" spcCol="0" rtlCol="0" fromWordArt="0" anchor="ctr" anchorCtr="0" forceAA="0" upright="0" compatLnSpc="0">
+            <a:spAutoFit/>
+          </a:bodyPr>
+          <a:p>
+            <a:pPr algn="just">
+              <a:lnSpc>
+                <a:spcPct val="114999"/>
+              </a:lnSpc>
+              <a:defRPr/>
+            </a:pPr>
+            <a:r>
+              <a:rPr sz="2000" b="1">
+                <a:solidFill>
+                  <a:schemeClr val="bg1"/>
+                </a:solidFill>
+                <a:latin typeface="Comfortaa"/>
+                <a:ea typeface="Comfortaa"/>
+                <a:cs typeface="Comfortaa"/>
+              </a:rPr>
+              <a:t>CSRF adalah </a:t>
+            </a:r>
+            <a:r>
+              <a:rPr sz="2000" b="1">
+                <a:solidFill>
+                  <a:schemeClr val="bg1"/>
+                </a:solidFill>
+                <a:latin typeface="Comfortaa"/>
+                <a:cs typeface="Comfortaa"/>
+              </a:rPr>
+              <a:t>serangan dimana penyerang memanipulasi pengguna yang telah login</a:t>
+            </a:r>
+            <a:r>
+              <a:rPr sz="2000" b="1">
+                <a:solidFill>
+                  <a:schemeClr val="bg1"/>
+                </a:solidFill>
+                <a:latin typeface="Comfortaa"/>
+                <a:cs typeface="Comfortaa"/>
+              </a:rPr>
+              <a:t> untuk melakukan aksi yang tidak diinginkan pengguna seperti mengganti email atau password, transfer data, manipulasi akun, dan lainya.</a:t>
+            </a:r>
+            <a:endParaRPr sz="2000" b="1">
+              <a:solidFill>
+                <a:schemeClr val="bg1"/>
+              </a:solidFill>
+              <a:latin typeface="Comfortaa"/>
+              <a:cs typeface="Comfortaa"/>
+            </a:endParaRPr>
+          </a:p>
+        </p:txBody>
+      </p:sp>
+      <p:sp>
+        <p:nvSpPr>
+          <p:cNvPr id="432231798" name=""/>
+          <p:cNvSpPr txBox="1"/>
+          <p:nvPr/>
+        </p:nvSpPr>
+        <p:spPr bwMode="auto">
+          <a:xfrm rot="0" flipH="0" flipV="0">
+            <a:off x="3262935" y="-9716342"/>
+            <a:ext cx="8235545" cy="1143350"/>
+          </a:xfrm>
+          <a:prstGeom prst="rect">
+            <a:avLst/>
+          </a:prstGeom>
+          <a:noFill/>
+        </p:spPr>
+        <p:txBody>
+          <a:bodyPr vertOverflow="overflow" horzOverflow="overflow" vert="horz" wrap="square" lIns="91440" tIns="45720" rIns="91440" bIns="45720" numCol="1" spcCol="0" rtlCol="0" fromWordArt="0" anchor="ctr" anchorCtr="0" forceAA="0" upright="0" compatLnSpc="0">
+            <a:spAutoFit/>
+          </a:bodyPr>
+          <a:p>
+            <a:pPr algn="just">
+              <a:lnSpc>
+                <a:spcPct val="114999"/>
+              </a:lnSpc>
+              <a:defRPr/>
+            </a:pPr>
+            <a:r>
+              <a:rPr sz="2000" b="1">
+                <a:solidFill>
+                  <a:schemeClr val="bg1"/>
+                </a:solidFill>
+                <a:latin typeface="Comfortaa"/>
+                <a:ea typeface="Comfortaa"/>
+                <a:cs typeface="Comfortaa"/>
+              </a:rPr>
+              <a:t>Karena permintaan tersebut berasal dari pengguna sah yang sudah login, server akan mempercayai permintaan tersebut tanpa mengecek validitasnya </a:t>
+            </a:r>
+            <a:endParaRPr sz="2000" b="1">
+              <a:solidFill>
+                <a:schemeClr val="bg1"/>
+              </a:solidFill>
+              <a:latin typeface="Comfortaa"/>
+              <a:cs typeface="Comfortaa"/>
+            </a:endParaRPr>
+          </a:p>
+        </p:txBody>
+      </p:sp>
+      <p:sp>
+        <p:nvSpPr>
+          <p:cNvPr id="609743943" name=""/>
+          <p:cNvSpPr txBox="1"/>
+          <p:nvPr/>
+        </p:nvSpPr>
+        <p:spPr bwMode="auto">
+          <a:xfrm rot="0" flipH="0" flipV="0">
+            <a:off x="3302309" y="-6098057"/>
+            <a:ext cx="8762499" cy="477368"/>
+          </a:xfrm>
+          <a:prstGeom prst="rect">
+            <a:avLst/>
+          </a:prstGeom>
+          <a:noFill/>
+        </p:spPr>
+        <p:txBody>
+          <a:bodyPr vertOverflow="overflow" horzOverflow="overflow" vert="horz" wrap="square" lIns="91440" tIns="45720" rIns="91440" bIns="45720" numCol="1" spcCol="0" rtlCol="0" fromWordArt="0" anchor="ctr" anchorCtr="0" forceAA="0" upright="0" compatLnSpc="0">
+            <a:spAutoFit/>
+          </a:bodyPr>
+          <a:p>
+            <a:pPr algn="just">
+              <a:lnSpc>
+                <a:spcPct val="114999"/>
+              </a:lnSpc>
+              <a:defRPr/>
+            </a:pPr>
+            <a:r>
+              <a:rPr sz="2200" b="1">
+                <a:solidFill>
+                  <a:schemeClr val="bg1"/>
+                </a:solidFill>
+                <a:latin typeface="Comfortaa"/>
+                <a:ea typeface="Comfortaa"/>
+                <a:cs typeface="Comfortaa"/>
+              </a:rPr>
+              <a:t>Contoh </a:t>
+            </a:r>
+            <a:r>
+              <a:rPr sz="2200" b="1">
+                <a:gradFill>
+                  <a:gsLst>
+                    <a:gs pos="0">
+                      <a:srgbClr val="00E3C5"/>
+                    </a:gs>
+                    <a:gs pos="100000">
+                      <a:srgbClr val="00B3EF"/>
+                    </a:gs>
+                  </a:gsLst>
+                  <a:lin ang="5400000" scaled="1"/>
+                </a:gradFill>
+                <a:latin typeface="Comfortaa"/>
+                <a:ea typeface="Comfortaa"/>
+                <a:cs typeface="Comfortaa"/>
+              </a:rPr>
+              <a:t>CSRF</a:t>
+            </a:r>
+            <a:r>
+              <a:rPr sz="2200" b="1">
+                <a:solidFill>
+                  <a:schemeClr val="bg1"/>
+                </a:solidFill>
+                <a:latin typeface="Comfortaa"/>
+                <a:cs typeface="Comfortaa"/>
+              </a:rPr>
+              <a:t> :</a:t>
+            </a:r>
+            <a:endParaRPr sz="2200" b="1">
+              <a:solidFill>
+                <a:schemeClr val="bg1"/>
+              </a:solidFill>
+              <a:latin typeface="Comfortaa"/>
+              <a:cs typeface="Comfortaa"/>
+            </a:endParaRPr>
+          </a:p>
+        </p:txBody>
+      </p:sp>
+      <p:sp>
+        <p:nvSpPr>
+          <p:cNvPr id="1849520086" name=""/>
+          <p:cNvSpPr txBox="1"/>
+          <p:nvPr/>
+        </p:nvSpPr>
+        <p:spPr bwMode="auto">
+          <a:xfrm rot="0" flipH="0" flipV="0">
+            <a:off x="3302309" y="-3907016"/>
+            <a:ext cx="8785179" cy="442316"/>
+          </a:xfrm>
+          <a:prstGeom prst="rect">
+            <a:avLst/>
+          </a:prstGeom>
+          <a:noFill/>
+        </p:spPr>
+        <p:txBody>
+          <a:bodyPr vertOverflow="overflow" horzOverflow="overflow" vert="horz" wrap="square" lIns="91440" tIns="45720" rIns="91440" bIns="45720" numCol="1" spcCol="0" rtlCol="0" fromWordArt="0" anchor="ctr" anchorCtr="0" forceAA="0" upright="0" compatLnSpc="0">
+            <a:spAutoFit/>
+          </a:bodyPr>
+          <a:p>
+            <a:pPr algn="just">
+              <a:lnSpc>
+                <a:spcPct val="114999"/>
+              </a:lnSpc>
+              <a:defRPr/>
+            </a:pPr>
+            <a:r>
+              <a:rPr sz="2000" b="0">
+                <a:solidFill>
+                  <a:schemeClr val="bg1"/>
+                </a:solidFill>
+                <a:latin typeface="Inter"/>
+                <a:ea typeface="Inter"/>
+                <a:cs typeface="Inter"/>
+              </a:rPr>
+              <a:t>examp</a:t>
+            </a:r>
+            <a:r>
+              <a:rPr sz="2000" b="0">
+                <a:solidFill>
+                  <a:schemeClr val="bg1"/>
+                </a:solidFill>
+                <a:latin typeface="Inter"/>
+                <a:ea typeface="Inter"/>
+                <a:cs typeface="Inter"/>
+              </a:rPr>
+              <a:t>le.com/fundtransfer?acct=</a:t>
+            </a:r>
+            <a:r>
+              <a:rPr sz="2000" b="0">
+                <a:solidFill>
+                  <a:srgbClr val="FF0000"/>
+                </a:solidFill>
+                <a:latin typeface="Inter"/>
+                <a:ea typeface="Inter"/>
+                <a:cs typeface="Inter"/>
+              </a:rPr>
+              <a:t>223344</a:t>
+            </a:r>
+            <a:r>
+              <a:rPr sz="2000" b="0">
+                <a:solidFill>
+                  <a:schemeClr val="bg1"/>
+                </a:solidFill>
+                <a:latin typeface="Inter"/>
+                <a:ea typeface="Inter"/>
+                <a:cs typeface="Inter"/>
+              </a:rPr>
+              <a:t>&amp;amount=1000000</a:t>
+            </a:r>
+            <a:endParaRPr sz="2000" b="0">
+              <a:solidFill>
+                <a:schemeClr val="bg1"/>
+              </a:solidFill>
+              <a:latin typeface="Inter"/>
+              <a:cs typeface="Inter"/>
+            </a:endParaRPr>
+          </a:p>
+        </p:txBody>
+      </p:sp>
+      <p:sp>
+        <p:nvSpPr>
+          <p:cNvPr id="1094480464" name=""/>
+          <p:cNvSpPr txBox="1"/>
+          <p:nvPr/>
+        </p:nvSpPr>
+        <p:spPr bwMode="auto">
+          <a:xfrm rot="0" flipH="0" flipV="0">
+            <a:off x="3302309" y="-2016233"/>
+            <a:ext cx="8848179" cy="1143350"/>
+          </a:xfrm>
+          <a:prstGeom prst="rect">
+            <a:avLst/>
+          </a:prstGeom>
+          <a:noFill/>
+        </p:spPr>
+        <p:txBody>
+          <a:bodyPr vertOverflow="overflow" horzOverflow="overflow" vert="horz" wrap="square" lIns="91440" tIns="45720" rIns="91440" bIns="45720" numCol="1" spcCol="0" rtlCol="0" fromWordArt="0" anchor="ctr" anchorCtr="0" forceAA="0" upright="0" compatLnSpc="0">
+            <a:spAutoFit/>
+          </a:bodyPr>
+          <a:p>
+            <a:pPr algn="just">
+              <a:lnSpc>
+                <a:spcPct val="114999"/>
+              </a:lnSpc>
+              <a:defRPr/>
+            </a:pPr>
+            <a:r>
+              <a:rPr sz="2000" b="1">
+                <a:solidFill>
+                  <a:schemeClr val="bg1"/>
+                </a:solidFill>
+                <a:latin typeface="Comfortaa"/>
+                <a:ea typeface="Comfortaa"/>
+                <a:cs typeface="Comfortaa"/>
+              </a:rPr>
+              <a:t>pada link diatas, akun dengan nomor </a:t>
+            </a:r>
+            <a:r>
+              <a:rPr sz="2000" b="1">
+                <a:solidFill>
+                  <a:srgbClr val="FF0000"/>
+                </a:solidFill>
+                <a:latin typeface="Comfortaa"/>
+                <a:ea typeface="Comfortaa"/>
+                <a:cs typeface="Comfortaa"/>
+              </a:rPr>
+              <a:t>223344</a:t>
+            </a:r>
+            <a:r>
+              <a:rPr sz="2000" b="1">
+                <a:solidFill>
+                  <a:schemeClr val="bg1"/>
+                </a:solidFill>
+                <a:latin typeface="Comfortaa"/>
+                <a:cs typeface="Comfortaa"/>
+              </a:rPr>
+              <a:t> </a:t>
+            </a:r>
+            <a:r>
+              <a:rPr sz="2000" b="1">
+                <a:solidFill>
+                  <a:schemeClr val="bg1"/>
+                </a:solidFill>
+                <a:latin typeface="Comfortaa"/>
+                <a:cs typeface="Comfortaa"/>
+              </a:rPr>
+              <a:t>adalah akun milik penyerang, link ini kemudian dikirim ke korban melalui email/website phishing</a:t>
+            </a:r>
+            <a:endParaRPr sz="2000" b="1">
+              <a:solidFill>
+                <a:schemeClr val="bg1"/>
+              </a:solidFill>
+              <a:latin typeface="Comfortaa"/>
+              <a:cs typeface="Comfortaa"/>
+            </a:endParaRPr>
+          </a:p>
+        </p:txBody>
+      </p:sp>
     </p:spTree>
   </p:cSld>
   <p:clrMapOvr>
@@ -12375,7 +14081,7 @@
       </p:grpSpPr>
       <p:pic>
         <p:nvPicPr>
-          <p:cNvPr id="1791477059" name=""/>
+          <p:cNvPr id="424899121" name=""/>
           <p:cNvPicPr>
             <a:picLocks noChangeAspect="1"/>
           </p:cNvPicPr>
@@ -12397,7 +14103,7 @@
       </p:pic>
       <p:sp>
         <p:nvSpPr>
-          <p:cNvPr id="1415711004" name=""/>
+          <p:cNvPr id="2109160743" name=""/>
           <p:cNvSpPr/>
           <p:nvPr/>
         </p:nvSpPr>
@@ -12453,7 +14159,7 @@
       </p:sp>
       <p:sp>
         <p:nvSpPr>
-          <p:cNvPr id="549400132" name=""/>
+          <p:cNvPr id="640672341" name=""/>
           <p:cNvSpPr txBox="1"/>
           <p:nvPr/>
         </p:nvSpPr>
@@ -12530,7 +14236,7 @@
       </p:sp>
       <p:sp>
         <p:nvSpPr>
-          <p:cNvPr id="844046963" name=""/>
+          <p:cNvPr id="505229758" name=""/>
           <p:cNvSpPr txBox="1"/>
           <p:nvPr/>
         </p:nvSpPr>
@@ -12693,7 +14399,7 @@
       </p:sp>
       <p:sp>
         <p:nvSpPr>
-          <p:cNvPr id="834476062" name=""/>
+          <p:cNvPr id="2020041386" name=""/>
           <p:cNvSpPr/>
           <p:nvPr/>
         </p:nvSpPr>
@@ -12732,7 +14438,7 @@
       </p:sp>
       <p:sp>
         <p:nvSpPr>
-          <p:cNvPr id="1441058832" name=""/>
+          <p:cNvPr id="706391094" name=""/>
           <p:cNvSpPr/>
           <p:nvPr/>
         </p:nvSpPr>
@@ -12797,7 +14503,7 @@
       </p:sp>
       <p:sp>
         <p:nvSpPr>
-          <p:cNvPr id="252208220" name=""/>
+          <p:cNvPr id="1420823429" name=""/>
           <p:cNvSpPr txBox="1"/>
           <p:nvPr/>
         </p:nvSpPr>
@@ -12864,7 +14570,7 @@
       </p:sp>
       <p:sp>
         <p:nvSpPr>
-          <p:cNvPr id="598147756" name=""/>
+          <p:cNvPr id="1151335426" name=""/>
           <p:cNvSpPr txBox="1"/>
           <p:nvPr/>
         </p:nvSpPr>
@@ -12947,7 +14653,7 @@
       </p:sp>
       <p:sp>
         <p:nvSpPr>
-          <p:cNvPr id="1886951192" name=""/>
+          <p:cNvPr id="579451186" name=""/>
           <p:cNvSpPr txBox="1"/>
           <p:nvPr/>
         </p:nvSpPr>
@@ -13011,7 +14717,7 @@
       </p:sp>
       <p:sp>
         <p:nvSpPr>
-          <p:cNvPr id="1485039660" name=""/>
+          <p:cNvPr id="1088334076" name=""/>
           <p:cNvSpPr/>
           <p:nvPr/>
         </p:nvSpPr>
@@ -13059,7 +14765,7 @@
       </p:sp>
       <p:pic>
         <p:nvPicPr>
-          <p:cNvPr id="581766600" name=""/>
+          <p:cNvPr id="580550722" name=""/>
           <p:cNvPicPr>
             <a:picLocks noChangeAspect="1"/>
           </p:cNvPicPr>
@@ -13081,7 +14787,7 @@
       </p:pic>
       <p:sp>
         <p:nvSpPr>
-          <p:cNvPr id="75979847" name=""/>
+          <p:cNvPr id="1648940330" name=""/>
           <p:cNvSpPr txBox="1"/>
           <p:nvPr/>
         </p:nvSpPr>
@@ -13151,7 +14857,7 @@
       </p:sp>
       <p:sp>
         <p:nvSpPr>
-          <p:cNvPr id="62036726" name=""/>
+          <p:cNvPr id="1650387030" name=""/>
           <p:cNvSpPr txBox="1"/>
           <p:nvPr/>
         </p:nvSpPr>
@@ -13234,7 +14940,7 @@
       </p:sp>
       <p:sp>
         <p:nvSpPr>
-          <p:cNvPr id="2110952118" name=""/>
+          <p:cNvPr id="1724762795" name=""/>
           <p:cNvSpPr txBox="1"/>
           <p:nvPr/>
         </p:nvSpPr>
@@ -13317,7 +15023,7 @@
       </p:sp>
       <p:pic>
         <p:nvPicPr>
-          <p:cNvPr id="1768094481" name=""/>
+          <p:cNvPr id="1332256442" name=""/>
           <p:cNvPicPr>
             <a:picLocks noChangeAspect="1"/>
           </p:cNvPicPr>
@@ -13383,7 +15089,7 @@
       </p:grpSpPr>
       <p:sp>
         <p:nvSpPr>
-          <p:cNvPr id="1049844281" name=""/>
+          <p:cNvPr id="1716736457" name=""/>
           <p:cNvSpPr/>
           <p:nvPr/>
         </p:nvSpPr>
@@ -13448,7 +15154,7 @@
       </p:sp>
       <p:sp>
         <p:nvSpPr>
-          <p:cNvPr id="2135413612" name=""/>
+          <p:cNvPr id="1260089651" name=""/>
           <p:cNvSpPr/>
           <p:nvPr/>
         </p:nvSpPr>
@@ -13487,7 +15193,7 @@
       </p:sp>
       <p:sp>
         <p:nvSpPr>
-          <p:cNvPr id="991738175" name=""/>
+          <p:cNvPr id="129705667" name=""/>
           <p:cNvSpPr txBox="1"/>
           <p:nvPr/>
         </p:nvSpPr>
@@ -13554,7 +15260,7 @@
       </p:sp>
       <p:sp>
         <p:nvSpPr>
-          <p:cNvPr id="1316774217" name=""/>
+          <p:cNvPr id="1399079870" name=""/>
           <p:cNvSpPr txBox="1"/>
           <p:nvPr/>
         </p:nvSpPr>
@@ -13637,7 +15343,7 @@
       </p:sp>
       <p:sp>
         <p:nvSpPr>
-          <p:cNvPr id="851828153" name=""/>
+          <p:cNvPr id="1994736699" name=""/>
           <p:cNvSpPr txBox="1"/>
           <p:nvPr/>
         </p:nvSpPr>
@@ -13701,7 +15407,7 @@
       </p:sp>
       <p:sp>
         <p:nvSpPr>
-          <p:cNvPr id="1032311742" name=""/>
+          <p:cNvPr id="1870827052" name=""/>
           <p:cNvSpPr/>
           <p:nvPr/>
         </p:nvSpPr>
@@ -13749,7 +15455,7 @@
       </p:sp>
       <p:pic>
         <p:nvPicPr>
-          <p:cNvPr id="1859259480" name=""/>
+          <p:cNvPr id="609768707" name=""/>
           <p:cNvPicPr>
             <a:picLocks noChangeAspect="1"/>
           </p:cNvPicPr>
@@ -13771,7 +15477,7 @@
       </p:pic>
       <p:sp>
         <p:nvSpPr>
-          <p:cNvPr id="1961563287" name=""/>
+          <p:cNvPr id="1503005690" name=""/>
           <p:cNvSpPr txBox="1"/>
           <p:nvPr/>
         </p:nvSpPr>
@@ -13841,7 +15547,7 @@
       </p:sp>
       <p:sp>
         <p:nvSpPr>
-          <p:cNvPr id="1652640631" name=""/>
+          <p:cNvPr id="1577109243" name=""/>
           <p:cNvSpPr txBox="1"/>
           <p:nvPr/>
         </p:nvSpPr>
@@ -13924,7 +15630,7 @@
       </p:sp>
       <p:sp>
         <p:nvSpPr>
-          <p:cNvPr id="855432344" name=""/>
+          <p:cNvPr id="1470699083" name=""/>
           <p:cNvSpPr txBox="1"/>
           <p:nvPr/>
         </p:nvSpPr>
@@ -14007,7 +15713,7 @@
       </p:sp>
       <p:pic>
         <p:nvPicPr>
-          <p:cNvPr id="734938831" name=""/>
+          <p:cNvPr id="2034791145" name=""/>
           <p:cNvPicPr>
             <a:picLocks noChangeAspect="1"/>
           </p:cNvPicPr>
@@ -14069,7 +15775,7 @@
       </p:grpSpPr>
       <p:sp>
         <p:nvSpPr>
-          <p:cNvPr id="880529400" name=""/>
+          <p:cNvPr id="375422415" name=""/>
           <p:cNvSpPr/>
           <p:nvPr/>
         </p:nvSpPr>
@@ -14108,7 +15814,7 @@
       </p:sp>
       <p:sp>
         <p:nvSpPr>
-          <p:cNvPr id="135856885" name=""/>
+          <p:cNvPr id="1660401856" name=""/>
           <p:cNvSpPr/>
           <p:nvPr/>
         </p:nvSpPr>
@@ -14173,7 +15879,7 @@
       </p:sp>
       <p:sp>
         <p:nvSpPr>
-          <p:cNvPr id="881245713" name=""/>
+          <p:cNvPr id="1745022082" name=""/>
           <p:cNvSpPr txBox="1"/>
           <p:nvPr/>
         </p:nvSpPr>
@@ -14240,7 +15946,7 @@
       </p:sp>
       <p:sp>
         <p:nvSpPr>
-          <p:cNvPr id="1713895192" name=""/>
+          <p:cNvPr id="2020395158" name=""/>
           <p:cNvSpPr txBox="1"/>
           <p:nvPr/>
         </p:nvSpPr>
@@ -14323,7 +16029,7 @@
       </p:sp>
       <p:sp>
         <p:nvSpPr>
-          <p:cNvPr id="121288430" name=""/>
+          <p:cNvPr id="1775672713" name=""/>
           <p:cNvSpPr txBox="1"/>
           <p:nvPr/>
         </p:nvSpPr>
@@ -14387,7 +16093,7 @@
       </p:sp>
       <p:sp>
         <p:nvSpPr>
-          <p:cNvPr id="1004837860" name=""/>
+          <p:cNvPr id="1602227665" name=""/>
           <p:cNvSpPr/>
           <p:nvPr/>
         </p:nvSpPr>
@@ -14435,7 +16141,7 @@
       </p:sp>
       <p:sp>
         <p:nvSpPr>
-          <p:cNvPr id="121556220" name=""/>
+          <p:cNvPr id="1306151625" name=""/>
           <p:cNvSpPr txBox="1"/>
           <p:nvPr/>
         </p:nvSpPr>
@@ -14505,7 +16211,7 @@
       </p:sp>
       <p:sp>
         <p:nvSpPr>
-          <p:cNvPr id="494757322" name=""/>
+          <p:cNvPr id="1857742771" name=""/>
           <p:cNvSpPr txBox="1"/>
           <p:nvPr/>
         </p:nvSpPr>
@@ -14588,7 +16294,7 @@
       </p:sp>
       <p:sp>
         <p:nvSpPr>
-          <p:cNvPr id="1788858421" name=""/>
+          <p:cNvPr id="121764844" name=""/>
           <p:cNvSpPr txBox="1"/>
           <p:nvPr/>
         </p:nvSpPr>
@@ -14671,7 +16377,7 @@
       </p:sp>
       <p:pic>
         <p:nvPicPr>
-          <p:cNvPr id="1235181766" name=""/>
+          <p:cNvPr id="987704485" name=""/>
           <p:cNvPicPr>
             <a:picLocks noChangeAspect="1"/>
           </p:cNvPicPr>
@@ -14693,7 +16399,7 @@
       </p:pic>
       <p:sp>
         <p:nvSpPr>
-          <p:cNvPr id="491946065" name=""/>
+          <p:cNvPr id="1779283911" name=""/>
           <p:cNvSpPr txBox="1"/>
           <p:nvPr/>
         </p:nvSpPr>
@@ -14807,7 +16513,7 @@
       </p:sp>
       <p:pic>
         <p:nvPicPr>
-          <p:cNvPr id="1676991122" name=""/>
+          <p:cNvPr id="1399320995" name=""/>
           <p:cNvPicPr>
             <a:picLocks noChangeAspect="1"/>
           </p:cNvPicPr>
@@ -14829,7 +16535,7 @@
       </p:pic>
       <p:pic>
         <p:nvPicPr>
-          <p:cNvPr id="1693464482" name=""/>
+          <p:cNvPr id="283030564" name=""/>
           <p:cNvPicPr>
             <a:picLocks noChangeAspect="1"/>
           </p:cNvPicPr>
@@ -14851,7 +16557,7 @@
       </p:pic>
       <p:pic>
         <p:nvPicPr>
-          <p:cNvPr id="1255373953" name=""/>
+          <p:cNvPr id="970301266" name=""/>
           <p:cNvPicPr>
             <a:picLocks noChangeAspect="1"/>
           </p:cNvPicPr>
@@ -14873,7 +16579,7 @@
       </p:pic>
       <p:pic>
         <p:nvPicPr>
-          <p:cNvPr id="1462342941" name=""/>
+          <p:cNvPr id="72976567" name=""/>
           <p:cNvPicPr>
             <a:picLocks noChangeAspect="1"/>
           </p:cNvPicPr>
@@ -14895,7 +16601,7 @@
       </p:pic>
       <p:pic>
         <p:nvPicPr>
-          <p:cNvPr id="374261756" name=""/>
+          <p:cNvPr id="1852220736" name=""/>
           <p:cNvPicPr>
             <a:picLocks noChangeAspect="1"/>
           </p:cNvPicPr>
@@ -14917,7 +16623,7 @@
       </p:pic>
       <p:pic>
         <p:nvPicPr>
-          <p:cNvPr id="612054640" name=""/>
+          <p:cNvPr id="730418664" name=""/>
           <p:cNvPicPr>
             <a:picLocks noChangeAspect="1"/>
           </p:cNvPicPr>
@@ -14939,7 +16645,7 @@
       </p:pic>
       <p:pic>
         <p:nvPicPr>
-          <p:cNvPr id="415459605" name=""/>
+          <p:cNvPr id="2093591712" name=""/>
           <p:cNvPicPr>
             <a:picLocks noChangeAspect="1"/>
           </p:cNvPicPr>
@@ -14998,7 +16704,7 @@
       </p:grpSpPr>
       <p:sp>
         <p:nvSpPr>
-          <p:cNvPr id="1910228357" name=""/>
+          <p:cNvPr id="801208103" name=""/>
           <p:cNvSpPr/>
           <p:nvPr/>
         </p:nvSpPr>
@@ -15037,7 +16743,7 @@
       </p:sp>
       <p:sp>
         <p:nvSpPr>
-          <p:cNvPr id="1412487518" name=""/>
+          <p:cNvPr id="219515027" name=""/>
           <p:cNvSpPr/>
           <p:nvPr/>
         </p:nvSpPr>
@@ -15102,7 +16808,7 @@
       </p:sp>
       <p:sp>
         <p:nvSpPr>
-          <p:cNvPr id="97348731" name=""/>
+          <p:cNvPr id="1717138186" name=""/>
           <p:cNvSpPr/>
           <p:nvPr/>
         </p:nvSpPr>
@@ -15150,7 +16856,7 @@
       </p:sp>
       <p:sp>
         <p:nvSpPr>
-          <p:cNvPr id="1297580233" name=""/>
+          <p:cNvPr id="329135438" name=""/>
           <p:cNvSpPr txBox="1"/>
           <p:nvPr/>
         </p:nvSpPr>
@@ -15220,7 +16926,7 @@
       </p:sp>
       <p:sp>
         <p:nvSpPr>
-          <p:cNvPr id="521529707" name=""/>
+          <p:cNvPr id="668082095" name=""/>
           <p:cNvSpPr txBox="1"/>
           <p:nvPr/>
         </p:nvSpPr>
@@ -15303,7 +17009,7 @@
       </p:sp>
       <p:sp>
         <p:nvSpPr>
-          <p:cNvPr id="306409844" name=""/>
+          <p:cNvPr id="1210763661" name=""/>
           <p:cNvSpPr txBox="1"/>
           <p:nvPr/>
         </p:nvSpPr>
@@ -15386,7 +17092,7 @@
       </p:sp>
       <p:pic>
         <p:nvPicPr>
-          <p:cNvPr id="21846112" name=""/>
+          <p:cNvPr id="838534536" name=""/>
           <p:cNvPicPr>
             <a:picLocks noChangeAspect="1"/>
           </p:cNvPicPr>
@@ -15408,7 +17114,7 @@
       </p:pic>
       <p:pic>
         <p:nvPicPr>
-          <p:cNvPr id="1757325660" name=""/>
+          <p:cNvPr id="2133895861" name=""/>
           <p:cNvPicPr>
             <a:picLocks noChangeAspect="1"/>
           </p:cNvPicPr>
@@ -15430,7 +17136,7 @@
       </p:pic>
       <p:sp>
         <p:nvSpPr>
-          <p:cNvPr id="732249693" name=""/>
+          <p:cNvPr id="157583048" name=""/>
           <p:cNvSpPr txBox="1"/>
           <p:nvPr/>
         </p:nvSpPr>
@@ -15544,7 +17250,7 @@
       </p:sp>
       <p:pic>
         <p:nvPicPr>
-          <p:cNvPr id="982581468" name=""/>
+          <p:cNvPr id="707505844" name=""/>
           <p:cNvPicPr>
             <a:picLocks noChangeAspect="1"/>
           </p:cNvPicPr>
@@ -15566,7 +17272,7 @@
       </p:pic>
       <p:pic>
         <p:nvPicPr>
-          <p:cNvPr id="370681419" name=""/>
+          <p:cNvPr id="1848149416" name=""/>
           <p:cNvPicPr>
             <a:picLocks noChangeAspect="1"/>
           </p:cNvPicPr>
@@ -15588,7 +17294,7 @@
       </p:pic>
       <p:pic>
         <p:nvPicPr>
-          <p:cNvPr id="332176484" name=""/>
+          <p:cNvPr id="1169058508" name=""/>
           <p:cNvPicPr>
             <a:picLocks noChangeAspect="1"/>
           </p:cNvPicPr>
@@ -15610,7 +17316,7 @@
       </p:pic>
       <p:pic>
         <p:nvPicPr>
-          <p:cNvPr id="427418550" name=""/>
+          <p:cNvPr id="754488065" name=""/>
           <p:cNvPicPr>
             <a:picLocks noChangeAspect="1"/>
           </p:cNvPicPr>
@@ -15632,7 +17338,7 @@
       </p:pic>
       <p:pic>
         <p:nvPicPr>
-          <p:cNvPr id="449916880" name=""/>
+          <p:cNvPr id="2024865246" name=""/>
           <p:cNvPicPr>
             <a:picLocks noChangeAspect="1"/>
           </p:cNvPicPr>
@@ -15692,7 +17398,7 @@
       </p:grpSpPr>
       <p:sp>
         <p:nvSpPr>
-          <p:cNvPr id="2138083010" name=""/>
+          <p:cNvPr id="1289521520" name=""/>
           <p:cNvSpPr/>
           <p:nvPr/>
         </p:nvSpPr>
@@ -15731,7 +17437,7 @@
       </p:sp>
       <p:sp>
         <p:nvSpPr>
-          <p:cNvPr id="1012537789" name=""/>
+          <p:cNvPr id="1584331813" name=""/>
           <p:cNvSpPr/>
           <p:nvPr/>
         </p:nvSpPr>
@@ -15796,7 +17502,7 @@
       </p:sp>
       <p:sp>
         <p:nvSpPr>
-          <p:cNvPr id="1596905027" name=""/>
+          <p:cNvPr id="477896392" name=""/>
           <p:cNvSpPr/>
           <p:nvPr/>
         </p:nvSpPr>
@@ -15844,7 +17550,7 @@
       </p:sp>
       <p:sp>
         <p:nvSpPr>
-          <p:cNvPr id="103747248" name=""/>
+          <p:cNvPr id="589684374" name=""/>
           <p:cNvSpPr txBox="1"/>
           <p:nvPr/>
         </p:nvSpPr>
@@ -15914,7 +17620,7 @@
       </p:sp>
       <p:sp>
         <p:nvSpPr>
-          <p:cNvPr id="909254424" name=""/>
+          <p:cNvPr id="200421671" name=""/>
           <p:cNvSpPr txBox="1"/>
           <p:nvPr/>
         </p:nvSpPr>
@@ -15997,7 +17703,7 @@
       </p:sp>
       <p:sp>
         <p:nvSpPr>
-          <p:cNvPr id="1652347994" name=""/>
+          <p:cNvPr id="913126868" name=""/>
           <p:cNvSpPr txBox="1"/>
           <p:nvPr/>
         </p:nvSpPr>
@@ -16080,7 +17786,7 @@
       </p:sp>
       <p:pic>
         <p:nvPicPr>
-          <p:cNvPr id="351551837" name=""/>
+          <p:cNvPr id="962661462" name=""/>
           <p:cNvPicPr>
             <a:picLocks noChangeAspect="1"/>
           </p:cNvPicPr>
@@ -16102,7 +17808,7 @@
       </p:pic>
       <p:pic>
         <p:nvPicPr>
-          <p:cNvPr id="362439220" name=""/>
+          <p:cNvPr id="319040156" name=""/>
           <p:cNvPicPr>
             <a:picLocks noChangeAspect="1"/>
           </p:cNvPicPr>
@@ -16124,7 +17830,7 @@
       </p:pic>
       <p:sp>
         <p:nvSpPr>
-          <p:cNvPr id="1982708459" name=""/>
+          <p:cNvPr id="925433886" name=""/>
           <p:cNvSpPr txBox="1"/>
           <p:nvPr/>
         </p:nvSpPr>
@@ -16238,7 +17944,7 @@
       </p:sp>
       <p:pic>
         <p:nvPicPr>
-          <p:cNvPr id="2053425791" name=""/>
+          <p:cNvPr id="1910945291" name=""/>
           <p:cNvPicPr>
             <a:picLocks noChangeAspect="1"/>
           </p:cNvPicPr>
@@ -16260,7 +17966,7 @@
       </p:pic>
       <p:pic>
         <p:nvPicPr>
-          <p:cNvPr id="155207545" name=""/>
+          <p:cNvPr id="1538813484" name=""/>
           <p:cNvPicPr>
             <a:picLocks noChangeAspect="1"/>
           </p:cNvPicPr>
@@ -16282,7 +17988,7 @@
       </p:pic>
       <p:pic>
         <p:nvPicPr>
-          <p:cNvPr id="736445876" name=""/>
+          <p:cNvPr id="881691429" name=""/>
           <p:cNvPicPr>
             <a:picLocks noChangeAspect="1"/>
           </p:cNvPicPr>
@@ -16304,7 +18010,7 @@
       </p:pic>
       <p:pic>
         <p:nvPicPr>
-          <p:cNvPr id="808537990" name=""/>
+          <p:cNvPr id="1178824115" name=""/>
           <p:cNvPicPr>
             <a:picLocks noChangeAspect="1"/>
           </p:cNvPicPr>
@@ -16326,7 +18032,7 @@
       </p:pic>
       <p:pic>
         <p:nvPicPr>
-          <p:cNvPr id="524160555" name=""/>
+          <p:cNvPr id="1601533034" name=""/>
           <p:cNvPicPr>
             <a:picLocks noChangeAspect="1"/>
           </p:cNvPicPr>
@@ -16348,7 +18054,7 @@
       </p:pic>
       <p:sp>
         <p:nvSpPr>
-          <p:cNvPr id="63762273" name=""/>
+          <p:cNvPr id="1204517906" name=""/>
           <p:cNvSpPr txBox="1"/>
           <p:nvPr/>
         </p:nvSpPr>
@@ -16412,14 +18118,78 @@
       </p:sp>
       <p:sp>
         <p:nvSpPr>
-          <p:cNvPr id="484257328" name=""/>
+          <p:cNvPr id="163480529" name=""/>
           <p:cNvSpPr txBox="1"/>
           <p:nvPr/>
         </p:nvSpPr>
         <p:spPr bwMode="auto">
           <a:xfrm rot="0" flipH="0" flipV="0">
-            <a:off x="4505555" y="2727133"/>
-            <a:ext cx="8240765" cy="582523"/>
+            <a:off x="4505554" y="2727672"/>
+            <a:ext cx="8241844" cy="582523"/>
+          </a:xfrm>
+          <a:prstGeom prst="rect">
+            <a:avLst/>
+          </a:prstGeom>
+          <a:noFill/>
+        </p:spPr>
+        <p:txBody>
+          <a:bodyPr vertOverflow="overflow" horzOverflow="overflow" vert="horz" wrap="square" lIns="91440" tIns="45720" rIns="91440" bIns="45720" numCol="1" spcCol="0" rtlCol="0" fromWordArt="0" anchor="ctr" anchorCtr="0" forceAA="0" upright="0" compatLnSpc="0">
+            <a:spAutoFit/>
+          </a:bodyPr>
+          <a:p>
+            <a:pPr algn="just">
+              <a:lnSpc>
+                <a:spcPct val="114999"/>
+              </a:lnSpc>
+              <a:defRPr/>
+            </a:pPr>
+            <a:r>
+              <a:rPr sz="2800" b="1">
+                <a:gradFill>
+                  <a:gsLst>
+                    <a:gs pos="0">
+                      <a:srgbClr val="2F5EFD"/>
+                    </a:gs>
+                    <a:gs pos="100000">
+                      <a:srgbClr val="00B0F0"/>
+                    </a:gs>
+                  </a:gsLst>
+                  <a:lin ang="13500000" scaled="1"/>
+                </a:gradFill>
+                <a:latin typeface="Comfortaa"/>
+                <a:ea typeface="Comfortaa"/>
+                <a:cs typeface="Comfortaa"/>
+              </a:rPr>
+              <a:t>SQL Injection</a:t>
+            </a:r>
+            <a:endParaRPr sz="2800" b="1">
+              <a:gradFill>
+                <a:gsLst>
+                  <a:gs pos="0">
+                    <a:srgbClr val="2F5EFD"/>
+                  </a:gs>
+                  <a:gs pos="100000">
+                    <a:srgbClr val="00B0F0"/>
+                  </a:gs>
+                </a:gsLst>
+                <a:lin ang="13500000" scaled="1"/>
+              </a:gradFill>
+              <a:latin typeface="Comfortaa"/>
+              <a:cs typeface="Comfortaa"/>
+            </a:endParaRPr>
+          </a:p>
+        </p:txBody>
+      </p:sp>
+      <p:sp>
+        <p:nvSpPr>
+          <p:cNvPr id="1899173738" name=""/>
+          <p:cNvSpPr txBox="1"/>
+          <p:nvPr/>
+        </p:nvSpPr>
+        <p:spPr bwMode="auto">
+          <a:xfrm rot="0" flipH="0" flipV="0">
+            <a:off x="4499435" y="3761503"/>
+            <a:ext cx="8253005" cy="582523"/>
           </a:xfrm>
           <a:prstGeom prst="rect">
             <a:avLst/>
@@ -16454,7 +18224,7 @@
                 <a:ea typeface="Comfortaa"/>
                 <a:cs typeface="Comfortaa"/>
               </a:rPr>
-              <a:t>SQL Injection</a:t>
+              <a:t>Cross-Site Forgery Request (CSRF)</a:t>
             </a:r>
             <a:endParaRPr sz="2800" b="1">
               <a:gradFill>
@@ -16476,71 +18246,7 @@
       </p:sp>
       <p:sp>
         <p:nvSpPr>
-          <p:cNvPr id="833213142" name=""/>
-          <p:cNvSpPr txBox="1"/>
-          <p:nvPr/>
-        </p:nvSpPr>
-        <p:spPr bwMode="auto">
-          <a:xfrm rot="0" flipH="0" flipV="0">
-            <a:off x="4499435" y="3761503"/>
-            <a:ext cx="8253005" cy="582523"/>
-          </a:xfrm>
-          <a:prstGeom prst="rect">
-            <a:avLst/>
-          </a:prstGeom>
-          <a:noFill/>
-        </p:spPr>
-        <p:txBody>
-          <a:bodyPr vertOverflow="overflow" horzOverflow="overflow" vert="horz" wrap="square" lIns="91440" tIns="45720" rIns="91440" bIns="45720" numCol="1" spcCol="0" rtlCol="0" fromWordArt="0" anchor="ctr" anchorCtr="0" forceAA="0" upright="0" compatLnSpc="0">
-            <a:spAutoFit/>
-          </a:bodyPr>
-          <a:p>
-            <a:pPr algn="just">
-              <a:lnSpc>
-                <a:spcPct val="114999"/>
-              </a:lnSpc>
-              <a:defRPr/>
-            </a:pPr>
-            <a:r>
-              <a:rPr sz="2800" b="1">
-                <a:gradFill>
-                  <a:gsLst>
-                    <a:gs pos="0">
-                      <a:srgbClr val="00B0F0"/>
-                    </a:gs>
-                    <a:gs pos="100000">
-                      <a:srgbClr val="00F0E0"/>
-                    </a:gs>
-                  </a:gsLst>
-                  <a:lin ang="13500000" scaled="1"/>
-                </a:gradFill>
-                <a:latin typeface="Comfortaa"/>
-                <a:ea typeface="Comfortaa"/>
-                <a:cs typeface="Comfortaa"/>
-              </a:rPr>
-              <a:t>Cross-Site Forgery Request (CSRF)</a:t>
-            </a:r>
-            <a:endParaRPr sz="2800" b="1">
-              <a:gradFill>
-                <a:gsLst>
-                  <a:gs pos="0">
-                    <a:srgbClr val="00B0F0"/>
-                  </a:gs>
-                  <a:gs pos="100000">
-                    <a:srgbClr val="00F0E0"/>
-                  </a:gs>
-                </a:gsLst>
-                <a:lin ang="13500000" scaled="1"/>
-              </a:gradFill>
-              <a:latin typeface="Comfortaa"/>
-              <a:cs typeface="Comfortaa"/>
-            </a:endParaRPr>
-          </a:p>
-        </p:txBody>
-      </p:sp>
-      <p:sp>
-        <p:nvSpPr>
-          <p:cNvPr id="90927309" name=""/>
+          <p:cNvPr id="19958112" name=""/>
           <p:cNvSpPr txBox="1"/>
           <p:nvPr/>
         </p:nvSpPr>
@@ -16604,7 +18310,7 @@
       </p:sp>
       <p:sp>
         <p:nvSpPr>
-          <p:cNvPr id="1555538542" name=""/>
+          <p:cNvPr id="358748513" name=""/>
           <p:cNvSpPr txBox="1"/>
           <p:nvPr/>
         </p:nvSpPr>
@@ -16716,7 +18422,7 @@
                                           </p:stCondLst>
                                         </p:cTn>
                                         <p:tgtEl>
-                                          <p:spTgt spid="63762273"/>
+                                          <p:spTgt spid="1204517906"/>
                                         </p:tgtEl>
                                         <p:attrNameLst>
                                           <p:attrName>style.visibility</p:attrName>
@@ -16730,7 +18436,7 @@
                                       <p:cBhvr>
                                         <p:cTn id="18" dur="500"/>
                                         <p:tgtEl>
-                                          <p:spTgt spid="63762273"/>
+                                          <p:spTgt spid="1204517906"/>
                                         </p:tgtEl>
                                       </p:cBhvr>
                                     </p:animEffect>
@@ -16751,7 +18457,7 @@
                                           </p:stCondLst>
                                         </p:cTn>
                                         <p:tgtEl>
-                                          <p:spTgt spid="484257328"/>
+                                          <p:spTgt spid="163480529"/>
                                         </p:tgtEl>
                                         <p:attrNameLst>
                                           <p:attrName>style.visibility</p:attrName>
@@ -16765,7 +18471,7 @@
                                       <p:cBhvr>
                                         <p:cTn id="15" dur="500"/>
                                         <p:tgtEl>
-                                          <p:spTgt spid="484257328"/>
+                                          <p:spTgt spid="163480529"/>
                                         </p:tgtEl>
                                       </p:cBhvr>
                                     </p:animEffect>
@@ -16786,7 +18492,7 @@
                                           </p:stCondLst>
                                         </p:cTn>
                                         <p:tgtEl>
-                                          <p:spTgt spid="833213142"/>
+                                          <p:spTgt spid="1899173738"/>
                                         </p:tgtEl>
                                         <p:attrNameLst>
                                           <p:attrName>style.visibility</p:attrName>
@@ -16800,7 +18506,7 @@
                                       <p:cBhvr>
                                         <p:cTn id="12" dur="500"/>
                                         <p:tgtEl>
-                                          <p:spTgt spid="833213142"/>
+                                          <p:spTgt spid="1899173738"/>
                                         </p:tgtEl>
                                       </p:cBhvr>
                                     </p:animEffect>
@@ -16821,7 +18527,7 @@
                                           </p:stCondLst>
                                         </p:cTn>
                                         <p:tgtEl>
-                                          <p:spTgt spid="90927309"/>
+                                          <p:spTgt spid="19958112"/>
                                         </p:tgtEl>
                                         <p:attrNameLst>
                                           <p:attrName>style.visibility</p:attrName>
@@ -16835,7 +18541,7 @@
                                       <p:cBhvr>
                                         <p:cTn id="9" dur="500"/>
                                         <p:tgtEl>
-                                          <p:spTgt spid="90927309"/>
+                                          <p:spTgt spid="19958112"/>
                                         </p:tgtEl>
                                       </p:cBhvr>
                                     </p:animEffect>
@@ -16856,7 +18562,7 @@
                                           </p:stCondLst>
                                         </p:cTn>
                                         <p:tgtEl>
-                                          <p:spTgt spid="1555538542"/>
+                                          <p:spTgt spid="358748513"/>
                                         </p:tgtEl>
                                         <p:attrNameLst>
                                           <p:attrName>style.visibility</p:attrName>
@@ -16870,7 +18576,7 @@
                                       <p:cBhvr>
                                         <p:cTn id="6" dur="500"/>
                                         <p:tgtEl>
-                                          <p:spTgt spid="1555538542"/>
+                                          <p:spTgt spid="358748513"/>
                                         </p:tgtEl>
                                       </p:cBhvr>
                                     </p:animEffect>
@@ -16927,7 +18633,7 @@
       </p:grpSpPr>
       <p:sp>
         <p:nvSpPr>
-          <p:cNvPr id="1643657122" name=""/>
+          <p:cNvPr id="57618131" name=""/>
           <p:cNvSpPr/>
           <p:nvPr/>
         </p:nvSpPr>
@@ -16966,7 +18672,7 @@
       </p:sp>
       <p:sp>
         <p:nvSpPr>
-          <p:cNvPr id="902842525" name=""/>
+          <p:cNvPr id="242875535" name=""/>
           <p:cNvSpPr/>
           <p:nvPr/>
         </p:nvSpPr>
@@ -17031,7 +18737,7 @@
       </p:sp>
       <p:sp>
         <p:nvSpPr>
-          <p:cNvPr id="282869102" name=""/>
+          <p:cNvPr id="324694758" name=""/>
           <p:cNvSpPr/>
           <p:nvPr/>
         </p:nvSpPr>
@@ -17079,7 +18785,7 @@
       </p:sp>
       <p:pic>
         <p:nvPicPr>
-          <p:cNvPr id="1281461337" name=""/>
+          <p:cNvPr id="889528657" name=""/>
           <p:cNvPicPr>
             <a:picLocks noChangeAspect="1"/>
           </p:cNvPicPr>
@@ -17101,7 +18807,7 @@
       </p:pic>
       <p:sp>
         <p:nvSpPr>
-          <p:cNvPr id="688369727" name=""/>
+          <p:cNvPr id="2129148411" name=""/>
           <p:cNvSpPr txBox="1"/>
           <p:nvPr/>
         </p:nvSpPr>
@@ -17215,7 +18921,7 @@
       </p:sp>
       <p:pic>
         <p:nvPicPr>
-          <p:cNvPr id="1033571039" name=""/>
+          <p:cNvPr id="1281247402" name=""/>
           <p:cNvPicPr>
             <a:picLocks noChangeAspect="1"/>
           </p:cNvPicPr>
@@ -17237,7 +18943,7 @@
       </p:pic>
       <p:pic>
         <p:nvPicPr>
-          <p:cNvPr id="639040870" name=""/>
+          <p:cNvPr id="1239881261" name=""/>
           <p:cNvPicPr>
             <a:picLocks noChangeAspect="1"/>
           </p:cNvPicPr>
@@ -17259,7 +18965,7 @@
       </p:pic>
       <p:pic>
         <p:nvPicPr>
-          <p:cNvPr id="1120604486" name=""/>
+          <p:cNvPr id="1095531001" name=""/>
           <p:cNvPicPr>
             <a:picLocks noChangeAspect="1"/>
           </p:cNvPicPr>
@@ -17281,7 +18987,7 @@
       </p:pic>
       <p:pic>
         <p:nvPicPr>
-          <p:cNvPr id="1398183741" name=""/>
+          <p:cNvPr id="1240140945" name=""/>
           <p:cNvPicPr>
             <a:picLocks noChangeAspect="1"/>
           </p:cNvPicPr>
@@ -17303,7 +19009,7 @@
       </p:pic>
       <p:pic>
         <p:nvPicPr>
-          <p:cNvPr id="561249958" name=""/>
+          <p:cNvPr id="516809337" name=""/>
           <p:cNvPicPr>
             <a:picLocks noChangeAspect="1"/>
           </p:cNvPicPr>
@@ -17325,7 +19031,7 @@
       </p:pic>
       <p:sp>
         <p:nvSpPr>
-          <p:cNvPr id="1043276818" name=""/>
+          <p:cNvPr id="328751371" name=""/>
           <p:cNvSpPr txBox="1"/>
           <p:nvPr/>
         </p:nvSpPr>
@@ -17389,14 +19095,78 @@
       </p:sp>
       <p:sp>
         <p:nvSpPr>
-          <p:cNvPr id="206535246" name=""/>
+          <p:cNvPr id="204677549" name=""/>
           <p:cNvSpPr txBox="1"/>
           <p:nvPr/>
         </p:nvSpPr>
         <p:spPr bwMode="auto">
           <a:xfrm rot="0" flipH="0" flipV="0">
-            <a:off x="4505555" y="2727133"/>
-            <a:ext cx="8240765" cy="582523"/>
+            <a:off x="4505554" y="2728212"/>
+            <a:ext cx="8242924" cy="582523"/>
+          </a:xfrm>
+          <a:prstGeom prst="rect">
+            <a:avLst/>
+          </a:prstGeom>
+          <a:noFill/>
+        </p:spPr>
+        <p:txBody>
+          <a:bodyPr vertOverflow="overflow" horzOverflow="overflow" vert="horz" wrap="square" lIns="91440" tIns="45720" rIns="91440" bIns="45720" numCol="1" spcCol="0" rtlCol="0" fromWordArt="0" anchor="ctr" anchorCtr="0" forceAA="0" upright="0" compatLnSpc="0">
+            <a:spAutoFit/>
+          </a:bodyPr>
+          <a:p>
+            <a:pPr algn="just">
+              <a:lnSpc>
+                <a:spcPct val="114999"/>
+              </a:lnSpc>
+              <a:defRPr/>
+            </a:pPr>
+            <a:r>
+              <a:rPr sz="2800" b="1">
+                <a:gradFill>
+                  <a:gsLst>
+                    <a:gs pos="0">
+                      <a:srgbClr val="2F5EFD"/>
+                    </a:gs>
+                    <a:gs pos="100000">
+                      <a:srgbClr val="00B0F0"/>
+                    </a:gs>
+                  </a:gsLst>
+                  <a:lin ang="13500000" scaled="1"/>
+                </a:gradFill>
+                <a:latin typeface="Comfortaa"/>
+                <a:ea typeface="Comfortaa"/>
+                <a:cs typeface="Comfortaa"/>
+              </a:rPr>
+              <a:t>SQL Injection</a:t>
+            </a:r>
+            <a:endParaRPr sz="2800" b="1">
+              <a:gradFill>
+                <a:gsLst>
+                  <a:gs pos="0">
+                    <a:srgbClr val="2F5EFD"/>
+                  </a:gs>
+                  <a:gs pos="100000">
+                    <a:srgbClr val="00B0F0"/>
+                  </a:gs>
+                </a:gsLst>
+                <a:lin ang="13500000" scaled="1"/>
+              </a:gradFill>
+              <a:latin typeface="Comfortaa"/>
+              <a:cs typeface="Comfortaa"/>
+            </a:endParaRPr>
+          </a:p>
+        </p:txBody>
+      </p:sp>
+      <p:sp>
+        <p:nvSpPr>
+          <p:cNvPr id="540324260" name=""/>
+          <p:cNvSpPr txBox="1"/>
+          <p:nvPr/>
+        </p:nvSpPr>
+        <p:spPr bwMode="auto">
+          <a:xfrm rot="0" flipH="0" flipV="0">
+            <a:off x="4499435" y="3761503"/>
+            <a:ext cx="8253005" cy="582523"/>
           </a:xfrm>
           <a:prstGeom prst="rect">
             <a:avLst/>
@@ -17431,7 +19201,7 @@
                 <a:ea typeface="Comfortaa"/>
                 <a:cs typeface="Comfortaa"/>
               </a:rPr>
-              <a:t>SQL Injection</a:t>
+              <a:t>Cross-Site Forgery Request (CSRF)</a:t>
             </a:r>
             <a:endParaRPr sz="2800" b="1">
               <a:gradFill>
@@ -17453,71 +19223,7 @@
       </p:sp>
       <p:sp>
         <p:nvSpPr>
-          <p:cNvPr id="1973085187" name=""/>
-          <p:cNvSpPr txBox="1"/>
-          <p:nvPr/>
-        </p:nvSpPr>
-        <p:spPr bwMode="auto">
-          <a:xfrm rot="0" flipH="0" flipV="0">
-            <a:off x="4499435" y="3761503"/>
-            <a:ext cx="8253005" cy="582523"/>
-          </a:xfrm>
-          <a:prstGeom prst="rect">
-            <a:avLst/>
-          </a:prstGeom>
-          <a:noFill/>
-        </p:spPr>
-        <p:txBody>
-          <a:bodyPr vertOverflow="overflow" horzOverflow="overflow" vert="horz" wrap="square" lIns="91440" tIns="45720" rIns="91440" bIns="45720" numCol="1" spcCol="0" rtlCol="0" fromWordArt="0" anchor="ctr" anchorCtr="0" forceAA="0" upright="0" compatLnSpc="0">
-            <a:spAutoFit/>
-          </a:bodyPr>
-          <a:p>
-            <a:pPr algn="just">
-              <a:lnSpc>
-                <a:spcPct val="114999"/>
-              </a:lnSpc>
-              <a:defRPr/>
-            </a:pPr>
-            <a:r>
-              <a:rPr sz="2800" b="1">
-                <a:gradFill>
-                  <a:gsLst>
-                    <a:gs pos="0">
-                      <a:srgbClr val="00B0F0"/>
-                    </a:gs>
-                    <a:gs pos="100000">
-                      <a:srgbClr val="00F0E0"/>
-                    </a:gs>
-                  </a:gsLst>
-                  <a:lin ang="13500000" scaled="1"/>
-                </a:gradFill>
-                <a:latin typeface="Comfortaa"/>
-                <a:ea typeface="Comfortaa"/>
-                <a:cs typeface="Comfortaa"/>
-              </a:rPr>
-              <a:t>Cross-Site Forgery Request (CSRF)</a:t>
-            </a:r>
-            <a:endParaRPr sz="2800" b="1">
-              <a:gradFill>
-                <a:gsLst>
-                  <a:gs pos="0">
-                    <a:srgbClr val="00B0F0"/>
-                  </a:gs>
-                  <a:gs pos="100000">
-                    <a:srgbClr val="00F0E0"/>
-                  </a:gs>
-                </a:gsLst>
-                <a:lin ang="13500000" scaled="1"/>
-              </a:gradFill>
-              <a:latin typeface="Comfortaa"/>
-              <a:cs typeface="Comfortaa"/>
-            </a:endParaRPr>
-          </a:p>
-        </p:txBody>
-      </p:sp>
-      <p:sp>
-        <p:nvSpPr>
-          <p:cNvPr id="702305824" name=""/>
+          <p:cNvPr id="2063436749" name=""/>
           <p:cNvSpPr txBox="1"/>
           <p:nvPr/>
         </p:nvSpPr>
@@ -17581,7 +19287,7 @@
       </p:sp>
       <p:sp>
         <p:nvSpPr>
-          <p:cNvPr id="1174267514" name=""/>
+          <p:cNvPr id="549045966" name=""/>
           <p:cNvSpPr txBox="1"/>
           <p:nvPr/>
         </p:nvSpPr>
@@ -17645,7 +19351,7 @@
       </p:sp>
       <p:pic>
         <p:nvPicPr>
-          <p:cNvPr id="39109039" name=""/>
+          <p:cNvPr id="1888183830" name=""/>
           <p:cNvPicPr>
             <a:picLocks noChangeAspect="1"/>
           </p:cNvPicPr>
@@ -17667,7 +19373,7 @@
       </p:pic>
       <p:sp>
         <p:nvSpPr>
-          <p:cNvPr id="1156621488" name=""/>
+          <p:cNvPr id="1958875408" name=""/>
           <p:cNvSpPr txBox="1"/>
           <p:nvPr/>
         </p:nvSpPr>
@@ -17715,7 +19421,7 @@
       </p:sp>
       <p:sp>
         <p:nvSpPr>
-          <p:cNvPr id="550448677" name=""/>
+          <p:cNvPr id="1662312184" name=""/>
           <p:cNvSpPr txBox="1"/>
           <p:nvPr/>
         </p:nvSpPr>
@@ -17779,7 +19485,7 @@
       </p:sp>
       <p:sp>
         <p:nvSpPr>
-          <p:cNvPr id="1751151897" name=""/>
+          <p:cNvPr id="1688981913" name=""/>
           <p:cNvSpPr txBox="1"/>
           <p:nvPr/>
         </p:nvSpPr>
@@ -17838,7 +19544,7 @@
       </p:sp>
       <p:sp>
         <p:nvSpPr>
-          <p:cNvPr id="1131929178" name=""/>
+          <p:cNvPr id="1977342014" name=""/>
           <p:cNvSpPr txBox="1"/>
           <p:nvPr/>
         </p:nvSpPr>
@@ -17927,7 +19633,7 @@
       </p:sp>
       <p:sp>
         <p:nvSpPr>
-          <p:cNvPr id="1084084598" name=""/>
+          <p:cNvPr id="1772213998" name=""/>
           <p:cNvSpPr txBox="1"/>
           <p:nvPr/>
         </p:nvSpPr>
@@ -17972,7 +19678,7 @@
       </p:sp>
       <p:sp>
         <p:nvSpPr>
-          <p:cNvPr id="331940302" name=""/>
+          <p:cNvPr id="872253631" name=""/>
           <p:cNvSpPr/>
           <p:nvPr/>
         </p:nvSpPr>
@@ -18038,7 +19744,7 @@
       </p:sp>
       <p:sp>
         <p:nvSpPr>
-          <p:cNvPr id="380578415" name=""/>
+          <p:cNvPr id="1184094568" name=""/>
           <p:cNvSpPr txBox="1"/>
           <p:nvPr/>
         </p:nvSpPr>
@@ -18127,7 +19833,7 @@
       </p:sp>
       <p:sp>
         <p:nvSpPr>
-          <p:cNvPr id="1751430812" name=""/>
+          <p:cNvPr id="656698408" name=""/>
           <p:cNvSpPr txBox="1"/>
           <p:nvPr/>
         </p:nvSpPr>
@@ -18206,7 +19912,7 @@
       </p:grpSpPr>
       <p:sp>
         <p:nvSpPr>
-          <p:cNvPr id="593946156" name=""/>
+          <p:cNvPr id="915373092" name=""/>
           <p:cNvSpPr/>
           <p:nvPr/>
         </p:nvSpPr>
@@ -18245,7 +19951,7 @@
       </p:sp>
       <p:sp>
         <p:nvSpPr>
-          <p:cNvPr id="1847983411" name=""/>
+          <p:cNvPr id="1366035121" name=""/>
           <p:cNvSpPr/>
           <p:nvPr/>
         </p:nvSpPr>
@@ -18310,7 +20016,7 @@
       </p:sp>
       <p:sp>
         <p:nvSpPr>
-          <p:cNvPr id="1478763269" name=""/>
+          <p:cNvPr id="1517275201" name=""/>
           <p:cNvSpPr/>
           <p:nvPr/>
         </p:nvSpPr>
@@ -18358,7 +20064,7 @@
       </p:sp>
       <p:pic>
         <p:nvPicPr>
-          <p:cNvPr id="1825342619" name=""/>
+          <p:cNvPr id="1646787831" name=""/>
           <p:cNvPicPr>
             <a:picLocks noChangeAspect="1"/>
           </p:cNvPicPr>
@@ -18380,7 +20086,7 @@
       </p:pic>
       <p:sp>
         <p:nvSpPr>
-          <p:cNvPr id="1243932785" name=""/>
+          <p:cNvPr id="1021286345" name=""/>
           <p:cNvSpPr txBox="1"/>
           <p:nvPr/>
         </p:nvSpPr>
@@ -18494,7 +20200,7 @@
       </p:sp>
       <p:pic>
         <p:nvPicPr>
-          <p:cNvPr id="1157585121" name=""/>
+          <p:cNvPr id="2037815695" name=""/>
           <p:cNvPicPr>
             <a:picLocks noChangeAspect="1"/>
           </p:cNvPicPr>
@@ -18516,7 +20222,7 @@
       </p:pic>
       <p:pic>
         <p:nvPicPr>
-          <p:cNvPr id="1481208924" name=""/>
+          <p:cNvPr id="2096640111" name=""/>
           <p:cNvPicPr>
             <a:picLocks noChangeAspect="1"/>
           </p:cNvPicPr>
@@ -18538,7 +20244,7 @@
       </p:pic>
       <p:pic>
         <p:nvPicPr>
-          <p:cNvPr id="755588959" name=""/>
+          <p:cNvPr id="2018088087" name=""/>
           <p:cNvPicPr>
             <a:picLocks noChangeAspect="1"/>
           </p:cNvPicPr>
@@ -18560,7 +20266,7 @@
       </p:pic>
       <p:pic>
         <p:nvPicPr>
-          <p:cNvPr id="381551478" name=""/>
+          <p:cNvPr id="1633973113" name=""/>
           <p:cNvPicPr>
             <a:picLocks noChangeAspect="1"/>
           </p:cNvPicPr>
@@ -18582,7 +20288,7 @@
       </p:pic>
       <p:pic>
         <p:nvPicPr>
-          <p:cNvPr id="1740446906" name=""/>
+          <p:cNvPr id="1928753523" name=""/>
           <p:cNvPicPr>
             <a:picLocks noChangeAspect="1"/>
           </p:cNvPicPr>
@@ -18604,7 +20310,7 @@
       </p:pic>
       <p:sp>
         <p:nvSpPr>
-          <p:cNvPr id="568719878" name=""/>
+          <p:cNvPr id="869010842" name=""/>
           <p:cNvSpPr txBox="1"/>
           <p:nvPr/>
         </p:nvSpPr>
@@ -18668,14 +20374,14 @@
       </p:sp>
       <p:sp>
         <p:nvSpPr>
-          <p:cNvPr id="687519981" name=""/>
+          <p:cNvPr id="600748441" name=""/>
           <p:cNvSpPr txBox="1"/>
           <p:nvPr/>
         </p:nvSpPr>
         <p:spPr bwMode="auto">
           <a:xfrm rot="0" flipH="0" flipV="0">
-            <a:off x="4505555" y="-14132116"/>
-            <a:ext cx="8240765" cy="582523"/>
+            <a:off x="4499435" y="-8906745"/>
+            <a:ext cx="8253005" cy="582523"/>
           </a:xfrm>
           <a:prstGeom prst="rect">
             <a:avLst/>
@@ -18710,7 +20416,7 @@
                 <a:ea typeface="Comfortaa"/>
                 <a:cs typeface="Comfortaa"/>
               </a:rPr>
-              <a:t>SQL Injection</a:t>
+              <a:t>Cross-Site Forgery Request (CSRF)</a:t>
             </a:r>
             <a:endParaRPr sz="2800" b="1">
               <a:gradFill>
@@ -18732,71 +20438,7 @@
       </p:sp>
       <p:sp>
         <p:nvSpPr>
-          <p:cNvPr id="1929251322" name=""/>
-          <p:cNvSpPr txBox="1"/>
-          <p:nvPr/>
-        </p:nvSpPr>
-        <p:spPr bwMode="auto">
-          <a:xfrm rot="0" flipH="0" flipV="0">
-            <a:off x="4499435" y="-8906745"/>
-            <a:ext cx="8253005" cy="582523"/>
-          </a:xfrm>
-          <a:prstGeom prst="rect">
-            <a:avLst/>
-          </a:prstGeom>
-          <a:noFill/>
-        </p:spPr>
-        <p:txBody>
-          <a:bodyPr vertOverflow="overflow" horzOverflow="overflow" vert="horz" wrap="square" lIns="91440" tIns="45720" rIns="91440" bIns="45720" numCol="1" spcCol="0" rtlCol="0" fromWordArt="0" anchor="ctr" anchorCtr="0" forceAA="0" upright="0" compatLnSpc="0">
-            <a:spAutoFit/>
-          </a:bodyPr>
-          <a:p>
-            <a:pPr algn="just">
-              <a:lnSpc>
-                <a:spcPct val="114999"/>
-              </a:lnSpc>
-              <a:defRPr/>
-            </a:pPr>
-            <a:r>
-              <a:rPr sz="2800" b="1">
-                <a:gradFill>
-                  <a:gsLst>
-                    <a:gs pos="0">
-                      <a:srgbClr val="00B0F0"/>
-                    </a:gs>
-                    <a:gs pos="100000">
-                      <a:srgbClr val="00F0E0"/>
-                    </a:gs>
-                  </a:gsLst>
-                  <a:lin ang="13500000" scaled="1"/>
-                </a:gradFill>
-                <a:latin typeface="Comfortaa"/>
-                <a:ea typeface="Comfortaa"/>
-                <a:cs typeface="Comfortaa"/>
-              </a:rPr>
-              <a:t>Cross-Site Forgery Request (CSRF)</a:t>
-            </a:r>
-            <a:endParaRPr sz="2800" b="1">
-              <a:gradFill>
-                <a:gsLst>
-                  <a:gs pos="0">
-                    <a:srgbClr val="00B0F0"/>
-                  </a:gs>
-                  <a:gs pos="100000">
-                    <a:srgbClr val="00F0E0"/>
-                  </a:gs>
-                </a:gsLst>
-                <a:lin ang="13500000" scaled="1"/>
-              </a:gradFill>
-              <a:latin typeface="Comfortaa"/>
-              <a:cs typeface="Comfortaa"/>
-            </a:endParaRPr>
-          </a:p>
-        </p:txBody>
-      </p:sp>
-      <p:sp>
-        <p:nvSpPr>
-          <p:cNvPr id="867358117" name=""/>
+          <p:cNvPr id="254465950" name=""/>
           <p:cNvSpPr txBox="1"/>
           <p:nvPr/>
         </p:nvSpPr>
@@ -18860,7 +20502,7 @@
       </p:sp>
       <p:sp>
         <p:nvSpPr>
-          <p:cNvPr id="433618323" name=""/>
+          <p:cNvPr id="786686068" name=""/>
           <p:cNvSpPr txBox="1"/>
           <p:nvPr/>
         </p:nvSpPr>
@@ -18924,7 +20566,7 @@
       </p:sp>
       <p:pic>
         <p:nvPicPr>
-          <p:cNvPr id="752535906" name=""/>
+          <p:cNvPr id="491013332" name=""/>
           <p:cNvPicPr>
             <a:picLocks noChangeAspect="1"/>
           </p:cNvPicPr>
@@ -18946,7 +20588,7 @@
       </p:pic>
       <p:sp>
         <p:nvSpPr>
-          <p:cNvPr id="1534795145" name=""/>
+          <p:cNvPr id="1442044000" name=""/>
           <p:cNvSpPr txBox="1"/>
           <p:nvPr/>
         </p:nvSpPr>
@@ -18994,7 +20636,7 @@
       </p:sp>
       <p:sp>
         <p:nvSpPr>
-          <p:cNvPr id="436046356" name=""/>
+          <p:cNvPr id="1172869558" name=""/>
           <p:cNvSpPr txBox="1"/>
           <p:nvPr/>
         </p:nvSpPr>
@@ -19058,7 +20700,7 @@
       </p:sp>
       <p:sp>
         <p:nvSpPr>
-          <p:cNvPr id="749607421" name=""/>
+          <p:cNvPr id="1072531581" name=""/>
           <p:cNvSpPr txBox="1"/>
           <p:nvPr/>
         </p:nvSpPr>
@@ -19117,7 +20759,7 @@
       </p:sp>
       <p:sp>
         <p:nvSpPr>
-          <p:cNvPr id="634847586" name=""/>
+          <p:cNvPr id="789918967" name=""/>
           <p:cNvSpPr txBox="1"/>
           <p:nvPr/>
         </p:nvSpPr>
@@ -19206,7 +20848,7 @@
       </p:sp>
       <p:sp>
         <p:nvSpPr>
-          <p:cNvPr id="661352485" name=""/>
+          <p:cNvPr id="1057913402" name=""/>
           <p:cNvSpPr txBox="1"/>
           <p:nvPr/>
         </p:nvSpPr>
@@ -19251,7 +20893,7 @@
       </p:sp>
       <p:sp>
         <p:nvSpPr>
-          <p:cNvPr id="495570877" name=""/>
+          <p:cNvPr id="172833611" name=""/>
           <p:cNvSpPr/>
           <p:nvPr/>
         </p:nvSpPr>
@@ -19317,7 +20959,7 @@
       </p:sp>
       <p:sp>
         <p:nvSpPr>
-          <p:cNvPr id="1407676392" name=""/>
+          <p:cNvPr id="998559618" name=""/>
           <p:cNvSpPr txBox="1"/>
           <p:nvPr/>
         </p:nvSpPr>
@@ -19406,7 +21048,7 @@
       </p:sp>
       <p:sp>
         <p:nvSpPr>
-          <p:cNvPr id="1709941487" name=""/>
+          <p:cNvPr id="1931097646" name=""/>
           <p:cNvSpPr txBox="1"/>
           <p:nvPr/>
         </p:nvSpPr>
@@ -19451,7 +21093,7 @@
       </p:sp>
       <p:sp>
         <p:nvSpPr>
-          <p:cNvPr id="51496816" name=""/>
+          <p:cNvPr id="2037307207" name=""/>
           <p:cNvSpPr txBox="1"/>
           <p:nvPr/>
         </p:nvSpPr>
@@ -19515,7 +21157,7 @@
       </p:sp>
       <p:sp>
         <p:nvSpPr>
-          <p:cNvPr id="2075214986" name=""/>
+          <p:cNvPr id="1803448850" name=""/>
           <p:cNvSpPr/>
           <p:nvPr/>
         </p:nvSpPr>
@@ -19635,7 +21277,7 @@
       </p:sp>
       <p:pic>
         <p:nvPicPr>
-          <p:cNvPr id="912104326" name=""/>
+          <p:cNvPr id="1826185691" name=""/>
           <p:cNvPicPr>
             <a:picLocks noChangeAspect="1"/>
           </p:cNvPicPr>
@@ -19657,7 +21299,7 @@
       </p:pic>
       <p:sp>
         <p:nvSpPr>
-          <p:cNvPr id="237528122" name=""/>
+          <p:cNvPr id="1201633210" name=""/>
           <p:cNvSpPr/>
           <p:nvPr/>
         </p:nvSpPr>
@@ -19794,7 +21436,7 @@
       </p:sp>
       <p:sp>
         <p:nvSpPr>
-          <p:cNvPr id="418627372" name=""/>
+          <p:cNvPr id="293211772" name=""/>
           <p:cNvSpPr/>
           <p:nvPr/>
         </p:nvSpPr>
@@ -19946,7 +21588,7 @@
       </p:sp>
       <p:pic>
         <p:nvPicPr>
-          <p:cNvPr id="1639740740" name=""/>
+          <p:cNvPr id="371602501" name=""/>
           <p:cNvPicPr>
             <a:picLocks noChangeAspect="1"/>
           </p:cNvPicPr>
@@ -19968,7 +21610,7 @@
       </p:pic>
       <p:pic>
         <p:nvPicPr>
-          <p:cNvPr id="642265184" name=""/>
+          <p:cNvPr id="1445821524" name=""/>
           <p:cNvPicPr>
             <a:picLocks noChangeAspect="1"/>
           </p:cNvPicPr>
@@ -19988,6 +21630,70 @@
           </a:prstGeom>
         </p:spPr>
       </p:pic>
+      <p:sp>
+        <p:nvSpPr>
+          <p:cNvPr id="1941975717" name=""/>
+          <p:cNvSpPr txBox="1"/>
+          <p:nvPr/>
+        </p:nvSpPr>
+        <p:spPr bwMode="auto">
+          <a:xfrm rot="0" flipH="0" flipV="0">
+            <a:off x="4505554" y="-14135716"/>
+            <a:ext cx="8243283" cy="582523"/>
+          </a:xfrm>
+          <a:prstGeom prst="rect">
+            <a:avLst/>
+          </a:prstGeom>
+          <a:noFill/>
+        </p:spPr>
+        <p:txBody>
+          <a:bodyPr vertOverflow="overflow" horzOverflow="overflow" vert="horz" wrap="square" lIns="91440" tIns="45720" rIns="91440" bIns="45720" numCol="1" spcCol="0" rtlCol="0" fromWordArt="0" anchor="ctr" anchorCtr="0" forceAA="0" upright="0" compatLnSpc="0">
+            <a:spAutoFit/>
+          </a:bodyPr>
+          <a:p>
+            <a:pPr algn="just">
+              <a:lnSpc>
+                <a:spcPct val="114999"/>
+              </a:lnSpc>
+              <a:defRPr/>
+            </a:pPr>
+            <a:r>
+              <a:rPr sz="2800" b="1">
+                <a:gradFill>
+                  <a:gsLst>
+                    <a:gs pos="0">
+                      <a:srgbClr val="2F5EFD"/>
+                    </a:gs>
+                    <a:gs pos="100000">
+                      <a:srgbClr val="00B0F0"/>
+                    </a:gs>
+                  </a:gsLst>
+                  <a:lin ang="13500000" scaled="1"/>
+                </a:gradFill>
+                <a:latin typeface="Comfortaa"/>
+                <a:ea typeface="Comfortaa"/>
+                <a:cs typeface="Comfortaa"/>
+              </a:rPr>
+              <a:t>SQL Injection</a:t>
+            </a:r>
+            <a:endParaRPr sz="2800" b="1">
+              <a:gradFill>
+                <a:gsLst>
+                  <a:gs pos="0">
+                    <a:srgbClr val="2F5EFD"/>
+                  </a:gs>
+                  <a:gs pos="100000">
+                    <a:srgbClr val="00B0F0"/>
+                  </a:gs>
+                </a:gsLst>
+                <a:lin ang="13500000" scaled="1"/>
+              </a:gradFill>
+              <a:latin typeface="Comfortaa"/>
+              <a:cs typeface="Comfortaa"/>
+            </a:endParaRPr>
+          </a:p>
+        </p:txBody>
+      </p:sp>
     </p:spTree>
   </p:cSld>
   <p:clrMapOvr>
@@ -20028,7 +21734,7 @@
       </p:grpSpPr>
       <p:sp>
         <p:nvSpPr>
-          <p:cNvPr id="1446463884" name=""/>
+          <p:cNvPr id="2024866787" name=""/>
           <p:cNvSpPr/>
           <p:nvPr/>
         </p:nvSpPr>
@@ -20067,7 +21773,7 @@
       </p:sp>
       <p:sp>
         <p:nvSpPr>
-          <p:cNvPr id="1886318930" name=""/>
+          <p:cNvPr id="1322699927" name=""/>
           <p:cNvSpPr/>
           <p:nvPr/>
         </p:nvSpPr>
@@ -20132,7 +21838,7 @@
       </p:sp>
       <p:sp>
         <p:nvSpPr>
-          <p:cNvPr id="1153470" name=""/>
+          <p:cNvPr id="328454016" name=""/>
           <p:cNvSpPr/>
           <p:nvPr/>
         </p:nvSpPr>
@@ -20180,7 +21886,7 @@
       </p:sp>
       <p:pic>
         <p:nvPicPr>
-          <p:cNvPr id="1569250148" name=""/>
+          <p:cNvPr id="654630314" name=""/>
           <p:cNvPicPr>
             <a:picLocks noChangeAspect="1"/>
           </p:cNvPicPr>
@@ -20202,7 +21908,7 @@
       </p:pic>
       <p:pic>
         <p:nvPicPr>
-          <p:cNvPr id="660001851" name=""/>
+          <p:cNvPr id="1663521019" name=""/>
           <p:cNvPicPr>
             <a:picLocks noChangeAspect="1"/>
           </p:cNvPicPr>
@@ -20224,7 +21930,7 @@
       </p:pic>
       <p:sp>
         <p:nvSpPr>
-          <p:cNvPr id="1130115662" name=""/>
+          <p:cNvPr id="1011355555" name=""/>
           <p:cNvSpPr txBox="1"/>
           <p:nvPr/>
         </p:nvSpPr>
@@ -20272,7 +21978,7 @@
       </p:sp>
       <p:sp>
         <p:nvSpPr>
-          <p:cNvPr id="392821064" name=""/>
+          <p:cNvPr id="1306707695" name=""/>
           <p:cNvSpPr txBox="1"/>
           <p:nvPr/>
         </p:nvSpPr>
@@ -20336,7 +22042,7 @@
       </p:sp>
       <p:sp>
         <p:nvSpPr>
-          <p:cNvPr id="170716324" name=""/>
+          <p:cNvPr id="1344236089" name=""/>
           <p:cNvSpPr txBox="1"/>
           <p:nvPr/>
         </p:nvSpPr>
@@ -20395,7 +22101,7 @@
       </p:sp>
       <p:sp>
         <p:nvSpPr>
-          <p:cNvPr id="797666223" name=""/>
+          <p:cNvPr id="1821970301" name=""/>
           <p:cNvSpPr txBox="1"/>
           <p:nvPr/>
         </p:nvSpPr>
@@ -20484,7 +22190,7 @@
       </p:sp>
       <p:sp>
         <p:nvSpPr>
-          <p:cNvPr id="1961594393" name=""/>
+          <p:cNvPr id="2099653454" name=""/>
           <p:cNvSpPr txBox="1"/>
           <p:nvPr/>
         </p:nvSpPr>
@@ -20529,7 +22235,7 @@
       </p:sp>
       <p:sp>
         <p:nvSpPr>
-          <p:cNvPr id="842370632" name=""/>
+          <p:cNvPr id="360421195" name=""/>
           <p:cNvSpPr/>
           <p:nvPr/>
         </p:nvSpPr>
@@ -20595,7 +22301,7 @@
       </p:sp>
       <p:sp>
         <p:nvSpPr>
-          <p:cNvPr id="1970787331" name=""/>
+          <p:cNvPr id="1250415096" name=""/>
           <p:cNvSpPr txBox="1"/>
           <p:nvPr/>
         </p:nvSpPr>
@@ -20684,7 +22390,7 @@
       </p:sp>
       <p:sp>
         <p:nvSpPr>
-          <p:cNvPr id="1653809924" name=""/>
+          <p:cNvPr id="2145491689" name=""/>
           <p:cNvSpPr txBox="1"/>
           <p:nvPr/>
         </p:nvSpPr>
@@ -20729,7 +22435,7 @@
       </p:sp>
       <p:sp>
         <p:nvSpPr>
-          <p:cNvPr id="1861964924" name=""/>
+          <p:cNvPr id="1143388181" name=""/>
           <p:cNvSpPr txBox="1"/>
           <p:nvPr/>
         </p:nvSpPr>
@@ -20793,7 +22499,7 @@
       </p:sp>
       <p:sp>
         <p:nvSpPr>
-          <p:cNvPr id="777734219" name=""/>
+          <p:cNvPr id="2143371110" name=""/>
           <p:cNvSpPr/>
           <p:nvPr/>
         </p:nvSpPr>
@@ -20913,7 +22619,7 @@
       </p:sp>
       <p:pic>
         <p:nvPicPr>
-          <p:cNvPr id="452813957" name=""/>
+          <p:cNvPr id="204621118" name=""/>
           <p:cNvPicPr>
             <a:picLocks noChangeAspect="1"/>
           </p:cNvPicPr>
@@ -20935,7 +22641,7 @@
       </p:pic>
       <p:sp>
         <p:nvSpPr>
-          <p:cNvPr id="1062060457" name=""/>
+          <p:cNvPr id="1053851396" name=""/>
           <p:cNvSpPr/>
           <p:nvPr/>
         </p:nvSpPr>
@@ -21072,7 +22778,7 @@
       </p:sp>
       <p:sp>
         <p:nvSpPr>
-          <p:cNvPr id="1773452522" name=""/>
+          <p:cNvPr id="698573850" name=""/>
           <p:cNvSpPr/>
           <p:nvPr/>
         </p:nvSpPr>
@@ -21224,7 +22930,7 @@
       </p:sp>
       <p:pic>
         <p:nvPicPr>
-          <p:cNvPr id="1631308136" name=""/>
+          <p:cNvPr id="1985469385" name=""/>
           <p:cNvPicPr>
             <a:picLocks noChangeAspect="1"/>
           </p:cNvPicPr>
@@ -21246,7 +22952,7 @@
       </p:pic>
       <p:pic>
         <p:nvPicPr>
-          <p:cNvPr id="1059211695" name=""/>
+          <p:cNvPr id="1904006372" name=""/>
           <p:cNvPicPr>
             <a:picLocks noChangeAspect="1"/>
           </p:cNvPicPr>
@@ -21268,7 +22974,7 @@
       </p:pic>
       <p:sp>
         <p:nvSpPr>
-          <p:cNvPr id="694084527" name=""/>
+          <p:cNvPr id="858213442" name=""/>
           <p:cNvSpPr txBox="1"/>
           <p:nvPr/>
         </p:nvSpPr>
@@ -21332,7 +23038,7 @@
       </p:sp>
       <p:sp>
         <p:nvSpPr>
-          <p:cNvPr id="644320434" name=""/>
+          <p:cNvPr id="1997692036" name=""/>
           <p:cNvSpPr txBox="1"/>
           <p:nvPr/>
         </p:nvSpPr>
@@ -21380,7 +23086,7 @@
       </p:sp>
       <p:sp>
         <p:nvSpPr>
-          <p:cNvPr id="1616697769" name=""/>
+          <p:cNvPr id="2119174543" name=""/>
           <p:cNvSpPr txBox="1"/>
           <p:nvPr/>
         </p:nvSpPr>
@@ -21444,7 +23150,7 @@
       </p:sp>
       <p:sp>
         <p:nvSpPr>
-          <p:cNvPr id="1575672146" name=""/>
+          <p:cNvPr id="2133160116" name=""/>
           <p:cNvSpPr txBox="1"/>
           <p:nvPr/>
         </p:nvSpPr>
